--- a/ausgabe/Praesentation-KLARTEXT.pptx
+++ b/ausgabe/Praesentation-KLARTEXT.pptx
@@ -978,222 +978,158 @@
           <a:lstStyle/>
           <a:p>
             <a:r>
-              <a:t>Jetzt zum Widerstand. Der Unterricht nennt vier Ursachen: Verlustangst,</a:t>
-            </a:r>
-          </a:p>
-          <a:p>
-            <a:r>
-              <a:t>Unsicherheit, Gewohnheit und fehlende Perspektive. Ich zeige sie nicht als</a:t>
-            </a:r>
-          </a:p>
-          <a:p>
-            <a:r>
-              <a:t>Liste, sondern an vier Rollen von der Folie davor — jede sagt Nein aus einem</a:t>
-            </a:r>
-          </a:p>
-          <a:p>
-            <a:r>
-              <a:t>anderen Grund.</a:t>
-            </a:r>
-          </a:p>
-          <a:p/>
-          <a:p>
-            <a:r>
-              <a:t>Der Programmbereich zuerst. Sein Einwand: Die Befunde stehen in Bausteinen,</a:t>
-            </a:r>
-          </a:p>
-          <a:p>
-            <a:r>
-              <a:t>über die ich nicht entscheide. Ich habe das nachgezählt, und es stimmt</a:t>
-            </a:r>
-          </a:p>
-          <a:p>
-            <a:r>
-              <a:t>vollständig. Der Beispielkurs, den ich gleich vorführe, hat keinen eigenen</a:t>
-            </a:r>
-          </a:p>
-          <a:p>
-            <a:r>
-              <a:t>Satz. Er besteht restlos aus zwei Bausteinen, dem Anmeldehinweis und der</a:t>
-            </a:r>
-          </a:p>
-          <a:p>
-            <a:r>
-              <a:t>Niveaubeschreibung. Alle neun Befunde liegen dort, und der Anmeldehinweis</a:t>
-            </a:r>
-          </a:p>
-          <a:p>
-            <a:r>
-              <a:t>steht wortgleich in hundertfünf Kursen. Das ist Verlustangst in ihrer echten</a:t>
-            </a:r>
-          </a:p>
-          <a:p>
-            <a:r>
-              <a:t>Form: nicht Angst vor der Maschine, sondern die Aussicht, für etwas gemessen</a:t>
-            </a:r>
-          </a:p>
-          <a:p>
-            <a:r>
-              <a:t>zu werden, das man nicht ändern darf. Meine Antwort ist deshalb keine</a:t>
-            </a:r>
-          </a:p>
-          <a:p>
-            <a:r>
-              <a:t>Schulung, sondern eine Zuständigkeitsfrage, die vor dem Pilot geklärt wird.</a:t>
-            </a:r>
-          </a:p>
-          <a:p>
-            <a:r>
-              <a:t>Nebenbei ist es die gute Nachricht: ein Baustein in Ordnung gebracht, und</a:t>
-            </a:r>
-          </a:p>
-          <a:p>
-            <a:r>
-              <a:t>hundertfünf Kurse sind es mit.</a:t>
-            </a:r>
-          </a:p>
-          <a:p/>
-          <a:p>
-            <a:r>
-              <a:t>Die Kursleitung auf Honorarbasis. Noch eine Aufgabe, für die es keine</a:t>
-            </a:r>
-          </a:p>
-          <a:p>
-            <a:r>
-              <a:t>Unterrichtseinheit gibt — das ist fehlende Perspektive, und bei dieser Gruppe</a:t>
-            </a:r>
-          </a:p>
-          <a:p>
-            <a:r>
-              <a:t>schärfer als bei allen anderen, weil ihre Abrechnungseinheit die</a:t>
-            </a:r>
-          </a:p>
-          <a:p>
-            <a:r>
-              <a:t>Unterrichtsstunde ist. Textarbeit kommt darin nicht vor. Meine Antwort ist der</a:t>
-            </a:r>
-          </a:p>
-          <a:p>
-            <a:r>
-              <a:t>Zuschnitt: Geprüft wird im Programmbereich, an dem Text, der dort eingeht. Das</a:t>
-            </a:r>
-          </a:p>
-          <a:p>
-            <a:r>
-              <a:t>schützt auch den Status. Verbindliche Regeln, Schulungspflicht und ein</a:t>
-            </a:r>
-          </a:p>
-          <a:p>
-            <a:r>
-              <a:t>Protokoll je Text sind genau die Merkmale, aus denen das Bundessozialgericht</a:t>
-            </a:r>
-          </a:p>
-          <a:p>
-            <a:r>
-              <a:t>im Herrenberg-Urteil eine Eingliederung in den Betrieb hergeleitet hat.</a:t>
-            </a:r>
-          </a:p>
-          <a:p/>
-          <a:p>
-            <a:r>
-              <a:t>Die Redaktion des Programmhefts. Ihr Einwand ist der, an den ich zuletzt</a:t>
-            </a:r>
-          </a:p>
-          <a:p>
-            <a:r>
-              <a:t>gedacht hätte: Verständlicher heißt länger, und ich habe eine feste</a:t>
-            </a:r>
-          </a:p>
-          <a:p>
-            <a:r>
-              <a:t>Seitenzahl. Das ist Gewohnheit, aber nicht als Trägheit, sondern als</a:t>
-            </a:r>
-          </a:p>
-          <a:p>
-            <a:r>
-              <a:t>konkurrierendes Regelwerk. Diese Redaktion kürzt beruflich, ein Werkzeug, das</a:t>
-            </a:r>
-          </a:p>
-          <a:p>
-            <a:r>
-              <a:t>Erklärungen verlangt, arbeitet gegen ihren Auftrag. Meine Antwort trennt die</a:t>
-            </a:r>
-          </a:p>
-          <a:p>
-            <a:r>
-              <a:t>Medien: Geprüft wird der Text im Portal, und dort gibt es keine Seitenzahl.</a:t>
-            </a:r>
-          </a:p>
-          <a:p/>
-          <a:p>
-            <a:r>
-              <a:t>Und der Personalrat. Der Paragraf knüpft die Mitbestimmung an technische</a:t>
-            </a:r>
-          </a:p>
-          <a:p>
-            <a:r>
-              <a:t>Einrichtungen, die zur Überwachung geeignet sind — geeignet, nicht verwendet.</a:t>
-            </a:r>
-          </a:p>
-          <a:p>
-            <a:r>
-              <a:t>Eine Zusage, nicht nach Urheber auszuwerten, räumt den Tatbestand also gar</a:t>
-            </a:r>
-          </a:p>
-          <a:p>
-            <a:r>
-              <a:t>nicht aus, und etwas vorzulegen ist keine Zustimmung. Das Instrument nennt der</a:t>
-            </a:r>
-          </a:p>
-          <a:p>
-            <a:r>
-              <a:t>Paragraf selbst: die Dienstvereinbarung, mit Zweckbindung, Zugriffskreis und</a:t>
-            </a:r>
-          </a:p>
-          <a:p>
-            <a:r>
-              <a:t>Löschfrist. Sie ist die Voraussetzung für alles Weitere und kommt auf den</a:t>
-            </a:r>
-          </a:p>
-          <a:p>
-            <a:r>
-              <a:t>nächsten beiden Folien noch zweimal vor.</a:t>
-            </a:r>
-          </a:p>
-          <a:p/>
-          <a:p>
-            <a:r>
-              <a:t>Der Satz unten: Betroffene zu Beteiligten machen. Hier heißt das konkret,</a:t>
-            </a:r>
-          </a:p>
-          <a:p>
-            <a:r>
-              <a:t>entscheiden, bevor geschult wird. Drei der vier Einwände sind überhaupt keine</a:t>
-            </a:r>
-          </a:p>
-          <a:p>
-            <a:r>
-              <a:t>Kommunikationsaufgabe. Wer die Bausteinfreigabe, die Zuständigkeit und den</a:t>
-            </a:r>
-          </a:p>
-          <a:p>
-            <a:r>
-              <a:t>Umgang mit den Protokollen offenlässt und stattdessen eine Schulung ansetzt,</a:t>
-            </a:r>
-          </a:p>
-          <a:p>
-            <a:r>
-              <a:t>schult gegen einen Widerstand, der berechtigt ist. Der vierte, der der</a:t>
-            </a:r>
-          </a:p>
-          <a:p>
-            <a:r>
-              <a:t>Redaktion, ist einer — und er wird beantwortet, indem man zugibt, dass sie mit</a:t>
-            </a:r>
-          </a:p>
-          <a:p>
-            <a:r>
-              <a:t>dem fehlenden Prüfschritt die ganze Zeit recht hatte.</a:t>
+              <a:t>Jetzt zum Widerstand. Der Unterricht nennt vier Ursachen: Unsicherheit,</a:t>
+            </a:r>
+          </a:p>
+          <a:p>
+            <a:r>
+              <a:t>Verlustangst, fehlende Perspektive und Gewohnheit. Ich zeige für jede einen</a:t>
+            </a:r>
+          </a:p>
+          <a:p>
+            <a:r>
+              <a:t>Fall, den es hier wirklich gibt.</a:t>
+            </a:r>
+          </a:p>
+          <a:p/>
+          <a:p>
+            <a:r>
+              <a:rPr b="1"/>
+              <a:t>Unsicherheit</a:t>
+            </a:r>
+            <a:r>
+              <a:t> — die Frage, die im ganzen Haus als Erstes kommt: Schreibt die</a:t>
+            </a:r>
+          </a:p>
+          <a:p>
+            <a:r>
+              <a:t>KI jetzt unsere Texte? Nein. Sie schlägt vor, mehr nicht. Entschieden und</a:t>
+            </a:r>
+          </a:p>
+          <a:p>
+            <a:r>
+              <a:t>veröffentlicht wird von Menschen. Das ist keine Beruhigung, sondern der</a:t>
+            </a:r>
+          </a:p>
+          <a:p>
+            <a:r>
+              <a:t>Zuschnitt des Werkzeugs.</a:t>
+            </a:r>
+          </a:p>
+          <a:p/>
+          <a:p>
+            <a:r>
+              <a:rPr b="1"/>
+              <a:t>Verlustangst</a:t>
+            </a:r>
+            <a:r>
+              <a:t> — und das ist der einzige Einwand, der noch offen ist. Ich habe</a:t>
+            </a:r>
+          </a:p>
+          <a:p>
+            <a:r>
+              <a:t>nachgezählt: Der Beispielkurs besteht restlos aus zwei Bausteinen, dem</a:t>
+            </a:r>
+          </a:p>
+          <a:p>
+            <a:r>
+              <a:t>Anmeldehinweis und der Niveaubeschreibung. Alle Befunde liegen dort, und der</a:t>
+            </a:r>
+          </a:p>
+          <a:p>
+            <a:r>
+              <a:t>Anmeldehinweis steht wortgleich in hundertfünf Kursen. Das ist keine Angst vor</a:t>
+            </a:r>
+          </a:p>
+          <a:p>
+            <a:r>
+              <a:t>der Maschine, sondern die Aussicht, für etwas gemessen zu werden, das man nicht</a:t>
+            </a:r>
+          </a:p>
+          <a:p>
+            <a:r>
+              <a:t>ändern darf. Die Antwort ist deshalb keine Schulung, sondern eine</a:t>
+            </a:r>
+          </a:p>
+          <a:p>
+            <a:r>
+              <a:t>Zuständigkeitsfrage. Und darin steckt die gute Nachricht: ein Baustein in</a:t>
+            </a:r>
+          </a:p>
+          <a:p>
+            <a:r>
+              <a:t>Ordnung gebracht, und hundertfünf Kurse sind es mit.</a:t>
+            </a:r>
+          </a:p>
+          <a:p/>
+          <a:p>
+            <a:r>
+              <a:rPr b="1"/>
+              <a:t>Fehlende Perspektive</a:t>
+            </a:r>
+            <a:r>
+              <a:t> — bei den Honorarkräften schärfer als bei allen</a:t>
+            </a:r>
+          </a:p>
+          <a:p>
+            <a:r>
+              <a:t>anderen, weil ihre Abrechnungseinheit die Unterrichtsstunde ist. Textarbeit</a:t>
+            </a:r>
+          </a:p>
+          <a:p>
+            <a:r>
+              <a:t>kommt darin nicht vor. Die Antwort ist der Zuschnitt: Geprüft wird im</a:t>
+            </a:r>
+          </a:p>
+          <a:p>
+            <a:r>
+              <a:t>Programmbereich, an dem Text, der dort eingeht. Das schützt auch ihren Status —</a:t>
+            </a:r>
+          </a:p>
+          <a:p>
+            <a:r>
+              <a:t>verbindliche Regeln und ein Protokoll je Text sind genau die Merkmale, aus</a:t>
+            </a:r>
+          </a:p>
+          <a:p>
+            <a:r>
+              <a:t>denen das Bundessozialgericht im Herrenberg-Urteil eine Eingliederung in den</a:t>
+            </a:r>
+          </a:p>
+          <a:p>
+            <a:r>
+              <a:t>Betrieb hergeleitet hat.</a:t>
+            </a:r>
+          </a:p>
+          <a:p/>
+          <a:p>
+            <a:r>
+              <a:rPr b="1"/>
+              <a:t>Gewohnheit</a:t>
+            </a:r>
+            <a:r>
+              <a:t> — nicht als Trägheit, sondern als konkurrierendes Regelwerk:</a:t>
+            </a:r>
+          </a:p>
+          <a:p>
+            <a:r>
+              <a:t>Diese Redaktion kürzt beruflich. Ein Werkzeug, das Erklärungen verlangt,</a:t>
+            </a:r>
+          </a:p>
+          <a:p>
+            <a:r>
+              <a:t>arbeitet gegen ihren Auftrag. Die Antwort trennt die Medien: Geprüft wird der</a:t>
+            </a:r>
+          </a:p>
+          <a:p>
+            <a:r>
+              <a:t>Text im Portal, und dort gibt es keine Seitenzahl.</a:t>
+            </a:r>
+          </a:p>
+          <a:p/>
+          <a:p>
+            <a:r>
+              <a:t>Betroffene zu Beteiligten machen heißt hier: entscheiden, bevor geschult wird.</a:t>
             </a:r>
           </a:p>
         </p:txBody>

--- a/ausgabe/Praesentation-KLARTEXT.pptx
+++ b/ausgabe/Praesentation-KLARTEXT.pptx
@@ -516,6 +516,12 @@
           <a:lstStyle/>
           <a:p>
             <a:r>
+              <a:t>### Begrüßung</a:t>
+            </a:r>
+          </a:p>
+          <a:p/>
+          <a:p>
+            <a:r>
               <a:t>Ich stelle euch heute mein Abschlussprojekt vor: KLARTEXT, ein Prüfschritt für</a:t>
             </a:r>
           </a:p>
@@ -527,6 +533,12 @@
           <a:p/>
           <a:p>
             <a:r>
+              <a:t>### Worum es geht</a:t>
+            </a:r>
+          </a:p>
+          <a:p/>
+          <a:p>
+            <a:r>
               <a:t>Es geht um Barrierefreiheit. Die meisten denken dabei an Technik: Kontraste,</a:t>
             </a:r>
           </a:p>
@@ -548,6 +560,12 @@
           <a:p/>
           <a:p>
             <a:r>
+              <a:t>### Der schärfste Fall</a:t>
+            </a:r>
+          </a:p>
+          <a:p/>
+          <a:p>
+            <a:r>
               <a:t>Angefangen hat es mit dem schärfsten Fall. Die Volkshochschule bietet</a:t>
             </a:r>
           </a:p>
@@ -574,6 +592,12 @@
           <a:p/>
           <a:p>
             <a:r>
+              <a:t>### Rollen und Datenstand</a:t>
+            </a:r>
+          </a:p>
+          <a:p/>
+          <a:p>
+            <a:r>
               <a:t>Ich habe das Projekt allein bearbeitet, alle Rollen liegen also bei mir. Und</a:t>
             </a:r>
           </a:p>
@@ -585,6 +609,12 @@
           <a:p>
             <a:r>
               <a:t>Website, am achtundzwanzigsten Juli. Der Datensatz liegt der Arbeit bei.</a:t>
+            </a:r>
+          </a:p>
+          <a:p/>
+          <a:p>
+            <a:r>
+              <a:t>### Ausblick</a:t>
             </a:r>
           </a:p>
           <a:p/>
@@ -687,7 +717,13 @@
           <a:p/>
           <a:p>
             <a:r>
-              <a:t>Oben rechts, eng einbinden: wer entscheidet oder zustimmen muss.</a:t>
+              <a:t>### Oben rechts: Eng einbinden</a:t>
+            </a:r>
+          </a:p>
+          <a:p/>
+          <a:p>
+            <a:r>
+              <a:t>Wer entscheidet oder zustimmen muss.</a:t>
             </a:r>
           </a:p>
           <a:p/>
@@ -770,7 +806,13 @@
           <a:p/>
           <a:p>
             <a:r>
-              <a:t>Nur dieser eine Fachbereich — deshalb unten links, informieren.</a:t>
+              <a:t>### Unten links: Informieren</a:t>
+            </a:r>
+          </a:p>
+          <a:p/>
+          <a:p>
+            <a:r>
+              <a:t>Nur dieser eine Fachbereich ist im Pilot — die anderen erfahren davon.</a:t>
             </a:r>
           </a:p>
           <a:p/>
@@ -791,7 +833,13 @@
           <a:p/>
           <a:p>
             <a:r>
-              <a:t>Oben links: hoher Einfluss, aber mein Projekt verändert ihre Arbeit nicht.</a:t>
+              <a:t>### Oben links: Beobachten</a:t>
+            </a:r>
+          </a:p>
+          <a:p/>
+          <a:p>
+            <a:r>
+              <a:t>Hoher Einfluss, aber mein Projekt verändert ihre Arbeit nicht.</a:t>
             </a:r>
           </a:p>
           <a:p/>
@@ -842,7 +890,13 @@
           <a:p/>
           <a:p>
             <a:r>
-              <a:t>Und unten rechts der Quadrant, der mich am meisten beschäftigt hat.</a:t>
+              <a:t>### Unten rechts: Konsultieren</a:t>
+            </a:r>
+          </a:p>
+          <a:p/>
+          <a:p>
+            <a:r>
+              <a:t>Der Quadrant, der mich am meisten beschäftigt hat.</a:t>
             </a:r>
           </a:p>
           <a:p/>
@@ -994,11 +1048,13 @@
           <a:p/>
           <a:p>
             <a:r>
-              <a:rPr b="1"/>
-              <a:t>Unsicherheit</a:t>
-            </a:r>
-            <a:r>
-              <a:t> — die Frage, die im ganzen Haus als Erstes kommt: Schreibt die</a:t>
+              <a:t>### Unsicherheit · im ganzen Haus</a:t>
+            </a:r>
+          </a:p>
+          <a:p/>
+          <a:p>
+            <a:r>
+              <a:t>Die Frage, die im ganzen Haus als Erstes kommt: Schreibt die</a:t>
             </a:r>
           </a:p>
           <a:p>
@@ -1019,11 +1075,13 @@
           <a:p/>
           <a:p>
             <a:r>
-              <a:rPr b="1"/>
-              <a:t>Verlustangst</a:t>
-            </a:r>
-            <a:r>
-              <a:t> — und das ist der einzige Einwand, der noch offen ist. Ich habe</a:t>
+              <a:t>### Verlustangst · Fachbereich</a:t>
+            </a:r>
+          </a:p>
+          <a:p/>
+          <a:p>
+            <a:r>
+              <a:t>Der einzige Einwand, der noch offen ist. Ich habe</a:t>
             </a:r>
           </a:p>
           <a:p>
@@ -1064,11 +1122,13 @@
           <a:p/>
           <a:p>
             <a:r>
-              <a:rPr b="1"/>
-              <a:t>Fehlende Perspektive</a:t>
-            </a:r>
-            <a:r>
-              <a:t> — bei den Honorarkräften schärfer als bei allen</a:t>
+              <a:t>### Fehlende Perspektive · Kursleitung</a:t>
+            </a:r>
+          </a:p>
+          <a:p/>
+          <a:p>
+            <a:r>
+              <a:t>Bei den Honorarkräften schärfer als bei allen</a:t>
             </a:r>
           </a:p>
           <a:p>
@@ -1104,26 +1164,59 @@
           <a:p/>
           <a:p>
             <a:r>
-              <a:rPr b="1"/>
-              <a:t>Gewohnheit</a:t>
-            </a:r>
-            <a:r>
-              <a:t> — nicht als Trägheit, sondern als konkurrierendes Regelwerk:</a:t>
-            </a:r>
-          </a:p>
-          <a:p>
-            <a:r>
-              <a:t>Diese Redaktion kürzt beruflich. Ein Werkzeug, das Erklärungen verlangt,</a:t>
-            </a:r>
-          </a:p>
-          <a:p>
-            <a:r>
-              <a:t>arbeitet gegen ihren Auftrag. Die Antwort trennt die Medien: Geprüft wird der</a:t>
-            </a:r>
-          </a:p>
-          <a:p>
-            <a:r>
-              <a:t>Text im Portal, und dort gibt es keine Seitenzahl.</a:t>
+              <a:t>### Gewohnheit · Redaktion des Programmhefts</a:t>
+            </a:r>
+          </a:p>
+          <a:p/>
+          <a:p>
+            <a:r>
+              <a:t>Nicht als Trägheit, sondern als konkurrierendes Regelwerk:</a:t>
+            </a:r>
+          </a:p>
+          <a:p>
+            <a:r>
+              <a:t>Diese Redaktion kürzt beruflich, ein Werkzeug, das Erklärungen verlangt,</a:t>
+            </a:r>
+          </a:p>
+          <a:p>
+            <a:r>
+              <a:t>scheint gegen ihren Auftrag zu arbeiten. Nur trägt die Annahme nicht. Ich habe</a:t>
+            </a:r>
+          </a:p>
+          <a:p>
+            <a:r>
+              <a:t>die neun Vorschläge aus einem echten Lauf nachgerechnet: Fünf davon machen den</a:t>
+            </a:r>
+          </a:p>
+          <a:p>
+            <a:r>
+              <a:t>Text kürzer, einer lässt ihn gleich, und unter dem Strich wächst er um</a:t>
+            </a:r>
+          </a:p>
+          <a:p>
+            <a:r>
+              <a:t>einunddreißig Zeichen — bei siebenhundertzehn. Länger wird es vor allem dort,</a:t>
+            </a:r>
+          </a:p>
+          <a:p>
+            <a:r>
+              <a:t>wo ein Verwaltungswort in einen ganzen Satz aufgelöst wird, Selbsteinschätzung</a:t>
+            </a:r>
+          </a:p>
+          <a:p>
+            <a:r>
+              <a:t>zum Beispiel. Und geprüft wird ohnehin der Text im Portal, und dort gibt</a:t>
+            </a:r>
+          </a:p>
+          <a:p>
+            <a:r>
+              <a:t>es keine Seitenzahl.</a:t>
+            </a:r>
+          </a:p>
+          <a:p/>
+          <a:p>
+            <a:r>
+              <a:t>### Der Kasten unten</a:t>
             </a:r>
           </a:p>
           <a:p/>
@@ -1215,6 +1308,12 @@
           <a:p/>
           <a:p>
             <a:r>
+              <a:t>### Monat 2, Strang Kommunikation: Training</a:t>
+            </a:r>
+          </a:p>
+          <a:p/>
+          <a:p>
+            <a:r>
               <a:t>Erstens das Training im zweiten Monat. Das ist keine Kür, sondern Pflicht:</a:t>
             </a:r>
           </a:p>
@@ -1241,6 +1340,12 @@
           <a:p>
             <a:r>
               <a:t>nicht — das ist der Grund, warum die Kursleitungen aus dieser Kette bleiben.</a:t>
+            </a:r>
+          </a:p>
+          <a:p/>
+          <a:p>
+            <a:r>
+              <a:t>### Strang Change: erst fragen, dann handeln</a:t>
             </a:r>
           </a:p>
           <a:p/>
@@ -1337,6 +1442,12 @@
           <a:p/>
           <a:p>
             <a:r>
+              <a:t>### Die vier Schritte</a:t>
+            </a:r>
+          </a:p>
+          <a:p/>
+          <a:p>
+            <a:r>
               <a:t>Die Dienstvereinbarung zuerst, aus dem Grund von eben. Dann einen</a:t>
             </a:r>
           </a:p>
@@ -1358,6 +1469,12 @@
           <a:p>
             <a:r>
               <a:t>kein Einkauf, keine neue Stelle, der KI-Rahmen ist da.</a:t>
+            </a:r>
+          </a:p>
+          <a:p/>
+          <a:p>
+            <a:r>
+              <a:t>### Der Kasten unten: der dritte Schritt</a:t>
             </a:r>
           </a:p>
           <a:p/>
@@ -1454,6 +1571,12 @@
           <a:p/>
           <a:p>
             <a:r>
+              <a:t>### Die ersten drei Kennzahlen</a:t>
+            </a:r>
+          </a:p>
+          <a:p/>
+          <a:p>
+            <a:r>
               <a:t>Vier Kennzahlen mit Ausgangswert und Ziel. Die Befundquote soll von</a:t>
             </a:r>
           </a:p>
@@ -1480,6 +1603,12 @@
           <a:p/>
           <a:p>
             <a:r>
+              <a:t>### Die vierte Kennzahl: die Befragung</a:t>
+            </a:r>
+          </a:p>
+          <a:p/>
+          <a:p>
+            <a:r>
               <a:t>Die vierte Zeile ist mir wichtig, weil die ersten drei nur den Text messen und</a:t>
             </a:r>
           </a:p>
@@ -1522,6 +1651,12 @@
           <a:p/>
           <a:p>
             <a:r>
+              <a:t>### Letzte Spalte: womit gemessen wird</a:t>
+            </a:r>
+          </a:p>
+          <a:p/>
+          <a:p>
+            <a:r>
               <a:t>In der letzten Spalte steht, womit gemessen wird. Die Nachmessung läuft mit</a:t>
             </a:r>
           </a:p>
@@ -1543,47 +1678,49 @@
           <a:p/>
           <a:p>
             <a:r>
-              <a:t>Unten steht das Risiko, das ich zuerst übersehen habe und das unangenehmste</a:t>
-            </a:r>
-          </a:p>
-          <a:p>
-            <a:r>
-              <a:t>ist: Die Protokolle können gegen das Unternehmen verwendet werden. Sie belegen</a:t>
-            </a:r>
-          </a:p>
-          <a:p>
-            <a:r>
-              <a:t>datiert und zitierbar, dass Texte Kriterien verletzen, die das Haus sich</a:t>
-            </a:r>
-          </a:p>
-          <a:p>
-            <a:r>
-              <a:t>freiwillig gibt. Wer laut Impressum persönlich für die Inhalte verantwortlich</a:t>
-            </a:r>
-          </a:p>
-          <a:p>
-            <a:r>
-              <a:t>ist, hat nach dem Pilot eine Kenntnis, die er vorher nicht hatte. Deshalb</a:t>
-            </a:r>
-          </a:p>
-          <a:p>
-            <a:r>
-              <a:t>gehören die Protokolle in dieselbe Dienstvereinbarung, und deshalb gehört zu</a:t>
-            </a:r>
-          </a:p>
-          <a:p>
-            <a:r>
-              <a:t>jedem Befundstand ein Abstellplan mit Datum. Ein dokumentierter Mangel mit</a:t>
-            </a:r>
-          </a:p>
-          <a:p>
-            <a:r>
-              <a:t>Plan steht besser da als ungeprüfter Bestand — aber nur, wenn der Plan</a:t>
-            </a:r>
-          </a:p>
-          <a:p>
-            <a:r>
-              <a:t>wirklich existiert.</a:t>
+              <a:t>### Das Risiko unten</a:t>
+            </a:r>
+          </a:p>
+          <a:p/>
+          <a:p>
+            <a:r>
+              <a:t>Das Risiko steckt in den Kennzahlen selbst. Die ersten drei lassen sich</a:t>
+            </a:r>
+          </a:p>
+          <a:p>
+            <a:r>
+              <a:t>erfüllen, ohne dass ein einziger Text besser wird: Wer lange Sätze teilt und</a:t>
+            </a:r>
+          </a:p>
+          <a:p>
+            <a:r>
+              <a:t>schwere Wörter austauscht, drückt die Befundquote — ob der Text dadurch</a:t>
+            </a:r>
+          </a:p>
+          <a:p>
+            <a:r>
+              <a:t>verständlicher geworden ist, hat dann noch niemand gefragt. Ein kürzerer Satz</a:t>
+            </a:r>
+          </a:p>
+          <a:p>
+            <a:r>
+              <a:t>ist nicht automatisch ein verständlicherer.</a:t>
+            </a:r>
+          </a:p>
+          <a:p/>
+          <a:p>
+            <a:r>
+              <a:t>Genau dagegen steht die vierte Kennzahl. Sie fragt nicht den Text, sondern die</a:t>
+            </a:r>
+          </a:p>
+          <a:p>
+            <a:r>
+              <a:t>Menschen, für die er geschrieben ist. Ohne sie misst der Pilot am Ende nur</a:t>
+            </a:r>
+          </a:p>
+          <a:p>
+            <a:r>
+              <a:t>seinen eigenen Maßstab.</a:t>
             </a:r>
           </a:p>
         </p:txBody>
@@ -1653,6 +1790,12 @@
           <a:lstStyle/>
           <a:p>
             <a:r>
+              <a:t>### Was diese Arbeit ist</a:t>
+            </a:r>
+          </a:p>
+          <a:p/>
+          <a:p>
+            <a:r>
               <a:t>Ich habe ein reales Unternehmen analysiert, einen Prozess gefunden, in dem</a:t>
             </a:r>
           </a:p>
@@ -1669,6 +1812,12 @@
           <a:p/>
           <a:p>
             <a:r>
+              <a:t>### Meine Lehre aus dem Projekt</a:t>
+            </a:r>
+          </a:p>
+          <a:p/>
+          <a:p>
+            <a:r>
               <a:t>Der System-Prompt selbst ist an einem Nachmittag geschrieben. Das ist meine</a:t>
             </a:r>
           </a:p>
@@ -1690,6 +1839,12 @@
           <a:p>
             <a:r>
               <a:t>schreiben, das Werkzeug nicht als Kontrolle erleben.</a:t>
+            </a:r>
+          </a:p>
+          <a:p/>
+          <a:p>
+            <a:r>
+              <a:t>### Der Link auf der Folie</a:t>
             </a:r>
           </a:p>
           <a:p/>
@@ -1781,6 +1936,12 @@
           <a:p/>
           <a:p>
             <a:r>
+              <a:t>### 5.800 Texte und 57 Prozent</a:t>
+            </a:r>
+          </a:p>
+          <a:p/>
+          <a:p>
+            <a:r>
               <a:t>Die Volkshochschule veröffentlicht rund fünftausendachthundert</a:t>
             </a:r>
           </a:p>
@@ -1807,6 +1968,12 @@
           <a:p/>
           <a:p>
             <a:r>
+              <a:t>### Fünf Jahre ohne externe Prüfung</a:t>
+            </a:r>
+          </a:p>
+          <a:p/>
+          <a:p>
+            <a:r>
               <a:t>Die dritte Zahl stammt aus dem Unternehmen selbst. In der Erklärung zur</a:t>
             </a:r>
           </a:p>
@@ -1828,6 +1995,12 @@
           <a:p/>
           <a:p>
             <a:r>
+              <a:t>### Einfache Sprache, der eigentliche Anlass</a:t>
+            </a:r>
+          </a:p>
+          <a:p/>
+          <a:p>
+            <a:r>
               <a:t>Dieselbe Erklärung enthält den Satz, der mich auf dieses Projekt gebracht hat.</a:t>
             </a:r>
           </a:p>
@@ -1854,6 +2027,12 @@
           <a:p>
             <a:r>
               <a:t>das nicht.</a:t>
+            </a:r>
+          </a:p>
+          <a:p/>
+          <a:p>
+            <a:r>
+              <a:t>### Der Kasten unten</a:t>
             </a:r>
           </a:p>
           <a:p/>
@@ -1940,6 +2119,12 @@
           <a:p/>
           <a:p>
             <a:r>
+              <a:t>### Ziel</a:t>
+            </a:r>
+          </a:p>
+          <a:p/>
+          <a:p>
+            <a:r>
               <a:t>Das Ziel oben ist von den Lesenden her formuliert. Wer einen Kurs sucht, soll</a:t>
             </a:r>
           </a:p>
@@ -1972,6 +2157,12 @@
           <a:p/>
           <a:p>
             <a:r>
+              <a:t>### Lösung</a:t>
+            </a:r>
+          </a:p>
+          <a:p/>
+          <a:p>
+            <a:r>
               <a:t>Dafür genügt ein System-Prompt in dem KI-Rahmen, den der Volkshochschul-</a:t>
             </a:r>
           </a:p>
@@ -1988,6 +2179,12 @@
           <a:p/>
           <a:p>
             <a:r>
+              <a:t>### Abgrenzung</a:t>
+            </a:r>
+          </a:p>
+          <a:p/>
+          <a:p>
+            <a:r>
               <a:t>Die Abgrenzung darunter zieht sich durch das ganze Konzept: Für die technische</a:t>
             </a:r>
           </a:p>
@@ -1999,6 +2196,12 @@
           <a:p>
             <a:r>
               <a:t>zusammen mit der städtischen IT. Die KI sieht nur den Kurstext.</a:t>
+            </a:r>
+          </a:p>
+          <a:p/>
+          <a:p>
+            <a:r>
+              <a:t>### Der Kasten unten</a:t>
             </a:r>
           </a:p>
           <a:p/>
@@ -2085,6 +2288,12 @@
           <a:p/>
           <a:p>
             <a:r>
+              <a:t>### Linke Spalte: Das Unternehmen</a:t>
+            </a:r>
+          </a:p>
+          <a:p/>
+          <a:p>
+            <a:r>
               <a:t>Die Volkshochschule Frankfurt ist kein Amt, sondern ein Eigenbetrieb der</a:t>
             </a:r>
           </a:p>
@@ -2137,6 +2346,12 @@
           <a:p/>
           <a:p>
             <a:r>
+              <a:t>### Der Satz oben aus der Betriebssatzung</a:t>
+            </a:r>
+          </a:p>
+          <a:p/>
+          <a:p>
+            <a:r>
               <a:t>Der Satz oben stammt wörtlich aus der Betriebssatzung: Die Angebote stehen</a:t>
             </a:r>
           </a:p>
@@ -2153,6 +2368,12 @@
           <a:p/>
           <a:p>
             <a:r>
+              <a:t>### Rechte Spalte: So entsteht ein Kurstext</a:t>
+            </a:r>
+          </a:p>
+          <a:p/>
+          <a:p>
+            <a:r>
               <a:t>Rechts steht, wie ein Kurstext entsteht. Geplant wird halbjährlich, von den</a:t>
             </a:r>
           </a:p>
@@ -2174,6 +2395,12 @@
           <a:p>
             <a:r>
               <a:t>ist nicht öffentlich dokumentiert.</a:t>
+            </a:r>
+          </a:p>
+          <a:p/>
+          <a:p>
+            <a:r>
+              <a:t>### Der Kasten unten</a:t>
             </a:r>
           </a:p>
           <a:p/>
@@ -2302,6 +2529,12 @@
           <a:p/>
           <a:p>
             <a:r>
+              <a:t>### Die Messung</a:t>
+            </a:r>
+          </a:p>
+          <a:p/>
+          <a:p>
+            <a:r>
               <a:t>Das Kursportal hat eine offene Schnittstelle. Darüber habe ich alle</a:t>
             </a:r>
           </a:p>
@@ -2318,6 +2551,12 @@
           <a:p/>
           <a:p>
             <a:r>
+              <a:t>### Wonach gemessen wurde</a:t>
+            </a:r>
+          </a:p>
+          <a:p/>
+          <a:p>
+            <a:r>
               <a:t>Oben steht, wonach ich gemessen habe: sechs Regeln, erst der Maßstab, dann das</a:t>
             </a:r>
           </a:p>
@@ -2334,6 +2573,12 @@
           <a:p/>
           <a:p>
             <a:r>
+              <a:t>### Links: die zwei Pflichtregeln</a:t>
+            </a:r>
+          </a:p>
+          <a:p/>
+          <a:p>
+            <a:r>
               <a:t>Links stehen die beiden Pflichtregeln. Sie stehen auf Stufe A der</a:t>
             </a:r>
           </a:p>
@@ -2402,6 +2647,12 @@
           <a:p/>
           <a:p>
             <a:r>
+              <a:t>### Rechts: die vier Empfehlungen</a:t>
+            </a:r>
+          </a:p>
+          <a:p/>
+          <a:p>
+            <a:r>
               <a:t>Rechts stehen die vier Empfehlungen. Verbindlich sind sie nicht, aber sie sind</a:t>
             </a:r>
           </a:p>
@@ -2497,6 +2748,12 @@
           <a:p/>
           <a:p>
             <a:r>
+              <a:t>### Zwei Kurse im Vergleich</a:t>
+            </a:r>
+          </a:p>
+          <a:p/>
+          <a:p>
+            <a:r>
               <a:t>Die Tabelle darunter zeigt zwei Sprachkurse, und beide tragen eine niedrige</a:t>
             </a:r>
           </a:p>
@@ -2576,6 +2833,12 @@
           <a:p/>
           <a:p>
             <a:r>
+              <a:t>### Der Kasten unten</a:t>
+            </a:r>
+          </a:p>
+          <a:p/>
+          <a:p>
+            <a:r>
               <a:t>Deshalb reicht kein Werkzeug, das nur den Text ansieht. Man muss wissen, für</a:t>
             </a:r>
           </a:p>
@@ -2597,6 +2860,12 @@
           <a:p>
             <a:r>
               <a:t>eingestellter Prompt etwas, was ein Standardwerkzeug nicht kann.</a:t>
+            </a:r>
+          </a:p>
+          <a:p/>
+          <a:p>
+            <a:r>
+              <a:t>### Nachtrag: warum 57 Prozent eine Untergrenze sind</a:t>
             </a:r>
           </a:p>
           <a:p/>
@@ -2693,6 +2962,12 @@
           <a:p/>
           <a:p>
             <a:r>
+              <a:t>### Was Barrierefreiheit heißt</a:t>
+            </a:r>
+          </a:p>
+          <a:p/>
+          <a:p>
+            <a:r>
               <a:t>Digitale Barrierefreiheit bedeutet, dass eine Website auch für Menschen mit</a:t>
             </a:r>
           </a:p>
@@ -2709,6 +2984,12 @@
           <a:p/>
           <a:p>
             <a:r>
+              <a:t>### Welches Recht gilt</a:t>
+            </a:r>
+          </a:p>
+          <a:p/>
+          <a:p>
+            <a:r>
               <a:t>Für die vhs gilt weder die EU-Richtlinie noch das</a:t>
             </a:r>
           </a:p>
@@ -2735,6 +3016,12 @@
           <a:p/>
           <a:p>
             <a:r>
+              <a:t>### Der Block in der Mitte: Pflicht und freiwillig</a:t>
+            </a:r>
+          </a:p>
+          <a:p/>
+          <a:p>
+            <a:r>
               <a:t>Der Block in der Mitte zeigt nur die Kriterien, die am Text der</a:t>
             </a:r>
           </a:p>
@@ -2766,6 +3053,12 @@
           <a:p>
             <a:r>
               <a:t>die beiden Kriterien also, um die es in diesem Projekt geht.</a:t>
+            </a:r>
+          </a:p>
+          <a:p/>
+          <a:p>
+            <a:r>
+              <a:t>### Der Kasten unten</a:t>
             </a:r>
           </a:p>
           <a:p/>
@@ -2909,6 +3202,12 @@
           <a:p/>
           <a:p>
             <a:r>
+              <a:t>### Linke Spalte: Das Seitengerüst</a:t>
+            </a:r>
+          </a:p>
+          <a:p/>
+          <a:p>
+            <a:r>
               <a:t>Links steht, was am Gerüst der Seite hängt: Kontraste, Tastaturbedienung,</a:t>
             </a:r>
           </a:p>
@@ -2930,6 +3229,12 @@
           <a:p/>
           <a:p>
             <a:r>
+              <a:t>### Rechte Spalte: Der einzelne Text</a:t>
+            </a:r>
+          </a:p>
+          <a:p/>
+          <a:p>
+            <a:r>
               <a:t>Rechts steht, was am einzelnen Text hängt. Versteht die Zielgruppe genau</a:t>
             </a:r>
           </a:p>
@@ -2946,6 +3251,12 @@
           <a:p/>
           <a:p>
             <a:r>
+              <a:t>### Der Kasten unten: wo die Trennlinie verläuft</a:t>
+            </a:r>
+          </a:p>
+          <a:p/>
+          <a:p>
+            <a:r>
               <a:t>Die Trennlinie verläuft also nicht zwischen Sprache und Technik. Zwei meiner</a:t>
             </a:r>
           </a:p>
@@ -2998,6 +3309,12 @@
           <a:p>
             <a:r>
               <a:t>Einschätzung verlangen.</a:t>
+            </a:r>
+          </a:p>
+          <a:p/>
+          <a:p>
+            <a:r>
+              <a:t>### Technische Voraussetzungen</a:t>
             </a:r>
           </a:p>
           <a:p/>
@@ -3094,6 +3411,12 @@
           <a:p/>
           <a:p>
             <a:r>
+              <a:t>### Rolle, Aufgabe, Format</a:t>
+            </a:r>
+          </a:p>
+          <a:p/>
+          <a:p>
+            <a:r>
               <a:t>Die ROLLE macht ihn zur Redaktionsassistenz, nicht zur Autorin. Die AUFGABE</a:t>
             </a:r>
           </a:p>
@@ -3115,6 +3438,12 @@
           <a:p/>
           <a:p>
             <a:r>
+              <a:t>### Kontext: die Wortliste</a:t>
+            </a:r>
+          </a:p>
+          <a:p/>
+          <a:p>
+            <a:r>
               <a:t>Der KONTEXT enthält das Hauswissen: die acht Programmbereiche, die internen</a:t>
             </a:r>
           </a:p>
@@ -3167,6 +3496,12 @@
           <a:p>
             <a:r>
               <a:t>des Deutschen Volkshochschulverbands in Frankfurt.</a:t>
+            </a:r>
+          </a:p>
+          <a:p/>
+          <a:p>
+            <a:r>
+              <a:t>### Der Kasten unten: die Zeile Grenzen</a:t>
             </a:r>
           </a:p>
           <a:p/>
@@ -3273,6 +3608,12 @@
           <a:p/>
           <a:p>
             <a:r>
+              <a:t>### Weg 1: Als KI-Assistent bei fobizz</a:t>
+            </a:r>
+          </a:p>
+          <a:p/>
+          <a:p>
+            <a:r>
               <a:t>Der erste braucht keine eigene Technik. Der Deutsche Volkshochschul-Verband</a:t>
             </a:r>
           </a:p>
@@ -3319,6 +3660,12 @@
           <a:p/>
           <a:p>
             <a:r>
+              <a:t>### Die Einschränkung zu Weg 1</a:t>
+            </a:r>
+          </a:p>
+          <a:p/>
+          <a:p>
+            <a:r>
               <a:t>Eine Einschränkung gehört dazu, denn diesen Weg habe ich nicht ausprobiert:</a:t>
             </a:r>
           </a:p>
@@ -3350,6 +3697,12 @@
           <a:p/>
           <a:p>
             <a:r>
+              <a:t>### Weg 2: Als eigenes Prüfwerkzeug</a:t>
+            </a:r>
+          </a:p>
+          <a:p/>
+          <a:p>
+            <a:r>
               <a:t>Der zweite Weg ist das Prüfwerkzeug, das ich gebaut habe. Dort fügt man den</a:t>
             </a:r>
           </a:p>
@@ -3371,6 +3724,12 @@
           <a:p/>
           <a:p>
             <a:r>
+              <a:t>### Rechts im Bild: ein Befund</a:t>
+            </a:r>
+          </a:p>
+          <a:p/>
+          <a:p>
+            <a:r>
               <a:t>Rechts steht, was dabei herauskommt: ein Befund aus einem echten Durchlauf,</a:t>
             </a:r>
           </a:p>
@@ -3402,6 +3761,12 @@
           <a:p/>
           <a:p>
             <a:r>
+              <a:t>### Hier die Vorführung</a:t>
+            </a:r>
+          </a:p>
+          <a:p/>
+          <a:p>
+            <a:r>
               <a:t>Ich zeige euch das kurz live, an genau diesem Kurs.</a:t>
             </a:r>
           </a:p>
@@ -3414,6 +3779,12 @@
           <a:p>
             <a:r>
               <a:t>der Weg funktioniert, er ist keine fertige Anwendung.</a:t>
+            </a:r>
+          </a:p>
+          <a:p/>
+          <a:p>
+            <a:r>
+              <a:t>### Der Kasten unten</a:t>
             </a:r>
           </a:p>
           <a:p/>

--- a/ausgabe/Praesentation-KLARTEXT.pptx
+++ b/ausgabe/Praesentation-KLARTEXT.pptx
@@ -1081,42 +1081,42 @@
           <a:p/>
           <a:p>
             <a:r>
-              <a:t>Der einzige Einwand, der noch offen ist. Ich habe</a:t>
-            </a:r>
-          </a:p>
-          <a:p>
-            <a:r>
-              <a:t>nachgezählt: Der Beispielkurs besteht restlos aus zwei Bausteinen, dem</a:t>
-            </a:r>
-          </a:p>
-          <a:p>
-            <a:r>
-              <a:t>Anmeldehinweis und der Niveaubeschreibung. Alle Befunde liegen dort, und der</a:t>
-            </a:r>
-          </a:p>
-          <a:p>
-            <a:r>
-              <a:t>Anmeldehinweis steht wortgleich in hundertfünf Kursen. Das ist keine Angst vor</a:t>
-            </a:r>
-          </a:p>
-          <a:p>
-            <a:r>
-              <a:t>der Maschine, sondern die Aussicht, für etwas gemessen zu werden, das man nicht</a:t>
-            </a:r>
-          </a:p>
-          <a:p>
-            <a:r>
-              <a:t>ändern darf. Die Antwort ist deshalb keine Schulung, sondern eine</a:t>
-            </a:r>
-          </a:p>
-          <a:p>
-            <a:r>
-              <a:t>Zuständigkeitsfrage. Und darin steckt die gute Nachricht: ein Baustein in</a:t>
-            </a:r>
-          </a:p>
-          <a:p>
-            <a:r>
-              <a:t>Ordnung gebracht, und hundertfünf Kurse sind es mit.</a:t>
+              <a:t>Der einzige Einwand, der noch offen ist. Eine Kursbeschreibung ist selten von</a:t>
+            </a:r>
+          </a:p>
+          <a:p>
+            <a:r>
+              <a:t>einer Hand: Der Anmeldehinweis, die Beschreibung der Niveaustufe — solche</a:t>
+            </a:r>
+          </a:p>
+          <a:p>
+            <a:r>
+              <a:t>Bausteine stehen wortgleich in vielen Kursen und werden nicht in dem Bereich</a:t>
+            </a:r>
+          </a:p>
+          <a:p>
+            <a:r>
+              <a:t>gepflegt, der den Kurs anbietet. Wer die Befunde bekommt, darf den Text also</a:t>
+            </a:r>
+          </a:p>
+          <a:p>
+            <a:r>
+              <a:t>oft gar nicht ändern. Das ist keine Angst vor der Maschine, sondern die</a:t>
+            </a:r>
+          </a:p>
+          <a:p>
+            <a:r>
+              <a:t>Aussicht, für etwas geradezustehen, das einem nicht gehört. Die Antwort ist</a:t>
+            </a:r>
+          </a:p>
+          <a:p>
+            <a:r>
+              <a:t>deshalb keine Schulung, sondern eine Zuständigkeitsfrage — und die gehört vor</a:t>
+            </a:r>
+          </a:p>
+          <a:p>
+            <a:r>
+              <a:t>den Pilot.</a:t>
             </a:r>
           </a:p>
           <a:p/>
@@ -1143,22 +1143,17 @@
           </a:p>
           <a:p>
             <a:r>
-              <a:t>Programmbereich, an dem Text, der dort eingeht. Das schützt auch ihren Status —</a:t>
-            </a:r>
-          </a:p>
-          <a:p>
-            <a:r>
-              <a:t>verbindliche Regeln und ein Protokoll je Text sind genau die Merkmale, aus</a:t>
-            </a:r>
-          </a:p>
-          <a:p>
-            <a:r>
-              <a:t>denen das Bundessozialgericht im Herrenberg-Urteil eine Eingliederung in den</a:t>
-            </a:r>
-          </a:p>
-          <a:p>
-            <a:r>
-              <a:t>Betrieb hergeleitet hat.</a:t>
+              <a:t>Fachbereich, an dem Text, der dort eingeht. Das schützt auch ihren Status:</a:t>
+            </a:r>
+          </a:p>
+          <a:p>
+            <a:r>
+              <a:t>Verbindliche Regeln und ein Protokoll je Text wären genau die Merkmale, an</a:t>
+            </a:r>
+          </a:p>
+          <a:p>
+            <a:r>
+              <a:t>denen sich eine Scheinselbständigkeit festmachen lässt.</a:t>
             </a:r>
           </a:p>
           <a:p/>
@@ -1170,42 +1165,32 @@
           <a:p/>
           <a:p>
             <a:r>
-              <a:t>Nicht als Trägheit, sondern als konkurrierendes Regelwerk:</a:t>
-            </a:r>
-          </a:p>
-          <a:p>
-            <a:r>
-              <a:t>Diese Redaktion kürzt beruflich, ein Werkzeug, das Erklärungen verlangt,</a:t>
-            </a:r>
-          </a:p>
-          <a:p>
-            <a:r>
-              <a:t>scheint gegen ihren Auftrag zu arbeiten. Nur trägt die Annahme nicht. Ich habe</a:t>
-            </a:r>
-          </a:p>
-          <a:p>
-            <a:r>
-              <a:t>die neun Vorschläge aus einem echten Lauf nachgerechnet: Fünf davon machen den</a:t>
-            </a:r>
-          </a:p>
-          <a:p>
-            <a:r>
-              <a:t>Text kürzer, einer lässt ihn gleich, und unter dem Strich wächst er um</a:t>
-            </a:r>
-          </a:p>
-          <a:p>
-            <a:r>
-              <a:t>einunddreißig Zeichen — bei siebenhundertzehn. Länger wird es vor allem dort,</a:t>
-            </a:r>
-          </a:p>
-          <a:p>
-            <a:r>
-              <a:t>wo ein Verwaltungswort in einen ganzen Satz aufgelöst wird, Selbsteinschätzung</a:t>
-            </a:r>
-          </a:p>
-          <a:p>
-            <a:r>
-              <a:t>zum Beispiel. Und geprüft wird ohnehin der Text im Portal, und dort gibt</a:t>
+              <a:t>Der Satz, der jedes Qualitätsprojekt begleitet: Es hat sich doch nie jemand</a:t>
+            </a:r>
+          </a:p>
+          <a:p>
+            <a:r>
+              <a:t>beschwert. Er stimmt vermutlich sogar — nur beweist er das Gegenteil. Wer sich</a:t>
+            </a:r>
+          </a:p>
+          <a:p>
+            <a:r>
+              <a:t>beschwert, hat den Text gelesen und verstanden. Die Menschen, um die es hier</a:t>
+            </a:r>
+          </a:p>
+          <a:p>
+            <a:r>
+              <a:t>geht, melden sich nicht: Sie verstehen die Beschreibung nicht, sie fragen nicht</a:t>
+            </a:r>
+          </a:p>
+          <a:p>
+            <a:r>
+              <a:t>nach, und sie melden sich auch nicht an. Ihr Fehlen sieht von innen aus wie</a:t>
+            </a:r>
+          </a:p>
+          <a:p>
+            <a:r>
+              <a:t>Zufriedenheit. Und geprüft wird ohnehin der Text im Portal, und dort gibt</a:t>
             </a:r>
           </a:p>
           <a:p>
@@ -1445,7 +1430,6 @@
               <a:t>### Die vier Schritte</a:t>
             </a:r>
           </a:p>
-          <a:p/>
           <a:p>
             <a:r>
               <a:t>Die Dienstvereinbarung zuerst, aus dem Grund von eben. Dann einen</a:t>

--- a/ausgabe/Praesentation-KLARTEXT.pptx
+++ b/ausgabe/Praesentation-KLARTEXT.pptx
@@ -1138,7 +1138,12 @@
           </a:p>
           <a:p>
             <a:r>
-              <a:t>kommt darin nicht vor. Die Antwort ist der Zuschnitt: Geprüft wird im</a:t>
+              <a:t>kommt darin nicht vor, der Einwand ist also berechtigt und gehört auch so</a:t>
+            </a:r>
+          </a:p>
+          <a:p>
+            <a:r>
+              <a:t>beantwortet. Die Antwort ist der Zuschnitt: Geprüft wird im</a:t>
             </a:r>
           </a:p>
           <a:p>
@@ -1170,27 +1175,37 @@
           </a:p>
           <a:p>
             <a:r>
-              <a:t>beschwert. Er stimmt vermutlich sogar — nur beweist er das Gegenteil. Wer sich</a:t>
-            </a:r>
-          </a:p>
-          <a:p>
-            <a:r>
-              <a:t>beschwert, hat den Text gelesen und verstanden. Die Menschen, um die es hier</a:t>
-            </a:r>
-          </a:p>
-          <a:p>
-            <a:r>
-              <a:t>geht, melden sich nicht: Sie verstehen die Beschreibung nicht, sie fragen nicht</a:t>
-            </a:r>
-          </a:p>
-          <a:p>
-            <a:r>
-              <a:t>nach, und sie melden sich auch nicht an. Ihr Fehlen sieht von innen aus wie</a:t>
-            </a:r>
-          </a:p>
-          <a:p>
-            <a:r>
-              <a:t>Zufriedenheit. Und geprüft wird ohnehin der Text im Portal, und dort gibt</a:t>
+              <a:t>beschwert. Und er stimmt vermutlich. Entscheidend ist, wie man darauf antwortet:</a:t>
+            </a:r>
+          </a:p>
+          <a:p>
+            <a:r>
+              <a:t>Diese Redaktion prüft Texte im Haus als Einzige schon heute. Sie ist keine</a:t>
+            </a:r>
+          </a:p>
+          <a:p>
+            <a:r>
+              <a:t>Bremse, sie ist der nächstliegende Verbündete, und so sollte man ihr auch</a:t>
+            </a:r>
+          </a:p>
+          <a:p>
+            <a:r>
+              <a:t>begegnen. Der Punkt ist nur: Wer sich beschwert, hat den Text gelesen und</a:t>
+            </a:r>
+          </a:p>
+          <a:p>
+            <a:r>
+              <a:t>verstanden. Die Menschen, um die es hier geht, fragen nicht nach und melden sich</a:t>
+            </a:r>
+          </a:p>
+          <a:p>
+            <a:r>
+              <a:t>auch nicht an. Ihr Fehlen sieht von innen aus wie Zufriedenheit — dass es bisher</a:t>
+            </a:r>
+          </a:p>
+          <a:p>
+            <a:r>
+              <a:t>niemand gesehen hat, ist deshalb kein Versäumnis, sondern liegt in der Sache. Und geprüft wird ohnehin der Text im Portal, und dort gibt</a:t>
             </a:r>
           </a:p>
           <a:p>

--- a/ausgabe/Praesentation-KLARTEXT.pptx
+++ b/ausgabe/Praesentation-KLARTEXT.pptx
@@ -522,39 +522,34 @@
           <a:p/>
           <a:p>
             <a:r>
-              <a:t>Ich stelle euch heute mein Abschlussprojekt vor: KLARTEXT, ein Prüfschritt für</a:t>
-            </a:r>
-          </a:p>
-          <a:p>
-            <a:r>
-              <a:t>die Kursbeschreibungen der Volkshochschule Frankfurt.</a:t>
-            </a:r>
-          </a:p>
-          <a:p/>
-          <a:p>
-            <a:r>
-              <a:t>### Worum es geht</a:t>
-            </a:r>
-          </a:p>
-          <a:p/>
-          <a:p>
-            <a:r>
-              <a:t>Es geht um Barrierefreiheit. Die meisten denken dabei an Technik: Kontraste,</a:t>
-            </a:r>
-          </a:p>
-          <a:p>
-            <a:r>
-              <a:t>Tastaturbedienung, Vorleseprogramme. Mich interessiert der andere Teil — ob</a:t>
-            </a:r>
-          </a:p>
-          <a:p>
-            <a:r>
-              <a:t>der Text ankommt bei denen, für die er geschrieben ist. Das betrifft alle acht</a:t>
-            </a:r>
-          </a:p>
-          <a:p>
-            <a:r>
-              <a:t>Programmbereiche.</a:t>
+              <a:t>Willkommen zu meinem Abschlussprojekt!</a:t>
+            </a:r>
+          </a:p>
+          <a:p>
+            <a:r>
+              <a:t>- KLARTEXT, ein KI-gestützter Prüfschritt für die Kursbeschreibungen der Volkshochschule Frankfurt.</a:t>
+            </a:r>
+          </a:p>
+          <a:p/>
+          <a:p>
+            <a:r>
+              <a:t>### Worum geht es?</a:t>
+            </a:r>
+          </a:p>
+          <a:p/>
+          <a:p>
+            <a:r>
+              <a:t>- Barrierefreiheit.</a:t>
+            </a:r>
+          </a:p>
+          <a:p>
+            <a:r>
+              <a:t>- Aber nicht der technische Teil wie. Kontraste oder Tastaturbedienung, sondern:</a:t>
+            </a:r>
+          </a:p>
+          <a:p>
+            <a:r>
+              <a:t>- ob der Text ankommt bei denen, für die er geschrieben ist.</a:t>
             </a:r>
           </a:p>
           <a:p/>
@@ -563,64 +558,14 @@
               <a:t>### Der schärfste Fall</a:t>
             </a:r>
           </a:p>
-          <a:p/>
-          <a:p>
-            <a:r>
-              <a:t>Angefangen hat es mit dem schärfsten Fall. Die Volkshochschule bietet</a:t>
-            </a:r>
-          </a:p>
-          <a:p>
-            <a:r>
-              <a:t>Deutschkurse für Menschen an, die gerade erst Deutsch lernen, und die</a:t>
-            </a:r>
-          </a:p>
-          <a:p>
-            <a:r>
-              <a:t>Beschreibungen dieser Kurse sind in einem Deutsch geschrieben, das man erst</a:t>
-            </a:r>
-          </a:p>
-          <a:p>
-            <a:r>
-              <a:t>nach dem Kurs versteht. Wer Deutsch lernen will, muss also erst Deutsch</a:t>
-            </a:r>
-          </a:p>
-          <a:p>
-            <a:r>
-              <a:t>können. Das ist der Extremfall, aber das Prinzip dahinter gilt überall.</a:t>
-            </a:r>
-          </a:p>
-          <a:p/>
-          <a:p>
-            <a:r>
-              <a:t>### Rollen und Datenstand</a:t>
-            </a:r>
-          </a:p>
-          <a:p/>
-          <a:p>
-            <a:r>
-              <a:t>Ich habe das Projekt allein bearbeitet, alle Rollen liegen also bei mir. Und</a:t>
-            </a:r>
-          </a:p>
-          <a:p>
-            <a:r>
-              <a:t>alle Zahlen, die gleich kommen, habe ich selbst gemessen, an der echten</a:t>
-            </a:r>
-          </a:p>
-          <a:p>
-            <a:r>
-              <a:t>Website, am achtundzwanzigsten Juli. Der Datensatz liegt der Arbeit bei.</a:t>
-            </a:r>
-          </a:p>
-          <a:p/>
-          <a:p>
-            <a:r>
-              <a:t>### Ausblick</a:t>
-            </a:r>
-          </a:p>
-          <a:p/>
-          <a:p>
-            <a:r>
-              <a:t>Am Ende zeige ich das Werkzeug an einem echten Kurstext.</a:t>
+          <a:p>
+            <a:r>
+              <a:t>- Beispiel: bietet die Volkshochschule Deutschkurse für Menschen an, die gerade erst Deutsch lernen.</a:t>
+            </a:r>
+          </a:p>
+          <a:p>
+            <a:r>
+              <a:t>- Die Beschreibungen dieser Kurse sind oft in einem Deutsch geschrieben, das man erst nach dem Kurs versteht.</a:t>
             </a:r>
           </a:p>
         </p:txBody>
@@ -1205,12 +1150,7 @@
           </a:p>
           <a:p>
             <a:r>
-              <a:t>niemand gesehen hat, ist deshalb kein Versäumnis, sondern liegt in der Sache. Und geprüft wird ohnehin der Text im Portal, und dort gibt</a:t>
-            </a:r>
-          </a:p>
-          <a:p>
-            <a:r>
-              <a:t>es keine Seitenzahl.</a:t>
+              <a:t>niemand gesehen hat, ist deshalb kein Versäumnis, sondern liegt in der Sache.</a:t>
             </a:r>
           </a:p>
           <a:p/>
@@ -1849,17 +1789,17 @@
           <a:p/>
           <a:p>
             <a:r>
-              <a:t>Danke für die Aufmerksamkeit. Die Adresse steht oben, dort läuft der Prototyp</a:t>
-            </a:r>
-          </a:p>
-          <a:p>
-            <a:r>
-              <a:t>weiter — mit dem Prompt in allen Fassungen und den Läufen, die ihr gesehen</a:t>
-            </a:r>
-          </a:p>
-          <a:p>
-            <a:r>
-              <a:t>habt. Jetzt gerne eure Fragen.</a:t>
+              <a:t>Danke für die Aufmerksamkeit. Die Adresse steht hier auf der Folie, dort läuft</a:t>
+            </a:r>
+          </a:p>
+          <a:p>
+            <a:r>
+              <a:t>der Prototyp weiter — mit dem Prompt in allen Fassungen und den Läufen, die ihr</a:t>
+            </a:r>
+          </a:p>
+          <a:p>
+            <a:r>
+              <a:t>gesehen habt. Jetzt gerne eure Fragen.</a:t>
             </a:r>
           </a:p>
         </p:txBody>
@@ -1929,7 +1869,7 @@
           <a:lstStyle/>
           <a:p>
             <a:r>
-              <a:t>Drei Zahlen zum Einstieg.</a:t>
+              <a:t>Erstmal eine kurze Übersicht zum Projekt.</a:t>
             </a:r>
           </a:p>
           <a:p/>
@@ -1983,12 +1923,12 @@
           </a:p>
           <a:p>
             <a:r>
-              <a:t>ersten Juli zweitausendeinundzwanzig, heute auf den Tag genau fünf Jahre her.</a:t>
-            </a:r>
-          </a:p>
-          <a:p>
-            <a:r>
-              <a:t>Seitdem bewertet sich das Unternehmen selbst.</a:t>
+              <a:t>ersten Juli zweitausendeinundzwanzig, also vor gut fünf Jahren. Seitdem</a:t>
+            </a:r>
+          </a:p>
+          <a:p>
+            <a:r>
+              <a:t>bewertet sich das Unternehmen selbst.</a:t>
             </a:r>
           </a:p>
           <a:p/>
@@ -2200,6 +2140,38 @@
           <a:p/>
           <a:p>
             <a:r>
+              <a:t>### Ergebnis</a:t>
+            </a:r>
+          </a:p>
+          <a:p/>
+          <a:p>
+            <a:r>
+              <a:t>Der vierte Punkt ist das erwartete Ergebnis. Die Befundquote soll von</a:t>
+            </a:r>
+          </a:p>
+          <a:p>
+            <a:r>
+              <a:t>siebenundfünfzig unter fünfundzwanzig Prozent fallen, und der laufende Aufwand</a:t>
+            </a:r>
+          </a:p>
+          <a:p>
+            <a:r>
+              <a:t>liegt bei neunundzwanzig Stunden im Jahr. Das ist gerechnet, nicht geschätzt:</a:t>
+            </a:r>
+          </a:p>
+          <a:p>
+            <a:r>
+              <a:t>Geprüft wird nur, was neu entsteht, also rund sechshundert Texte im Jahr und</a:t>
+            </a:r>
+          </a:p>
+          <a:p>
+            <a:r>
+              <a:t>nicht fünftausendachthundert.</a:t>
+            </a:r>
+          </a:p>
+          <a:p/>
+          <a:p>
+            <a:r>
               <a:t>### Der Kasten unten</a:t>
             </a:r>
           </a:p>
@@ -3046,29 +3018,40 @@
           </a:p>
           <a:p>
             <a:r>
-              <a:t>zur Zielgruppe passt. Beides ist dreifach A und damit nicht gefordert — genau</a:t>
-            </a:r>
-          </a:p>
-          <a:p>
-            <a:r>
-              <a:t>die beiden Kriterien also, um die es in diesem Projekt geht.</a:t>
+              <a:t>zur Zielgruppe passt. Beides ist dreifach A und damit nicht gefordert — und</a:t>
+            </a:r>
+          </a:p>
+          <a:p>
+            <a:r>
+              <a:t>beides gehört zum Kern dieses Projekts. Zwei meiner Regeln liegen dagegen im</a:t>
+            </a:r>
+          </a:p>
+          <a:p>
+            <a:r>
+              <a:t>Pflichtbereich; dazu gleich mehr.</a:t>
+            </a:r>
+          </a:p>
+          <a:p/>
+          <a:p>
+            <a:r>
+              <a:t>### Warum ich nicht mit dem Bußgeld argumentiere</a:t>
+            </a:r>
+          </a:p>
+          <a:p/>
+          <a:p>
+            <a:r>
+              <a:t>Ich könnte jetzt mit einem drohenden Bußgeld argumentieren. Das wäre bequem,</a:t>
+            </a:r>
+          </a:p>
+          <a:p>
+            <a:r>
+              <a:t>und es wäre falsch.</a:t>
             </a:r>
           </a:p>
           <a:p/>
           <a:p>
             <a:r>
               <a:t>### Der Kasten unten</a:t>
-            </a:r>
-          </a:p>
-          <a:p/>
-          <a:p>
-            <a:r>
-              <a:t>Ich könnte jetzt mit einem drohenden Bußgeld argumentieren. Das wäre bequem,</a:t>
-            </a:r>
-          </a:p>
-          <a:p>
-            <a:r>
-              <a:t>und es wäre falsch.</a:t>
             </a:r>
           </a:p>
           <a:p/>
@@ -3292,7 +3275,7 @@
           <a:p/>
           <a:p>
             <a:r>
-              <a:t>Diese Trennung hat sich beim Bauen zweimal selbst bestätigt. Zwei Zusagen, die</a:t>
+              <a:t>Diese Trennung hat sich beim Bauen dreimal selbst bestätigt. Drei Zusagen, die</a:t>
             </a:r>
           </a:p>
           <a:p>
@@ -3302,12 +3285,12 @@
           </a:p>
           <a:p>
             <a:r>
-              <a:t>eingehalten. Beide stehen jetzt im Programmcode, weil sie feststehen und keine</a:t>
-            </a:r>
-          </a:p>
-          <a:p>
-            <a:r>
-              <a:t>Einschätzung verlangen.</a:t>
+              <a:t>eingehalten. Alle drei stehen jetzt im Programmcode, weil sie feststehen und</a:t>
+            </a:r>
+          </a:p>
+          <a:p>
+            <a:r>
+              <a:t>keine Einschätzung verlangen.</a:t>
             </a:r>
           </a:p>
           <a:p/>

--- a/ausgabe/Praesentation-KLARTEXT.pptx
+++ b/ausgabe/Praesentation-KLARTEXT.pptx
@@ -516,55 +516,65 @@
           <a:lstStyle/>
           <a:p>
             <a:r>
+              <a:rPr i="0"/>
               <a:t>### Begrüßung</a:t>
             </a:r>
           </a:p>
           <a:p/>
           <a:p>
             <a:r>
+              <a:rPr i="0"/>
               <a:t>Willkommen zu meinem Abschlussprojekt!</a:t>
             </a:r>
           </a:p>
           <a:p>
             <a:r>
+              <a:rPr i="0"/>
               <a:t>- KLARTEXT, ein KI-gestützter Prüfschritt für die Kursbeschreibungen der Volkshochschule Frankfurt.</a:t>
             </a:r>
           </a:p>
           <a:p/>
           <a:p>
             <a:r>
+              <a:rPr i="0"/>
               <a:t>### Worum geht es?</a:t>
             </a:r>
           </a:p>
           <a:p/>
           <a:p>
             <a:r>
+              <a:rPr i="0"/>
               <a:t>- Barrierefreiheit.</a:t>
             </a:r>
           </a:p>
           <a:p>
             <a:r>
+              <a:rPr i="0"/>
               <a:t>- Aber nicht der technische Teil wie. Kontraste oder Tastaturbedienung, sondern:</a:t>
             </a:r>
           </a:p>
           <a:p>
             <a:r>
+              <a:rPr i="0"/>
               <a:t>- ob der Text ankommt bei denen, für die er geschrieben ist.</a:t>
             </a:r>
           </a:p>
           <a:p/>
           <a:p>
             <a:r>
+              <a:rPr i="0"/>
               <a:t>### Der schärfste Fall</a:t>
             </a:r>
           </a:p>
           <a:p>
             <a:r>
+              <a:rPr i="0"/>
               <a:t>- Beispiel: bietet die Volkshochschule Deutschkurse für Menschen an, die gerade erst Deutsch lernen.</a:t>
             </a:r>
           </a:p>
           <a:p>
             <a:r>
+              <a:rPr i="0"/>
               <a:t>- Die Beschreibungen dieser Kurse sind oft in einem Deutsch geschrieben, das man erst nach dem Kurs versteht.</a:t>
             </a:r>
           </a:p>
@@ -635,278 +645,319 @@
           <a:lstStyle/>
           <a:p>
             <a:r>
+              <a:rPr i="0"/>
               <a:t>Damit zum Change-Teil, und der beginnt mit den </a:t>
             </a:r>
             <a:r>
-              <a:rPr b="1"/>
+              <a:rPr b="1" i="0"/>
               <a:t>Stakeholdern</a:t>
             </a:r>
             <a:r>
+              <a:rPr i="0"/>
               <a:t>. Die</a:t>
             </a:r>
           </a:p>
           <a:p>
             <a:r>
-              <a:rPr b="1"/>
+              <a:rPr b="1" i="0"/>
               <a:t>Einfluss-Betroffenheits-Matrix</a:t>
             </a:r>
             <a:r>
+              <a:rPr i="0"/>
               <a:t> sortiert sie nach zwei Fragen: Wer ist</a:t>
             </a:r>
           </a:p>
           <a:p>
             <a:r>
+              <a:rPr i="0"/>
               <a:t>betroffen, und wer hat Einfluss.</a:t>
             </a:r>
           </a:p>
           <a:p/>
           <a:p>
             <a:r>
+              <a:rPr i="0"/>
               <a:t>### Oben rechts: Eng einbinden</a:t>
             </a:r>
           </a:p>
           <a:p/>
           <a:p>
             <a:r>
+              <a:rPr i="0"/>
               <a:t>Wer entscheidet oder zustimmen muss.</a:t>
             </a:r>
           </a:p>
           <a:p/>
           <a:p>
             <a:r>
-              <a:rPr b="1"/>
+              <a:rPr b="1" i="0"/>
               <a:t>Der Direktor</a:t>
             </a:r>
             <a:r>
+              <a:rPr i="0"/>
               <a:t> — laut Impressum persönlich für die redaktionellen Inhalte</a:t>
             </a:r>
           </a:p>
           <a:p>
             <a:r>
+              <a:rPr i="0"/>
               <a:t>verantwortlich.</a:t>
             </a:r>
           </a:p>
           <a:p/>
           <a:p>
             <a:r>
-              <a:rPr b="1"/>
+              <a:rPr b="1" i="0"/>
               <a:t>Der Fachbereich des Pilotbereichs</a:t>
             </a:r>
             <a:r>
+              <a:rPr i="0"/>
               <a:t> — er entscheidet über den Text. Und</a:t>
             </a:r>
           </a:p>
           <a:p>
             <a:r>
+              <a:rPr i="0"/>
               <a:t>zwar nur dieser eine: Vier Fachbereiche gleichzeitig wären kein Pilot mehr.</a:t>
             </a:r>
           </a:p>
           <a:p/>
           <a:p>
             <a:r>
-              <a:rPr b="1"/>
+              <a:rPr b="1" i="0"/>
               <a:t>Die Redaktion des Programmhefts</a:t>
             </a:r>
             <a:r>
+              <a:rPr i="0"/>
               <a:t> — prüft Texte für den Druck schon heute,</a:t>
             </a:r>
           </a:p>
           <a:p>
             <a:r>
+              <a:rPr i="0"/>
               <a:t>weiß also, wie Textprüfung geht.</a:t>
             </a:r>
           </a:p>
           <a:p/>
           <a:p>
             <a:r>
-              <a:rPr b="1"/>
+              <a:rPr b="1" i="0"/>
               <a:t>Der Personalrat</a:t>
             </a:r>
             <a:r>
+              <a:rPr i="0"/>
               <a:t> — hier ist die Einordnung eigentlich zu schwach. Sein</a:t>
             </a:r>
           </a:p>
           <a:p>
             <a:r>
+              <a:rPr i="0"/>
               <a:t>Einfluss ist kein hoher, sondern ein </a:t>
             </a:r>
             <a:r>
-              <a:rPr b="1"/>
+              <a:rPr b="1" i="0"/>
               <a:t>sperrender</a:t>
             </a:r>
             <a:r>
+              <a:rPr i="0"/>
               <a:t>: Die Einführung des</a:t>
             </a:r>
           </a:p>
           <a:p>
             <a:r>
+              <a:rPr i="0"/>
               <a:t>Werkzeugs ist mitbestimmungspflichtig, sie braucht seine Zustimmung. Seine</a:t>
             </a:r>
           </a:p>
           <a:p>
             <a:r>
+              <a:rPr i="0"/>
               <a:t>zwei von sechzehn Sitzen in der Betriebskommission sind daneben bedeutungslos.</a:t>
             </a:r>
           </a:p>
           <a:p/>
           <a:p>
             <a:r>
+              <a:rPr i="0"/>
               <a:t>### Unten links: Informieren</a:t>
             </a:r>
           </a:p>
           <a:p/>
           <a:p>
             <a:r>
+              <a:rPr i="0"/>
               <a:t>Nur dieser eine Fachbereich ist im Pilot — die anderen erfahren davon.</a:t>
             </a:r>
           </a:p>
           <a:p/>
           <a:p>
             <a:r>
-              <a:rPr b="1"/>
+              <a:rPr b="1" i="0"/>
               <a:t>Die drei übrigen Fachbereiche</a:t>
             </a:r>
             <a:r>
+              <a:rPr i="0"/>
               <a:t> — sollen wissen, dass es läuft, und sehen,</a:t>
             </a:r>
           </a:p>
           <a:p>
             <a:r>
+              <a:rPr i="0"/>
               <a:t>was herauskommt. Im Pilot sind sie nicht dabei.</a:t>
             </a:r>
           </a:p>
           <a:p/>
           <a:p>
             <a:r>
+              <a:rPr i="0"/>
               <a:t>### Oben links: Beobachten</a:t>
             </a:r>
           </a:p>
           <a:p/>
           <a:p>
             <a:r>
+              <a:rPr i="0"/>
               <a:t>Hoher Einfluss, aber mein Projekt verändert ihre Arbeit nicht.</a:t>
             </a:r>
           </a:p>
           <a:p/>
           <a:p>
             <a:r>
-              <a:rPr b="1"/>
+              <a:rPr b="1" i="0"/>
               <a:t>Die städtische IT</a:t>
             </a:r>
             <a:r>
+              <a:rPr i="0"/>
               <a:t> — bleibt für die technische Seite zuständig.</a:t>
             </a:r>
           </a:p>
           <a:p/>
           <a:p>
             <a:r>
-              <a:rPr b="1"/>
+              <a:rPr b="1" i="0"/>
               <a:t>Advellence</a:t>
             </a:r>
             <a:r>
+              <a:rPr i="0"/>
               <a:t> — die Schweizer Firma, die laut Impressum das Portal</a:t>
             </a:r>
           </a:p>
           <a:p>
             <a:r>
+              <a:rPr i="0"/>
               <a:t>programmiert.</a:t>
             </a:r>
           </a:p>
           <a:p/>
           <a:p>
             <a:r>
-              <a:rPr b="1"/>
+              <a:rPr b="1" i="0"/>
               <a:t>Die Betriebskommission</a:t>
             </a:r>
             <a:r>
+              <a:rPr i="0"/>
               <a:t> — Aufsichtsgremium.</a:t>
             </a:r>
           </a:p>
           <a:p/>
           <a:p>
             <a:r>
-              <a:rPr b="1"/>
+              <a:rPr b="1" i="0"/>
               <a:t>Der Volkshochschul-Verband</a:t>
             </a:r>
             <a:r>
+              <a:rPr i="0"/>
               <a:t> — stellt den KI-Zugang, den ich nutze.</a:t>
             </a:r>
           </a:p>
           <a:p/>
           <a:p>
             <a:r>
+              <a:rPr i="0"/>
               <a:t>### Unten rechts: Konsultieren</a:t>
             </a:r>
           </a:p>
           <a:p/>
           <a:p>
             <a:r>
+              <a:rPr i="0"/>
               <a:t>Der Quadrant, der mich am meisten beschäftigt hat.</a:t>
             </a:r>
           </a:p>
           <a:p/>
           <a:p>
             <a:r>
-              <a:rPr b="1"/>
+              <a:rPr b="1" i="0"/>
               <a:t>Die Kursleitungen auf Honorarbasis</a:t>
             </a:r>
             <a:r>
+              <a:rPr i="0"/>
               <a:t> — maximal betroffen, denn in der</a:t>
             </a:r>
           </a:p>
           <a:p>
             <a:r>
+              <a:rPr i="0"/>
               <a:t>Branche schreiben sie viele dieser Texte. In keinem Gremium sitzen sie, und</a:t>
             </a:r>
           </a:p>
           <a:p>
             <a:r>
+              <a:rPr i="0"/>
               <a:t>vorschreiben kann man ihnen als Honorarkräften nichts. Einen Kanal haben sie</a:t>
             </a:r>
           </a:p>
           <a:p>
             <a:r>
+              <a:rPr i="0"/>
               <a:t>aber doch: Arbeitnehmerähnliche Personen gelten nach dem</a:t>
             </a:r>
           </a:p>
           <a:p>
             <a:r>
+              <a:rPr i="0"/>
               <a:t>Personalvertretungsgesetz als Beschäftigte, der Personalrat vertritt sie mit.</a:t>
             </a:r>
           </a:p>
           <a:p/>
           <a:p>
             <a:r>
-              <a:rPr b="1"/>
+              <a:rPr b="1" i="0"/>
               <a:t>Die Teilnehmenden</a:t>
             </a:r>
             <a:r>
+              <a:rPr i="0"/>
               <a:t> — besonders in den Deutschkursen und in der</a:t>
             </a:r>
           </a:p>
           <a:p>
             <a:r>
+              <a:rPr i="0"/>
               <a:t>Grundbildung. Für sie ist das ganze Projekt gemacht, und sie haben keine</a:t>
             </a:r>
           </a:p>
           <a:p>
             <a:r>
+              <a:rPr i="0"/>
               <a:t>Stimme, in keinem Gremium und in keinem Gesetz.</a:t>
             </a:r>
           </a:p>
           <a:p/>
           <a:p>
             <a:r>
+              <a:rPr i="0"/>
               <a:t>Bei ihnen ist Beteiligung kein guter Stil, sondern das einzige Instrument, das</a:t>
             </a:r>
           </a:p>
           <a:p>
             <a:r>
+              <a:rPr i="0"/>
               <a:t>überhaupt zur Verfügung steht. Was das praktisch heißt, steht auf der nächsten</a:t>
             </a:r>
           </a:p>
           <a:p>
             <a:r>
+              <a:rPr i="0"/>
               <a:t>Folie.</a:t>
             </a:r>
           </a:p>
@@ -977,191 +1028,227 @@
           <a:lstStyle/>
           <a:p>
             <a:r>
+              <a:rPr i="0"/>
               <a:t>Jetzt zum Widerstand. Der Unterricht nennt vier Ursachen: Unsicherheit,</a:t>
             </a:r>
           </a:p>
           <a:p>
             <a:r>
+              <a:rPr i="0"/>
               <a:t>Verlustangst, fehlende Perspektive und Gewohnheit. Ich zeige für jede einen</a:t>
             </a:r>
           </a:p>
           <a:p>
             <a:r>
+              <a:rPr i="0"/>
               <a:t>Fall, den es hier wirklich gibt.</a:t>
             </a:r>
           </a:p>
           <a:p/>
           <a:p>
             <a:r>
+              <a:rPr i="0"/>
               <a:t>### Unsicherheit · im ganzen Haus</a:t>
             </a:r>
           </a:p>
           <a:p/>
           <a:p>
             <a:r>
+              <a:rPr i="0"/>
               <a:t>Die Frage, die im ganzen Haus als Erstes kommt: Schreibt die</a:t>
             </a:r>
           </a:p>
           <a:p>
             <a:r>
+              <a:rPr i="0"/>
               <a:t>KI jetzt unsere Texte? Nein. Sie schlägt vor, mehr nicht. Entschieden und</a:t>
             </a:r>
           </a:p>
           <a:p>
             <a:r>
+              <a:rPr i="0"/>
               <a:t>veröffentlicht wird von Menschen. Das ist keine Beruhigung, sondern der</a:t>
             </a:r>
           </a:p>
           <a:p>
             <a:r>
+              <a:rPr i="0"/>
               <a:t>Zuschnitt des Werkzeugs.</a:t>
             </a:r>
           </a:p>
           <a:p/>
           <a:p>
             <a:r>
+              <a:rPr i="0"/>
               <a:t>### Verlustangst · Fachbereich</a:t>
             </a:r>
           </a:p>
           <a:p/>
           <a:p>
             <a:r>
+              <a:rPr i="0"/>
               <a:t>Der einzige Einwand, der noch offen ist. Eine Kursbeschreibung ist selten von</a:t>
             </a:r>
           </a:p>
           <a:p>
             <a:r>
+              <a:rPr i="0"/>
               <a:t>einer Hand: Der Anmeldehinweis, die Beschreibung der Niveaustufe — solche</a:t>
             </a:r>
           </a:p>
           <a:p>
             <a:r>
+              <a:rPr i="0"/>
               <a:t>Bausteine stehen wortgleich in vielen Kursen und werden nicht in dem Bereich</a:t>
             </a:r>
           </a:p>
           <a:p>
             <a:r>
+              <a:rPr i="0"/>
               <a:t>gepflegt, der den Kurs anbietet. Wer die Befunde bekommt, darf den Text also</a:t>
             </a:r>
           </a:p>
           <a:p>
             <a:r>
+              <a:rPr i="0"/>
               <a:t>oft gar nicht ändern. Das ist keine Angst vor der Maschine, sondern die</a:t>
             </a:r>
           </a:p>
           <a:p>
             <a:r>
+              <a:rPr i="0"/>
               <a:t>Aussicht, für etwas geradezustehen, das einem nicht gehört. Die Antwort ist</a:t>
             </a:r>
           </a:p>
           <a:p>
             <a:r>
+              <a:rPr i="0"/>
               <a:t>deshalb keine Schulung, sondern eine Zuständigkeitsfrage — und die gehört vor</a:t>
             </a:r>
           </a:p>
           <a:p>
             <a:r>
+              <a:rPr i="0"/>
               <a:t>den Pilot.</a:t>
             </a:r>
           </a:p>
           <a:p/>
           <a:p>
             <a:r>
+              <a:rPr i="0"/>
               <a:t>### Fehlende Perspektive · Kursleitung</a:t>
             </a:r>
           </a:p>
           <a:p/>
           <a:p>
             <a:r>
+              <a:rPr i="0"/>
               <a:t>Bei den Honorarkräften schärfer als bei allen</a:t>
             </a:r>
           </a:p>
           <a:p>
             <a:r>
+              <a:rPr i="0"/>
               <a:t>anderen, weil ihre Abrechnungseinheit die Unterrichtsstunde ist. Textarbeit</a:t>
             </a:r>
           </a:p>
           <a:p>
             <a:r>
+              <a:rPr i="0"/>
               <a:t>kommt darin nicht vor, der Einwand ist also berechtigt und gehört auch so</a:t>
             </a:r>
           </a:p>
           <a:p>
             <a:r>
+              <a:rPr i="0"/>
               <a:t>beantwortet. Die Antwort ist der Zuschnitt: Geprüft wird im</a:t>
             </a:r>
           </a:p>
           <a:p>
             <a:r>
+              <a:rPr i="0"/>
               <a:t>Fachbereich, an dem Text, der dort eingeht. Das schützt auch ihren Status:</a:t>
             </a:r>
           </a:p>
           <a:p>
             <a:r>
+              <a:rPr i="0"/>
               <a:t>Verbindliche Regeln und ein Protokoll je Text wären genau die Merkmale, an</a:t>
             </a:r>
           </a:p>
           <a:p>
             <a:r>
+              <a:rPr i="0"/>
               <a:t>denen sich eine Scheinselbständigkeit festmachen lässt.</a:t>
             </a:r>
           </a:p>
           <a:p/>
           <a:p>
             <a:r>
+              <a:rPr i="0"/>
               <a:t>### Gewohnheit · Redaktion des Programmhefts</a:t>
             </a:r>
           </a:p>
           <a:p/>
           <a:p>
             <a:r>
+              <a:rPr i="0"/>
               <a:t>Der Satz, der jedes Qualitätsprojekt begleitet: Es hat sich doch nie jemand</a:t>
             </a:r>
           </a:p>
           <a:p>
             <a:r>
+              <a:rPr i="0"/>
               <a:t>beschwert. Und er stimmt vermutlich. Entscheidend ist, wie man darauf antwortet:</a:t>
             </a:r>
           </a:p>
           <a:p>
             <a:r>
+              <a:rPr i="0"/>
               <a:t>Diese Redaktion prüft Texte im Haus als Einzige schon heute. Sie ist keine</a:t>
             </a:r>
           </a:p>
           <a:p>
             <a:r>
+              <a:rPr i="0"/>
               <a:t>Bremse, sie ist der nächstliegende Verbündete, und so sollte man ihr auch</a:t>
             </a:r>
           </a:p>
           <a:p>
             <a:r>
+              <a:rPr i="0"/>
               <a:t>begegnen. Der Punkt ist nur: Wer sich beschwert, hat den Text gelesen und</a:t>
             </a:r>
           </a:p>
           <a:p>
             <a:r>
+              <a:rPr i="0"/>
               <a:t>verstanden. Die Menschen, um die es hier geht, fragen nicht nach und melden sich</a:t>
             </a:r>
           </a:p>
           <a:p>
             <a:r>
+              <a:rPr i="0"/>
               <a:t>auch nicht an. Ihr Fehlen sieht von innen aus wie Zufriedenheit — dass es bisher</a:t>
             </a:r>
           </a:p>
           <a:p>
             <a:r>
+              <a:rPr i="0"/>
               <a:t>niemand gesehen hat, ist deshalb kein Versäumnis, sondern liegt in der Sache.</a:t>
             </a:r>
           </a:p>
           <a:p/>
           <a:p>
             <a:r>
+              <a:rPr i="0"/>
               <a:t>### Der Kasten unten</a:t>
             </a:r>
           </a:p>
           <a:p/>
           <a:p>
             <a:r>
+              <a:rPr i="0"/>
               <a:t>Betroffene zu Beteiligten machen heißt hier: entscheiden, bevor geschult wird.</a:t>
             </a:r>
           </a:p>
@@ -1232,75 +1319,89 @@
           <a:lstStyle/>
           <a:p>
             <a:r>
+              <a:rPr i="0"/>
               <a:t>Der Zeitplan, drei Monate, drei Stränge, die neun Phasen aus der</a:t>
             </a:r>
           </a:p>
           <a:p>
             <a:r>
+              <a:rPr i="0"/>
               <a:t>Aufgabenstellung als Überschrift jeder Zelle. Die Zellen könnt ihr mitlesen,</a:t>
             </a:r>
           </a:p>
           <a:p>
             <a:r>
+              <a:rPr i="0"/>
               <a:t>ich hebe zwei Dinge heraus.</a:t>
             </a:r>
           </a:p>
           <a:p/>
           <a:p>
             <a:r>
+              <a:rPr i="0"/>
               <a:t>### Monat 2, Strang Kommunikation: Training</a:t>
             </a:r>
           </a:p>
           <a:p/>
           <a:p>
             <a:r>
+              <a:rPr i="0"/>
               <a:t>Erstens das Training im zweiten Monat. Das ist keine Kür, sondern Pflicht:</a:t>
             </a:r>
           </a:p>
           <a:p>
             <a:r>
+              <a:rPr i="0"/>
               <a:t>Artikel vier der KI-Verordnung verlangt seit Februar zweitausendfünfundzwanzig</a:t>
             </a:r>
           </a:p>
           <a:p>
             <a:r>
+              <a:rPr i="0"/>
               <a:t>ausreichende KI-Kompetenz, und zwar für das Personal und für alle, die im</a:t>
             </a:r>
           </a:p>
           <a:p>
             <a:r>
+              <a:rPr i="0"/>
               <a:t>Auftrag mit Betrieb und Nutzung befasst sind. Deshalb steht in der Zelle nicht</a:t>
             </a:r>
           </a:p>
           <a:p>
             <a:r>
+              <a:rPr i="0"/>
               <a:t>Personal, sondern alle, die bedienen. Wer nicht bedient, braucht die Schulung</a:t>
             </a:r>
           </a:p>
           <a:p>
             <a:r>
+              <a:rPr i="0"/>
               <a:t>nicht — das ist der Grund, warum die Kursleitungen aus dieser Kette bleiben.</a:t>
             </a:r>
           </a:p>
           <a:p/>
           <a:p>
             <a:r>
+              <a:rPr i="0"/>
               <a:t>### Strang Change: erst fragen, dann handeln</a:t>
             </a:r>
           </a:p>
           <a:p/>
           <a:p>
             <a:r>
+              <a:rPr i="0"/>
               <a:t>Und zweitens die Reihenfolge im Change-Strang: erst fragen, dann handeln. Die</a:t>
             </a:r>
           </a:p>
           <a:p>
             <a:r>
+              <a:rPr i="0"/>
               <a:t>Freigabe der Textbausteine steht deshalb im ersten Monat und nicht im zweiten,</a:t>
             </a:r>
           </a:p>
           <a:p>
             <a:r>
+              <a:rPr i="0"/>
               <a:t>sonst läuft der Quick Win auf eine Zuständigkeit, die niemand hat.</a:t>
             </a:r>
           </a:p>
@@ -1371,69 +1472,82 @@
           <a:lstStyle/>
           <a:p>
             <a:r>
+              <a:rPr i="0"/>
               <a:t>Die ersten dreißig Tage, und das ist keine Aufzählung, sondern eine</a:t>
             </a:r>
           </a:p>
           <a:p>
             <a:r>
+              <a:rPr i="0"/>
               <a:t>Reihenfolge: Jeder Schritt bedingt den nächsten.</a:t>
             </a:r>
           </a:p>
           <a:p/>
           <a:p>
             <a:r>
+              <a:rPr i="0"/>
               <a:t>### Die vier Schritte</a:t>
             </a:r>
           </a:p>
           <a:p>
             <a:r>
+              <a:rPr i="0"/>
               <a:t>Die Dienstvereinbarung zuerst, aus dem Grund von eben. Dann einen</a:t>
             </a:r>
           </a:p>
           <a:p>
             <a:r>
+              <a:rPr i="0"/>
               <a:t>Programmbereich gewinnen, und zwar freiwillig — ein zugewiesener liefert kein</a:t>
             </a:r>
           </a:p>
           <a:p>
             <a:r>
+              <a:rPr i="0"/>
               <a:t>belastbares Ergebnis, sondern nur Erfüllung. Dann die Freigabe der Bausteine.</a:t>
             </a:r>
           </a:p>
           <a:p>
             <a:r>
+              <a:rPr i="0"/>
               <a:t>Und erst als viertes das Technische, den Assistenten anlegen. Es kostet nichts:</a:t>
             </a:r>
           </a:p>
           <a:p>
             <a:r>
+              <a:rPr i="0"/>
               <a:t>kein Einkauf, keine neue Stelle, der KI-Zugang ist da.</a:t>
             </a:r>
           </a:p>
           <a:p/>
           <a:p>
             <a:r>
+              <a:rPr i="0"/>
               <a:t>### Der Kasten unten: der dritte Schritt</a:t>
             </a:r>
           </a:p>
           <a:p/>
           <a:p>
             <a:r>
+              <a:rPr i="0"/>
               <a:t>Der dritte Schritt ist der, den man am ehesten überspringt, und der teuerste.</a:t>
             </a:r>
           </a:p>
           <a:p>
             <a:r>
+              <a:rPr i="0"/>
               <a:t>Lässt man ihn aus, liefert der Pilot eine Liste von Befunden, die im</a:t>
             </a:r>
           </a:p>
           <a:p>
             <a:r>
+              <a:rPr i="0"/>
               <a:t>Pilotbereich niemand ändern darf — und das Werkzeug hat sich beim ersten</a:t>
             </a:r>
           </a:p>
           <a:p>
             <a:r>
+              <a:rPr i="0"/>
               <a:t>Durchlauf selbst erledigt.</a:t>
             </a:r>
           </a:p>
@@ -1504,161 +1618,191 @@
           <a:lstStyle/>
           <a:p>
             <a:r>
+              <a:rPr i="0"/>
               <a:t>Und woran würde man merken, ob es gewirkt hat?</a:t>
             </a:r>
           </a:p>
           <a:p/>
           <a:p>
             <a:r>
+              <a:rPr i="0"/>
               <a:t>### Die ersten drei Kennzahlen</a:t>
             </a:r>
           </a:p>
           <a:p/>
           <a:p>
             <a:r>
+              <a:rPr i="0"/>
               <a:t>Vier Kennzahlen mit Ausgangswert und Ziel. Die Befundquote soll von</a:t>
             </a:r>
           </a:p>
           <a:p>
             <a:r>
+              <a:rPr i="0"/>
               <a:t>siebenundfünfzig Prozent unter fünfundzwanzig fallen. Alle neuen Texte im</a:t>
             </a:r>
           </a:p>
           <a:p>
             <a:r>
+              <a:rPr i="0"/>
               <a:t>Pilotbereich sollen geprüft sein. Und von den einunddreißig Texten für</a:t>
             </a:r>
           </a:p>
           <a:p>
             <a:r>
+              <a:rPr i="0"/>
               <a:t>Deutschkurse auf A1 und A2, die heute alle Wörter über dem Niveau ihrer Leser</a:t>
             </a:r>
           </a:p>
           <a:p>
             <a:r>
+              <a:rPr i="0"/>
               <a:t>enthalten, sollen höchstens noch zehn betroffen sein.</a:t>
             </a:r>
           </a:p>
           <a:p/>
           <a:p>
             <a:r>
+              <a:rPr i="0"/>
               <a:t>### Die vierte Kennzahl: die Befragung</a:t>
             </a:r>
           </a:p>
           <a:p/>
           <a:p>
             <a:r>
+              <a:rPr i="0"/>
               <a:t>Die vierte Zeile ist mir wichtig, weil die ersten drei nur den Text messen und</a:t>
             </a:r>
           </a:p>
           <a:p>
             <a:r>
+              <a:rPr i="0"/>
               <a:t>nicht die Wirkung. Deshalb frage ich die Teilnehmenden selbst. Nicht über</a:t>
             </a:r>
           </a:p>
           <a:p>
             <a:r>
+              <a:rPr i="0"/>
               <a:t>einen Fragebogen auf der Website, denn den füllt genau die Zielgruppe nicht</a:t>
             </a:r>
           </a:p>
           <a:p>
             <a:r>
+              <a:rPr i="0"/>
               <a:t>aus, um die es geht. Sondern im Kurs, am Ende einer Stunde, in einfacher</a:t>
             </a:r>
           </a:p>
           <a:p>
             <a:r>
+              <a:rPr i="0"/>
               <a:t>Sprache.</a:t>
             </a:r>
           </a:p>
           <a:p/>
           <a:p>
             <a:r>
+              <a:rPr i="0"/>
               <a:t>Diese Befragung ist freiwillig und wird vergütet. Sonst wäre sie eine neue</a:t>
             </a:r>
           </a:p>
           <a:p>
             <a:r>
+              <a:rPr i="0"/>
               <a:t>Aufgabe ohne Bezahlung, und das ist bei Honorarkräften genau das Problem von</a:t>
             </a:r>
           </a:p>
           <a:p>
             <a:r>
+              <a:rPr i="0"/>
               <a:t>der Widerstandsfolie.</a:t>
             </a:r>
           </a:p>
           <a:p/>
           <a:p>
             <a:r>
+              <a:rPr i="0"/>
               <a:t>### Letzte Spalte: womit gemessen wird</a:t>
             </a:r>
           </a:p>
           <a:p/>
           <a:p>
             <a:r>
+              <a:rPr i="0"/>
               <a:t>In der letzten Spalte steht, womit gemessen wird. Die Nachmessung läuft mit</a:t>
             </a:r>
           </a:p>
           <a:p>
             <a:r>
+              <a:rPr i="0"/>
               <a:t>demselben Skript wie die Ausgangsmessung, und dafür bleibt es unverändert</a:t>
             </a:r>
           </a:p>
           <a:p>
             <a:r>
+              <a:rPr i="0"/>
               <a:t>liegen. Wäre es zwischendurch verbessert worden, wüsste man hinterher</a:t>
             </a:r>
           </a:p>
           <a:p>
             <a:r>
+              <a:rPr i="0"/>
               <a:t>nicht, ob die Texte besser geworden sind oder nur die Messung anders.</a:t>
             </a:r>
           </a:p>
           <a:p/>
           <a:p>
             <a:r>
+              <a:rPr i="0"/>
               <a:t>### Das Risiko unten</a:t>
             </a:r>
           </a:p>
           <a:p/>
           <a:p>
             <a:r>
+              <a:rPr i="0"/>
               <a:t>Das Risiko steckt in den Kennzahlen selbst. Die ersten drei lassen sich</a:t>
             </a:r>
           </a:p>
           <a:p>
             <a:r>
+              <a:rPr i="0"/>
               <a:t>erfüllen, ohne dass ein einziger Text besser wird: Wer lange Sätze teilt und</a:t>
             </a:r>
           </a:p>
           <a:p>
             <a:r>
+              <a:rPr i="0"/>
               <a:t>schwere Wörter austauscht, drückt die Befundquote — ob der Text dadurch</a:t>
             </a:r>
           </a:p>
           <a:p>
             <a:r>
+              <a:rPr i="0"/>
               <a:t>verständlicher geworden ist, hat dann noch niemand gefragt. Ein kürzerer Satz</a:t>
             </a:r>
           </a:p>
           <a:p>
             <a:r>
+              <a:rPr i="0"/>
               <a:t>ist nicht automatisch ein verständlicherer.</a:t>
             </a:r>
           </a:p>
           <a:p/>
           <a:p>
             <a:r>
+              <a:rPr i="0"/>
               <a:t>Genau dagegen steht die vierte Kennzahl. Sie fragt nicht den Text, sondern die</a:t>
             </a:r>
           </a:p>
           <a:p>
             <a:r>
+              <a:rPr i="0"/>
               <a:t>Menschen, für die er geschrieben ist. Ohne sie misst der Pilot am Ende nur</a:t>
             </a:r>
           </a:p>
           <a:p>
             <a:r>
+              <a:rPr i="0"/>
               <a:t>seinen eigenen Maßstab.</a:t>
             </a:r>
           </a:p>
@@ -1729,76 +1873,90 @@
           <a:lstStyle/>
           <a:p>
             <a:r>
+              <a:rPr i="0"/>
               <a:t>### Was diese Arbeit ist</a:t>
             </a:r>
           </a:p>
           <a:p/>
           <a:p>
             <a:r>
+              <a:rPr i="0"/>
               <a:t>Ich habe ein reales Unternehmen analysiert, einen Prozess gefunden, in dem</a:t>
             </a:r>
           </a:p>
           <a:p>
             <a:r>
+              <a:rPr i="0"/>
               <a:t>niemand etwas falsch macht und trotzdem etwas fehlt, und ich habe den Zustand</a:t>
             </a:r>
           </a:p>
           <a:p>
             <a:r>
+              <a:rPr i="0"/>
               <a:t>gemessen statt geschätzt.</a:t>
             </a:r>
           </a:p>
           <a:p/>
           <a:p>
             <a:r>
+              <a:rPr i="0"/>
               <a:t>### Meine Lehre aus dem Projekt</a:t>
             </a:r>
           </a:p>
           <a:p/>
           <a:p>
             <a:r>
+              <a:rPr i="0"/>
               <a:t>Der System-Prompt selbst ist an einem Nachmittag geschrieben. Das ist meine</a:t>
             </a:r>
           </a:p>
           <a:p>
             <a:r>
+              <a:rPr i="0"/>
               <a:t>eigentliche Lehre aus diesem Projekt. Die Arbeit steckt in allem, was ihn</a:t>
             </a:r>
           </a:p>
           <a:p>
             <a:r>
+              <a:rPr i="0"/>
               <a:t>möglich macht: zu wissen, für wen ein Text ist, zu wissen, was Pflicht ist und</a:t>
             </a:r>
           </a:p>
           <a:p>
             <a:r>
+              <a:rPr i="0"/>
               <a:t>was Anspruch, und einen Weg zu finden, auf dem die Menschen, die diese Texte</a:t>
             </a:r>
           </a:p>
           <a:p>
             <a:r>
+              <a:rPr i="0"/>
               <a:t>schreiben, das Werkzeug nicht als Kontrolle erleben.</a:t>
             </a:r>
           </a:p>
           <a:p/>
           <a:p>
             <a:r>
+              <a:rPr i="0"/>
               <a:t>### Der Link auf der Folie</a:t>
             </a:r>
           </a:p>
           <a:p/>
           <a:p>
             <a:r>
+              <a:rPr i="0"/>
               <a:t>Danke für die Aufmerksamkeit. Die Adresse steht hier auf der Folie, dort läuft</a:t>
             </a:r>
           </a:p>
           <a:p>
             <a:r>
+              <a:rPr i="0"/>
               <a:t>der Prototyp weiter — mit dem Prompt in allen Fassungen und den Läufen, die ihr</a:t>
             </a:r>
           </a:p>
           <a:p>
             <a:r>
+              <a:rPr i="0"/>
               <a:t>gesehen habt. Jetzt gerne eure Fragen.</a:t>
             </a:r>
           </a:p>
@@ -1869,120 +2027,95 @@
           <a:lstStyle/>
           <a:p>
             <a:r>
+              <a:rPr i="0"/>
               <a:t>Erstmal eine kurze Übersicht zum Projekt.</a:t>
             </a:r>
           </a:p>
           <a:p/>
           <a:p>
             <a:r>
+              <a:rPr i="0"/>
               <a:t>### 5.800 Texte und 57 Prozent</a:t>
             </a:r>
           </a:p>
           <a:p/>
           <a:p>
             <a:r>
-              <a:t>Die Volkshochschule veröffentlicht rund fünftausendachthundert</a:t>
-            </a:r>
-          </a:p>
-          <a:p>
-            <a:r>
-              <a:t>Kursbeschreibungen im Jahr. Von allen Texten, die heute im Portal stehen,</a:t>
-            </a:r>
-          </a:p>
-          <a:p>
-            <a:r>
-              <a:t>haben siebenundfünfzig Prozent mindestens einen Befund, und das ist die Untergrenze:</a:t>
-            </a:r>
-          </a:p>
-          <a:p>
-            <a:r>
-              <a:t>Die Zahl stammt von einem Skript, das ohne KI auskommt und deshalb eine der</a:t>
-            </a:r>
-          </a:p>
-          <a:p>
-            <a:r>
-              <a:t>sechs Regeln nicht prüfen kann. Mit dem Prüfassistenten liegt der Wert höher.</a:t>
-            </a:r>
-          </a:p>
-          <a:p/>
-          <a:p>
-            <a:r>
+              <a:rPr i="0"/>
+              <a:t>- Die Volkshochschule veröffentlicht rund 5800 Kursbeschreibungen im Jahr.</a:t>
+            </a:r>
+          </a:p>
+          <a:p>
+            <a:r>
+              <a:rPr i="0"/>
+              <a:t>- Von allen Texten, die heute im Portal stehen, hat mehr als jeder zweite Text einen Befund </a:t>
+            </a:r>
+            <a:r>
+              <a:rPr i="1"/>
+              <a:t>Die Zahl stammt von einem Skript, das ohne KI auskommt und deshalb eine der sechs Regeln nicht prüfen kann. Mit dem Prüfassistenten liegt der Wert höher.</a:t>
+            </a:r>
+          </a:p>
+          <a:p/>
+          <a:p>
+            <a:r>
+              <a:rPr i="0"/>
               <a:t>### Fünf Jahre ohne externe Prüfung</a:t>
             </a:r>
           </a:p>
-          <a:p/>
-          <a:p>
-            <a:r>
-              <a:t>Die dritte Zahl stammt aus dem Unternehmen selbst. In der Erklärung zur</a:t>
-            </a:r>
-          </a:p>
-          <a:p>
-            <a:r>
-              <a:t>Barrierefreiheit steht, wann die Website zuletzt extern geprüft wurde: am</a:t>
-            </a:r>
-          </a:p>
-          <a:p>
-            <a:r>
-              <a:t>ersten Juli zweitausendeinundzwanzig, also vor gut fünf Jahren. Seitdem</a:t>
-            </a:r>
-          </a:p>
-          <a:p>
-            <a:r>
-              <a:t>bewertet sich das Unternehmen selbst.</a:t>
-            </a:r>
-          </a:p>
-          <a:p/>
-          <a:p>
-            <a:r>
+          <a:p>
+            <a:r>
+              <a:rPr i="0"/>
+              <a:t>Die letzte externe Prüfung auf Barrierefreiheit der Website ist etwa 5 Jahre</a:t>
+            </a:r>
+          </a:p>
+          <a:p>
+            <a:r>
+              <a:rPr i="0"/>
+              <a:t>her. Die Zahl stammt aus der Erklärung zur Barrierefreiheit der</a:t>
+            </a:r>
+          </a:p>
+          <a:p>
+            <a:r>
+              <a:rPr i="0"/>
+              <a:t>Volkshochschule.</a:t>
+            </a:r>
+          </a:p>
+          <a:p/>
+          <a:p>
+            <a:r>
+              <a:rPr i="0"/>
               <a:t>### Einfache Sprache, der eigentliche Anlass</a:t>
             </a:r>
           </a:p>
-          <a:p/>
-          <a:p>
-            <a:r>
-              <a:t>Dieselbe Erklärung enthält den Satz, der mich auf dieses Projekt gebracht hat.</a:t>
-            </a:r>
-          </a:p>
-          <a:p>
-            <a:r>
-              <a:t>Die wichtigsten Informationen zu Betrieb und Kursgeschäft, heißt es dort,</a:t>
-            </a:r>
-          </a:p>
-          <a:p>
-            <a:r>
-              <a:t>seien in einfacher Sprache verfügbar. Das Unternehmen hat die Frage nach der</a:t>
-            </a:r>
-          </a:p>
-          <a:p>
-            <a:r>
-              <a:t>Verständlichkeit also längst gestellt und für einen Bereich beantwortet. Nur</a:t>
-            </a:r>
-          </a:p>
-          <a:p>
-            <a:r>
-              <a:t>für die Kursbeschreibungen selbst, den mit Abstand größten Textbestand, gilt</a:t>
-            </a:r>
-          </a:p>
-          <a:p>
-            <a:r>
-              <a:t>das nicht.</a:t>
-            </a:r>
-          </a:p>
-          <a:p/>
-          <a:p>
-            <a:r>
+          <a:p>
+            <a:r>
+              <a:rPr i="0"/>
+              <a:t>Dort heißt es auch, dass Informationen zu Betrieb und Kursgeschäft in</a:t>
+            </a:r>
+          </a:p>
+          <a:p>
+            <a:r>
+              <a:rPr i="0"/>
+              <a:t>einfacher Sprache verfügbar sind. Das gilt jedoch nicht für die</a:t>
+            </a:r>
+          </a:p>
+          <a:p>
+            <a:r>
+              <a:rPr i="0"/>
+              <a:t>Kursbeschreibungen selbst, die immerhin den größten Textbestand darstellen.</a:t>
+            </a:r>
+          </a:p>
+          <a:p/>
+          <a:p>
+            <a:r>
+              <a:rPr i="0"/>
               <a:t>### Der Kasten unten</a:t>
             </a:r>
           </a:p>
-          <a:p/>
-          <a:p>
-            <a:r>
-              <a:t>Da setze ich an. Unten steht die Frage, um die es geht: Mehr als jeder zweite</a:t>
-            </a:r>
-          </a:p>
-          <a:p>
-            <a:r>
-              <a:t>Text hat einen Befund. Für wen ist er eigentlich zu schwer?</a:t>
+          <a:p>
+            <a:r>
+              <a:rPr i="0"/>
+              <a:t>Vor allem hier setzt das Projekt an.</a:t>
             </a:r>
           </a:p>
         </p:txBody>
@@ -2052,137 +2185,162 @@
           <a:lstStyle/>
           <a:p>
             <a:r>
+              <a:rPr i="0"/>
               <a:t>Daraus folgt mein Vorschlag.</a:t>
             </a:r>
           </a:p>
           <a:p/>
           <a:p>
             <a:r>
+              <a:rPr i="0"/>
               <a:t>### Ziel</a:t>
             </a:r>
           </a:p>
           <a:p/>
           <a:p>
             <a:r>
+              <a:rPr i="0"/>
               <a:t>Das Ziel oben ist von den Lesenden her formuliert. Wer einen Kurs sucht, soll</a:t>
             </a:r>
           </a:p>
           <a:p>
             <a:r>
+              <a:rPr i="0"/>
               <a:t>die Beschreibung verstehen, ob er sie liest oder vorgelesen bekommt. Die</a:t>
             </a:r>
           </a:p>
           <a:p>
             <a:r>
+              <a:rPr i="0"/>
               <a:t>Betriebssatzung sagt, die Angebote stehen allen offen — dann muss das auch für</a:t>
             </a:r>
           </a:p>
           <a:p>
             <a:r>
+              <a:rPr i="0"/>
               <a:t>die Texte gelten, mit denen wir sie ankündigen.</a:t>
             </a:r>
           </a:p>
           <a:p/>
           <a:p>
             <a:r>
+              <a:rPr i="0"/>
               <a:t>Geprüft wird zweierlei: ob die Zielgruppe den Text versteht, und ob ein</a:t>
             </a:r>
           </a:p>
           <a:p>
             <a:r>
+              <a:rPr i="0"/>
               <a:t>Vorleseprogramm etwas damit anfangen kann.</a:t>
             </a:r>
           </a:p>
           <a:p/>
           <a:p>
             <a:r>
+              <a:rPr i="0"/>
               <a:t>### Lösung</a:t>
             </a:r>
           </a:p>
           <a:p/>
           <a:p>
             <a:r>
+              <a:rPr i="0"/>
               <a:t>Dafür genügt ein System-Prompt in dem KI-Zugang, den der Volkshochschul-</a:t>
             </a:r>
           </a:p>
           <a:p>
             <a:r>
+              <a:rPr i="0"/>
               <a:t>Verband ohnehin für alle Volkshochschulen bereitstellt. Es muss nichts</a:t>
             </a:r>
           </a:p>
           <a:p>
             <a:r>
+              <a:rPr i="0"/>
               <a:t>beschafft werden.</a:t>
             </a:r>
           </a:p>
           <a:p/>
           <a:p>
             <a:r>
+              <a:rPr i="0"/>
               <a:t>### Abgrenzung</a:t>
             </a:r>
           </a:p>
           <a:p/>
           <a:p>
             <a:r>
+              <a:rPr i="0"/>
               <a:t>Die Abgrenzung darunter zieht sich durch das ganze Konzept: Für die technische</a:t>
             </a:r>
           </a:p>
           <a:p>
             <a:r>
+              <a:rPr i="0"/>
               <a:t>Barrierefreiheit der Website bleibt ein normales Prüfwerkzeug zuständig,</a:t>
             </a:r>
           </a:p>
           <a:p>
             <a:r>
+              <a:rPr i="0"/>
               <a:t>zusammen mit der städtischen IT. Die KI sieht nur den Kurstext.</a:t>
             </a:r>
           </a:p>
           <a:p/>
           <a:p>
             <a:r>
+              <a:rPr i="0"/>
               <a:t>### Ergebnis</a:t>
             </a:r>
           </a:p>
           <a:p/>
           <a:p>
             <a:r>
+              <a:rPr i="0"/>
               <a:t>Der vierte Punkt ist das erwartete Ergebnis. Die Befundquote soll von</a:t>
             </a:r>
           </a:p>
           <a:p>
             <a:r>
+              <a:rPr i="0"/>
               <a:t>siebenundfünfzig unter fünfundzwanzig Prozent fallen, und der laufende Aufwand</a:t>
             </a:r>
           </a:p>
           <a:p>
             <a:r>
+              <a:rPr i="0"/>
               <a:t>liegt bei neunundzwanzig Stunden im Jahr. Das ist gerechnet, nicht geschätzt:</a:t>
             </a:r>
           </a:p>
           <a:p>
             <a:r>
+              <a:rPr i="0"/>
               <a:t>Geprüft wird nur, was neu entsteht, also rund sechshundert Texte im Jahr und</a:t>
             </a:r>
           </a:p>
           <a:p>
             <a:r>
+              <a:rPr i="0"/>
               <a:t>nicht fünftausendachthundert.</a:t>
             </a:r>
           </a:p>
           <a:p/>
           <a:p>
             <a:r>
+              <a:rPr i="0"/>
               <a:t>### Der Kasten unten</a:t>
             </a:r>
           </a:p>
           <a:p/>
           <a:p>
             <a:r>
+              <a:rPr i="0"/>
               <a:t>Unten steht der erste Schritt: ein Pilot in einem Programmbereich, drei</a:t>
             </a:r>
           </a:p>
           <a:p>
             <a:r>
+              <a:rPr i="0"/>
               <a:t>Monate. Der Prompt schlägt vor, der Mensch entscheidet.</a:t>
             </a:r>
           </a:p>
@@ -2253,177 +2411,210 @@
           <a:lstStyle/>
           <a:p>
             <a:r>
+              <a:rPr i="0"/>
               <a:t>Das Unternehmen und der Prozess.</a:t>
             </a:r>
           </a:p>
           <a:p/>
           <a:p>
             <a:r>
+              <a:rPr i="0"/>
               <a:t>### Linke Spalte: Das Unternehmen</a:t>
             </a:r>
           </a:p>
           <a:p/>
           <a:p>
             <a:r>
+              <a:rPr i="0"/>
               <a:t>Die Volkshochschule Frankfurt ist kein Amt, sondern ein Eigenbetrieb der</a:t>
             </a:r>
           </a:p>
           <a:p>
             <a:r>
+              <a:rPr i="0"/>
               <a:t>Stadt. Geleitet wird sie von einem Direktor, der laut Impressum auch</a:t>
             </a:r>
           </a:p>
           <a:p>
             <a:r>
+              <a:rPr i="0"/>
               <a:t>persönlich für die redaktionellen Inhalte der Website verantwortlich ist.</a:t>
             </a:r>
           </a:p>
           <a:p>
             <a:r>
+              <a:rPr i="0"/>
               <a:t>Darüber steht eine Betriebskommission mit sechzehn Sitzen, zwei davon für den</a:t>
             </a:r>
           </a:p>
           <a:p>
             <a:r>
+              <a:rPr i="0"/>
               <a:t>Personalrat. Diese zwei Sitze spielen später noch eine Rolle.</a:t>
             </a:r>
           </a:p>
           <a:p/>
           <a:p>
             <a:r>
+              <a:rPr i="0"/>
               <a:t>Am Ende der ersten Zeile steht die Qualitätstestierung. Das Unternehmen ist</a:t>
             </a:r>
           </a:p>
           <a:p>
             <a:r>
+              <a:rPr i="0"/>
               <a:t>seit zweitausendfünf nach L Q W testiert, Lernerorientierte</a:t>
             </a:r>
           </a:p>
           <a:p>
             <a:r>
+              <a:rPr i="0"/>
               <a:t>Qualitätstestierung in der Weiterbildung, ein Verfahren mit regelmäßiger</a:t>
             </a:r>
           </a:p>
           <a:p>
             <a:r>
+              <a:rPr i="0"/>
               <a:t>externer Prüfung, inzwischen in der sechsten Runde. Hier fehlt also keine</a:t>
             </a:r>
           </a:p>
           <a:p>
             <a:r>
+              <a:rPr i="0"/>
               <a:t>Qualitätskultur. Es fehlt genau ein Schritt darin.</a:t>
             </a:r>
           </a:p>
           <a:p/>
           <a:p>
             <a:r>
+              <a:rPr i="0"/>
               <a:t>### Der Satz oben aus der Betriebssatzung</a:t>
             </a:r>
           </a:p>
           <a:p/>
           <a:p>
             <a:r>
+              <a:rPr i="0"/>
               <a:t>Der Satz oben stammt wörtlich aus der Betriebssatzung: Die Angebote stehen</a:t>
             </a:r>
           </a:p>
           <a:p>
             <a:r>
+              <a:rPr i="0"/>
               <a:t>grundsätzlich allen offen, ohne Rücksicht auf Vorbildung. Daran messe ich das</a:t>
             </a:r>
           </a:p>
           <a:p>
             <a:r>
+              <a:rPr i="0"/>
               <a:t>Unternehmen — nicht am Gesetz, sondern an seinem eigenen Anspruch.</a:t>
             </a:r>
           </a:p>
           <a:p/>
           <a:p>
             <a:r>
+              <a:rPr i="0"/>
               <a:t>### Rechte Spalte: So entsteht ein Kurstext</a:t>
             </a:r>
           </a:p>
           <a:p/>
           <a:p>
             <a:r>
+              <a:rPr i="0"/>
               <a:t>Rechts steht, wie ein Kurstext entsteht. Geplant wird halbjährlich, von den</a:t>
             </a:r>
           </a:p>
           <a:p>
             <a:r>
+              <a:rPr i="0"/>
               <a:t>Teams der vier Fachbereiche. Der Text wird geschrieben und ins</a:t>
             </a:r>
           </a:p>
           <a:p>
             <a:r>
+              <a:rPr i="0"/>
               <a:t>Kursverwaltungssystem eingepflegt, und dann erscheint er. Über der Spalte</a:t>
             </a:r>
           </a:p>
           <a:p>
             <a:r>
+              <a:rPr i="0"/>
               <a:t>steht das Wort angenommen, denn wer bei der vhs Frankfurt die Texte schreibt,</a:t>
             </a:r>
           </a:p>
           <a:p>
             <a:r>
+              <a:rPr i="0"/>
               <a:t>ist nicht öffentlich dokumentiert.</a:t>
             </a:r>
           </a:p>
           <a:p/>
           <a:p>
             <a:r>
+              <a:rPr i="0"/>
               <a:t>### Der Kasten unten</a:t>
             </a:r>
           </a:p>
           <a:p/>
           <a:p>
             <a:r>
+              <a:rPr i="0"/>
               <a:t>Zwischen dem Einpflegen und dem Erscheinen ist kein Prüfschritt auf</a:t>
             </a:r>
           </a:p>
           <a:p>
             <a:r>
+              <a:rPr i="0"/>
               <a:t>Verständlichkeit vorgesehen. Das ist kein Vorwurf, denn dieser Arbeitsschritt</a:t>
             </a:r>
           </a:p>
           <a:p>
             <a:r>
+              <a:rPr i="0"/>
               <a:t>ist nirgends vorgesehen. Genau deshalb ist es ein Fall für Prozessgestaltung</a:t>
             </a:r>
           </a:p>
           <a:p>
             <a:r>
+              <a:rPr i="0"/>
               <a:t>und nicht für einen Appell, sich mehr Mühe zu geben.</a:t>
             </a:r>
           </a:p>
           <a:p/>
           <a:p>
             <a:r>
+              <a:rPr i="0"/>
               <a:t>Für das gedruckte Programmheft gibt es sehr wohl eine Redaktion, das Impressum</a:t>
             </a:r>
           </a:p>
           <a:p>
             <a:r>
+              <a:rPr i="0"/>
               <a:t>nennt sie mit Namen. Für das Portal gibt es sie nicht, und dort stehen die</a:t>
             </a:r>
           </a:p>
           <a:p>
             <a:r>
+              <a:rPr i="0"/>
               <a:t>Texte, um die es hier geht.</a:t>
             </a:r>
           </a:p>
           <a:p/>
           <a:p>
             <a:r>
+              <a:rPr i="0"/>
               <a:t>Ich habe nachgezählt: Vierundfünfzig Prozent aller Kurse teilen sich ihren</a:t>
             </a:r>
           </a:p>
           <a:p>
             <a:r>
+              <a:rPr i="0"/>
               <a:t>Text mit mindestens einem anderen. Ein schlecht formulierter Text ist hier nie</a:t>
             </a:r>
           </a:p>
           <a:p>
             <a:r>
+              <a:rPr i="0"/>
               <a:t>ein Einzelfall.</a:t>
             </a:r>
           </a:p>
@@ -2494,369 +2685,438 @@
           <a:lstStyle/>
           <a:p>
             <a:r>
+              <a:rPr i="0"/>
               <a:t>Zur Potenzialermittlung. Hier habe ich nicht geschätzt, sondern gemessen.</a:t>
             </a:r>
           </a:p>
           <a:p/>
           <a:p>
             <a:r>
+              <a:rPr i="0"/>
               <a:t>### Die Messung</a:t>
             </a:r>
           </a:p>
           <a:p/>
           <a:p>
             <a:r>
+              <a:rPr i="0"/>
               <a:t>Das Kursportal hat eine offene Schnittstelle. Darüber habe ich alle</a:t>
             </a:r>
           </a:p>
           <a:p>
             <a:r>
+              <a:rPr i="0"/>
               <a:t>Kurstexte gezogen, gut dreitausend, und mit einem eigenen Skript ausgewertet.</a:t>
             </a:r>
           </a:p>
           <a:p>
             <a:r>
+              <a:rPr i="0"/>
               <a:t>Siebenundfünfzig Prozent haben mindestens einen Befund.</a:t>
             </a:r>
           </a:p>
           <a:p/>
           <a:p>
             <a:r>
+              <a:rPr i="0"/>
               <a:t>### Wonach gemessen wurde</a:t>
             </a:r>
           </a:p>
           <a:p/>
           <a:p>
             <a:r>
+              <a:rPr i="0"/>
               <a:t>Oben steht, wonach ich gemessen habe: sechs Regeln, erst der Maßstab, dann das</a:t>
             </a:r>
           </a:p>
           <a:p>
             <a:r>
+              <a:rPr i="0"/>
               <a:t>Ergebnis. Dieselben sechs Regeln sind zugleich der Maßstab des</a:t>
             </a:r>
           </a:p>
           <a:p>
             <a:r>
+              <a:rPr i="0"/>
               <a:t>Prüfassistenten, den ich gleich zeige.</a:t>
             </a:r>
           </a:p>
           <a:p/>
           <a:p>
             <a:r>
+              <a:rPr i="0"/>
               <a:t>### Links: die zwei Pflichtregeln</a:t>
             </a:r>
           </a:p>
           <a:p/>
           <a:p>
             <a:r>
+              <a:rPr i="0"/>
               <a:t>Links stehen die beiden Pflichtregeln. Sie stehen auf Stufe A der</a:t>
             </a:r>
           </a:p>
           <a:p>
             <a:r>
+              <a:rPr i="0"/>
               <a:t>Barrierefreiheitsrichtlinien und sind damit verbindlich.</a:t>
             </a:r>
           </a:p>
           <a:p/>
           <a:p>
             <a:r>
+              <a:rPr i="0"/>
               <a:t>Struktur heißt: Eine Zeile sieht aus wie eine Überschrift, ist im Quelltext</a:t>
             </a:r>
           </a:p>
           <a:p>
             <a:r>
+              <a:rPr i="0"/>
               <a:t>aber gewöhnlicher Fließtext. Dasselbe gilt für Aufzählungen, die jemand nur</a:t>
             </a:r>
           </a:p>
           <a:p>
             <a:r>
+              <a:rPr i="0"/>
               <a:t>mit Bindestrichen gebaut hat. Wer sehend liest, merkt davon nichts. Ein</a:t>
             </a:r>
           </a:p>
           <a:p>
             <a:r>
+              <a:rPr i="0"/>
               <a:t>Screenreader dagegen bietet an, sich alle Überschriften einer Seite vorlesen</a:t>
             </a:r>
           </a:p>
           <a:p>
             <a:r>
+              <a:rPr i="0"/>
               <a:t>zu lassen, um gezielt dorthin zu springen — was technisch keine Überschrift</a:t>
             </a:r>
           </a:p>
           <a:p>
             <a:r>
+              <a:rPr i="0"/>
               <a:t>ist, taucht in dieser Liste nicht auf. Die Gliederung ist dann sichtbar</a:t>
             </a:r>
           </a:p>
           <a:p>
             <a:r>
+              <a:rPr i="0"/>
               <a:t>vorhanden und für das Vorleseprogramm nicht da.</a:t>
             </a:r>
           </a:p>
           <a:p/>
           <a:p>
             <a:r>
+              <a:rPr i="0"/>
               <a:t>Linktext heißt: Der Link sagt nicht, wohin er führt. Das bekannteste Beispiel</a:t>
             </a:r>
           </a:p>
           <a:p>
             <a:r>
+              <a:rPr i="0"/>
               <a:t>ist ein Link, der schlicht „hier“ heißt. Der Grund ist derselbe: Screenreader</a:t>
             </a:r>
           </a:p>
           <a:p>
             <a:r>
+              <a:rPr i="0"/>
               <a:t>lesen auf Wunsch nur die Links einer Seite vor, ohne den Text drumherum. Eine</a:t>
             </a:r>
           </a:p>
           <a:p>
             <a:r>
+              <a:rPr i="0"/>
               <a:t>Liste aus fünfmal „hier“ hilft niemandem weiter.</a:t>
             </a:r>
           </a:p>
           <a:p/>
           <a:p>
             <a:r>
+              <a:rPr i="0"/>
               <a:t>### Rechts: die vier Empfehlungen</a:t>
             </a:r>
           </a:p>
           <a:p/>
           <a:p>
             <a:r>
+              <a:rPr i="0"/>
               <a:t>Rechts stehen die vier Empfehlungen. Verbindlich sind sie nicht, aber sie sind</a:t>
             </a:r>
           </a:p>
           <a:p>
             <a:r>
+              <a:rPr i="0"/>
               <a:t>der eigentliche Ertrag dieses Projekts. Zwei davon, zu schwere Wörter und</a:t>
             </a:r>
           </a:p>
           <a:p>
             <a:r>
+              <a:rPr i="0"/>
               <a:t>nicht aufgelöste Abkürzungen, stehen auf Stufe AAA — der höchsten, die niemand</a:t>
             </a:r>
           </a:p>
           <a:p>
             <a:r>
+              <a:rPr i="0"/>
               <a:t>einhalten muss. Die beiden anderen habe ich selbst gesetzt.</a:t>
             </a:r>
           </a:p>
           <a:p/>
           <a:p>
             <a:r>
+              <a:rPr i="0"/>
               <a:t>Niveau heißt: Ein Wort liegt über dem Sprachniveau derer, die den Text lesen</a:t>
             </a:r>
           </a:p>
           <a:p>
             <a:r>
+              <a:rPr i="0"/>
               <a:t>sollen. Das ist die Regel, die sich ohne Kenntnis der Zielgruppe überhaupt</a:t>
             </a:r>
           </a:p>
           <a:p>
             <a:r>
+              <a:rPr i="0"/>
               <a:t>nicht anwenden lässt.</a:t>
             </a:r>
           </a:p>
           <a:p/>
           <a:p>
             <a:r>
+              <a:rPr i="0"/>
               <a:t>Amtsdeutsch heißt: Im Text steht ein Verwaltungswort, obwohl ein alltägliches</a:t>
             </a:r>
           </a:p>
           <a:p>
             <a:r>
+              <a:rPr i="0"/>
               <a:t>genügen würde. Umbuchung statt Wechsel, gegebenenfalls statt wenn nötig. Das</a:t>
             </a:r>
           </a:p>
           <a:p>
             <a:r>
+              <a:rPr i="0"/>
               <a:t>trifft nicht nur Sprachanfänger, sondern auch geübte Leserinnen und Leser.</a:t>
             </a:r>
           </a:p>
           <a:p/>
           <a:p>
             <a:r>
+              <a:rPr i="0"/>
               <a:t>Satz heißt: über fünfundzwanzig Wörter, bei Deutschkursen über fünfzehn. Diese</a:t>
             </a:r>
           </a:p>
           <a:p>
             <a:r>
+              <a:rPr i="0"/>
               <a:t>beiden Zahlen habe ich gesetzt, nicht gemessen; sie orientieren sich an den</a:t>
             </a:r>
           </a:p>
           <a:p>
             <a:r>
+              <a:rPr i="0"/>
               <a:t>Empfehlungen für einfache Sprache. Zur Satzlänge sagen die</a:t>
             </a:r>
           </a:p>
           <a:p>
             <a:r>
+              <a:rPr i="0"/>
               <a:t>Barrierefreiheitsrichtlinien nämlich nichts, und ob es die richtigen Zahlen</a:t>
             </a:r>
           </a:p>
           <a:p>
             <a:r>
+              <a:rPr i="0"/>
               <a:t>sind, soll der Pilot beantworten.</a:t>
             </a:r>
           </a:p>
           <a:p/>
           <a:p>
             <a:r>
+              <a:rPr i="0"/>
               <a:t>Abkürzung heißt: Ein Kürzel steht im Text, ohne beim ersten Mal aufgelöst zu</a:t>
             </a:r>
           </a:p>
           <a:p>
             <a:r>
+              <a:rPr i="0"/>
               <a:t>werden. Davon hat die vhs einige eigene, D-T-Z zum Beispiel, der Deutsch-Test</a:t>
             </a:r>
           </a:p>
           <a:p>
             <a:r>
+              <a:rPr i="0"/>
               <a:t>für Zuwanderer.</a:t>
             </a:r>
           </a:p>
           <a:p/>
           <a:p>
             <a:r>
+              <a:rPr i="0"/>
               <a:t>### Zwei Kurse im Vergleich</a:t>
             </a:r>
           </a:p>
           <a:p/>
           <a:p>
             <a:r>
+              <a:rPr i="0"/>
               <a:t>Die Tabelle darunter zeigt zwei Sprachkurse, und beide tragen eine niedrige</a:t>
             </a:r>
           </a:p>
           <a:p>
             <a:r>
+              <a:rPr i="0"/>
               <a:t>Stufe im Titel. Das bedeutet zweimal etwas völlig Verschiedenes.</a:t>
             </a:r>
           </a:p>
           <a:p/>
           <a:p>
             <a:r>
+              <a:rPr i="0"/>
               <a:t>Beim Englischkurs steht A1 für das Englisch, das dort gelernt wird. Wer die</a:t>
             </a:r>
           </a:p>
           <a:p>
             <a:r>
+              <a:rPr i="0"/>
               <a:t>Beschreibung liest, ist deutschsprachig und liest Deutsch fließend. Beim</a:t>
             </a:r>
           </a:p>
           <a:p>
             <a:r>
+              <a:rPr i="0"/>
               <a:t>Deutschkurs steht A2 für das Deutsch, das dort gelernt wird. Wer diese</a:t>
             </a:r>
           </a:p>
           <a:p>
             <a:r>
+              <a:rPr i="0"/>
               <a:t>Beschreibung liest, kann Deutsch bisher eine Stufe darunter, also A1.</a:t>
             </a:r>
           </a:p>
           <a:p/>
           <a:p>
             <a:r>
+              <a:rPr i="0"/>
               <a:t>Der Englischkurs hat kein einziges Wort über dem Niveau seiner Leser und einen</a:t>
             </a:r>
           </a:p>
           <a:p>
             <a:r>
+              <a:rPr i="0"/>
               <a:t>Befund insgesamt, eine nicht aufgelöste Abkürzung. Der Deutschkurs hat</a:t>
             </a:r>
           </a:p>
           <a:p>
             <a:r>
+              <a:rPr i="0"/>
               <a:t>dreiundfünfzig zu schwere Wörter und siebenundfünfzig Befunde. Darunter</a:t>
             </a:r>
           </a:p>
           <a:p>
             <a:r>
+              <a:rPr i="0"/>
               <a:t>Selbsteinschätzung, Fehleinschätzung und Umbuchung — Wörter, die man erst weit</a:t>
             </a:r>
           </a:p>
           <a:p>
             <a:r>
+              <a:rPr i="0"/>
               <a:t>oberhalb des Kursziels lernt.</a:t>
             </a:r>
           </a:p>
           <a:p/>
           <a:p>
             <a:r>
+              <a:rPr i="0"/>
               <a:t>Dabei sind beide Texte gleich einfach gebaut. Die Sätze sind in beiden Fällen</a:t>
             </a:r>
           </a:p>
           <a:p>
             <a:r>
+              <a:rPr i="0"/>
               <a:t>kurz, im Schnitt neun und sieben Wörter. Ein Lesbarkeitsindex, der</a:t>
             </a:r>
           </a:p>
           <a:p>
             <a:r>
+              <a:rPr i="0"/>
               <a:t>Satz- und Wortlängen zählt, findet bei keinem der beiden etwas. Er schweigt</a:t>
             </a:r>
           </a:p>
           <a:p>
             <a:r>
+              <a:rPr i="0"/>
               <a:t>zweimal, und einmal davon zu Unrecht.</a:t>
             </a:r>
           </a:p>
           <a:p/>
           <a:p>
             <a:r>
+              <a:rPr i="0"/>
               <a:t>### Der Kasten unten</a:t>
             </a:r>
           </a:p>
           <a:p/>
           <a:p>
             <a:r>
+              <a:rPr i="0"/>
               <a:t>Deshalb reicht kein Werkzeug, das nur den Text ansieht. Man muss wissen, für</a:t>
             </a:r>
           </a:p>
           <a:p>
             <a:r>
+              <a:rPr i="0"/>
               <a:t>wen der Text ist. Für Deutschkurse auf den Stufen A1 und A2 gibt es</a:t>
             </a:r>
           </a:p>
           <a:p>
             <a:r>
+              <a:rPr i="0"/>
               <a:t>einunddreißig verschiedene Texte, und alle einunddreißig enthalten Wörter über</a:t>
             </a:r>
           </a:p>
           <a:p>
             <a:r>
+              <a:rPr i="0"/>
               <a:t>dem Niveau ihrer Leser. Genau hier kann ein fachlich</a:t>
             </a:r>
           </a:p>
           <a:p>
             <a:r>
+              <a:rPr i="0"/>
               <a:t>eingestellter Prompt etwas, was ein Standardwerkzeug nicht kann.</a:t>
             </a:r>
           </a:p>
           <a:p/>
           <a:p>
             <a:r>
+              <a:rPr i="0"/>
               <a:t>### Nachtrag: warum 57 Prozent eine Untergrenze sind</a:t>
             </a:r>
           </a:p>
           <a:p/>
           <a:p>
             <a:r>
+              <a:rPr i="0"/>
               <a:t>Noch einmal zu den siebenundfünfzig Prozent: Das ist eine Untergrenze. Mein</a:t>
             </a:r>
           </a:p>
           <a:p>
             <a:r>
+              <a:rPr i="0"/>
               <a:t>Messskript prüft fünf der sechs Regeln; die erste, ob eine hervorgehobene</a:t>
             </a:r>
           </a:p>
           <a:p>
             <a:r>
+              <a:rPr i="0"/>
               <a:t>Zeile eine Überschrift sein sollte, kann kein Skript entscheiden. Ich messe</a:t>
             </a:r>
           </a:p>
           <a:p>
             <a:r>
+              <a:rPr i="0"/>
               <a:t>also bewusst zu niedrig statt zu hoch.</a:t>
             </a:r>
           </a:p>
@@ -2927,182 +3187,216 @@
           <a:lstStyle/>
           <a:p>
             <a:r>
+              <a:rPr i="0"/>
               <a:t>Kurz die Rechtslage.</a:t>
             </a:r>
           </a:p>
           <a:p/>
           <a:p>
             <a:r>
+              <a:rPr i="0"/>
               <a:t>### Was Barrierefreiheit heißt</a:t>
             </a:r>
           </a:p>
           <a:p/>
           <a:p>
             <a:r>
+              <a:rPr i="0"/>
               <a:t>Digitale Barrierefreiheit bedeutet, dass eine Website auch für Menschen mit</a:t>
             </a:r>
           </a:p>
           <a:p>
             <a:r>
+              <a:rPr i="0"/>
               <a:t>Behinderung nutzbar sein muss. Der Maßstab sind die WCAG, mit drei Stufen: A,</a:t>
             </a:r>
           </a:p>
           <a:p>
             <a:r>
+              <a:rPr i="0"/>
               <a:t>doppel A und dreifach A.</a:t>
             </a:r>
           </a:p>
           <a:p/>
           <a:p>
             <a:r>
+              <a:rPr i="0"/>
               <a:t>### Welches Recht gilt</a:t>
             </a:r>
           </a:p>
           <a:p/>
           <a:p>
             <a:r>
+              <a:rPr i="0"/>
               <a:t>Für die vhs gilt weder die EU-Richtlinie noch das</a:t>
             </a:r>
           </a:p>
           <a:p>
             <a:r>
+              <a:rPr i="0"/>
               <a:t>Barrierefreiheitsstärkungsgesetz unmittelbar. Sie ist eine kommunale</a:t>
             </a:r>
           </a:p>
           <a:p>
             <a:r>
+              <a:rPr i="0"/>
               <a:t>Einrichtung in Hessen, also greift Landesrecht: Paragraph vierzehn des</a:t>
             </a:r>
           </a:p>
           <a:p>
             <a:r>
+              <a:rPr i="0"/>
               <a:t>Hessischen Behindertengleichstellungsgesetzes und die hessische Verordnung.</a:t>
             </a:r>
           </a:p>
           <a:p>
             <a:r>
+              <a:rPr i="0"/>
               <a:t>Gefordert wird Stufe doppel A.</a:t>
             </a:r>
           </a:p>
           <a:p/>
           <a:p>
             <a:r>
+              <a:rPr i="0"/>
               <a:t>### Der Block in der Mitte: Pflicht und freiwillig</a:t>
             </a:r>
           </a:p>
           <a:p/>
           <a:p>
             <a:r>
+              <a:rPr i="0"/>
               <a:t>Der Block in der Mitte zeigt nur die Kriterien, die am Text der</a:t>
             </a:r>
           </a:p>
           <a:p>
             <a:r>
+              <a:rPr i="0"/>
               <a:t>Kursbeschreibung selbst hängen. Links steht, was daran verbindlich ist: dass</a:t>
             </a:r>
           </a:p>
           <a:p>
             <a:r>
+              <a:rPr i="0"/>
               <a:t>eine Zeile, die eine Gliederungsebene eröffnet, auch technisch als Überschrift</a:t>
             </a:r>
           </a:p>
           <a:p>
             <a:r>
+              <a:rPr i="0"/>
               <a:t>ausgezeichnet wird, und dass ein Linktext sagt, wohin er führt. Rechts steht,</a:t>
             </a:r>
           </a:p>
           <a:p>
             <a:r>
+              <a:rPr i="0"/>
               <a:t>was freiwillig ist: dass Abkürzungen erklärt werden und dass das Leseniveau</a:t>
             </a:r>
           </a:p>
           <a:p>
             <a:r>
+              <a:rPr i="0"/>
               <a:t>zur Zielgruppe passt. Beides ist dreifach A und damit nicht gefordert — und</a:t>
             </a:r>
           </a:p>
           <a:p>
             <a:r>
+              <a:rPr i="0"/>
               <a:t>beides gehört zum Kern dieses Projekts. Zwei meiner Regeln liegen dagegen im</a:t>
             </a:r>
           </a:p>
           <a:p>
             <a:r>
+              <a:rPr i="0"/>
               <a:t>Pflichtbereich; dazu gleich mehr.</a:t>
             </a:r>
           </a:p>
           <a:p/>
           <a:p>
             <a:r>
+              <a:rPr i="0"/>
               <a:t>### Warum ich nicht mit dem Bußgeld argumentiere</a:t>
             </a:r>
           </a:p>
           <a:p/>
           <a:p>
             <a:r>
+              <a:rPr i="0"/>
               <a:t>Ich könnte jetzt mit einem drohenden Bußgeld argumentieren. Das wäre bequem,</a:t>
             </a:r>
           </a:p>
           <a:p>
             <a:r>
+              <a:rPr i="0"/>
               <a:t>und es wäre falsch.</a:t>
             </a:r>
           </a:p>
           <a:p/>
           <a:p>
             <a:r>
+              <a:rPr i="0"/>
               <a:t>### Der Kasten unten</a:t>
             </a:r>
           </a:p>
           <a:p/>
           <a:p>
             <a:r>
+              <a:rPr i="0"/>
               <a:t>Freiwillig heißt aber nicht belanglos. Paragraph drei Absatz eins der</a:t>
             </a:r>
           </a:p>
           <a:p>
             <a:r>
+              <a:rPr i="0"/>
               <a:t>hessischen Verordnung verlangt eigenständig, dass Angebote verständlich sind.</a:t>
             </a:r>
           </a:p>
           <a:p>
             <a:r>
+              <a:rPr i="0"/>
               <a:t>Die Konformitätsstufe begründet eine Vermutung, keine Obergrenze der Pflicht.</a:t>
             </a:r>
           </a:p>
           <a:p>
             <a:r>
+              <a:rPr i="0"/>
               <a:t>Ich argumentiere also nicht gegen das Recht, sondern in einer Lücke, die es</a:t>
             </a:r>
           </a:p>
           <a:p>
             <a:r>
+              <a:rPr i="0"/>
               <a:t>selbst offenlässt.</a:t>
             </a:r>
           </a:p>
           <a:p/>
           <a:p>
             <a:r>
+              <a:rPr i="0"/>
               <a:t>Den eigentlichen Auftrag gibt sich das Unternehmen ohnehin selbst. Die</a:t>
             </a:r>
           </a:p>
           <a:p>
             <a:r>
+              <a:rPr i="0"/>
               <a:t>Betriebssatzung sagt, die Angebote stünden allen offen, ohne Rücksicht auf</a:t>
             </a:r>
           </a:p>
           <a:p>
             <a:r>
+              <a:rPr i="0"/>
               <a:t>Vorbildung. Für ein solches Unternehmen ist es nicht vertretbar, dass</a:t>
             </a:r>
           </a:p>
           <a:p>
             <a:r>
+              <a:rPr i="0"/>
               <a:t>ausgerechnet die Kriterien für Menschen mit geringer Vorbildung die</a:t>
             </a:r>
           </a:p>
           <a:p>
             <a:r>
+              <a:rPr i="0"/>
               <a:t>freiwilligen sind.</a:t>
             </a:r>
           </a:p>
@@ -3173,145 +3467,172 @@
           <a:lstStyle/>
           <a:p>
             <a:r>
+              <a:rPr i="0"/>
               <a:t>Zur Lösung. Sie beginnt mit einer Abgrenzung, und die halte ich für den</a:t>
             </a:r>
           </a:p>
           <a:p>
             <a:r>
+              <a:rPr i="0"/>
               <a:t>wichtigsten Teil meines Konzepts.</a:t>
             </a:r>
           </a:p>
           <a:p/>
           <a:p>
             <a:r>
+              <a:rPr i="0"/>
               <a:t>### Linke Spalte: Das Seitengerüst</a:t>
             </a:r>
           </a:p>
           <a:p/>
           <a:p>
             <a:r>
+              <a:rPr i="0"/>
               <a:t>Links steht, was am Gerüst der Seite hängt: Kontraste, Tastaturbedienung,</a:t>
             </a:r>
           </a:p>
           <a:p>
             <a:r>
+              <a:rPr i="0"/>
               <a:t>Seitentitel, Navigation. Das kann man prüfen, ohne einen einzigen Kurs zu</a:t>
             </a:r>
           </a:p>
           <a:p>
             <a:r>
+              <a:rPr i="0"/>
               <a:t>kennen. Es gilt für alle fünftausendachthundert Texte gleich, dafür gibt es</a:t>
             </a:r>
           </a:p>
           <a:p>
             <a:r>
+              <a:rPr i="0"/>
               <a:t>etablierte Programme wie axe-core, und zuständig ist die städtische IT.</a:t>
             </a:r>
           </a:p>
           <a:p/>
           <a:p>
             <a:r>
+              <a:rPr i="0"/>
               <a:t>### Rechte Spalte: Der einzelne Text</a:t>
             </a:r>
           </a:p>
           <a:p/>
           <a:p>
             <a:r>
+              <a:rPr i="0"/>
               <a:t>Rechts steht, was am einzelnen Text hängt. Versteht die Zielgruppe genau</a:t>
             </a:r>
           </a:p>
           <a:p>
             <a:r>
+              <a:rPr i="0"/>
               <a:t>dieses Kurses ihn? Diese Frage lässt sich nicht beantworten, ohne zu wissen,</a:t>
             </a:r>
           </a:p>
           <a:p>
             <a:r>
+              <a:rPr i="0"/>
               <a:t>wer liest. Zuständig sind die Programmbereiche.</a:t>
             </a:r>
           </a:p>
           <a:p/>
           <a:p>
             <a:r>
+              <a:rPr i="0"/>
               <a:t>### Der Kasten unten: wo die Trennlinie verläuft</a:t>
             </a:r>
           </a:p>
           <a:p/>
           <a:p>
             <a:r>
+              <a:rPr i="0"/>
               <a:t>Die Trennlinie verläuft also nicht zwischen Sprache und Technik. Zwei meiner</a:t>
             </a:r>
           </a:p>
           <a:p>
             <a:r>
+              <a:rPr i="0"/>
               <a:t>sechs Regeln sind selbst Pflichtkriterien der Barrierefreiheit. Ein Beispiel:</a:t>
             </a:r>
           </a:p>
           <a:p>
             <a:r>
+              <a:rPr i="0"/>
               <a:t>eine hervorgehobene Zeile, die als Überschrift gemeint ist, aber im Quelltext</a:t>
             </a:r>
           </a:p>
           <a:p>
             <a:r>
+              <a:rPr i="0"/>
               <a:t>keine ist. Das Prüfprogramm sieht dort nur Fließtext und meldet nichts. Ob</a:t>
             </a:r>
           </a:p>
           <a:p>
             <a:r>
+              <a:rPr i="0"/>
               <a:t>diese Zeile eine Überschrift sein sollte, kann man dem Text nicht ansehen,</a:t>
             </a:r>
           </a:p>
           <a:p>
             <a:r>
+              <a:rPr i="0"/>
               <a:t>sondern nur verstehen. Deshalb liegt ausgerechnet dieses Pflichtkriterium</a:t>
             </a:r>
           </a:p>
           <a:p>
             <a:r>
+              <a:rPr i="0"/>
               <a:t>rechts.</a:t>
             </a:r>
           </a:p>
           <a:p/>
           <a:p>
             <a:r>
+              <a:rPr i="0"/>
               <a:t>Diese Trennung hat sich beim Bauen dreimal selbst bestätigt. Drei Zusagen, die</a:t>
             </a:r>
           </a:p>
           <a:p>
             <a:r>
+              <a:rPr i="0"/>
               <a:t>ich zuerst in den Prompt geschrieben hatte, hat das Modell nicht zuverlässig</a:t>
             </a:r>
           </a:p>
           <a:p>
             <a:r>
+              <a:rPr i="0"/>
               <a:t>eingehalten. Alle drei stehen jetzt im Programmcode, weil sie feststehen und</a:t>
             </a:r>
           </a:p>
           <a:p>
             <a:r>
+              <a:rPr i="0"/>
               <a:t>keine Einschätzung verlangen.</a:t>
             </a:r>
           </a:p>
           <a:p/>
           <a:p>
             <a:r>
+              <a:rPr i="0"/>
               <a:t>### Technische Voraussetzungen</a:t>
             </a:r>
           </a:p>
           <a:p/>
           <a:p>
             <a:r>
+              <a:rPr i="0"/>
               <a:t>Technisch braucht es den KI-Zugang, den der Volkshochschul-Verband ohnehin</a:t>
             </a:r>
           </a:p>
           <a:p>
             <a:r>
+              <a:rPr i="0"/>
               <a:t>bereitstellt, einen dort angelegten Assistenten und die Wortliste als Datei.</a:t>
             </a:r>
           </a:p>
           <a:p>
             <a:r>
+              <a:rPr i="0"/>
               <a:t>Kein neuer Vertrag, kein Eingriff ins Kursverwaltungssystem.</a:t>
             </a:r>
           </a:p>
@@ -3382,133 +3703,158 @@
           <a:lstStyle/>
           <a:p>
             <a:r>
+              <a:rPr i="0"/>
               <a:t>Zum Kern der Aufgabe, dem System-Prompt. Er folgt der Sechs-Komponenten-</a:t>
             </a:r>
           </a:p>
           <a:p>
             <a:r>
+              <a:rPr i="0"/>
               <a:t>Struktur aus dem Aufgabenblatt.</a:t>
             </a:r>
           </a:p>
           <a:p/>
           <a:p>
             <a:r>
+              <a:rPr i="0"/>
               <a:t>### Rolle, Aufgabe, Format</a:t>
             </a:r>
           </a:p>
           <a:p/>
           <a:p>
             <a:r>
+              <a:rPr i="0"/>
               <a:t>Die ROLLE macht ihn zur Redaktionsassistenz, nicht zur Autorin. Die AUFGABE</a:t>
             </a:r>
           </a:p>
           <a:p>
             <a:r>
+              <a:rPr i="0"/>
               <a:t>schreibt die Reihenfolge vor: erst die Zielgruppe bestimmen, dann prüfen. Das</a:t>
             </a:r>
           </a:p>
           <a:p>
             <a:r>
+              <a:rPr i="0"/>
               <a:t>FORMAT erzwingt zu jedem Befund ein wörtliches Zitat, eine Begründung und</a:t>
             </a:r>
           </a:p>
           <a:p>
             <a:r>
+              <a:rPr i="0"/>
               <a:t>einen konkreten Vorschlag. Ohne Vorschlag kein Befund.</a:t>
             </a:r>
           </a:p>
           <a:p/>
           <a:p>
             <a:r>
+              <a:rPr i="0"/>
               <a:t>### Kontext: die Wortliste</a:t>
             </a:r>
           </a:p>
           <a:p/>
           <a:p>
             <a:r>
+              <a:rPr i="0"/>
               <a:t>Der KONTEXT enthält das Hauswissen: die acht Programmbereiche, die internen</a:t>
             </a:r>
           </a:p>
           <a:p>
             <a:r>
+              <a:rPr i="0"/>
               <a:t>Abkürzungen, sechs Prüfregeln und — der wichtigste Teil — achthundertzwanzig</a:t>
             </a:r>
           </a:p>
           <a:p>
             <a:r>
+              <a:rPr i="0"/>
               <a:t>Wörter des Prüfungswortschatzes für das Goethe-Zertifikat A1. Diese Liste</a:t>
             </a:r>
           </a:p>
           <a:p>
             <a:r>
+              <a:rPr i="0"/>
               <a:t>steht vollständig im Prompt, nicht als Verweis. Er schätzt das Sprachniveau</a:t>
             </a:r>
           </a:p>
           <a:p>
             <a:r>
+              <a:rPr i="0"/>
               <a:t>also nicht, sondern begründet es.</a:t>
             </a:r>
           </a:p>
           <a:p/>
           <a:p>
             <a:r>
+              <a:rPr i="0"/>
               <a:t>Das ist das Ergebnis der ersten Überarbeitung. In meiner ersten Fassung</a:t>
             </a:r>
           </a:p>
           <a:p>
             <a:r>
+              <a:rPr i="0"/>
               <a:t>behauptete der Prompt, gegen die Wortlisten zu prüfen, hatte sie aber gar</a:t>
             </a:r>
           </a:p>
           <a:p>
             <a:r>
+              <a:rPr i="0"/>
               <a:t>nicht. Er schätzte weiter frei und klang dabei nach Beleg — derselbe Fehler,</a:t>
             </a:r>
           </a:p>
           <a:p>
             <a:r>
+              <a:rPr i="0"/>
               <a:t>den ich anderen Werkzeugen vorwerfe. Der Grundstock dieser Listen stammt</a:t>
             </a:r>
           </a:p>
           <a:p>
             <a:r>
+              <a:rPr i="0"/>
               <a:t>übrigens laut Goethe-Institut aus einer Veröffentlichung der Prüfungszentrale</a:t>
             </a:r>
           </a:p>
           <a:p>
             <a:r>
+              <a:rPr i="0"/>
               <a:t>des Deutschen Volkshochschulverbands in Frankfurt.</a:t>
             </a:r>
           </a:p>
           <a:p/>
           <a:p>
             <a:r>
+              <a:rPr i="0"/>
               <a:t>### Der Kasten unten: die Zeile Grenzen</a:t>
             </a:r>
           </a:p>
           <a:p/>
           <a:p>
             <a:r>
+              <a:rPr i="0"/>
               <a:t>In der Zeile GRENZEN steht: bewertet Texte, niemals Personen. Dieser eine Satz</a:t>
             </a:r>
           </a:p>
           <a:p>
             <a:r>
+              <a:rPr i="0"/>
               <a:t>leistet zweierlei. Er hält das Projekt aus dem Hochrisikobereich der KI-</a:t>
             </a:r>
           </a:p>
           <a:p>
             <a:r>
+              <a:rPr i="0"/>
               <a:t>Verordnung heraus, denn hoch eingestuft wird dort nur, was Menschen bewertet —</a:t>
             </a:r>
           </a:p>
           <a:p>
             <a:r>
+              <a:rPr i="0"/>
               <a:t>dieses System bewertet Texte. Und er ist die Antwort auf die Frage des</a:t>
             </a:r>
           </a:p>
           <a:p>
             <a:r>
+              <a:rPr i="0"/>
               <a:t>Personalrats, ob hier Leistung kontrolliert wird.</a:t>
             </a:r>
           </a:p>
@@ -3579,214 +3925,254 @@
           <a:lstStyle/>
           <a:p>
             <a:r>
+              <a:rPr i="0"/>
               <a:t>Bleibt die Frage, wie das in den Alltag kommt. Dafür gibt es zwei Wege, und</a:t>
             </a:r>
           </a:p>
           <a:p>
             <a:r>
+              <a:rPr i="0"/>
               <a:t>beide stehen vom ersten Tag an offen.</a:t>
             </a:r>
           </a:p>
           <a:p/>
           <a:p>
             <a:r>
+              <a:rPr i="0"/>
               <a:t>### Weg 1: Als KI-Assistent bei fobizz</a:t>
             </a:r>
           </a:p>
           <a:p/>
           <a:p>
             <a:r>
+              <a:rPr i="0"/>
               <a:t>Der erste braucht keine eigene Technik. Der Deutsche Volkshochschul-Verband</a:t>
             </a:r>
           </a:p>
           <a:p>
             <a:r>
+              <a:rPr i="0"/>
               <a:t>hat im Mai zweitausendfünfundzwanzig eine Rahmenvereinbarung mit einem</a:t>
             </a:r>
           </a:p>
           <a:p>
             <a:r>
+              <a:rPr i="0"/>
               <a:t>Anbieter namens fobizz geschlossen. Mitarbeitende aller Volkshochschulen in</a:t>
             </a:r>
           </a:p>
           <a:p>
             <a:r>
+              <a:rPr i="0"/>
               <a:t>Deutschland haben darüber datenschutzkonformen Zugang zu KI-Anwendungen, und</a:t>
             </a:r>
           </a:p>
           <a:p>
             <a:r>
+              <a:rPr i="0"/>
               <a:t>man kann dort eigene Assistenten mit eigenen Anweisungen anlegen. Genau das</a:t>
             </a:r>
           </a:p>
           <a:p>
             <a:r>
+              <a:rPr i="0"/>
               <a:t>ist mein Prompt. Zustimmung außerhalb des Pilotbereichs braucht es dafür</a:t>
             </a:r>
           </a:p>
           <a:p>
             <a:r>
+              <a:rPr i="0"/>
               <a:t>nicht, weil der Rahmenvertrag schon da ist. Zu klären ist allerdings, ob die</a:t>
             </a:r>
           </a:p>
           <a:p>
             <a:r>
+              <a:rPr i="0"/>
               <a:t>vhs Frankfurt die Lizenz auch tatsächlich gebucht hat — der Rahmenvertrag</a:t>
             </a:r>
           </a:p>
           <a:p>
             <a:r>
+              <a:rPr i="0"/>
               <a:t>schafft die Möglichkeit, er ist nicht die Buchung.</a:t>
             </a:r>
           </a:p>
           <a:p/>
           <a:p>
             <a:r>
+              <a:rPr i="0"/>
               <a:t>### Die Einschränkung zu Weg 1</a:t>
             </a:r>
           </a:p>
           <a:p/>
           <a:p>
             <a:r>
+              <a:rPr i="0"/>
               <a:t>Eine Einschränkung gehört dazu, denn diesen Weg habe ich nicht ausprobiert:</a:t>
             </a:r>
           </a:p>
           <a:p>
             <a:r>
+              <a:rPr i="0"/>
               <a:t>Mein Prüfwerkzeug bearbeitet jede Antwort nach. Es rechnet die Einstufung</a:t>
             </a:r>
           </a:p>
           <a:p>
             <a:r>
+              <a:rPr i="0"/>
               <a:t>anhand einer Tabelle nach und entfernt Personennamen. Beides stand</a:t>
             </a:r>
           </a:p>
           <a:p>
             <a:r>
+              <a:rPr i="0"/>
               <a:t>ursprünglich im Prompt, und beides hielt das Modell nicht zuverlässig ein —</a:t>
             </a:r>
           </a:p>
           <a:p>
             <a:r>
+              <a:rPr i="0"/>
               <a:t>deshalb steht es heute im Programmcode. In einem fremden Assistenten gibt es</a:t>
             </a:r>
           </a:p>
           <a:p>
             <a:r>
+              <a:rPr i="0"/>
               <a:t>diesen Code nicht. Was das praktisch bedeutet, muss der Pilot zeigen.</a:t>
             </a:r>
           </a:p>
           <a:p/>
           <a:p>
             <a:r>
+              <a:rPr i="0"/>
               <a:t>### Weg 2: Als eigenes Prüfwerkzeug</a:t>
             </a:r>
           </a:p>
           <a:p/>
           <a:p>
             <a:r>
+              <a:rPr i="0"/>
               <a:t>Der zweite Weg ist das Prüfwerkzeug, das ich gebaut habe. Dort fügt man den</a:t>
             </a:r>
           </a:p>
           <a:p>
             <a:r>
+              <a:rPr i="0"/>
               <a:t>Entwurf ein — oder gibt bei einem vorhandenen Kurs nur die Nummer ein, dann</a:t>
             </a:r>
           </a:p>
           <a:p>
             <a:r>
+              <a:rPr i="0"/>
               <a:t>holt es den Text selbst. Die Schnittstelle des Kursportals ist öffentlich, das</a:t>
             </a:r>
           </a:p>
           <a:p>
             <a:r>
+              <a:rPr i="0"/>
               <a:t>kostet keinen Zugang; es braucht nur einen eigenen Server.</a:t>
             </a:r>
           </a:p>
           <a:p/>
           <a:p>
             <a:r>
+              <a:rPr i="0"/>
               <a:t>### Rechts im Bild: ein Befund</a:t>
             </a:r>
           </a:p>
           <a:p/>
           <a:p>
             <a:r>
+              <a:rPr i="0"/>
               <a:t>Rechts steht, was dabei herauskommt: ein Befund aus einem echten Durchlauf,</a:t>
             </a:r>
           </a:p>
           <a:p>
             <a:r>
+              <a:rPr i="0"/>
               <a:t>dem Deutschkurs auf A2. Jeder Befund hat dieselben vier Teile: die Einstufung,</a:t>
             </a:r>
           </a:p>
           <a:p>
             <a:r>
+              <a:rPr i="0"/>
               <a:t>die Regel, die wörtliche Stelle aus dem Text und einen konkreten Vorschlag.</a:t>
             </a:r>
           </a:p>
           <a:p>
             <a:r>
+              <a:rPr i="0"/>
               <a:t>Dieser hier ist Pflicht, der Link heißt schlicht „hier“. Wer sich die Seite</a:t>
             </a:r>
           </a:p>
           <a:p>
             <a:r>
+              <a:rPr i="0"/>
               <a:t>vorlesen lässt und von Link zu Link springt, hört nur „hier“. Der Vorschlag</a:t>
             </a:r>
           </a:p>
           <a:p>
             <a:r>
+              <a:rPr i="0"/>
               <a:t>daneben ist kein Kommentar, sondern fertiger Text zum Übernehmen.</a:t>
             </a:r>
           </a:p>
           <a:p/>
           <a:p>
             <a:r>
+              <a:rPr i="0"/>
               <a:t>### Hier die Vorführung</a:t>
             </a:r>
           </a:p>
           <a:p/>
           <a:p>
             <a:r>
+              <a:rPr i="0"/>
               <a:t>Ich zeige euch das kurz live, an genau diesem Kurs.</a:t>
             </a:r>
           </a:p>
           <a:p/>
           <a:p>
             <a:r>
+              <a:rPr i="0"/>
               <a:t>Das ist ein Prototyp, den ich für diese Arbeit gebaut habe. Er belegt, dass</a:t>
             </a:r>
           </a:p>
           <a:p>
             <a:r>
+              <a:rPr i="0"/>
               <a:t>der Weg funktioniert, er ist keine fertige Anwendung.</a:t>
             </a:r>
           </a:p>
           <a:p/>
           <a:p>
             <a:r>
+              <a:rPr i="0"/>
               <a:t>### Der Kasten unten</a:t>
             </a:r>
           </a:p>
           <a:p/>
           <a:p>
             <a:r>
+              <a:rPr i="0"/>
               <a:t>Die Nachbemerkung unten ist kein Teil des Pilotprojekts. Man könnte die</a:t>
             </a:r>
           </a:p>
           <a:p>
             <a:r>
+              <a:rPr i="0"/>
               <a:t>Prüfung ins Redaktionssystem selbst einbauen, dort, wo der Text entsteht. Nur</a:t>
             </a:r>
           </a:p>
           <a:p>
             <a:r>
+              <a:rPr i="0"/>
               <a:t>wird das Portal von einem externen Dienstleister betreut, also hieße das:</a:t>
             </a:r>
           </a:p>
           <a:p>
             <a:r>
+              <a:rPr i="0"/>
               <a:t>Auftrag, Budget, Vorlauf. Man kauft nichts, bevor man weiß, ob es wirkt.</a:t>
             </a:r>
           </a:p>

--- a/ausgabe/Praesentation-KLARTEXT.pptx
+++ b/ausgabe/Praesentation-KLARTEXT.pptx
@@ -550,7 +550,7 @@
           <a:p>
             <a:r>
               <a:rPr i="0"/>
-              <a:t>- Aber nicht der technische Teil wie. Kontraste oder Tastaturbedienung, sondern:</a:t>
+              <a:t>- Aber nicht der technische Teil wie Kontraste oder Tastaturbedienung, sondern:</a:t>
             </a:r>
           </a:p>
           <a:p>
@@ -2048,7 +2048,7 @@
           <a:p>
             <a:r>
               <a:rPr i="0"/>
-              <a:t>- Von allen Texten, die heute im Portal stehen, hat mehr als jeder zweite Text einen Befund </a:t>
+              <a:t>- Von allen Texten, die heute im Portal stehen, hat mehr als jeder zweite Text einen Befund. </a:t>
             </a:r>
             <a:r>
               <a:rPr i="1"/>
@@ -2196,42 +2196,10 @@
               <a:t>### Ziel</a:t>
             </a:r>
           </a:p>
-          <a:p/>
-          <a:p>
-            <a:r>
-              <a:rPr i="0"/>
-              <a:t>Das Ziel oben ist von den Lesenden her formuliert. Wer einen Kurs sucht, soll</a:t>
-            </a:r>
-          </a:p>
-          <a:p>
-            <a:r>
-              <a:rPr i="0"/>
-              <a:t>die Beschreibung verstehen, ob er sie liest oder vorgelesen bekommt. Die</a:t>
-            </a:r>
-          </a:p>
-          <a:p>
-            <a:r>
-              <a:rPr i="0"/>
-              <a:t>Betriebssatzung sagt, die Angebote stehen allen offen — dann muss das auch für</a:t>
-            </a:r>
-          </a:p>
-          <a:p>
-            <a:r>
-              <a:rPr i="0"/>
-              <a:t>die Texte gelten, mit denen wir sie ankündigen.</a:t>
-            </a:r>
-          </a:p>
-          <a:p/>
-          <a:p>
-            <a:r>
-              <a:rPr i="0"/>
-              <a:t>Geprüft wird zweierlei: ob die Zielgruppe den Text versteht, und ob ein</a:t>
-            </a:r>
-          </a:p>
-          <a:p>
-            <a:r>
-              <a:rPr i="0"/>
-              <a:t>Vorleseprogramm etwas damit anfangen kann.</a:t>
+          <a:p>
+            <a:r>
+              <a:rPr i="0"/>
+              <a:t>- *vorlesen*</a:t>
             </a:r>
           </a:p>
           <a:p/>
@@ -2241,23 +2209,10 @@
               <a:t>### Lösung</a:t>
             </a:r>
           </a:p>
-          <a:p/>
-          <a:p>
-            <a:r>
-              <a:rPr i="0"/>
-              <a:t>Dafür genügt ein System-Prompt in dem KI-Zugang, den der Volkshochschul-</a:t>
-            </a:r>
-          </a:p>
-          <a:p>
-            <a:r>
-              <a:rPr i="0"/>
-              <a:t>Verband ohnehin für alle Volkshochschulen bereitstellt. Es muss nichts</a:t>
-            </a:r>
-          </a:p>
-          <a:p>
-            <a:r>
-              <a:rPr i="0"/>
-              <a:t>beschafft werden.</a:t>
+          <a:p>
+            <a:r>
+              <a:rPr i="0"/>
+              <a:t>- *vorlesen*</a:t>
             </a:r>
           </a:p>
           <a:p/>
@@ -2267,61 +2222,10 @@
               <a:t>### Abgrenzung</a:t>
             </a:r>
           </a:p>
-          <a:p/>
-          <a:p>
-            <a:r>
-              <a:rPr i="0"/>
-              <a:t>Die Abgrenzung darunter zieht sich durch das ganze Konzept: Für die technische</a:t>
-            </a:r>
-          </a:p>
-          <a:p>
-            <a:r>
-              <a:rPr i="0"/>
-              <a:t>Barrierefreiheit der Website bleibt ein normales Prüfwerkzeug zuständig,</a:t>
-            </a:r>
-          </a:p>
-          <a:p>
-            <a:r>
-              <a:rPr i="0"/>
-              <a:t>zusammen mit der städtischen IT. Die KI sieht nur den Kurstext.</a:t>
-            </a:r>
-          </a:p>
-          <a:p/>
-          <a:p>
-            <a:r>
-              <a:rPr i="0"/>
-              <a:t>### Ergebnis</a:t>
-            </a:r>
-          </a:p>
-          <a:p/>
-          <a:p>
-            <a:r>
-              <a:rPr i="0"/>
-              <a:t>Der vierte Punkt ist das erwartete Ergebnis. Die Befundquote soll von</a:t>
-            </a:r>
-          </a:p>
-          <a:p>
-            <a:r>
-              <a:rPr i="0"/>
-              <a:t>siebenundfünfzig unter fünfundzwanzig Prozent fallen, und der laufende Aufwand</a:t>
-            </a:r>
-          </a:p>
-          <a:p>
-            <a:r>
-              <a:rPr i="0"/>
-              <a:t>liegt bei neunundzwanzig Stunden im Jahr. Das ist gerechnet, nicht geschätzt:</a:t>
-            </a:r>
-          </a:p>
-          <a:p>
-            <a:r>
-              <a:rPr i="0"/>
-              <a:t>Geprüft wird nur, was neu entsteht, also rund sechshundert Texte im Jahr und</a:t>
-            </a:r>
-          </a:p>
-          <a:p>
-            <a:r>
-              <a:rPr i="0"/>
-              <a:t>nicht fünftausendachthundert.</a:t>
+          <a:p>
+            <a:r>
+              <a:rPr i="0"/>
+              <a:t>- Für die technische Barrierefreiheit der Website bleiben normale Prüfwerkzeug zuständig, zusammen mit der städtischen IT. Die KI sieht nur den Kurstext.</a:t>
             </a:r>
           </a:p>
           <a:p/>
@@ -2331,17 +2235,10 @@
               <a:t>### Der Kasten unten</a:t>
             </a:r>
           </a:p>
-          <a:p/>
-          <a:p>
-            <a:r>
-              <a:rPr i="0"/>
-              <a:t>Unten steht der erste Schritt: ein Pilot in einem Programmbereich, drei</a:t>
-            </a:r>
-          </a:p>
-          <a:p>
-            <a:r>
-              <a:rPr i="0"/>
-              <a:t>Monate. Der Prompt schlägt vor, der Mensch entscheidet.</a:t>
+          <a:p>
+            <a:r>
+              <a:rPr i="0"/>
+              <a:t>- *vorlesen*</a:t>
             </a:r>
           </a:p>
         </p:txBody>
@@ -2412,76 +2309,50 @@
           <a:p>
             <a:r>
               <a:rPr i="0"/>
-              <a:t>Das Unternehmen und der Prozess.</a:t>
-            </a:r>
-          </a:p>
-          <a:p/>
-          <a:p>
-            <a:r>
-              <a:rPr i="0"/>
-              <a:t>### Linke Spalte: Das Unternehmen</a:t>
-            </a:r>
-          </a:p>
-          <a:p/>
-          <a:p>
-            <a:r>
-              <a:rPr i="0"/>
-              <a:t>Die Volkshochschule Frankfurt ist kein Amt, sondern ein Eigenbetrieb der</a:t>
-            </a:r>
-          </a:p>
-          <a:p>
-            <a:r>
-              <a:rPr i="0"/>
-              <a:t>Stadt. Geleitet wird sie von einem Direktor, der laut Impressum auch</a:t>
-            </a:r>
-          </a:p>
-          <a:p>
-            <a:r>
-              <a:rPr i="0"/>
-              <a:t>persönlich für die redaktionellen Inhalte der Website verantwortlich ist.</a:t>
-            </a:r>
-          </a:p>
-          <a:p>
-            <a:r>
-              <a:rPr i="0"/>
-              <a:t>Darüber steht eine Betriebskommission mit sechzehn Sitzen, zwei davon für den</a:t>
-            </a:r>
-          </a:p>
-          <a:p>
-            <a:r>
-              <a:rPr i="0"/>
-              <a:t>Personalrat. Diese zwei Sitze spielen später noch eine Rolle.</a:t>
-            </a:r>
-          </a:p>
-          <a:p/>
-          <a:p>
-            <a:r>
-              <a:rPr i="0"/>
-              <a:t>Am Ende der ersten Zeile steht die Qualitätstestierung. Das Unternehmen ist</a:t>
-            </a:r>
-          </a:p>
-          <a:p>
-            <a:r>
-              <a:rPr i="0"/>
-              <a:t>seit zweitausendfünf nach L Q W testiert, Lernerorientierte</a:t>
-            </a:r>
-          </a:p>
-          <a:p>
-            <a:r>
-              <a:rPr i="0"/>
-              <a:t>Qualitätstestierung in der Weiterbildung, ein Verfahren mit regelmäßiger</a:t>
-            </a:r>
-          </a:p>
-          <a:p>
-            <a:r>
-              <a:rPr i="0"/>
-              <a:t>externer Prüfung, inzwischen in der sechsten Runde. Hier fehlt also keine</a:t>
-            </a:r>
-          </a:p>
-          <a:p>
-            <a:r>
-              <a:rPr i="0"/>
-              <a:t>Qualitätskultur. Es fehlt genau ein Schritt darin.</a:t>
+              <a:t>Zunächst zum Unternehmen und zum aktuellen Prozess.</a:t>
+            </a:r>
+          </a:p>
+          <a:p/>
+          <a:p>
+            <a:r>
+              <a:rPr i="0"/>
+              <a:t>### Das Unternehmen</a:t>
+            </a:r>
+          </a:p>
+          <a:p>
+            <a:r>
+              <a:rPr i="0"/>
+              <a:t>- kein Amt, sondern ein Eigenbetrieb der Stadt.</a:t>
+            </a:r>
+          </a:p>
+          <a:p>
+            <a:r>
+              <a:rPr i="0"/>
+              <a:t>- seit 2005 extern qualitätsgeprüft nach </a:t>
+            </a:r>
+            <a:r>
+              <a:rPr b="1" i="0"/>
+              <a:t>LQW</a:t>
+            </a:r>
+            <a:r>
+              <a:rPr i="0"/>
+              <a:t>, </a:t>
+            </a:r>
+            <a:r>
+              <a:rPr b="1" i="0"/>
+              <a:t>Lernerorientierte Qualitätstestierung in der Weiterbildung</a:t>
+            </a:r>
+          </a:p>
+          <a:p>
+            <a:r>
+              <a:rPr i="0"/>
+              <a:t>- Geleitet wird sie von einem Direktor, der laut Impressum auch persönlich für die redaktionellen Inhalte der Website verantwortlich ist.</a:t>
+            </a:r>
+          </a:p>
+          <a:p>
+            <a:r>
+              <a:rPr i="0"/>
+              <a:t>- Darüber steht eine Betriebskommission mit sechzehn Sitzen, zwei davon für den Personalrat.</a:t>
             </a:r>
           </a:p>
           <a:p/>
@@ -2491,7 +2362,6 @@
               <a:t>### Der Satz oben aus der Betriebssatzung</a:t>
             </a:r>
           </a:p>
-          <a:p/>
           <a:p>
             <a:r>
               <a:rPr i="0"/>
@@ -2501,121 +2371,20 @@
           <a:p>
             <a:r>
               <a:rPr i="0"/>
-              <a:t>grundsätzlich allen offen, ohne Rücksicht auf Vorbildung. Daran messe ich das</a:t>
-            </a:r>
-          </a:p>
-          <a:p>
-            <a:r>
-              <a:rPr i="0"/>
-              <a:t>Unternehmen — nicht am Gesetz, sondern an seinem eigenen Anspruch.</a:t>
-            </a:r>
-          </a:p>
-          <a:p/>
-          <a:p>
-            <a:r>
-              <a:rPr i="0"/>
-              <a:t>### Rechte Spalte: So entsteht ein Kurstext</a:t>
-            </a:r>
-          </a:p>
-          <a:p/>
-          <a:p>
-            <a:r>
-              <a:rPr i="0"/>
-              <a:t>Rechts steht, wie ein Kurstext entsteht. Geplant wird halbjährlich, von den</a:t>
-            </a:r>
-          </a:p>
-          <a:p>
-            <a:r>
-              <a:rPr i="0"/>
-              <a:t>Teams der vier Fachbereiche. Der Text wird geschrieben und ins</a:t>
-            </a:r>
-          </a:p>
-          <a:p>
-            <a:r>
-              <a:rPr i="0"/>
-              <a:t>Kursverwaltungssystem eingepflegt, und dann erscheint er. Über der Spalte</a:t>
-            </a:r>
-          </a:p>
-          <a:p>
-            <a:r>
-              <a:rPr i="0"/>
-              <a:t>steht das Wort angenommen, denn wer bei der vhs Frankfurt die Texte schreibt,</a:t>
-            </a:r>
-          </a:p>
-          <a:p>
-            <a:r>
-              <a:rPr i="0"/>
-              <a:t>ist nicht öffentlich dokumentiert.</a:t>
-            </a:r>
-          </a:p>
-          <a:p/>
-          <a:p>
-            <a:r>
-              <a:rPr i="0"/>
-              <a:t>### Der Kasten unten</a:t>
-            </a:r>
-          </a:p>
-          <a:p/>
-          <a:p>
-            <a:r>
-              <a:rPr i="0"/>
-              <a:t>Zwischen dem Einpflegen und dem Erscheinen ist kein Prüfschritt auf</a:t>
-            </a:r>
-          </a:p>
-          <a:p>
-            <a:r>
-              <a:rPr i="0"/>
-              <a:t>Verständlichkeit vorgesehen. Das ist kein Vorwurf, denn dieser Arbeitsschritt</a:t>
-            </a:r>
-          </a:p>
-          <a:p>
-            <a:r>
-              <a:rPr i="0"/>
-              <a:t>ist nirgends vorgesehen. Genau deshalb ist es ein Fall für Prozessgestaltung</a:t>
-            </a:r>
-          </a:p>
-          <a:p>
-            <a:r>
-              <a:rPr i="0"/>
-              <a:t>und nicht für einen Appell, sich mehr Mühe zu geben.</a:t>
-            </a:r>
-          </a:p>
-          <a:p/>
-          <a:p>
-            <a:r>
-              <a:rPr i="0"/>
-              <a:t>Für das gedruckte Programmheft gibt es sehr wohl eine Redaktion, das Impressum</a:t>
-            </a:r>
-          </a:p>
-          <a:p>
-            <a:r>
-              <a:rPr i="0"/>
-              <a:t>nennt sie mit Namen. Für das Portal gibt es sie nicht, und dort stehen die</a:t>
-            </a:r>
-          </a:p>
-          <a:p>
-            <a:r>
-              <a:rPr i="0"/>
-              <a:t>Texte, um die es hier geht.</a:t>
-            </a:r>
-          </a:p>
-          <a:p/>
-          <a:p>
-            <a:r>
-              <a:rPr i="0"/>
-              <a:t>Ich habe nachgezählt: Vierundfünfzig Prozent aller Kurse teilen sich ihren</a:t>
-            </a:r>
-          </a:p>
-          <a:p>
-            <a:r>
-              <a:rPr i="0"/>
-              <a:t>Text mit mindestens einem anderen. Ein schlecht formulierter Text ist hier nie</a:t>
-            </a:r>
-          </a:p>
-          <a:p>
-            <a:r>
-              <a:rPr i="0"/>
-              <a:t>ein Einzelfall.</a:t>
+              <a:t>grundsätzlich allen offen, ohne Rücksicht auf Vorbildung.</a:t>
+            </a:r>
+          </a:p>
+          <a:p/>
+          <a:p>
+            <a:r>
+              <a:rPr i="0"/>
+              <a:t>### So entsteht ein Kurstext</a:t>
+            </a:r>
+          </a:p>
+          <a:p>
+            <a:r>
+              <a:rPr i="0"/>
+              <a:t>- *(vorlesen)*</a:t>
             </a:r>
           </a:p>
         </p:txBody>
@@ -2686,7 +2455,7 @@
           <a:p>
             <a:r>
               <a:rPr i="0"/>
-              <a:t>Zur Potenzialermittlung. Hier habe ich nicht geschätzt, sondern gemessen.</a:t>
+              <a:t>Zur Potenzialermittlung. Was zählt als Befund und für wen?</a:t>
             </a:r>
           </a:p>
           <a:p/>
@@ -2696,23 +2465,10 @@
               <a:t>### Die Messung</a:t>
             </a:r>
           </a:p>
-          <a:p/>
-          <a:p>
-            <a:r>
-              <a:rPr i="0"/>
-              <a:t>Das Kursportal hat eine offene Schnittstelle. Darüber habe ich alle</a:t>
-            </a:r>
-          </a:p>
-          <a:p>
-            <a:r>
-              <a:rPr i="0"/>
-              <a:t>Kurstexte gezogen, gut dreitausend, und mit einem eigenen Skript ausgewertet.</a:t>
-            </a:r>
-          </a:p>
-          <a:p>
-            <a:r>
-              <a:rPr i="0"/>
-              <a:t>Siebenundfünfzig Prozent haben mindestens einen Befund.</a:t>
+          <a:p>
+            <a:r>
+              <a:rPr i="0"/>
+              <a:t>- Das Kursportal hat eine offene Schnittstelle. Darüber habe ich alle Kurstexte gezogen, gut dreitausend, und mit einem eigenen Skript ausgewertet. Siebenundfünfzig Prozent haben mindestens einen Befund.</a:t>
             </a:r>
           </a:p>
           <a:p/>
@@ -2745,14 +2501,140 @@
           <a:p>
             <a:r>
               <a:rPr i="0"/>
-              <a:t>### Links: die zwei Pflichtregeln</a:t>
-            </a:r>
-          </a:p>
-          <a:p/>
-          <a:p>
-            <a:r>
-              <a:rPr i="0"/>
-              <a:t>Links stehen die beiden Pflichtregeln. Sie stehen auf Stufe A der</a:t>
+              <a:t>### Links: die vier Empfehlungen</a:t>
+            </a:r>
+          </a:p>
+          <a:p/>
+          <a:p>
+            <a:r>
+              <a:rPr i="0"/>
+              <a:t>Links stehen die vier Empfehlungen. Verbindlich sind sie nicht, aber sie sind</a:t>
+            </a:r>
+          </a:p>
+          <a:p>
+            <a:r>
+              <a:rPr i="0"/>
+              <a:t>der eigentliche Ertrag dieses Projekts — deshalb stehen sie vorn. Zwei davon,</a:t>
+            </a:r>
+          </a:p>
+          <a:p>
+            <a:r>
+              <a:rPr i="0"/>
+              <a:t>zu schwere Wörter und nicht aufgelöste Abkürzungen, stehen auf Stufe AAA — der</a:t>
+            </a:r>
+          </a:p>
+          <a:p>
+            <a:r>
+              <a:rPr i="0"/>
+              <a:t>höchsten, die niemand einhalten muss. Die beiden anderen habe ich selbst</a:t>
+            </a:r>
+          </a:p>
+          <a:p>
+            <a:r>
+              <a:rPr i="0"/>
+              <a:t>gesetzt.</a:t>
+            </a:r>
+          </a:p>
+          <a:p/>
+          <a:p>
+            <a:r>
+              <a:rPr i="0"/>
+              <a:t>Niveau heißt: Ein Wort liegt über dem Sprachniveau derer, die den Text lesen</a:t>
+            </a:r>
+          </a:p>
+          <a:p>
+            <a:r>
+              <a:rPr i="0"/>
+              <a:t>sollen. Das ist die Regel, die sich ohne Kenntnis der Zielgruppe überhaupt</a:t>
+            </a:r>
+          </a:p>
+          <a:p>
+            <a:r>
+              <a:rPr i="0"/>
+              <a:t>nicht anwenden lässt.</a:t>
+            </a:r>
+          </a:p>
+          <a:p/>
+          <a:p>
+            <a:r>
+              <a:rPr i="0"/>
+              <a:t>Amtsdeutsch heißt: Im Text steht ein Verwaltungswort, obwohl ein alltägliches</a:t>
+            </a:r>
+          </a:p>
+          <a:p>
+            <a:r>
+              <a:rPr i="0"/>
+              <a:t>genügen würde. Umbuchung statt Wechsel, gegebenenfalls statt wenn nötig. Das</a:t>
+            </a:r>
+          </a:p>
+          <a:p>
+            <a:r>
+              <a:rPr i="0"/>
+              <a:t>trifft nicht nur Sprachanfänger, sondern auch geübte Leserinnen und Leser.</a:t>
+            </a:r>
+          </a:p>
+          <a:p/>
+          <a:p>
+            <a:r>
+              <a:rPr i="0"/>
+              <a:t>Satz heißt: über fünfundzwanzig Wörter, bei Deutschkursen über fünfzehn. Diese</a:t>
+            </a:r>
+          </a:p>
+          <a:p>
+            <a:r>
+              <a:rPr i="0"/>
+              <a:t>beiden Zahlen habe ich gesetzt, nicht gemessen; sie orientieren sich an den</a:t>
+            </a:r>
+          </a:p>
+          <a:p>
+            <a:r>
+              <a:rPr i="0"/>
+              <a:t>Empfehlungen für einfache Sprache. Zur Satzlänge sagen die</a:t>
+            </a:r>
+          </a:p>
+          <a:p>
+            <a:r>
+              <a:rPr i="0"/>
+              <a:t>Barrierefreiheitsrichtlinien nämlich nichts, und ob es die richtigen Zahlen</a:t>
+            </a:r>
+          </a:p>
+          <a:p>
+            <a:r>
+              <a:rPr i="0"/>
+              <a:t>sind, soll der Pilot beantworten.</a:t>
+            </a:r>
+          </a:p>
+          <a:p/>
+          <a:p>
+            <a:r>
+              <a:rPr i="0"/>
+              <a:t>Abkürzung heißt: Ein Kürzel steht im Text, ohne beim ersten Mal aufgelöst zu</a:t>
+            </a:r>
+          </a:p>
+          <a:p>
+            <a:r>
+              <a:rPr i="0"/>
+              <a:t>werden. Davon hat die vhs einige eigene, D-T-Z zum Beispiel, der Deutsch-Test</a:t>
+            </a:r>
+          </a:p>
+          <a:p>
+            <a:r>
+              <a:rPr i="0"/>
+              <a:t>für Zuwanderer.</a:t>
+            </a:r>
+          </a:p>
+          <a:p/>
+          <a:p>
+            <a:r>
+              <a:rPr i="0"/>
+              <a:t>### Rechts: die zwei Pflichtregeln</a:t>
+            </a:r>
+          </a:p>
+          <a:p/>
+          <a:p>
+            <a:r>
+              <a:rPr i="0"/>
+              <a:t>Rechts stehen die beiden Pflichtregeln. Sie stehen auf Stufe A der</a:t>
             </a:r>
           </a:p>
           <a:p>
@@ -2827,126 +2709,6 @@
             <a:r>
               <a:rPr i="0"/>
               <a:t>Liste aus fünfmal „hier“ hilft niemandem weiter.</a:t>
-            </a:r>
-          </a:p>
-          <a:p/>
-          <a:p>
-            <a:r>
-              <a:rPr i="0"/>
-              <a:t>### Rechts: die vier Empfehlungen</a:t>
-            </a:r>
-          </a:p>
-          <a:p/>
-          <a:p>
-            <a:r>
-              <a:rPr i="0"/>
-              <a:t>Rechts stehen die vier Empfehlungen. Verbindlich sind sie nicht, aber sie sind</a:t>
-            </a:r>
-          </a:p>
-          <a:p>
-            <a:r>
-              <a:rPr i="0"/>
-              <a:t>der eigentliche Ertrag dieses Projekts. Zwei davon, zu schwere Wörter und</a:t>
-            </a:r>
-          </a:p>
-          <a:p>
-            <a:r>
-              <a:rPr i="0"/>
-              <a:t>nicht aufgelöste Abkürzungen, stehen auf Stufe AAA — der höchsten, die niemand</a:t>
-            </a:r>
-          </a:p>
-          <a:p>
-            <a:r>
-              <a:rPr i="0"/>
-              <a:t>einhalten muss. Die beiden anderen habe ich selbst gesetzt.</a:t>
-            </a:r>
-          </a:p>
-          <a:p/>
-          <a:p>
-            <a:r>
-              <a:rPr i="0"/>
-              <a:t>Niveau heißt: Ein Wort liegt über dem Sprachniveau derer, die den Text lesen</a:t>
-            </a:r>
-          </a:p>
-          <a:p>
-            <a:r>
-              <a:rPr i="0"/>
-              <a:t>sollen. Das ist die Regel, die sich ohne Kenntnis der Zielgruppe überhaupt</a:t>
-            </a:r>
-          </a:p>
-          <a:p>
-            <a:r>
-              <a:rPr i="0"/>
-              <a:t>nicht anwenden lässt.</a:t>
-            </a:r>
-          </a:p>
-          <a:p/>
-          <a:p>
-            <a:r>
-              <a:rPr i="0"/>
-              <a:t>Amtsdeutsch heißt: Im Text steht ein Verwaltungswort, obwohl ein alltägliches</a:t>
-            </a:r>
-          </a:p>
-          <a:p>
-            <a:r>
-              <a:rPr i="0"/>
-              <a:t>genügen würde. Umbuchung statt Wechsel, gegebenenfalls statt wenn nötig. Das</a:t>
-            </a:r>
-          </a:p>
-          <a:p>
-            <a:r>
-              <a:rPr i="0"/>
-              <a:t>trifft nicht nur Sprachanfänger, sondern auch geübte Leserinnen und Leser.</a:t>
-            </a:r>
-          </a:p>
-          <a:p/>
-          <a:p>
-            <a:r>
-              <a:rPr i="0"/>
-              <a:t>Satz heißt: über fünfundzwanzig Wörter, bei Deutschkursen über fünfzehn. Diese</a:t>
-            </a:r>
-          </a:p>
-          <a:p>
-            <a:r>
-              <a:rPr i="0"/>
-              <a:t>beiden Zahlen habe ich gesetzt, nicht gemessen; sie orientieren sich an den</a:t>
-            </a:r>
-          </a:p>
-          <a:p>
-            <a:r>
-              <a:rPr i="0"/>
-              <a:t>Empfehlungen für einfache Sprache. Zur Satzlänge sagen die</a:t>
-            </a:r>
-          </a:p>
-          <a:p>
-            <a:r>
-              <a:rPr i="0"/>
-              <a:t>Barrierefreiheitsrichtlinien nämlich nichts, und ob es die richtigen Zahlen</a:t>
-            </a:r>
-          </a:p>
-          <a:p>
-            <a:r>
-              <a:rPr i="0"/>
-              <a:t>sind, soll der Pilot beantworten.</a:t>
-            </a:r>
-          </a:p>
-          <a:p/>
-          <a:p>
-            <a:r>
-              <a:rPr i="0"/>
-              <a:t>Abkürzung heißt: Ein Kürzel steht im Text, ohne beim ersten Mal aufgelöst zu</a:t>
-            </a:r>
-          </a:p>
-          <a:p>
-            <a:r>
-              <a:rPr i="0"/>
-              <a:t>werden. Davon hat die vhs einige eigene, D-T-Z zum Beispiel, der Deutsch-Test</a:t>
-            </a:r>
-          </a:p>
-          <a:p>
-            <a:r>
-              <a:rPr i="0"/>
-              <a:t>für Zuwanderer.</a:t>
             </a:r>
           </a:p>
           <a:p/>
@@ -3259,7 +3021,7 @@
           <a:p>
             <a:r>
               <a:rPr i="0"/>
-              <a:t>### Der Block in der Mitte: Pflicht und freiwillig</a:t>
+              <a:t>### Der Block in der Mitte: freiwillig und Pflicht</a:t>
             </a:r>
           </a:p>
           <a:p/>
@@ -3272,43 +3034,43 @@
           <a:p>
             <a:r>
               <a:rPr i="0"/>
-              <a:t>Kursbeschreibung selbst hängen. Links steht, was daran verbindlich ist: dass</a:t>
-            </a:r>
-          </a:p>
-          <a:p>
-            <a:r>
-              <a:rPr i="0"/>
-              <a:t>eine Zeile, die eine Gliederungsebene eröffnet, auch technisch als Überschrift</a:t>
-            </a:r>
-          </a:p>
-          <a:p>
-            <a:r>
-              <a:rPr i="0"/>
-              <a:t>ausgezeichnet wird, und dass ein Linktext sagt, wohin er führt. Rechts steht,</a:t>
-            </a:r>
-          </a:p>
-          <a:p>
-            <a:r>
-              <a:rPr i="0"/>
-              <a:t>was freiwillig ist: dass Abkürzungen erklärt werden und dass das Leseniveau</a:t>
-            </a:r>
-          </a:p>
-          <a:p>
-            <a:r>
-              <a:rPr i="0"/>
-              <a:t>zur Zielgruppe passt. Beides ist dreifach A und damit nicht gefordert — und</a:t>
-            </a:r>
-          </a:p>
-          <a:p>
-            <a:r>
-              <a:rPr i="0"/>
-              <a:t>beides gehört zum Kern dieses Projekts. Zwei meiner Regeln liegen dagegen im</a:t>
-            </a:r>
-          </a:p>
-          <a:p>
-            <a:r>
-              <a:rPr i="0"/>
-              <a:t>Pflichtbereich; dazu gleich mehr.</a:t>
+              <a:t>Kursbeschreibung selbst hängen, und wieder steht links das, worum es hier</a:t>
+            </a:r>
+          </a:p>
+          <a:p>
+            <a:r>
+              <a:rPr i="0"/>
+              <a:t>geht: dass Abkürzungen erklärt werden und dass das Leseniveau zur Zielgruppe</a:t>
+            </a:r>
+          </a:p>
+          <a:p>
+            <a:r>
+              <a:rPr i="0"/>
+              <a:t>passt. Beides ist dreifach A und damit nicht gefordert. Rechts steht, was</a:t>
+            </a:r>
+          </a:p>
+          <a:p>
+            <a:r>
+              <a:rPr i="0"/>
+              <a:t>verbindlich ist: dass eine Zeile, die eine Gliederungsebene eröffnet, auch</a:t>
+            </a:r>
+          </a:p>
+          <a:p>
+            <a:r>
+              <a:rPr i="0"/>
+              <a:t>technisch als Überschrift ausgezeichnet wird, und dass ein Linktext sagt,</a:t>
+            </a:r>
+          </a:p>
+          <a:p>
+            <a:r>
+              <a:rPr i="0"/>
+              <a:t>wohin er führt. Zwei meiner Regeln liegen also im Pflichtbereich; dazu gleich</a:t>
+            </a:r>
+          </a:p>
+          <a:p>
+            <a:r>
+              <a:rPr i="0"/>
+              <a:t>mehr.</a:t>
             </a:r>
           </a:p>
           <a:p/>

--- a/ausgabe/Praesentation-KLARTEXT.pptx
+++ b/ausgabe/Praesentation-KLARTEXT.pptx
@@ -2501,38 +2501,120 @@
           <a:p>
             <a:r>
               <a:rPr i="0"/>
-              <a:t>### Links: die vier Empfehlungen</a:t>
-            </a:r>
-          </a:p>
-          <a:p/>
-          <a:p>
-            <a:r>
-              <a:rPr i="0"/>
-              <a:t>Links stehen die vier Empfehlungen. Verbindlich sind sie nicht, aber sie sind</a:t>
-            </a:r>
-          </a:p>
-          <a:p>
-            <a:r>
-              <a:rPr i="0"/>
-              <a:t>der eigentliche Ertrag dieses Projekts — deshalb stehen sie vorn. Zwei davon,</a:t>
-            </a:r>
-          </a:p>
-          <a:p>
-            <a:r>
-              <a:rPr i="0"/>
-              <a:t>zu schwere Wörter und nicht aufgelöste Abkürzungen, stehen auf Stufe AAA — der</a:t>
-            </a:r>
-          </a:p>
-          <a:p>
-            <a:r>
-              <a:rPr i="0"/>
-              <a:t>höchsten, die niemand einhalten muss. Die beiden anderen habe ich selbst</a:t>
-            </a:r>
-          </a:p>
-          <a:p>
-            <a:r>
-              <a:rPr i="0"/>
-              <a:t>gesetzt.</a:t>
+              <a:t>### Links: die zwei Pflichtregeln</a:t>
+            </a:r>
+          </a:p>
+          <a:p/>
+          <a:p>
+            <a:r>
+              <a:rPr i="0"/>
+              <a:t>Links stehen die beiden Pflichtregeln. Sie stehen auf Stufe A der</a:t>
+            </a:r>
+          </a:p>
+          <a:p>
+            <a:r>
+              <a:rPr i="0"/>
+              <a:t>Barrierefreiheitsrichtlinien und sind damit verbindlich.</a:t>
+            </a:r>
+          </a:p>
+          <a:p/>
+          <a:p>
+            <a:r>
+              <a:rPr i="0"/>
+              <a:t>Struktur heißt: Eine Zeile sieht aus wie eine Überschrift, ist im Quelltext</a:t>
+            </a:r>
+          </a:p>
+          <a:p>
+            <a:r>
+              <a:rPr i="0"/>
+              <a:t>aber gewöhnlicher Fließtext. Dasselbe gilt für Aufzählungen, die jemand nur</a:t>
+            </a:r>
+          </a:p>
+          <a:p>
+            <a:r>
+              <a:rPr i="0"/>
+              <a:t>mit Bindestrichen gebaut hat. Wer sehend liest, merkt davon nichts. Ein</a:t>
+            </a:r>
+          </a:p>
+          <a:p>
+            <a:r>
+              <a:rPr i="0"/>
+              <a:t>Screenreader dagegen bietet an, sich alle Überschriften einer Seite vorlesen</a:t>
+            </a:r>
+          </a:p>
+          <a:p>
+            <a:r>
+              <a:rPr i="0"/>
+              <a:t>zu lassen, um gezielt dorthin zu springen — was technisch keine Überschrift</a:t>
+            </a:r>
+          </a:p>
+          <a:p>
+            <a:r>
+              <a:rPr i="0"/>
+              <a:t>ist, taucht in dieser Liste nicht auf. Die Gliederung ist dann sichtbar</a:t>
+            </a:r>
+          </a:p>
+          <a:p>
+            <a:r>
+              <a:rPr i="0"/>
+              <a:t>vorhanden und für das Vorleseprogramm nicht da.</a:t>
+            </a:r>
+          </a:p>
+          <a:p/>
+          <a:p>
+            <a:r>
+              <a:rPr i="0"/>
+              <a:t>Linktext heißt: Der Link sagt nicht, wohin er führt. Das bekannteste Beispiel</a:t>
+            </a:r>
+          </a:p>
+          <a:p>
+            <a:r>
+              <a:rPr i="0"/>
+              <a:t>ist ein Link, der schlicht „hier“ heißt. Der Grund ist derselbe: Screenreader</a:t>
+            </a:r>
+          </a:p>
+          <a:p>
+            <a:r>
+              <a:rPr i="0"/>
+              <a:t>lesen auf Wunsch nur die Links einer Seite vor, ohne den Text drumherum. Eine</a:t>
+            </a:r>
+          </a:p>
+          <a:p>
+            <a:r>
+              <a:rPr i="0"/>
+              <a:t>Liste aus fünfmal „hier“ hilft niemandem weiter.</a:t>
+            </a:r>
+          </a:p>
+          <a:p/>
+          <a:p>
+            <a:r>
+              <a:rPr i="0"/>
+              <a:t>### Rechts: die vier Empfehlungen</a:t>
+            </a:r>
+          </a:p>
+          <a:p/>
+          <a:p>
+            <a:r>
+              <a:rPr i="0"/>
+              <a:t>Rechts stehen die vier Empfehlungen. Verbindlich sind sie nicht, aber sie sind</a:t>
+            </a:r>
+          </a:p>
+          <a:p>
+            <a:r>
+              <a:rPr i="0"/>
+              <a:t>der eigentliche Ertrag dieses Projekts. Zwei davon, zu schwere Wörter und</a:t>
+            </a:r>
+          </a:p>
+          <a:p>
+            <a:r>
+              <a:rPr i="0"/>
+              <a:t>nicht aufgelöste Abkürzungen, stehen auf Stufe AAA — der höchsten, die niemand</a:t>
+            </a:r>
+          </a:p>
+          <a:p>
+            <a:r>
+              <a:rPr i="0"/>
+              <a:t>einhalten muss. Die beiden anderen habe ich selbst gesetzt.</a:t>
             </a:r>
           </a:p>
           <a:p/>
@@ -2621,94 +2703,6 @@
             <a:r>
               <a:rPr i="0"/>
               <a:t>für Zuwanderer.</a:t>
-            </a:r>
-          </a:p>
-          <a:p/>
-          <a:p>
-            <a:r>
-              <a:rPr i="0"/>
-              <a:t>### Rechts: die zwei Pflichtregeln</a:t>
-            </a:r>
-          </a:p>
-          <a:p/>
-          <a:p>
-            <a:r>
-              <a:rPr i="0"/>
-              <a:t>Rechts stehen die beiden Pflichtregeln. Sie stehen auf Stufe A der</a:t>
-            </a:r>
-          </a:p>
-          <a:p>
-            <a:r>
-              <a:rPr i="0"/>
-              <a:t>Barrierefreiheitsrichtlinien und sind damit verbindlich.</a:t>
-            </a:r>
-          </a:p>
-          <a:p/>
-          <a:p>
-            <a:r>
-              <a:rPr i="0"/>
-              <a:t>Struktur heißt: Eine Zeile sieht aus wie eine Überschrift, ist im Quelltext</a:t>
-            </a:r>
-          </a:p>
-          <a:p>
-            <a:r>
-              <a:rPr i="0"/>
-              <a:t>aber gewöhnlicher Fließtext. Dasselbe gilt für Aufzählungen, die jemand nur</a:t>
-            </a:r>
-          </a:p>
-          <a:p>
-            <a:r>
-              <a:rPr i="0"/>
-              <a:t>mit Bindestrichen gebaut hat. Wer sehend liest, merkt davon nichts. Ein</a:t>
-            </a:r>
-          </a:p>
-          <a:p>
-            <a:r>
-              <a:rPr i="0"/>
-              <a:t>Screenreader dagegen bietet an, sich alle Überschriften einer Seite vorlesen</a:t>
-            </a:r>
-          </a:p>
-          <a:p>
-            <a:r>
-              <a:rPr i="0"/>
-              <a:t>zu lassen, um gezielt dorthin zu springen — was technisch keine Überschrift</a:t>
-            </a:r>
-          </a:p>
-          <a:p>
-            <a:r>
-              <a:rPr i="0"/>
-              <a:t>ist, taucht in dieser Liste nicht auf. Die Gliederung ist dann sichtbar</a:t>
-            </a:r>
-          </a:p>
-          <a:p>
-            <a:r>
-              <a:rPr i="0"/>
-              <a:t>vorhanden und für das Vorleseprogramm nicht da.</a:t>
-            </a:r>
-          </a:p>
-          <a:p/>
-          <a:p>
-            <a:r>
-              <a:rPr i="0"/>
-              <a:t>Linktext heißt: Der Link sagt nicht, wohin er führt. Das bekannteste Beispiel</a:t>
-            </a:r>
-          </a:p>
-          <a:p>
-            <a:r>
-              <a:rPr i="0"/>
-              <a:t>ist ein Link, der schlicht „hier“ heißt. Der Grund ist derselbe: Screenreader</a:t>
-            </a:r>
-          </a:p>
-          <a:p>
-            <a:r>
-              <a:rPr i="0"/>
-              <a:t>lesen auf Wunsch nur die Links einer Seite vor, ohne den Text drumherum. Eine</a:t>
-            </a:r>
-          </a:p>
-          <a:p>
-            <a:r>
-              <a:rPr i="0"/>
-              <a:t>Liste aus fünfmal „hier“ hilft niemandem weiter.</a:t>
             </a:r>
           </a:p>
           <a:p/>
@@ -3021,7 +3015,7 @@
           <a:p>
             <a:r>
               <a:rPr i="0"/>
-              <a:t>### Der Block in der Mitte: freiwillig und Pflicht</a:t>
+              <a:t>### Der Block in der Mitte: Pflicht und freiwillig</a:t>
             </a:r>
           </a:p>
           <a:p/>
@@ -3034,43 +3028,43 @@
           <a:p>
             <a:r>
               <a:rPr i="0"/>
-              <a:t>Kursbeschreibung selbst hängen, und wieder steht links das, worum es hier</a:t>
-            </a:r>
-          </a:p>
-          <a:p>
-            <a:r>
-              <a:rPr i="0"/>
-              <a:t>geht: dass Abkürzungen erklärt werden und dass das Leseniveau zur Zielgruppe</a:t>
-            </a:r>
-          </a:p>
-          <a:p>
-            <a:r>
-              <a:rPr i="0"/>
-              <a:t>passt. Beides ist dreifach A und damit nicht gefordert. Rechts steht, was</a:t>
-            </a:r>
-          </a:p>
-          <a:p>
-            <a:r>
-              <a:rPr i="0"/>
-              <a:t>verbindlich ist: dass eine Zeile, die eine Gliederungsebene eröffnet, auch</a:t>
-            </a:r>
-          </a:p>
-          <a:p>
-            <a:r>
-              <a:rPr i="0"/>
-              <a:t>technisch als Überschrift ausgezeichnet wird, und dass ein Linktext sagt,</a:t>
-            </a:r>
-          </a:p>
-          <a:p>
-            <a:r>
-              <a:rPr i="0"/>
-              <a:t>wohin er führt. Zwei meiner Regeln liegen also im Pflichtbereich; dazu gleich</a:t>
-            </a:r>
-          </a:p>
-          <a:p>
-            <a:r>
-              <a:rPr i="0"/>
-              <a:t>mehr.</a:t>
+              <a:t>Kursbeschreibung selbst hängen. Links steht, was daran verbindlich ist: dass</a:t>
+            </a:r>
+          </a:p>
+          <a:p>
+            <a:r>
+              <a:rPr i="0"/>
+              <a:t>eine Zeile, die eine Gliederungsebene eröffnet, auch technisch als Überschrift</a:t>
+            </a:r>
+          </a:p>
+          <a:p>
+            <a:r>
+              <a:rPr i="0"/>
+              <a:t>ausgezeichnet wird, und dass ein Linktext sagt, wohin er führt. Rechts steht,</a:t>
+            </a:r>
+          </a:p>
+          <a:p>
+            <a:r>
+              <a:rPr i="0"/>
+              <a:t>was freiwillig ist: dass Abkürzungen erklärt werden und dass das Leseniveau</a:t>
+            </a:r>
+          </a:p>
+          <a:p>
+            <a:r>
+              <a:rPr i="0"/>
+              <a:t>zur Zielgruppe passt. Beides ist dreifach A und damit nicht gefordert — und</a:t>
+            </a:r>
+          </a:p>
+          <a:p>
+            <a:r>
+              <a:rPr i="0"/>
+              <a:t>beides gehört zum Kern dieses Projekts. Zwei meiner Regeln liegen dagegen im</a:t>
+            </a:r>
+          </a:p>
+          <a:p>
+            <a:r>
+              <a:rPr i="0"/>
+              <a:t>Pflichtbereich; dazu gleich mehr.</a:t>
             </a:r>
           </a:p>
           <a:p/>

--- a/ausgabe/Praesentation-KLARTEXT.pptx
+++ b/ausgabe/Praesentation-KLARTEXT.pptx
@@ -2212,7 +2212,7 @@
           <a:p>
             <a:r>
               <a:rPr i="0"/>
-              <a:t>- *vorlesen*</a:t>
+              <a:t>- Ein Prüfschritt zur Sicherstellung der Zugänglichkeit eines Kurstextes für die Zielgruppe des Textes vor der Veröffentlichung. (weiter vorlesen)</a:t>
             </a:r>
           </a:p>
           <a:p/>
@@ -2346,6 +2346,12 @@
           <a:p>
             <a:r>
               <a:rPr i="0"/>
+              <a:t>- Es gibt acht Programmbereiche in vier Fachbereichen</a:t>
+            </a:r>
+          </a:p>
+          <a:p>
+            <a:r>
+              <a:rPr i="0"/>
               <a:t>- Geleitet wird sie von einem Direktor, der laut Impressum auch persönlich für die redaktionellen Inhalte der Website verantwortlich ist.</a:t>
             </a:r>
           </a:p>
@@ -2468,7 +2474,7 @@
           <a:p>
             <a:r>
               <a:rPr i="0"/>
-              <a:t>- Das Kursportal hat eine offene Schnittstelle. Darüber habe ich alle Kurstexte gezogen, gut dreitausend, und mit einem eigenen Skript ausgewertet. Siebenundfünfzig Prozent haben mindestens einen Befund.</a:t>
+              <a:t>- Erstmal kurz zur Messung: Das Kursportal hat eine offene Schnittstelle. Darüber habe ich alle Kurstexte gezogen und mit einem eigenen Skript ausgewertet.</a:t>
             </a:r>
           </a:p>
           <a:p/>
@@ -2478,215 +2484,134 @@
               <a:t>### Wonach gemessen wurde</a:t>
             </a:r>
           </a:p>
-          <a:p/>
-          <a:p>
-            <a:r>
-              <a:rPr i="0"/>
-              <a:t>Oben steht, wonach ich gemessen habe: sechs Regeln, erst der Maßstab, dann das</a:t>
-            </a:r>
-          </a:p>
-          <a:p>
-            <a:r>
-              <a:rPr i="0"/>
-              <a:t>Ergebnis. Dieselben sechs Regeln sind zugleich der Maßstab des</a:t>
-            </a:r>
-          </a:p>
-          <a:p>
-            <a:r>
-              <a:rPr i="0"/>
-              <a:t>Prüfassistenten, den ich gleich zeige.</a:t>
-            </a:r>
-          </a:p>
-          <a:p/>
-          <a:p>
-            <a:r>
-              <a:rPr i="0"/>
-              <a:t>### Links: die zwei Pflichtregeln</a:t>
-            </a:r>
-          </a:p>
-          <a:p/>
-          <a:p>
-            <a:r>
-              <a:rPr i="0"/>
-              <a:t>Links stehen die beiden Pflichtregeln. Sie stehen auf Stufe A der</a:t>
-            </a:r>
-          </a:p>
-          <a:p>
-            <a:r>
-              <a:rPr i="0"/>
-              <a:t>Barrierefreiheitsrichtlinien und sind damit verbindlich.</a:t>
-            </a:r>
-          </a:p>
-          <a:p/>
-          <a:p>
-            <a:r>
-              <a:rPr i="0"/>
-              <a:t>Struktur heißt: Eine Zeile sieht aus wie eine Überschrift, ist im Quelltext</a:t>
-            </a:r>
-          </a:p>
-          <a:p>
-            <a:r>
-              <a:rPr i="0"/>
-              <a:t>aber gewöhnlicher Fließtext. Dasselbe gilt für Aufzählungen, die jemand nur</a:t>
-            </a:r>
-          </a:p>
-          <a:p>
-            <a:r>
-              <a:rPr i="0"/>
-              <a:t>mit Bindestrichen gebaut hat. Wer sehend liest, merkt davon nichts. Ein</a:t>
-            </a:r>
-          </a:p>
-          <a:p>
-            <a:r>
-              <a:rPr i="0"/>
-              <a:t>Screenreader dagegen bietet an, sich alle Überschriften einer Seite vorlesen</a:t>
-            </a:r>
-          </a:p>
-          <a:p>
-            <a:r>
-              <a:rPr i="0"/>
-              <a:t>zu lassen, um gezielt dorthin zu springen — was technisch keine Überschrift</a:t>
-            </a:r>
-          </a:p>
-          <a:p>
-            <a:r>
-              <a:rPr i="0"/>
-              <a:t>ist, taucht in dieser Liste nicht auf. Die Gliederung ist dann sichtbar</a:t>
-            </a:r>
-          </a:p>
-          <a:p>
-            <a:r>
-              <a:rPr i="0"/>
-              <a:t>vorhanden und für das Vorleseprogramm nicht da.</a:t>
-            </a:r>
-          </a:p>
-          <a:p/>
-          <a:p>
-            <a:r>
-              <a:rPr i="0"/>
-              <a:t>Linktext heißt: Der Link sagt nicht, wohin er führt. Das bekannteste Beispiel</a:t>
-            </a:r>
-          </a:p>
-          <a:p>
-            <a:r>
-              <a:rPr i="0"/>
-              <a:t>ist ein Link, der schlicht „hier“ heißt. Der Grund ist derselbe: Screenreader</a:t>
-            </a:r>
-          </a:p>
-          <a:p>
-            <a:r>
-              <a:rPr i="0"/>
-              <a:t>lesen auf Wunsch nur die Links einer Seite vor, ohne den Text drumherum. Eine</a:t>
-            </a:r>
-          </a:p>
-          <a:p>
-            <a:r>
-              <a:rPr i="0"/>
-              <a:t>Liste aus fünfmal „hier“ hilft niemandem weiter.</a:t>
-            </a:r>
-          </a:p>
-          <a:p/>
-          <a:p>
-            <a:r>
-              <a:rPr i="0"/>
-              <a:t>### Rechts: die vier Empfehlungen</a:t>
-            </a:r>
-          </a:p>
-          <a:p/>
-          <a:p>
-            <a:r>
-              <a:rPr i="0"/>
-              <a:t>Rechts stehen die vier Empfehlungen. Verbindlich sind sie nicht, aber sie sind</a:t>
-            </a:r>
-          </a:p>
-          <a:p>
-            <a:r>
-              <a:rPr i="0"/>
-              <a:t>der eigentliche Ertrag dieses Projekts. Zwei davon, zu schwere Wörter und</a:t>
-            </a:r>
-          </a:p>
-          <a:p>
-            <a:r>
-              <a:rPr i="0"/>
-              <a:t>nicht aufgelöste Abkürzungen, stehen auf Stufe AAA — der höchsten, die niemand</a:t>
-            </a:r>
-          </a:p>
-          <a:p>
-            <a:r>
-              <a:rPr i="0"/>
-              <a:t>einhalten muss. Die beiden anderen habe ich selbst gesetzt.</a:t>
-            </a:r>
-          </a:p>
-          <a:p/>
-          <a:p>
-            <a:r>
-              <a:rPr i="0"/>
-              <a:t>Niveau heißt: Ein Wort liegt über dem Sprachniveau derer, die den Text lesen</a:t>
-            </a:r>
-          </a:p>
-          <a:p>
-            <a:r>
-              <a:rPr i="0"/>
-              <a:t>sollen. Das ist die Regel, die sich ohne Kenntnis der Zielgruppe überhaupt</a:t>
-            </a:r>
-          </a:p>
-          <a:p>
-            <a:r>
-              <a:rPr i="0"/>
-              <a:t>nicht anwenden lässt.</a:t>
-            </a:r>
-          </a:p>
-          <a:p/>
-          <a:p>
-            <a:r>
-              <a:rPr i="0"/>
-              <a:t>Amtsdeutsch heißt: Im Text steht ein Verwaltungswort, obwohl ein alltägliches</a:t>
-            </a:r>
-          </a:p>
-          <a:p>
-            <a:r>
-              <a:rPr i="0"/>
-              <a:t>genügen würde. Umbuchung statt Wechsel, gegebenenfalls statt wenn nötig. Das</a:t>
-            </a:r>
-          </a:p>
-          <a:p>
-            <a:r>
-              <a:rPr i="0"/>
-              <a:t>trifft nicht nur Sprachanfänger, sondern auch geübte Leserinnen und Leser.</a:t>
-            </a:r>
-          </a:p>
-          <a:p/>
-          <a:p>
-            <a:r>
-              <a:rPr i="0"/>
-              <a:t>Satz heißt: über fünfundzwanzig Wörter, bei Deutschkursen über fünfzehn. Diese</a:t>
-            </a:r>
-          </a:p>
-          <a:p>
-            <a:r>
-              <a:rPr i="0"/>
-              <a:t>beiden Zahlen habe ich gesetzt, nicht gemessen; sie orientieren sich an den</a:t>
-            </a:r>
-          </a:p>
-          <a:p>
-            <a:r>
-              <a:rPr i="0"/>
-              <a:t>Empfehlungen für einfache Sprache. Zur Satzlänge sagen die</a:t>
-            </a:r>
-          </a:p>
-          <a:p>
-            <a:r>
-              <a:rPr i="0"/>
-              <a:t>Barrierefreiheitsrichtlinien nämlich nichts, und ob es die richtigen Zahlen</a:t>
-            </a:r>
-          </a:p>
-          <a:p>
-            <a:r>
-              <a:rPr i="0"/>
-              <a:t>sind, soll der Pilot beantworten.</a:t>
-            </a:r>
-          </a:p>
-          <a:p/>
+          <a:p>
+            <a:r>
+              <a:rPr i="0"/>
+              <a:t>- Dabei wurde nach sechs Regeln gemessen.</a:t>
+            </a:r>
+          </a:p>
+          <a:p>
+            <a:r>
+              <a:rPr i="0"/>
+              <a:t>- Dieselben sechs Regeln sind zugleich der Maßstab des Prüfassistenten, den ich gleich zeige.</a:t>
+            </a:r>
+          </a:p>
+          <a:p/>
+          <a:p>
+            <a:r>
+              <a:rPr i="0"/>
+              <a:t>### Die zwei Pflichtregeln</a:t>
+            </a:r>
+          </a:p>
+          <a:p>
+            <a:r>
+              <a:rPr i="0"/>
+              <a:t>- Stehen auf Stufe A der Barrierefreiheitsrichtlinien und sind damit gesetzlich verbindlich.</a:t>
+            </a:r>
+          </a:p>
+          <a:p>
+            <a:r>
+              <a:rPr i="0"/>
+              <a:t>- </a:t>
+            </a:r>
+            <a:r>
+              <a:rPr b="1" i="0"/>
+              <a:t>STRUKTUR</a:t>
+            </a:r>
+            <a:r>
+              <a:rPr i="0"/>
+              <a:t>: Eine Zeile sieht z.B. aus wie eine Überschrift, ist im Quelltext aber gewöhnlicher Fließtext.</a:t>
+            </a:r>
+          </a:p>
+          <a:p>
+            <a:r>
+              <a:rPr i="0"/>
+              <a:t>- </a:t>
+            </a:r>
+            <a:r>
+              <a:rPr b="1" i="0"/>
+              <a:t>LINKTEXT</a:t>
+            </a:r>
+            <a:r>
+              <a:rPr i="0"/>
+              <a:t>: Der Linktext sagt nicht, wohin er führt. Beispiel: „hier“</a:t>
+            </a:r>
+          </a:p>
+          <a:p>
+            <a:r>
+              <a:rPr i="0"/>
+              <a:t>- </a:t>
+            </a:r>
+            <a:r>
+              <a:rPr b="1" i="0"/>
+              <a:t>Bei beiden</a:t>
+            </a:r>
+            <a:r>
+              <a:rPr i="0"/>
+              <a:t>: Screen-Reader können die Inhalte damit nicht zuverlässig lesen.</a:t>
+            </a:r>
+          </a:p>
+          <a:p/>
+          <a:p>
+            <a:r>
+              <a:rPr i="0"/>
+              <a:t>### Die vier Empfehlungen</a:t>
+            </a:r>
+          </a:p>
+          <a:p>
+            <a:r>
+              <a:rPr i="0"/>
+              <a:t>- Nicht verbindlich, aber der größte Ertrag des Projekts.</a:t>
+            </a:r>
+          </a:p>
+          <a:p>
+            <a:r>
+              <a:rPr i="0"/>
+              <a:t>- </a:t>
+            </a:r>
+            <a:r>
+              <a:rPr b="1" i="0"/>
+              <a:t>NIVEAU:</a:t>
+            </a:r>
+            <a:r>
+              <a:rPr i="0"/>
+              <a:t> Niveau heißt: Ein Wort liegt über dem Sprachniveau derer, die den Text lesen sollen. Das ist die Regel, die sich ohne Kenntnis der Zielgruppe überhaupt nicht anwenden lässt.</a:t>
+            </a:r>
+          </a:p>
+          <a:p>
+            <a:r>
+              <a:rPr i="0"/>
+              <a:t>- </a:t>
+            </a:r>
+            <a:r>
+              <a:rPr b="1" i="0"/>
+              <a:t>AMTSDEUTSCH</a:t>
+            </a:r>
+            <a:r>
+              <a:rPr i="0"/>
+              <a:t>: (vorlesen)</a:t>
+            </a:r>
+          </a:p>
+          <a:p>
+            <a:r>
+              <a:rPr i="0"/>
+              <a:t>- </a:t>
+            </a:r>
+            <a:r>
+              <a:rPr b="1" i="0"/>
+              <a:t>SATZ</a:t>
+            </a:r>
+            <a:r>
+              <a:rPr i="0"/>
+              <a:t>: Zur Satzlänge sagen die Barrierefreiheitsrichtlinien nichts. Aber die Zahlen orientieren sich an den Empfehlungen für einfache Sprache.</a:t>
+            </a:r>
+          </a:p>
+          <a:p>
+            <a:r>
+              <a:rPr i="0"/>
+              <a:t>- **AB</a:t>
+            </a:r>
+          </a:p>
           <a:p>
             <a:r>
               <a:rPr i="0"/>

--- a/ausgabe/Praesentation-KLARTEXT.pptx
+++ b/ausgabe/Praesentation-KLARTEXT.pptx
@@ -563,13 +563,13 @@
           <a:p>
             <a:r>
               <a:rPr i="0"/>
-              <a:t>### Der schärfste Fall</a:t>
-            </a:r>
-          </a:p>
-          <a:p>
-            <a:r>
-              <a:rPr i="0"/>
-              <a:t>- Beispiel: bietet die Volkshochschule Deutschkurse für Menschen an, die gerade erst Deutsch lernen.</a:t>
+              <a:t>### Ein konkreter Fall</a:t>
+            </a:r>
+          </a:p>
+          <a:p>
+            <a:r>
+              <a:rPr i="0"/>
+              <a:t>- Beispiel: Die Volkshochschule bietet Deutschkurse für Menschen an, die gerade erst Deutsch lernen.</a:t>
             </a:r>
           </a:p>
           <a:p>
@@ -2212,7 +2212,19 @@
           <a:p>
             <a:r>
               <a:rPr i="0"/>
-              <a:t>- Ein Prüfschritt zur Sicherstellung der Zugänglichkeit eines Kurstextes für die Zielgruppe des Textes vor der Veröffentlichung. (weiter vorlesen)</a:t>
+              <a:t>- </a:t>
+            </a:r>
+            <a:r>
+              <a:rPr b="1" i="0">
+                <a:solidFill>
+                  <a:srgbClr val="A4162B"/>
+                </a:solidFill>
+              </a:rPr>
+              <a:t>Ein Prüfschritt zur Sicherstellung der Zugänglichkeit eines Kurstextes für die Zielgruppe des Textes vor der Veröffentlichung.</a:t>
+            </a:r>
+            <a:r>
+              <a:rPr i="0"/>
+              <a:t> (weiter vorlesen)</a:t>
             </a:r>
           </a:p>
           <a:p/>
@@ -2226,6 +2238,19 @@
             <a:r>
               <a:rPr i="0"/>
               <a:t>- Für die technische Barrierefreiheit der Website bleiben normale Prüfwerkzeug zuständig, zusammen mit der städtischen IT. Die KI sieht nur den Kurstext.</a:t>
+            </a:r>
+          </a:p>
+          <a:p/>
+          <a:p>
+            <a:r>
+              <a:rPr i="0"/>
+              <a:t>### Ergebnis</a:t>
+            </a:r>
+          </a:p>
+          <a:p>
+            <a:r>
+              <a:rPr i="0"/>
+              <a:t>- *vorlesen*</a:t>
             </a:r>
           </a:p>
           <a:p/>
@@ -2358,7 +2383,7 @@
           <a:p>
             <a:r>
               <a:rPr i="0"/>
-              <a:t>- Darüber steht eine Betriebskommission mit sechzehn Sitzen, zwei davon für den Personalrat.</a:t>
+              <a:t>- Darüber steht eine Betriebskommission mit 16 Sitzen, 2 davon für den Personalrat.</a:t>
             </a:r>
           </a:p>
           <a:p/>
@@ -2468,39 +2493,27 @@
           <a:p>
             <a:r>
               <a:rPr i="0"/>
-              <a:t>### Die Messung</a:t>
-            </a:r>
-          </a:p>
-          <a:p>
-            <a:r>
-              <a:rPr i="0"/>
-              <a:t>- Erstmal kurz zur Messung: Das Kursportal hat eine offene Schnittstelle. Darüber habe ich alle Kurstexte gezogen und mit einem eigenen Skript ausgewertet.</a:t>
-            </a:r>
-          </a:p>
-          <a:p/>
-          <a:p>
-            <a:r>
-              <a:rPr i="0"/>
-              <a:t>### Wonach gemessen wurde</a:t>
-            </a:r>
-          </a:p>
-          <a:p>
-            <a:r>
-              <a:rPr i="0"/>
-              <a:t>- Dabei wurde nach sechs Regeln gemessen.</a:t>
-            </a:r>
-          </a:p>
-          <a:p>
-            <a:r>
-              <a:rPr i="0"/>
-              <a:t>- Dieselben sechs Regeln sind zugleich der Maßstab des Prüfassistenten, den ich gleich zeige.</a:t>
-            </a:r>
-          </a:p>
-          <a:p/>
-          <a:p>
-            <a:r>
-              <a:rPr i="0"/>
-              <a:t>### Die zwei Pflichtregeln</a:t>
+              <a:t>- Erstmal kurz zur Messung: Das Kursportal hat eine offene Schnittstelle. Darüber habe ich alle Kurstexte erhalten und mit einem Skript ausgewertet.</a:t>
+            </a:r>
+          </a:p>
+          <a:p/>
+          <a:p>
+            <a:r>
+              <a:rPr i="0"/>
+              <a:t>### Wonach wurde gemssen?</a:t>
+            </a:r>
+          </a:p>
+          <a:p>
+            <a:r>
+              <a:rPr i="0"/>
+              <a:t>- Nach 6 Regeln, die auch im System-Prompt Verwendung finden</a:t>
+            </a:r>
+          </a:p>
+          <a:p/>
+          <a:p>
+            <a:r>
+              <a:rPr i="0"/>
+              <a:t>### Es gibt 2 Pflichtregeln</a:t>
             </a:r>
           </a:p>
           <a:p>
@@ -2520,7 +2533,7 @@
             </a:r>
             <a:r>
               <a:rPr i="0"/>
-              <a:t>: Eine Zeile sieht z.B. aus wie eine Überschrift, ist im Quelltext aber gewöhnlicher Fließtext.</a:t>
+              <a:t>: z.B. eine Zeile sieht aus wie eine Überschrift, ist im Quelltext aber gewöhnlicher Fließtext.</a:t>
             </a:r>
           </a:p>
           <a:p>
@@ -2561,7 +2574,7 @@
           <a:p>
             <a:r>
               <a:rPr i="0"/>
-              <a:t>- Nicht verbindlich, aber der größte Ertrag des Projekts.</a:t>
+              <a:t>- Nicht verbindlich, aber sind die wichtigsten des Projekts.</a:t>
             </a:r>
           </a:p>
           <a:p>
@@ -2575,7 +2588,7 @@
             </a:r>
             <a:r>
               <a:rPr i="0"/>
-              <a:t> Niveau heißt: Ein Wort liegt über dem Sprachniveau derer, die den Text lesen sollen. Das ist die Regel, die sich ohne Kenntnis der Zielgruppe überhaupt nicht anwenden lässt.</a:t>
+              <a:t> Niveau heißt: Ein Wort liegt über dem Sprachniveau der Menschen, die den Text lesen sollen. Das ist die Regel, die sich ohne Kenntnis der Zielgruppe überhaupt nicht anwenden lässt.</a:t>
             </a:r>
           </a:p>
           <a:p>
@@ -2609,126 +2622,54 @@
           <a:p>
             <a:r>
               <a:rPr i="0"/>
-              <a:t>- **AB</a:t>
-            </a:r>
-          </a:p>
-          <a:p>
-            <a:r>
-              <a:rPr i="0"/>
-              <a:t>Abkürzung heißt: Ein Kürzel steht im Text, ohne beim ersten Mal aufgelöst zu</a:t>
-            </a:r>
-          </a:p>
-          <a:p>
-            <a:r>
-              <a:rPr i="0"/>
-              <a:t>werden. Davon hat die vhs einige eigene, D-T-Z zum Beispiel, der Deutsch-Test</a:t>
-            </a:r>
-          </a:p>
-          <a:p>
-            <a:r>
-              <a:rPr i="0"/>
-              <a:t>für Zuwanderer.</a:t>
-            </a:r>
-          </a:p>
-          <a:p/>
-          <a:p>
-            <a:r>
-              <a:rPr i="0"/>
-              <a:t>### Zwei Kurse im Vergleich</a:t>
-            </a:r>
-          </a:p>
-          <a:p/>
-          <a:p>
-            <a:r>
-              <a:rPr i="0"/>
-              <a:t>Die Tabelle darunter zeigt zwei Sprachkurse, und beide tragen eine niedrige</a:t>
-            </a:r>
-          </a:p>
-          <a:p>
-            <a:r>
-              <a:rPr i="0"/>
-              <a:t>Stufe im Titel. Das bedeutet zweimal etwas völlig Verschiedenes.</a:t>
-            </a:r>
-          </a:p>
-          <a:p/>
-          <a:p>
-            <a:r>
-              <a:rPr i="0"/>
-              <a:t>Beim Englischkurs steht A1 für das Englisch, das dort gelernt wird. Wer die</a:t>
-            </a:r>
-          </a:p>
-          <a:p>
-            <a:r>
-              <a:rPr i="0"/>
-              <a:t>Beschreibung liest, ist deutschsprachig und liest Deutsch fließend. Beim</a:t>
-            </a:r>
-          </a:p>
-          <a:p>
-            <a:r>
-              <a:rPr i="0"/>
-              <a:t>Deutschkurs steht A2 für das Deutsch, das dort gelernt wird. Wer diese</a:t>
-            </a:r>
-          </a:p>
-          <a:p>
-            <a:r>
-              <a:rPr i="0"/>
-              <a:t>Beschreibung liest, kann Deutsch bisher eine Stufe darunter, also A1.</a:t>
-            </a:r>
-          </a:p>
-          <a:p/>
-          <a:p>
-            <a:r>
-              <a:rPr i="0"/>
-              <a:t>Der Englischkurs hat kein einziges Wort über dem Niveau seiner Leser und einen</a:t>
-            </a:r>
-          </a:p>
-          <a:p>
-            <a:r>
-              <a:rPr i="0"/>
-              <a:t>Befund insgesamt, eine nicht aufgelöste Abkürzung. Der Deutschkurs hat</a:t>
-            </a:r>
-          </a:p>
-          <a:p>
-            <a:r>
-              <a:rPr i="0"/>
-              <a:t>dreiundfünfzig zu schwere Wörter und siebenundfünfzig Befunde. Darunter</a:t>
-            </a:r>
-          </a:p>
-          <a:p>
-            <a:r>
-              <a:rPr i="0"/>
-              <a:t>Selbsteinschätzung, Fehleinschätzung und Umbuchung — Wörter, die man erst weit</a:t>
-            </a:r>
-          </a:p>
-          <a:p>
-            <a:r>
-              <a:rPr i="0"/>
-              <a:t>oberhalb des Kursziels lernt.</a:t>
-            </a:r>
-          </a:p>
-          <a:p/>
-          <a:p>
-            <a:r>
-              <a:rPr i="0"/>
-              <a:t>Dabei sind beide Texte gleich einfach gebaut. Die Sätze sind in beiden Fällen</a:t>
-            </a:r>
-          </a:p>
-          <a:p>
-            <a:r>
-              <a:rPr i="0"/>
-              <a:t>kurz, im Schnitt neun und sieben Wörter. Ein Lesbarkeitsindex, der</a:t>
-            </a:r>
-          </a:p>
-          <a:p>
-            <a:r>
-              <a:rPr i="0"/>
-              <a:t>Satz- und Wortlängen zählt, findet bei keinem der beiden etwas. Er schweigt</a:t>
-            </a:r>
-          </a:p>
-          <a:p>
-            <a:r>
-              <a:rPr i="0"/>
-              <a:t>zweimal, und einmal davon zu Unrecht.</a:t>
+              <a:t>- </a:t>
+            </a:r>
+            <a:r>
+              <a:rPr b="1" i="0"/>
+              <a:t>ABKÜRZUNG</a:t>
+            </a:r>
+            <a:r>
+              <a:rPr i="0"/>
+              <a:t>: Ein Kürzel steht im Text, ohne beim ersten Mal aufgelöst zu werden. Davon hat die vhs einige, D-T-Z zum Beispiel, der Deutsch-Test für Zuwanderer.</a:t>
+            </a:r>
+          </a:p>
+          <a:p/>
+          <a:p>
+            <a:r>
+              <a:rPr i="0"/>
+              <a:t>### Zwei Kurse im Vergleich als Beispiel</a:t>
+            </a:r>
+          </a:p>
+          <a:p>
+            <a:r>
+              <a:rPr i="0"/>
+              <a:t>- Englisch A1.1 und Deutsch als Fremdsprache A2.2</a:t>
+            </a:r>
+          </a:p>
+          <a:p>
+            <a:r>
+              <a:rPr i="0"/>
+              <a:t>- Beide Beschreibungen sind auf Deutsch. </a:t>
+            </a:r>
+            <a:r>
+              <a:rPr b="1" i="0">
+                <a:solidFill>
+                  <a:srgbClr val="A4162B"/>
+                </a:solidFill>
+              </a:rPr>
+              <a:t>Nur kann die eine Zielgruppe Deutsch — die andere lernt es gerade erst.</a:t>
+            </a:r>
+          </a:p>
+          <a:p>
+            <a:r>
+              <a:rPr i="0"/>
+              <a:t>- Englischkurs: kein einziges zu schweres Wort. Deutschkurs: dreiundfünfzig.</a:t>
+            </a:r>
+          </a:p>
+          <a:p>
+            <a:r>
+              <a:rPr i="0"/>
+              <a:t>- Beide Texte haben kurze Sätze. Ein Programm, das nur zählt, findet bei keinem etwas.</a:t>
             </a:r>
           </a:p>
           <a:p/>
@@ -2738,67 +2679,10 @@
               <a:t>### Der Kasten unten</a:t>
             </a:r>
           </a:p>
-          <a:p/>
-          <a:p>
-            <a:r>
-              <a:rPr i="0"/>
-              <a:t>Deshalb reicht kein Werkzeug, das nur den Text ansieht. Man muss wissen, für</a:t>
-            </a:r>
-          </a:p>
-          <a:p>
-            <a:r>
-              <a:rPr i="0"/>
-              <a:t>wen der Text ist. Für Deutschkurse auf den Stufen A1 und A2 gibt es</a:t>
-            </a:r>
-          </a:p>
-          <a:p>
-            <a:r>
-              <a:rPr i="0"/>
-              <a:t>einunddreißig verschiedene Texte, und alle einunddreißig enthalten Wörter über</a:t>
-            </a:r>
-          </a:p>
-          <a:p>
-            <a:r>
-              <a:rPr i="0"/>
-              <a:t>dem Niveau ihrer Leser. Genau hier kann ein fachlich</a:t>
-            </a:r>
-          </a:p>
-          <a:p>
-            <a:r>
-              <a:rPr i="0"/>
-              <a:t>eingestellter Prompt etwas, was ein Standardwerkzeug nicht kann.</a:t>
-            </a:r>
-          </a:p>
-          <a:p/>
-          <a:p>
-            <a:r>
-              <a:rPr i="0"/>
-              <a:t>### Nachtrag: warum 57 Prozent eine Untergrenze sind</a:t>
-            </a:r>
-          </a:p>
-          <a:p/>
-          <a:p>
-            <a:r>
-              <a:rPr i="0"/>
-              <a:t>Noch einmal zu den siebenundfünfzig Prozent: Das ist eine Untergrenze. Mein</a:t>
-            </a:r>
-          </a:p>
-          <a:p>
-            <a:r>
-              <a:rPr i="0"/>
-              <a:t>Messskript prüft fünf der sechs Regeln; die erste, ob eine hervorgehobene</a:t>
-            </a:r>
-          </a:p>
-          <a:p>
-            <a:r>
-              <a:rPr i="0"/>
-              <a:t>Zeile eine Überschrift sein sollte, kann kein Skript entscheiden. Ich messe</a:t>
-            </a:r>
-          </a:p>
-          <a:p>
-            <a:r>
-              <a:rPr i="0"/>
-              <a:t>also bewusst zu niedrig statt zu hoch.</a:t>
+          <a:p>
+            <a:r>
+              <a:rPr i="0"/>
+              <a:t>- Man muss wissen, für wen der Text ist. Für Deutschkurse auf den Stufen A1 und A2 gibt es z.B. 31 verschiedene Texte, die  Wörter über dem Niveau ihrer Leser enthalten. Genau hier kann ein KI-Prompt etwas, was ein Standardwerkzeug nicht kann.</a:t>
             </a:r>
           </a:p>
         </p:txBody>
@@ -2869,216 +2753,64 @@
           <a:p>
             <a:r>
               <a:rPr i="0"/>
-              <a:t>Kurz die Rechtslage.</a:t>
-            </a:r>
-          </a:p>
-          <a:p/>
-          <a:p>
-            <a:r>
-              <a:rPr i="0"/>
-              <a:t>### Was Barrierefreiheit heißt</a:t>
-            </a:r>
-          </a:p>
-          <a:p/>
-          <a:p>
-            <a:r>
-              <a:rPr i="0"/>
-              <a:t>Digitale Barrierefreiheit bedeutet, dass eine Website auch für Menschen mit</a:t>
-            </a:r>
-          </a:p>
-          <a:p>
-            <a:r>
-              <a:rPr i="0"/>
-              <a:t>Behinderung nutzbar sein muss. Der Maßstab sind die WCAG, mit drei Stufen: A,</a:t>
-            </a:r>
-          </a:p>
-          <a:p>
-            <a:r>
-              <a:rPr i="0"/>
-              <a:t>doppel A und dreifach A.</a:t>
-            </a:r>
-          </a:p>
-          <a:p/>
-          <a:p>
-            <a:r>
-              <a:rPr i="0"/>
-              <a:t>### Welches Recht gilt</a:t>
-            </a:r>
-          </a:p>
-          <a:p/>
-          <a:p>
-            <a:r>
-              <a:rPr i="0"/>
-              <a:t>Für die vhs gilt weder die EU-Richtlinie noch das</a:t>
-            </a:r>
-          </a:p>
-          <a:p>
-            <a:r>
-              <a:rPr i="0"/>
-              <a:t>Barrierefreiheitsstärkungsgesetz unmittelbar. Sie ist eine kommunale</a:t>
-            </a:r>
-          </a:p>
-          <a:p>
-            <a:r>
-              <a:rPr i="0"/>
-              <a:t>Einrichtung in Hessen, also greift Landesrecht: Paragraph vierzehn des</a:t>
-            </a:r>
-          </a:p>
-          <a:p>
-            <a:r>
-              <a:rPr i="0"/>
-              <a:t>Hessischen Behindertengleichstellungsgesetzes und die hessische Verordnung.</a:t>
-            </a:r>
-          </a:p>
-          <a:p>
-            <a:r>
-              <a:rPr i="0"/>
-              <a:t>Gefordert wird Stufe doppel A.</a:t>
-            </a:r>
-          </a:p>
-          <a:p/>
-          <a:p>
-            <a:r>
-              <a:rPr i="0"/>
-              <a:t>### Der Block in der Mitte: Pflicht und freiwillig</a:t>
-            </a:r>
-          </a:p>
-          <a:p/>
-          <a:p>
-            <a:r>
-              <a:rPr i="0"/>
-              <a:t>Der Block in der Mitte zeigt nur die Kriterien, die am Text der</a:t>
-            </a:r>
-          </a:p>
-          <a:p>
-            <a:r>
-              <a:rPr i="0"/>
-              <a:t>Kursbeschreibung selbst hängen. Links steht, was daran verbindlich ist: dass</a:t>
-            </a:r>
-          </a:p>
-          <a:p>
-            <a:r>
-              <a:rPr i="0"/>
-              <a:t>eine Zeile, die eine Gliederungsebene eröffnet, auch technisch als Überschrift</a:t>
-            </a:r>
-          </a:p>
-          <a:p>
-            <a:r>
-              <a:rPr i="0"/>
-              <a:t>ausgezeichnet wird, und dass ein Linktext sagt, wohin er führt. Rechts steht,</a:t>
-            </a:r>
-          </a:p>
-          <a:p>
-            <a:r>
-              <a:rPr i="0"/>
-              <a:t>was freiwillig ist: dass Abkürzungen erklärt werden und dass das Leseniveau</a:t>
-            </a:r>
-          </a:p>
-          <a:p>
-            <a:r>
-              <a:rPr i="0"/>
-              <a:t>zur Zielgruppe passt. Beides ist dreifach A und damit nicht gefordert — und</a:t>
-            </a:r>
-          </a:p>
-          <a:p>
-            <a:r>
-              <a:rPr i="0"/>
-              <a:t>beides gehört zum Kern dieses Projekts. Zwei meiner Regeln liegen dagegen im</a:t>
-            </a:r>
-          </a:p>
-          <a:p>
-            <a:r>
-              <a:rPr i="0"/>
-              <a:t>Pflichtbereich; dazu gleich mehr.</a:t>
-            </a:r>
-          </a:p>
-          <a:p/>
-          <a:p>
-            <a:r>
-              <a:rPr i="0"/>
-              <a:t>### Warum ich nicht mit dem Bußgeld argumentiere</a:t>
-            </a:r>
-          </a:p>
-          <a:p/>
-          <a:p>
-            <a:r>
-              <a:rPr i="0"/>
-              <a:t>Ich könnte jetzt mit einem drohenden Bußgeld argumentieren. Das wäre bequem,</a:t>
-            </a:r>
-          </a:p>
-          <a:p>
-            <a:r>
-              <a:rPr i="0"/>
-              <a:t>und es wäre falsch.</a:t>
-            </a:r>
-          </a:p>
-          <a:p/>
-          <a:p>
-            <a:r>
-              <a:rPr i="0"/>
-              <a:t>### Der Kasten unten</a:t>
-            </a:r>
-          </a:p>
-          <a:p/>
-          <a:p>
-            <a:r>
-              <a:rPr i="0"/>
-              <a:t>Freiwillig heißt aber nicht belanglos. Paragraph drei Absatz eins der</a:t>
-            </a:r>
-          </a:p>
-          <a:p>
-            <a:r>
-              <a:rPr i="0"/>
-              <a:t>hessischen Verordnung verlangt eigenständig, dass Angebote verständlich sind.</a:t>
-            </a:r>
-          </a:p>
-          <a:p>
-            <a:r>
-              <a:rPr i="0"/>
-              <a:t>Die Konformitätsstufe begründet eine Vermutung, keine Obergrenze der Pflicht.</a:t>
-            </a:r>
-          </a:p>
-          <a:p>
-            <a:r>
-              <a:rPr i="0"/>
-              <a:t>Ich argumentiere also nicht gegen das Recht, sondern in einer Lücke, die es</a:t>
-            </a:r>
-          </a:p>
-          <a:p>
-            <a:r>
-              <a:rPr i="0"/>
-              <a:t>selbst offenlässt.</a:t>
-            </a:r>
-          </a:p>
-          <a:p/>
-          <a:p>
-            <a:r>
-              <a:rPr i="0"/>
-              <a:t>Den eigentlichen Auftrag gibt sich das Unternehmen ohnehin selbst. Die</a:t>
-            </a:r>
-          </a:p>
-          <a:p>
-            <a:r>
-              <a:rPr i="0"/>
-              <a:t>Betriebssatzung sagt, die Angebote stünden allen offen, ohne Rücksicht auf</a:t>
-            </a:r>
-          </a:p>
-          <a:p>
-            <a:r>
-              <a:rPr i="0"/>
-              <a:t>Vorbildung. Für ein solches Unternehmen ist es nicht vertretbar, dass</a:t>
-            </a:r>
-          </a:p>
-          <a:p>
-            <a:r>
-              <a:rPr i="0"/>
-              <a:t>ausgerechnet die Kriterien für Menschen mit geringer Vorbildung die</a:t>
-            </a:r>
-          </a:p>
-          <a:p>
-            <a:r>
-              <a:rPr i="0"/>
-              <a:t>freiwilligen sind.</a:t>
+              <a:t>Zunächst noch kurz zur Rechtslage.</a:t>
+            </a:r>
+          </a:p>
+          <a:p/>
+          <a:p>
+            <a:r>
+              <a:rPr i="0"/>
+              <a:t>### Was bedeutet Barrierefreiheit?</a:t>
+            </a:r>
+          </a:p>
+          <a:p>
+            <a:r>
+              <a:rPr i="0"/>
+              <a:t>- Digitale Barrierefreiheit bedeutet, dass eine Website auch für Menschen mit Behinderung nutzbar sein muss. Der Maßstab sind die WCAG, mit drei Stufen: A, Doppel A und Dreifach A.</a:t>
+            </a:r>
+          </a:p>
+          <a:p/>
+          <a:p>
+            <a:r>
+              <a:rPr i="0"/>
+              <a:t>### Welches Recht gilt?</a:t>
+            </a:r>
+          </a:p>
+          <a:p>
+            <a:r>
+              <a:rPr i="0"/>
+              <a:t>- Wichtig: Für die vhs gilt weder die EU-Richtlinie noch das Barrierefreiheitsstärkungsgesetz unmittelbar.</a:t>
+            </a:r>
+          </a:p>
+          <a:p>
+            <a:r>
+              <a:rPr i="0"/>
+              <a:t>- Als kommunale Einrichtung in Hessen greift Landesrecht: Paragraph 14 des Hessischen Behindertengleichstellungsgesetzes und die hessische Verordnung. Gefordert wird Stufe Doppel A.</a:t>
+            </a:r>
+          </a:p>
+          <a:p/>
+          <a:p>
+            <a:r>
+              <a:rPr i="0"/>
+              <a:t>### Callout</a:t>
+            </a:r>
+          </a:p>
+          <a:p>
+            <a:r>
+              <a:rPr i="0"/>
+              <a:t>- Einige der Regeln sind freiwillig, da sie nicht in WCAG Doppel A enthalten sind.</a:t>
+            </a:r>
+          </a:p>
+          <a:p>
+            <a:r>
+              <a:rPr i="0"/>
+              <a:t>- Freiwillig heißt aber nicht belanglos. Paragraph 3 Absatz 1 der hessischen Verordnung verlangt eigenständig, dass Angebote verständlich sind.</a:t>
+            </a:r>
+          </a:p>
+          <a:p>
+            <a:r>
+              <a:rPr i="0"/>
+              <a:t>- Außerdem sagt die Betriebssatzung, dass die Angebote allen offen stehen, ohne Rücksicht auf Vorbildung.</a:t>
             </a:r>
           </a:p>
         </p:txBody>

--- a/ausgabe/Praesentation-KLARTEXT.pptx
+++ b/ausgabe/Praesentation-KLARTEXT.pptx
@@ -1874,90 +1874,21 @@
           <a:p>
             <a:r>
               <a:rPr i="0"/>
-              <a:t>### Was diese Arbeit ist</a:t>
-            </a:r>
-          </a:p>
-          <a:p/>
-          <a:p>
-            <a:r>
-              <a:rPr i="0"/>
-              <a:t>Ich habe ein reales Unternehmen analysiert, einen Prozess gefunden, in dem</a:t>
-            </a:r>
-          </a:p>
-          <a:p>
-            <a:r>
-              <a:rPr i="0"/>
-              <a:t>niemand etwas falsch macht und trotzdem etwas fehlt, und ich habe den Zustand</a:t>
-            </a:r>
-          </a:p>
-          <a:p>
-            <a:r>
-              <a:rPr i="0"/>
-              <a:t>gemessen statt geschätzt.</a:t>
-            </a:r>
-          </a:p>
-          <a:p/>
-          <a:p>
-            <a:r>
-              <a:rPr i="0"/>
-              <a:t>### Meine Lehre aus dem Projekt</a:t>
-            </a:r>
-          </a:p>
-          <a:p/>
-          <a:p>
-            <a:r>
-              <a:rPr i="0"/>
-              <a:t>Der System-Prompt selbst ist an einem Nachmittag geschrieben. Das ist meine</a:t>
-            </a:r>
-          </a:p>
-          <a:p>
-            <a:r>
-              <a:rPr i="0"/>
-              <a:t>eigentliche Lehre aus diesem Projekt. Die Arbeit steckt in allem, was ihn</a:t>
-            </a:r>
-          </a:p>
-          <a:p>
-            <a:r>
-              <a:rPr i="0"/>
-              <a:t>möglich macht: zu wissen, für wen ein Text ist, zu wissen, was Pflicht ist und</a:t>
-            </a:r>
-          </a:p>
-          <a:p>
-            <a:r>
-              <a:rPr i="0"/>
-              <a:t>was Anspruch, und einen Weg zu finden, auf dem die Menschen, die diese Texte</a:t>
-            </a:r>
-          </a:p>
-          <a:p>
-            <a:r>
-              <a:rPr i="0"/>
-              <a:t>schreiben, das Werkzeug nicht als Kontrolle erleben.</a:t>
-            </a:r>
-          </a:p>
-          <a:p/>
-          <a:p>
-            <a:r>
-              <a:rPr i="0"/>
-              <a:t>### Der Link auf der Folie</a:t>
-            </a:r>
-          </a:p>
-          <a:p/>
-          <a:p>
-            <a:r>
-              <a:rPr i="0"/>
-              <a:t>Danke für die Aufmerksamkeit. Die Adresse steht hier auf der Folie, dort läuft</a:t>
-            </a:r>
-          </a:p>
-          <a:p>
-            <a:r>
-              <a:rPr i="0"/>
-              <a:t>der Prototyp weiter — mit dem Prompt in allen Fassungen und den Läufen, die ihr</a:t>
-            </a:r>
-          </a:p>
-          <a:p>
-            <a:r>
-              <a:rPr i="0"/>
-              <a:t>gesehen habt. Jetzt gerne eure Fragen.</a:t>
+              <a:t>- Danke für die Aufmerksamkeit.</a:t>
+            </a:r>
+          </a:p>
+          <a:p/>
+          <a:p>
+            <a:r>
+              <a:rPr i="0"/>
+              <a:t>- Zum Test an einem Kurstext aus dem Portal habe ich die URL zum Prototypen verlinkt — mit dem Prompt in allen Fassungen.</a:t>
+            </a:r>
+          </a:p>
+          <a:p/>
+          <a:p>
+            <a:r>
+              <a:rPr i="0"/>
+              <a:t>- Wenn es Fragen gibt gerne.</a:t>
             </a:r>
           </a:p>
         </p:txBody>

--- a/ausgabe/Praesentation-KLARTEXT.pptx
+++ b/ausgabe/Praesentation-KLARTEXT.pptx
@@ -680,99 +680,82 @@
               <a:t>### Oben rechts: Eng einbinden</a:t>
             </a:r>
           </a:p>
-          <a:p/>
-          <a:p>
-            <a:r>
-              <a:rPr i="0"/>
-              <a:t>Wer entscheidet oder zustimmen muss.</a:t>
-            </a:r>
-          </a:p>
-          <a:p/>
-          <a:p>
+          <a:p>
+            <a:r>
+              <a:rPr i="0"/>
+              <a:t>- Wer entscheidet oder zustimmen muss.</a:t>
+            </a:r>
+          </a:p>
+          <a:p>
+            <a:r>
+              <a:rPr i="0"/>
+              <a:t>- </a:t>
+            </a:r>
             <a:r>
               <a:rPr b="1" i="0"/>
               <a:t>Der Direktor</a:t>
             </a:r>
             <a:r>
               <a:rPr i="0"/>
-              <a:t> — laut Impressum persönlich für die redaktionellen Inhalte</a:t>
-            </a:r>
-          </a:p>
-          <a:p>
-            <a:r>
-              <a:rPr i="0"/>
-              <a:t>verantwortlich.</a:t>
-            </a:r>
-          </a:p>
-          <a:p/>
-          <a:p>
+              <a:t> — laut Impressum persönlich für die redaktionellen Inhalte verantwortlich.</a:t>
+            </a:r>
+          </a:p>
+          <a:p>
+            <a:r>
+              <a:rPr i="0"/>
+              <a:t>- </a:t>
+            </a:r>
             <a:r>
               <a:rPr b="1" i="0"/>
               <a:t>Der Fachbereich des Pilotbereichs</a:t>
             </a:r>
             <a:r>
               <a:rPr i="0"/>
-              <a:t> — er entscheidet über den Text. Und</a:t>
-            </a:r>
-          </a:p>
-          <a:p>
-            <a:r>
-              <a:rPr i="0"/>
-              <a:t>zwar nur dieser eine: Vier Fachbereiche gleichzeitig wären kein Pilot mehr.</a:t>
-            </a:r>
-          </a:p>
-          <a:p/>
-          <a:p>
+              <a:t> — entscheidet über den Text. Und zwar nur dieser eine: Vier gleichzeitig wären kein Pilot mehr.</a:t>
+            </a:r>
+          </a:p>
+          <a:p>
+            <a:r>
+              <a:rPr i="0"/>
+              <a:t>- </a:t>
+            </a:r>
             <a:r>
               <a:rPr b="1" i="0"/>
               <a:t>Die Redaktion des Programmhefts</a:t>
             </a:r>
             <a:r>
               <a:rPr i="0"/>
-              <a:t> — prüft Texte für den Druck schon heute,</a:t>
-            </a:r>
-          </a:p>
-          <a:p>
-            <a:r>
-              <a:rPr i="0"/>
-              <a:t>weiß also, wie Textprüfung geht.</a:t>
-            </a:r>
-          </a:p>
-          <a:p/>
-          <a:p>
+              <a:t> — prüft Texte für den Druck schon heute, weiß also, wie Textprüfung geht.</a:t>
+            </a:r>
+          </a:p>
+          <a:p>
+            <a:r>
+              <a:rPr i="0"/>
+              <a:t>- </a:t>
+            </a:r>
             <a:r>
               <a:rPr b="1" i="0"/>
               <a:t>Der Personalrat</a:t>
             </a:r>
             <a:r>
               <a:rPr i="0"/>
-              <a:t> — hier ist die Einordnung eigentlich zu schwach. Sein</a:t>
-            </a:r>
-          </a:p>
-          <a:p>
-            <a:r>
-              <a:rPr i="0"/>
-              <a:t>Einfluss ist kein hoher, sondern ein </a:t>
-            </a:r>
-            <a:r>
-              <a:rPr b="1" i="0"/>
+              <a:t> — hier ist die Einordnung zu schwach. Sein Einfluss ist kein hoher, sondern ein </a:t>
+            </a:r>
+            <a:r>
+              <a:rPr b="1" i="0">
+                <a:solidFill>
+                  <a:srgbClr val="A4162B"/>
+                </a:solidFill>
+              </a:rPr>
               <a:t>sperrender</a:t>
             </a:r>
             <a:r>
               <a:rPr i="0"/>
-              <a:t>: Die Einführung des</a:t>
-            </a:r>
-          </a:p>
-          <a:p>
-            <a:r>
-              <a:rPr i="0"/>
-              <a:t>Werkzeugs ist mitbestimmungspflichtig, sie braucht seine Zustimmung. Seine</a:t>
-            </a:r>
-          </a:p>
-          <a:p>
-            <a:r>
-              <a:rPr i="0"/>
-              <a:t>zwei von sechzehn Sitzen in der Betriebskommission sind daneben bedeutungslos.</a:t>
+              <a:t>: Die Einführung ist mitbestimmungspflichtig. </a:t>
+            </a:r>
+            <a:r>
+              <a:rPr i="1"/>
+              <a:t>Seine zwei von sechzehn Sitzen in der Betriebskommission sind daneben bedeutungslos.</a:t>
             </a:r>
           </a:p>
           <a:p/>
@@ -782,28 +765,18 @@
               <a:t>### Unten links: Informieren</a:t>
             </a:r>
           </a:p>
-          <a:p/>
-          <a:p>
-            <a:r>
-              <a:rPr i="0"/>
-              <a:t>Nur dieser eine Fachbereich ist im Pilot — die anderen erfahren davon.</a:t>
-            </a:r>
-          </a:p>
-          <a:p/>
-          <a:p>
+          <a:p>
+            <a:r>
+              <a:rPr i="0"/>
+              <a:t>- </a:t>
+            </a:r>
             <a:r>
               <a:rPr b="1" i="0"/>
               <a:t>Die drei übrigen Fachbereiche</a:t>
             </a:r>
             <a:r>
               <a:rPr i="0"/>
-              <a:t> — sollen wissen, dass es läuft, und sehen,</a:t>
-            </a:r>
-          </a:p>
-          <a:p>
-            <a:r>
-              <a:rPr i="0"/>
-              <a:t>was herauskommt. Im Pilot sind sie nicht dabei.</a:t>
+              <a:t> — sollen wissen, dass es läuft, und sehen, was herauskommt. Im Pilot sind sie nicht dabei.</a:t>
             </a:r>
           </a:p>
           <a:p/>
@@ -813,15 +786,17 @@
               <a:t>### Oben links: Beobachten</a:t>
             </a:r>
           </a:p>
-          <a:p/>
-          <a:p>
-            <a:r>
-              <a:rPr i="0"/>
-              <a:t>Hoher Einfluss, aber mein Projekt verändert ihre Arbeit nicht.</a:t>
-            </a:r>
-          </a:p>
-          <a:p/>
-          <a:p>
+          <a:p>
+            <a:r>
+              <a:rPr i="0"/>
+              <a:t>- Hoher Einfluss, aber ihre Arbeit verändert das Projekt nicht.</a:t>
+            </a:r>
+          </a:p>
+          <a:p>
+            <a:r>
+              <a:rPr i="0"/>
+              <a:t>- </a:t>
+            </a:r>
             <a:r>
               <a:rPr b="1" i="0"/>
               <a:t>Die städtische IT</a:t>
@@ -831,25 +806,25 @@
               <a:t> — bleibt für die technische Seite zuständig.</a:t>
             </a:r>
           </a:p>
-          <a:p/>
-          <a:p>
+          <a:p>
+            <a:r>
+              <a:rPr i="0"/>
+              <a:t>- </a:t>
+            </a:r>
             <a:r>
               <a:rPr b="1" i="0"/>
               <a:t>Advellence</a:t>
             </a:r>
             <a:r>
               <a:rPr i="0"/>
-              <a:t> — die Schweizer Firma, die laut Impressum das Portal</a:t>
-            </a:r>
-          </a:p>
-          <a:p>
-            <a:r>
-              <a:rPr i="0"/>
-              <a:t>programmiert.</a:t>
-            </a:r>
-          </a:p>
-          <a:p/>
-          <a:p>
+              <a:t> — programmiert laut Impressum das Portal.</a:t>
+            </a:r>
+          </a:p>
+          <a:p>
+            <a:r>
+              <a:rPr i="0"/>
+              <a:t>- </a:t>
+            </a:r>
             <a:r>
               <a:rPr b="1" i="0"/>
               <a:t>Die Betriebskommission</a:t>
@@ -859,15 +834,18 @@
               <a:t> — Aufsichtsgremium.</a:t>
             </a:r>
           </a:p>
-          <a:p/>
-          <a:p>
+          <a:p>
+            <a:r>
+              <a:rPr i="0"/>
+              <a:t>- </a:t>
+            </a:r>
             <a:r>
               <a:rPr b="1" i="0"/>
               <a:t>Der Volkshochschul-Verband</a:t>
             </a:r>
             <a:r>
               <a:rPr i="0"/>
-              <a:t> — stellt den KI-Zugang, den ich nutze.</a:t>
+              <a:t> — stellt den KI-Zugang.</a:t>
             </a:r>
           </a:p>
           <a:p/>
@@ -877,88 +855,58 @@
               <a:t>### Unten rechts: Konsultieren</a:t>
             </a:r>
           </a:p>
-          <a:p/>
-          <a:p>
-            <a:r>
-              <a:rPr i="0"/>
-              <a:t>Der Quadrant, der mich am meisten beschäftigt hat.</a:t>
-            </a:r>
-          </a:p>
-          <a:p/>
-          <a:p>
+          <a:p>
+            <a:r>
+              <a:rPr i="0"/>
+              <a:t>- Der Quadrant, der mich am meisten beschäftigt hat.</a:t>
+            </a:r>
+          </a:p>
+          <a:p>
+            <a:r>
+              <a:rPr i="0"/>
+              <a:t>- </a:t>
+            </a:r>
             <a:r>
               <a:rPr b="1" i="0"/>
               <a:t>Die Kursleitungen auf Honorarbasis</a:t>
             </a:r>
             <a:r>
               <a:rPr i="0"/>
-              <a:t> — maximal betroffen, denn in der</a:t>
-            </a:r>
-          </a:p>
-          <a:p>
-            <a:r>
-              <a:rPr i="0"/>
-              <a:t>Branche schreiben sie viele dieser Texte. In keinem Gremium sitzen sie, und</a:t>
-            </a:r>
-          </a:p>
-          <a:p>
-            <a:r>
-              <a:rPr i="0"/>
-              <a:t>vorschreiben kann man ihnen als Honorarkräften nichts. Einen Kanal haben sie</a:t>
-            </a:r>
-          </a:p>
-          <a:p>
-            <a:r>
-              <a:rPr i="0"/>
-              <a:t>aber doch: Arbeitnehmerähnliche Personen gelten nach dem</a:t>
-            </a:r>
-          </a:p>
-          <a:p>
-            <a:r>
-              <a:rPr i="0"/>
-              <a:t>Personalvertretungsgesetz als Beschäftigte, der Personalrat vertritt sie mit.</a:t>
-            </a:r>
-          </a:p>
-          <a:p/>
-          <a:p>
+              <a:t> — maximal betroffen, denn in der Branche schreiben sie viele dieser Texte. In keinem Gremium sitzen sie, und vorschreiben kann man ihnen nichts.</a:t>
+            </a:r>
+          </a:p>
+          <a:p>
+            <a:r>
+              <a:rPr i="0"/>
+              <a:t>- Einen Kanal haben sie doch: Arbeitnehmerähnliche Personen gelten nach dem Personalvertretungsgesetz als Beschäftigte, der Personalrat vertritt sie mit.</a:t>
+            </a:r>
+          </a:p>
+          <a:p>
+            <a:r>
+              <a:rPr i="0"/>
+              <a:t>- </a:t>
+            </a:r>
             <a:r>
               <a:rPr b="1" i="0"/>
               <a:t>Die Teilnehmenden</a:t>
             </a:r>
             <a:r>
               <a:rPr i="0"/>
-              <a:t> — besonders in den Deutschkursen und in der</a:t>
-            </a:r>
-          </a:p>
-          <a:p>
-            <a:r>
-              <a:rPr i="0"/>
-              <a:t>Grundbildung. Für sie ist das ganze Projekt gemacht, und sie haben keine</a:t>
-            </a:r>
-          </a:p>
-          <a:p>
-            <a:r>
-              <a:rPr i="0"/>
-              <a:t>Stimme, in keinem Gremium und in keinem Gesetz.</a:t>
-            </a:r>
-          </a:p>
-          <a:p/>
-          <a:p>
-            <a:r>
-              <a:rPr i="0"/>
-              <a:t>Bei ihnen ist Beteiligung kein guter Stil, sondern das einzige Instrument, das</a:t>
-            </a:r>
-          </a:p>
-          <a:p>
-            <a:r>
-              <a:rPr i="0"/>
-              <a:t>überhaupt zur Verfügung steht. Was das praktisch heißt, steht auf der nächsten</a:t>
-            </a:r>
-          </a:p>
-          <a:p>
-            <a:r>
-              <a:rPr i="0"/>
-              <a:t>Folie.</a:t>
+              <a:t> — besonders in Deutschkursen und Grundbildung. </a:t>
+            </a:r>
+            <a:r>
+              <a:rPr b="1" i="0">
+                <a:solidFill>
+                  <a:srgbClr val="A4162B"/>
+                </a:solidFill>
+              </a:rPr>
+              <a:t>Für sie ist das Projekt gemacht, und sie haben keine Stimme — in keinem Gremium und in keinem Gesetz.</a:t>
+            </a:r>
+          </a:p>
+          <a:p>
+            <a:r>
+              <a:rPr i="0"/>
+              <a:t>- Bei ihnen ist Beteiligung kein guter Stil, sondern das einzige Instrument, das es überhaupt gibt.</a:t>
             </a:r>
           </a:p>
         </p:txBody>
@@ -1035,13 +983,13 @@
           <a:p>
             <a:r>
               <a:rPr i="0"/>
-              <a:t>Verlustangst, fehlende Perspektive und Gewohnheit. Ich zeige für jede einen</a:t>
-            </a:r>
-          </a:p>
-          <a:p>
-            <a:r>
-              <a:rPr i="0"/>
-              <a:t>Fall, den es hier wirklich gibt.</a:t>
+              <a:t>Verlustangst, fehlende Perspektive und Gewohnheit. Für jede gibt es hier einen</a:t>
+            </a:r>
+          </a:p>
+          <a:p>
+            <a:r>
+              <a:rPr i="0"/>
+              <a:t>Fall, den es wirklich gibt.</a:t>
             </a:r>
           </a:p>
           <a:p/>
@@ -1051,205 +999,158 @@
               <a:t>### Unsicherheit · im ganzen Haus</a:t>
             </a:r>
           </a:p>
+          <a:p>
+            <a:r>
+              <a:rPr i="0"/>
+              <a:t>- Die Frage, die als Erstes kommt: Schreibt die KI jetzt unsere Texte?</a:t>
+            </a:r>
+          </a:p>
+          <a:p>
+            <a:r>
+              <a:rPr i="0"/>
+              <a:t>- Nein. Sie schlägt vor, mehr nicht. Entschieden und veröffentlicht wird von Menschen.</a:t>
+            </a:r>
+          </a:p>
+          <a:p>
+            <a:r>
+              <a:rPr i="0"/>
+              <a:t>- </a:t>
+            </a:r>
+            <a:r>
+              <a:rPr b="1" i="0">
+                <a:solidFill>
+                  <a:srgbClr val="A4162B"/>
+                </a:solidFill>
+              </a:rPr>
+              <a:t>Das ist keine Beruhigung, sondern der Zuschnitt des Werkzeugs.</a:t>
+            </a:r>
+          </a:p>
           <a:p/>
           <a:p>
             <a:r>
               <a:rPr i="0"/>
-              <a:t>Die Frage, die im ganzen Haus als Erstes kommt: Schreibt die</a:t>
-            </a:r>
-          </a:p>
-          <a:p>
-            <a:r>
-              <a:rPr i="0"/>
-              <a:t>KI jetzt unsere Texte? Nein. Sie schlägt vor, mehr nicht. Entschieden und</a:t>
-            </a:r>
-          </a:p>
-          <a:p>
-            <a:r>
-              <a:rPr i="0"/>
-              <a:t>veröffentlicht wird von Menschen. Das ist keine Beruhigung, sondern der</a:t>
-            </a:r>
-          </a:p>
-          <a:p>
-            <a:r>
-              <a:rPr i="0"/>
-              <a:t>Zuschnitt des Werkzeugs.</a:t>
+              <a:t>### Verlustangst · Fachbereich</a:t>
+            </a:r>
+          </a:p>
+          <a:p>
+            <a:r>
+              <a:rPr i="0"/>
+              <a:t>- Der einzige Einwand, der noch offen ist.</a:t>
+            </a:r>
+          </a:p>
+          <a:p>
+            <a:r>
+              <a:rPr i="0"/>
+              <a:t>- Eine Kursbeschreibung ist selten von einer Hand: Anmeldehinweis, Beschreibung der Niveaustufe — solche Bausteine stehen wortgleich in vielen Kursen und werden nicht dort gepflegt, wo der Kurs angeboten wird.</a:t>
+            </a:r>
+          </a:p>
+          <a:p>
+            <a:r>
+              <a:rPr i="0"/>
+              <a:t>- Wer die Befunde bekommt, darf den Text also oft gar nicht ändern.</a:t>
+            </a:r>
+          </a:p>
+          <a:p>
+            <a:r>
+              <a:rPr i="0"/>
+              <a:t>- Keine Angst vor der Maschine, sondern die Aussicht, für etwas geradezustehen, das einem nicht gehört.</a:t>
+            </a:r>
+          </a:p>
+          <a:p>
+            <a:r>
+              <a:rPr i="0"/>
+              <a:t>- Die Antwort ist deshalb keine Schulung, sondern eine Zuständigkeitsfrage — und die gehört vor den Pilot.</a:t>
             </a:r>
           </a:p>
           <a:p/>
           <a:p>
             <a:r>
               <a:rPr i="0"/>
-              <a:t>### Verlustangst · Fachbereich</a:t>
+              <a:t>### Fehlende Perspektive · Kursleitung</a:t>
+            </a:r>
+          </a:p>
+          <a:p>
+            <a:r>
+              <a:rPr i="0"/>
+              <a:t>- Bei den Honorarkräften schärfer als bei allen anderen: Ihre Abrechnungseinheit ist die Unterrichtsstunde, Textarbeit kommt darin nicht vor.</a:t>
+            </a:r>
+          </a:p>
+          <a:p>
+            <a:r>
+              <a:rPr i="0"/>
+              <a:t>- Der Einwand ist berechtigt und gehört auch so beantwortet.</a:t>
+            </a:r>
+          </a:p>
+          <a:p>
+            <a:r>
+              <a:rPr i="0"/>
+              <a:t>- Die Antwort ist der Zuschnitt: Geprüft wird im Fachbereich, an dem Text, der dort eingeht.</a:t>
+            </a:r>
+          </a:p>
+          <a:p>
+            <a:r>
+              <a:rPr i="0"/>
+              <a:t>- </a:t>
+            </a:r>
+            <a:r>
+              <a:rPr i="1"/>
+              <a:t>Das schützt auch ihren Status: Verbindliche Regeln und ein Protokoll je Text wären genau die Merkmale, an denen sich eine Scheinselbständigkeit festmachen lässt.</a:t>
             </a:r>
           </a:p>
           <a:p/>
           <a:p>
             <a:r>
               <a:rPr i="0"/>
-              <a:t>Der einzige Einwand, der noch offen ist. Eine Kursbeschreibung ist selten von</a:t>
-            </a:r>
-          </a:p>
-          <a:p>
-            <a:r>
-              <a:rPr i="0"/>
-              <a:t>einer Hand: Der Anmeldehinweis, die Beschreibung der Niveaustufe — solche</a:t>
-            </a:r>
-          </a:p>
-          <a:p>
-            <a:r>
-              <a:rPr i="0"/>
-              <a:t>Bausteine stehen wortgleich in vielen Kursen und werden nicht in dem Bereich</a:t>
-            </a:r>
-          </a:p>
-          <a:p>
-            <a:r>
-              <a:rPr i="0"/>
-              <a:t>gepflegt, der den Kurs anbietet. Wer die Befunde bekommt, darf den Text also</a:t>
-            </a:r>
-          </a:p>
-          <a:p>
-            <a:r>
-              <a:rPr i="0"/>
-              <a:t>oft gar nicht ändern. Das ist keine Angst vor der Maschine, sondern die</a:t>
-            </a:r>
-          </a:p>
-          <a:p>
-            <a:r>
-              <a:rPr i="0"/>
-              <a:t>Aussicht, für etwas geradezustehen, das einem nicht gehört. Die Antwort ist</a:t>
-            </a:r>
-          </a:p>
-          <a:p>
-            <a:r>
-              <a:rPr i="0"/>
-              <a:t>deshalb keine Schulung, sondern eine Zuständigkeitsfrage — und die gehört vor</a:t>
-            </a:r>
-          </a:p>
-          <a:p>
-            <a:r>
-              <a:rPr i="0"/>
-              <a:t>den Pilot.</a:t>
+              <a:t>### Gewohnheit · Redaktion des Programmhefts</a:t>
+            </a:r>
+          </a:p>
+          <a:p>
+            <a:r>
+              <a:rPr i="0"/>
+              <a:t>- Der Satz, der jedes Qualitätsprojekt begleitet: Es hat sich doch nie jemand beschwert. Und er stimmt vermutlich.</a:t>
+            </a:r>
+          </a:p>
+          <a:p>
+            <a:r>
+              <a:rPr i="0"/>
+              <a:t>- Diese Redaktion prüft als Einzige im Haus heute schon Texte. Sie ist keine Bremse, sondern der nächstliegende Verbündete — und so sollte man ihr auch begegnen.</a:t>
+            </a:r>
+          </a:p>
+          <a:p>
+            <a:r>
+              <a:rPr i="0"/>
+              <a:t>- Der Punkt ist nur: </a:t>
+            </a:r>
+            <a:r>
+              <a:rPr b="1" i="0">
+                <a:solidFill>
+                  <a:srgbClr val="A4162B"/>
+                </a:solidFill>
+              </a:rPr>
+              <a:t>Wer sich beschwert, hat den Text gelesen und verstanden.</a:t>
+            </a:r>
+          </a:p>
+          <a:p>
+            <a:r>
+              <a:rPr i="0"/>
+              <a:t>- Die Menschen, um die es geht, fragen nicht nach und melden sich auch nicht an. Ihr Fehlen sieht von innen aus wie Zufriedenheit. </a:t>
+            </a:r>
+            <a:r>
+              <a:rPr i="1"/>
+              <a:t>Dass es bisher niemand gesehen hat, ist deshalb kein Versäumnis, sondern liegt in der Sache.</a:t>
             </a:r>
           </a:p>
           <a:p/>
           <a:p>
             <a:r>
               <a:rPr i="0"/>
-              <a:t>### Fehlende Perspektive · Kursleitung</a:t>
-            </a:r>
-          </a:p>
-          <a:p/>
-          <a:p>
-            <a:r>
-              <a:rPr i="0"/>
-              <a:t>Bei den Honorarkräften schärfer als bei allen</a:t>
-            </a:r>
-          </a:p>
-          <a:p>
-            <a:r>
-              <a:rPr i="0"/>
-              <a:t>anderen, weil ihre Abrechnungseinheit die Unterrichtsstunde ist. Textarbeit</a:t>
-            </a:r>
-          </a:p>
-          <a:p>
-            <a:r>
-              <a:rPr i="0"/>
-              <a:t>kommt darin nicht vor, der Einwand ist also berechtigt und gehört auch so</a:t>
-            </a:r>
-          </a:p>
-          <a:p>
-            <a:r>
-              <a:rPr i="0"/>
-              <a:t>beantwortet. Die Antwort ist der Zuschnitt: Geprüft wird im</a:t>
-            </a:r>
-          </a:p>
-          <a:p>
-            <a:r>
-              <a:rPr i="0"/>
-              <a:t>Fachbereich, an dem Text, der dort eingeht. Das schützt auch ihren Status:</a:t>
-            </a:r>
-          </a:p>
-          <a:p>
-            <a:r>
-              <a:rPr i="0"/>
-              <a:t>Verbindliche Regeln und ein Protokoll je Text wären genau die Merkmale, an</a:t>
-            </a:r>
-          </a:p>
-          <a:p>
-            <a:r>
-              <a:rPr i="0"/>
-              <a:t>denen sich eine Scheinselbständigkeit festmachen lässt.</a:t>
-            </a:r>
-          </a:p>
-          <a:p/>
-          <a:p>
-            <a:r>
-              <a:rPr i="0"/>
-              <a:t>### Gewohnheit · Redaktion des Programmhefts</a:t>
-            </a:r>
-          </a:p>
-          <a:p/>
-          <a:p>
-            <a:r>
-              <a:rPr i="0"/>
-              <a:t>Der Satz, der jedes Qualitätsprojekt begleitet: Es hat sich doch nie jemand</a:t>
-            </a:r>
-          </a:p>
-          <a:p>
-            <a:r>
-              <a:rPr i="0"/>
-              <a:t>beschwert. Und er stimmt vermutlich. Entscheidend ist, wie man darauf antwortet:</a:t>
-            </a:r>
-          </a:p>
-          <a:p>
-            <a:r>
-              <a:rPr i="0"/>
-              <a:t>Diese Redaktion prüft Texte im Haus als Einzige schon heute. Sie ist keine</a:t>
-            </a:r>
-          </a:p>
-          <a:p>
-            <a:r>
-              <a:rPr i="0"/>
-              <a:t>Bremse, sie ist der nächstliegende Verbündete, und so sollte man ihr auch</a:t>
-            </a:r>
-          </a:p>
-          <a:p>
-            <a:r>
-              <a:rPr i="0"/>
-              <a:t>begegnen. Der Punkt ist nur: Wer sich beschwert, hat den Text gelesen und</a:t>
-            </a:r>
-          </a:p>
-          <a:p>
-            <a:r>
-              <a:rPr i="0"/>
-              <a:t>verstanden. Die Menschen, um die es hier geht, fragen nicht nach und melden sich</a:t>
-            </a:r>
-          </a:p>
-          <a:p>
-            <a:r>
-              <a:rPr i="0"/>
-              <a:t>auch nicht an. Ihr Fehlen sieht von innen aus wie Zufriedenheit — dass es bisher</a:t>
-            </a:r>
-          </a:p>
-          <a:p>
-            <a:r>
-              <a:rPr i="0"/>
-              <a:t>niemand gesehen hat, ist deshalb kein Versäumnis, sondern liegt in der Sache.</a:t>
-            </a:r>
-          </a:p>
-          <a:p/>
-          <a:p>
-            <a:r>
-              <a:rPr i="0"/>
               <a:t>### Der Kasten unten</a:t>
             </a:r>
           </a:p>
-          <a:p/>
-          <a:p>
-            <a:r>
-              <a:rPr i="0"/>
-              <a:t>Betroffene zu Beteiligten machen heißt hier: entscheiden, bevor geschult wird.</a:t>
+          <a:p>
+            <a:r>
+              <a:rPr i="0"/>
+              <a:t>- Betroffene zu Beteiligten machen heißt hier: entscheiden, bevor geschult wird.</a:t>
             </a:r>
           </a:p>
         </p:txBody>
@@ -1320,7 +1221,7 @@
           <a:p>
             <a:r>
               <a:rPr i="0"/>
-              <a:t>Der Zeitplan, drei Monate, drei Stränge, die neun Phasen aus der</a:t>
+              <a:t>Der Zeitplan: drei Monate, drei Stränge, die neun Phasen aus der</a:t>
             </a:r>
           </a:p>
           <a:p>
@@ -1339,70 +1240,64 @@
           <a:p>
             <a:r>
               <a:rPr i="0"/>
-              <a:t>### Monat 2, Strang Kommunikation: Training</a:t>
+              <a:t>### Monat 2, Kommunikation: Training</a:t>
+            </a:r>
+          </a:p>
+          <a:p>
+            <a:r>
+              <a:rPr i="0"/>
+              <a:t>- Keine Kür, sondern Pflicht: </a:t>
+            </a:r>
+            <a:r>
+              <a:rPr b="1" i="0"/>
+              <a:t>Artikel 4 der KI-Verordnung</a:t>
+            </a:r>
+            <a:r>
+              <a:rPr i="0"/>
+              <a:t> verlangt seit Februar 2025 ausreichende KI-Kompetenz.</a:t>
+            </a:r>
+          </a:p>
+          <a:p>
+            <a:r>
+              <a:rPr i="0"/>
+              <a:t>- Und zwar für das Personal und für alle, die im Auftrag mit Betrieb und Nutzung befasst sind.</a:t>
+            </a:r>
+          </a:p>
+          <a:p>
+            <a:r>
+              <a:rPr i="0"/>
+              <a:t>- Deshalb steht in der Zelle nicht „Personal“, sondern „alle, die bedienen“. </a:t>
+            </a:r>
+            <a:r>
+              <a:rPr i="1"/>
+              <a:t>Wer nicht bedient, braucht die Schulung nicht — deshalb bleiben die Kursleitungen aus dieser Kette.</a:t>
             </a:r>
           </a:p>
           <a:p/>
           <a:p>
             <a:r>
               <a:rPr i="0"/>
-              <a:t>Erstens das Training im zweiten Monat. Das ist keine Kür, sondern Pflicht:</a:t>
-            </a:r>
-          </a:p>
-          <a:p>
-            <a:r>
-              <a:rPr i="0"/>
-              <a:t>Artikel vier der KI-Verordnung verlangt seit Februar zweitausendfünfundzwanzig</a:t>
-            </a:r>
-          </a:p>
-          <a:p>
-            <a:r>
-              <a:rPr i="0"/>
-              <a:t>ausreichende KI-Kompetenz, und zwar für das Personal und für alle, die im</a:t>
-            </a:r>
-          </a:p>
-          <a:p>
-            <a:r>
-              <a:rPr i="0"/>
-              <a:t>Auftrag mit Betrieb und Nutzung befasst sind. Deshalb steht in der Zelle nicht</a:t>
-            </a:r>
-          </a:p>
-          <a:p>
-            <a:r>
-              <a:rPr i="0"/>
-              <a:t>Personal, sondern alle, die bedienen. Wer nicht bedient, braucht die Schulung</a:t>
-            </a:r>
-          </a:p>
-          <a:p>
-            <a:r>
-              <a:rPr i="0"/>
-              <a:t>nicht — das ist der Grund, warum die Kursleitungen aus dieser Kette bleiben.</a:t>
-            </a:r>
-          </a:p>
-          <a:p/>
-          <a:p>
-            <a:r>
-              <a:rPr i="0"/>
               <a:t>### Strang Change: erst fragen, dann handeln</a:t>
             </a:r>
           </a:p>
-          <a:p/>
-          <a:p>
-            <a:r>
-              <a:rPr i="0"/>
-              <a:t>Und zweitens die Reihenfolge im Change-Strang: erst fragen, dann handeln. Die</a:t>
-            </a:r>
-          </a:p>
-          <a:p>
-            <a:r>
-              <a:rPr i="0"/>
-              <a:t>Freigabe der Textbausteine steht deshalb im ersten Monat und nicht im zweiten,</a:t>
-            </a:r>
-          </a:p>
-          <a:p>
-            <a:r>
-              <a:rPr i="0"/>
-              <a:t>sonst läuft der Quick Win auf eine Zuständigkeit, die niemand hat.</a:t>
+          <a:p>
+            <a:r>
+              <a:rPr i="0"/>
+              <a:t>- Die Freigabe der Textbausteine steht im ersten Monat, nicht im zweiten.</a:t>
+            </a:r>
+          </a:p>
+          <a:p>
+            <a:r>
+              <a:rPr i="0"/>
+              <a:t>- </a:t>
+            </a:r>
+            <a:r>
+              <a:rPr b="1" i="0">
+                <a:solidFill>
+                  <a:srgbClr val="A4162B"/>
+                </a:solidFill>
+              </a:rPr>
+              <a:t>Sonst läuft der Quick Win auf eine Zuständigkeit, die niemand hat.</a:t>
             </a:r>
           </a:p>
         </p:txBody>
@@ -1473,13 +1368,17 @@
           <a:p>
             <a:r>
               <a:rPr i="0"/>
-              <a:t>Die ersten dreißig Tage, und das ist keine Aufzählung, sondern eine</a:t>
-            </a:r>
-          </a:p>
-          <a:p>
-            <a:r>
-              <a:rPr i="0"/>
-              <a:t>Reihenfolge: Jeder Schritt bedingt den nächsten.</a:t>
+              <a:t>Die ersten dreißig Tage. Keine Aufzählung, sondern eine Reihenfolge:</a:t>
+            </a:r>
+          </a:p>
+          <a:p>
+            <a:r>
+              <a:rPr b="1" i="0">
+                <a:solidFill>
+                  <a:srgbClr val="A4162B"/>
+                </a:solidFill>
+              </a:rPr>
+              <a:t>Jeder Schritt bedingt den nächsten.</a:t>
             </a:r>
           </a:p>
           <a:p/>
@@ -1492,31 +1391,57 @@
           <a:p>
             <a:r>
               <a:rPr i="0"/>
-              <a:t>Die Dienstvereinbarung zuerst, aus dem Grund von eben. Dann einen</a:t>
-            </a:r>
-          </a:p>
-          <a:p>
-            <a:r>
-              <a:rPr i="0"/>
-              <a:t>Programmbereich gewinnen, und zwar freiwillig — ein zugewiesener liefert kein</a:t>
-            </a:r>
-          </a:p>
-          <a:p>
-            <a:r>
-              <a:rPr i="0"/>
-              <a:t>belastbares Ergebnis, sondern nur Erfüllung. Dann die Freigabe der Bausteine.</a:t>
-            </a:r>
-          </a:p>
-          <a:p>
-            <a:r>
-              <a:rPr i="0"/>
-              <a:t>Und erst als viertes das Technische, den Assistenten anlegen. Es kostet nichts:</a:t>
-            </a:r>
-          </a:p>
-          <a:p>
-            <a:r>
-              <a:rPr i="0"/>
-              <a:t>kein Einkauf, keine neue Stelle, der KI-Zugang ist da.</a:t>
+              <a:t>- Die </a:t>
+            </a:r>
+            <a:r>
+              <a:rPr b="1" i="0"/>
+              <a:t>Dienstvereinbarung</a:t>
+            </a:r>
+            <a:r>
+              <a:rPr i="0"/>
+              <a:t> zuerst, aus dem Grund von eben.</a:t>
+            </a:r>
+          </a:p>
+          <a:p>
+            <a:r>
+              <a:rPr i="0"/>
+              <a:t>- Dann einen </a:t>
+            </a:r>
+            <a:r>
+              <a:rPr b="1" i="0"/>
+              <a:t>Programmbereich</a:t>
+            </a:r>
+            <a:r>
+              <a:rPr i="0"/>
+              <a:t> gewinnen, und zwar freiwillig — ein zugewiesener liefert kein belastbares Ergebnis, sondern nur Erfüllung.</a:t>
+            </a:r>
+          </a:p>
+          <a:p>
+            <a:r>
+              <a:rPr i="0"/>
+              <a:t>- Dann die </a:t>
+            </a:r>
+            <a:r>
+              <a:rPr b="1" i="0"/>
+              <a:t>Freigabe der Bausteine</a:t>
+            </a:r>
+            <a:r>
+              <a:rPr i="0"/>
+              <a:t>.</a:t>
+            </a:r>
+          </a:p>
+          <a:p>
+            <a:r>
+              <a:rPr i="0"/>
+              <a:t>- Und erst als viertes das Technische, den </a:t>
+            </a:r>
+            <a:r>
+              <a:rPr b="1" i="0"/>
+              <a:t>Assistenten anlegen</a:t>
+            </a:r>
+            <a:r>
+              <a:rPr i="0"/>
+              <a:t>. Das kostet nichts: kein Einkauf, keine neue Stelle, der KI-Zugang ist da.</a:t>
             </a:r>
           </a:p>
           <a:p/>
@@ -1526,29 +1451,22 @@
               <a:t>### Der Kasten unten: der dritte Schritt</a:t>
             </a:r>
           </a:p>
-          <a:p/>
-          <a:p>
-            <a:r>
-              <a:rPr i="0"/>
-              <a:t>Der dritte Schritt ist der, den man am ehesten überspringt, und der teuerste.</a:t>
-            </a:r>
-          </a:p>
-          <a:p>
-            <a:r>
-              <a:rPr i="0"/>
-              <a:t>Lässt man ihn aus, liefert der Pilot eine Liste von Befunden, die im</a:t>
-            </a:r>
-          </a:p>
-          <a:p>
-            <a:r>
-              <a:rPr i="0"/>
-              <a:t>Pilotbereich niemand ändern darf — und das Werkzeug hat sich beim ersten</a:t>
-            </a:r>
-          </a:p>
-          <a:p>
-            <a:r>
-              <a:rPr i="0"/>
-              <a:t>Durchlauf selbst erledigt.</a:t>
+          <a:p>
+            <a:r>
+              <a:rPr i="0"/>
+              <a:t>- Der, den man am ehesten überspringt, und der teuerste.</a:t>
+            </a:r>
+          </a:p>
+          <a:p>
+            <a:r>
+              <a:rPr i="0"/>
+              <a:t>- Lässt man ihn aus, liefert der Pilot eine Liste von Befunden, die im Pilotbereich niemand ändern darf.</a:t>
+            </a:r>
+          </a:p>
+          <a:p>
+            <a:r>
+              <a:rPr i="0"/>
+              <a:t>- Das Werkzeug hat sich dann beim ersten Durchlauf selbst erledigt.</a:t>
             </a:r>
           </a:p>
         </p:txBody>
@@ -1629,181 +1547,133 @@
               <a:t>### Die ersten drei Kennzahlen</a:t>
             </a:r>
           </a:p>
+          <a:p>
+            <a:r>
+              <a:rPr i="0"/>
+              <a:t>- Vier Kennzahlen, jede mit Ausgangswert und Ziel.</a:t>
+            </a:r>
+          </a:p>
+          <a:p>
+            <a:r>
+              <a:rPr i="0"/>
+              <a:t>- Die Befundquote soll von 57 Prozent unter 25 fallen.</a:t>
+            </a:r>
+          </a:p>
+          <a:p>
+            <a:r>
+              <a:rPr i="0"/>
+              <a:t>- Alle neuen Texte im Pilotbereich sollen geprüft sein.</a:t>
+            </a:r>
+          </a:p>
+          <a:p>
+            <a:r>
+              <a:rPr i="0"/>
+              <a:t>- Von den 31 Texten für Deutschkurse auf A1 und A2, die heute alle Wörter über dem Niveau ihrer Leser enthalten, sollen höchstens noch zehn betroffen sein.</a:t>
+            </a:r>
+          </a:p>
           <a:p/>
           <a:p>
             <a:r>
               <a:rPr i="0"/>
-              <a:t>Vier Kennzahlen mit Ausgangswert und Ziel. Die Befundquote soll von</a:t>
-            </a:r>
-          </a:p>
-          <a:p>
-            <a:r>
-              <a:rPr i="0"/>
-              <a:t>siebenundfünfzig Prozent unter fünfundzwanzig fallen. Alle neuen Texte im</a:t>
-            </a:r>
-          </a:p>
-          <a:p>
-            <a:r>
-              <a:rPr i="0"/>
-              <a:t>Pilotbereich sollen geprüft sein. Und von den einunddreißig Texten für</a:t>
-            </a:r>
-          </a:p>
-          <a:p>
-            <a:r>
-              <a:rPr i="0"/>
-              <a:t>Deutschkurse auf A1 und A2, die heute alle Wörter über dem Niveau ihrer Leser</a:t>
-            </a:r>
-          </a:p>
-          <a:p>
-            <a:r>
-              <a:rPr i="0"/>
-              <a:t>enthalten, sollen höchstens noch zehn betroffen sein.</a:t>
+              <a:t>### Die vierte Kennzahl: die Befragung</a:t>
+            </a:r>
+          </a:p>
+          <a:p>
+            <a:r>
+              <a:rPr i="0"/>
+              <a:t>- Die ersten drei messen nur den Text, nicht die Wirkung. Deshalb frage ich die Teilnehmenden selbst.</a:t>
+            </a:r>
+          </a:p>
+          <a:p>
+            <a:r>
+              <a:rPr i="0"/>
+              <a:t>- Nicht über einen Fragebogen auf der Website — den füllt genau die Zielgruppe nicht aus, um die es geht.</a:t>
+            </a:r>
+          </a:p>
+          <a:p>
+            <a:r>
+              <a:rPr i="0"/>
+              <a:t>- Sondern im Kurs, am Ende einer Stunde, in einfacher Sprache.</a:t>
+            </a:r>
+          </a:p>
+          <a:p>
+            <a:r>
+              <a:rPr i="0"/>
+              <a:t>- </a:t>
+            </a:r>
+            <a:r>
+              <a:rPr b="1" i="0">
+                <a:solidFill>
+                  <a:srgbClr val="A4162B"/>
+                </a:solidFill>
+              </a:rPr>
+              <a:t>Freiwillig und vergütet.</a:t>
+            </a:r>
+            <a:r>
+              <a:rPr i="0"/>
+              <a:t> </a:t>
+            </a:r>
+            <a:r>
+              <a:rPr i="1"/>
+              <a:t>Sonst wäre sie eine neue Aufgabe ohne Bezahlung — bei Honorarkräften genau das Problem von der Widerstandsfolie.</a:t>
             </a:r>
           </a:p>
           <a:p/>
           <a:p>
             <a:r>
               <a:rPr i="0"/>
-              <a:t>### Die vierte Kennzahl: die Befragung</a:t>
+              <a:t>### Letzte Spalte: womit gemessen wird</a:t>
+            </a:r>
+          </a:p>
+          <a:p>
+            <a:r>
+              <a:rPr i="0"/>
+              <a:t>- Die Nachmessung läuft mit demselben Skript wie die Ausgangsmessung. Dafür bleibt es unverändert liegen.</a:t>
+            </a:r>
+          </a:p>
+          <a:p>
+            <a:r>
+              <a:rPr i="0"/>
+              <a:t>- Sonst wüsste man hinterher nicht, ob die Texte besser geworden sind oder nur die Messung anders.</a:t>
             </a:r>
           </a:p>
           <a:p/>
           <a:p>
             <a:r>
               <a:rPr i="0"/>
-              <a:t>Die vierte Zeile ist mir wichtig, weil die ersten drei nur den Text messen und</a:t>
-            </a:r>
-          </a:p>
-          <a:p>
-            <a:r>
-              <a:rPr i="0"/>
-              <a:t>nicht die Wirkung. Deshalb frage ich die Teilnehmenden selbst. Nicht über</a:t>
-            </a:r>
-          </a:p>
-          <a:p>
-            <a:r>
-              <a:rPr i="0"/>
-              <a:t>einen Fragebogen auf der Website, denn den füllt genau die Zielgruppe nicht</a:t>
-            </a:r>
-          </a:p>
-          <a:p>
-            <a:r>
-              <a:rPr i="0"/>
-              <a:t>aus, um die es geht. Sondern im Kurs, am Ende einer Stunde, in einfacher</a:t>
-            </a:r>
-          </a:p>
-          <a:p>
-            <a:r>
-              <a:rPr i="0"/>
-              <a:t>Sprache.</a:t>
-            </a:r>
-          </a:p>
-          <a:p/>
-          <a:p>
-            <a:r>
-              <a:rPr i="0"/>
-              <a:t>Diese Befragung ist freiwillig und wird vergütet. Sonst wäre sie eine neue</a:t>
-            </a:r>
-          </a:p>
-          <a:p>
-            <a:r>
-              <a:rPr i="0"/>
-              <a:t>Aufgabe ohne Bezahlung, und das ist bei Honorarkräften genau das Problem von</a:t>
-            </a:r>
-          </a:p>
-          <a:p>
-            <a:r>
-              <a:rPr i="0"/>
-              <a:t>der Widerstandsfolie.</a:t>
-            </a:r>
-          </a:p>
-          <a:p/>
-          <a:p>
-            <a:r>
-              <a:rPr i="0"/>
-              <a:t>### Letzte Spalte: womit gemessen wird</a:t>
-            </a:r>
-          </a:p>
-          <a:p/>
-          <a:p>
-            <a:r>
-              <a:rPr i="0"/>
-              <a:t>In der letzten Spalte steht, womit gemessen wird. Die Nachmessung läuft mit</a:t>
-            </a:r>
-          </a:p>
-          <a:p>
-            <a:r>
-              <a:rPr i="0"/>
-              <a:t>demselben Skript wie die Ausgangsmessung, und dafür bleibt es unverändert</a:t>
-            </a:r>
-          </a:p>
-          <a:p>
-            <a:r>
-              <a:rPr i="0"/>
-              <a:t>liegen. Wäre es zwischendurch verbessert worden, wüsste man hinterher</a:t>
-            </a:r>
-          </a:p>
-          <a:p>
-            <a:r>
-              <a:rPr i="0"/>
-              <a:t>nicht, ob die Texte besser geworden sind oder nur die Messung anders.</a:t>
-            </a:r>
-          </a:p>
-          <a:p/>
-          <a:p>
-            <a:r>
-              <a:rPr i="0"/>
               <a:t>### Das Risiko unten</a:t>
             </a:r>
           </a:p>
-          <a:p/>
-          <a:p>
-            <a:r>
-              <a:rPr i="0"/>
-              <a:t>Das Risiko steckt in den Kennzahlen selbst. Die ersten drei lassen sich</a:t>
-            </a:r>
-          </a:p>
-          <a:p>
-            <a:r>
-              <a:rPr i="0"/>
-              <a:t>erfüllen, ohne dass ein einziger Text besser wird: Wer lange Sätze teilt und</a:t>
-            </a:r>
-          </a:p>
-          <a:p>
-            <a:r>
-              <a:rPr i="0"/>
-              <a:t>schwere Wörter austauscht, drückt die Befundquote — ob der Text dadurch</a:t>
-            </a:r>
-          </a:p>
-          <a:p>
-            <a:r>
-              <a:rPr i="0"/>
-              <a:t>verständlicher geworden ist, hat dann noch niemand gefragt. Ein kürzerer Satz</a:t>
-            </a:r>
-          </a:p>
-          <a:p>
-            <a:r>
-              <a:rPr i="0"/>
-              <a:t>ist nicht automatisch ein verständlicherer.</a:t>
-            </a:r>
-          </a:p>
-          <a:p/>
-          <a:p>
-            <a:r>
-              <a:rPr i="0"/>
-              <a:t>Genau dagegen steht die vierte Kennzahl. Sie fragt nicht den Text, sondern die</a:t>
-            </a:r>
-          </a:p>
-          <a:p>
-            <a:r>
-              <a:rPr i="0"/>
-              <a:t>Menschen, für die er geschrieben ist. Ohne sie misst der Pilot am Ende nur</a:t>
-            </a:r>
-          </a:p>
-          <a:p>
-            <a:r>
-              <a:rPr i="0"/>
-              <a:t>seinen eigenen Maßstab.</a:t>
+          <a:p>
+            <a:r>
+              <a:rPr i="0"/>
+              <a:t>- Die ersten drei Kennzahlen lassen sich erfüllen, ohne dass ein einziger Text besser wird: Wer lange Sätze teilt und schwere Wörter austauscht, drückt die Quote.</a:t>
+            </a:r>
+          </a:p>
+          <a:p>
+            <a:r>
+              <a:rPr i="0"/>
+              <a:t>- </a:t>
+            </a:r>
+            <a:r>
+              <a:rPr b="1" i="0">
+                <a:solidFill>
+                  <a:srgbClr val="A4162B"/>
+                </a:solidFill>
+              </a:rPr>
+              <a:t>Ein kürzerer Satz ist nicht automatisch ein verständlicherer.</a:t>
+            </a:r>
+          </a:p>
+          <a:p>
+            <a:r>
+              <a:rPr i="0"/>
+              <a:t>- Genau dagegen steht die vierte. Sie fragt nicht den Text, sondern die Menschen, für die er geschrieben ist.</a:t>
+            </a:r>
+          </a:p>
+          <a:p>
+            <a:r>
+              <a:rPr i="0"/>
+              <a:t>- Ohne sie misst der Pilot am Ende nur seinen eigenen Maßstab.</a:t>
             </a:r>
           </a:p>
         </p:txBody>
@@ -2825,159 +2695,114 @@
           <a:p>
             <a:r>
               <a:rPr i="0"/>
-              <a:t>### Linke Spalte: Das Seitengerüst</a:t>
+              <a:t>### Das Seitengerüst</a:t>
+            </a:r>
+          </a:p>
+          <a:p>
+            <a:r>
+              <a:rPr i="0"/>
+              <a:t>- Links steht, was am Gerüst der Seite hängt: Kontraste, Tastaturbedienung, Seitentitel, Navigation.</a:t>
+            </a:r>
+          </a:p>
+          <a:p>
+            <a:r>
+              <a:rPr i="0"/>
+              <a:t>- Prüfbar, ohne einen einzigen Kurs zu kennen. Gilt für alle 5800 Texte gleich.</a:t>
+            </a:r>
+          </a:p>
+          <a:p>
+            <a:r>
+              <a:rPr i="0"/>
+              <a:t>- Dafür gibt es etablierte Programme wie </a:t>
+            </a:r>
+            <a:r>
+              <a:rPr b="1" i="0"/>
+              <a:t>axe-core</a:t>
+            </a:r>
+            <a:r>
+              <a:rPr i="0"/>
+              <a:t>. Zuständig ist die städtische IT.</a:t>
             </a:r>
           </a:p>
           <a:p/>
           <a:p>
             <a:r>
               <a:rPr i="0"/>
-              <a:t>Links steht, was am Gerüst der Seite hängt: Kontraste, Tastaturbedienung,</a:t>
-            </a:r>
-          </a:p>
-          <a:p>
-            <a:r>
-              <a:rPr i="0"/>
-              <a:t>Seitentitel, Navigation. Das kann man prüfen, ohne einen einzigen Kurs zu</a:t>
-            </a:r>
-          </a:p>
-          <a:p>
-            <a:r>
-              <a:rPr i="0"/>
-              <a:t>kennen. Es gilt für alle fünftausendachthundert Texte gleich, dafür gibt es</a:t>
-            </a:r>
-          </a:p>
-          <a:p>
-            <a:r>
-              <a:rPr i="0"/>
-              <a:t>etablierte Programme wie axe-core, und zuständig ist die städtische IT.</a:t>
+              <a:t>### Der einzelne Text</a:t>
+            </a:r>
+          </a:p>
+          <a:p>
+            <a:r>
+              <a:rPr i="0"/>
+              <a:t>- Rechts steht, was am einzelnen Text hängt: </a:t>
+            </a:r>
+            <a:r>
+              <a:rPr b="1" i="0">
+                <a:solidFill>
+                  <a:srgbClr val="A4162B"/>
+                </a:solidFill>
+              </a:rPr>
+              <a:t>Versteht die Zielgruppe genau dieses Kurses ihn?</a:t>
+            </a:r>
+          </a:p>
+          <a:p>
+            <a:r>
+              <a:rPr i="0"/>
+              <a:t>- Das lässt sich nicht beantworten, ohne zu wissen, wer liest. Zuständig sind die Programmbereiche.</a:t>
             </a:r>
           </a:p>
           <a:p/>
           <a:p>
             <a:r>
               <a:rPr i="0"/>
-              <a:t>### Rechte Spalte: Der einzelne Text</a:t>
+              <a:t>### Der Kasten unten</a:t>
+            </a:r>
+          </a:p>
+          <a:p>
+            <a:r>
+              <a:rPr i="0"/>
+              <a:t>- Die Trennlinie verläuft also nicht zwischen Sprache und Technik. Zwei meiner sechs Regeln sind selbst Pflichtkriterien.</a:t>
+            </a:r>
+          </a:p>
+          <a:p>
+            <a:r>
+              <a:rPr i="0"/>
+              <a:t>- Beispiel: eine hervorgehobene Zeile, die als Überschrift gemeint ist, im Quelltext aber keine. Das Prüfprogramm sieht dort nur Fließtext und meldet nichts.</a:t>
+            </a:r>
+          </a:p>
+          <a:p>
+            <a:r>
+              <a:rPr i="0"/>
+              <a:t>- Ob sie eine Überschrift sein sollte, kann man dem Text nicht ansehen, sondern nur verstehen. Deshalb liegt dieses Pflichtkriterium rechts.</a:t>
+            </a:r>
+          </a:p>
+          <a:p>
+            <a:r>
+              <a:rPr i="0"/>
+              <a:t>- </a:t>
+            </a:r>
+            <a:r>
+              <a:rPr i="1"/>
+              <a:t>Beim Bauen hat sich das dreimal bestätigt: Drei Zusagen, die zuerst im Prompt standen, hielt das Modell nicht zuverlässig ein. Alle drei stehen heute im Programmcode.</a:t>
             </a:r>
           </a:p>
           <a:p/>
           <a:p>
             <a:r>
               <a:rPr i="0"/>
-              <a:t>Rechts steht, was am einzelnen Text hängt. Versteht die Zielgruppe genau</a:t>
-            </a:r>
-          </a:p>
-          <a:p>
-            <a:r>
-              <a:rPr i="0"/>
-              <a:t>dieses Kurses ihn? Diese Frage lässt sich nicht beantworten, ohne zu wissen,</a:t>
-            </a:r>
-          </a:p>
-          <a:p>
-            <a:r>
-              <a:rPr i="0"/>
-              <a:t>wer liest. Zuständig sind die Programmbereiche.</a:t>
-            </a:r>
-          </a:p>
-          <a:p/>
-          <a:p>
-            <a:r>
-              <a:rPr i="0"/>
-              <a:t>### Der Kasten unten: wo die Trennlinie verläuft</a:t>
-            </a:r>
-          </a:p>
-          <a:p/>
-          <a:p>
-            <a:r>
-              <a:rPr i="0"/>
-              <a:t>Die Trennlinie verläuft also nicht zwischen Sprache und Technik. Zwei meiner</a:t>
-            </a:r>
-          </a:p>
-          <a:p>
-            <a:r>
-              <a:rPr i="0"/>
-              <a:t>sechs Regeln sind selbst Pflichtkriterien der Barrierefreiheit. Ein Beispiel:</a:t>
-            </a:r>
-          </a:p>
-          <a:p>
-            <a:r>
-              <a:rPr i="0"/>
-              <a:t>eine hervorgehobene Zeile, die als Überschrift gemeint ist, aber im Quelltext</a:t>
-            </a:r>
-          </a:p>
-          <a:p>
-            <a:r>
-              <a:rPr i="0"/>
-              <a:t>keine ist. Das Prüfprogramm sieht dort nur Fließtext und meldet nichts. Ob</a:t>
-            </a:r>
-          </a:p>
-          <a:p>
-            <a:r>
-              <a:rPr i="0"/>
-              <a:t>diese Zeile eine Überschrift sein sollte, kann man dem Text nicht ansehen,</a:t>
-            </a:r>
-          </a:p>
-          <a:p>
-            <a:r>
-              <a:rPr i="0"/>
-              <a:t>sondern nur verstehen. Deshalb liegt ausgerechnet dieses Pflichtkriterium</a:t>
-            </a:r>
-          </a:p>
-          <a:p>
-            <a:r>
-              <a:rPr i="0"/>
-              <a:t>rechts.</a:t>
-            </a:r>
-          </a:p>
-          <a:p/>
-          <a:p>
-            <a:r>
-              <a:rPr i="0"/>
-              <a:t>Diese Trennung hat sich beim Bauen dreimal selbst bestätigt. Drei Zusagen, die</a:t>
-            </a:r>
-          </a:p>
-          <a:p>
-            <a:r>
-              <a:rPr i="0"/>
-              <a:t>ich zuerst in den Prompt geschrieben hatte, hat das Modell nicht zuverlässig</a:t>
-            </a:r>
-          </a:p>
-          <a:p>
-            <a:r>
-              <a:rPr i="0"/>
-              <a:t>eingehalten. Alle drei stehen jetzt im Programmcode, weil sie feststehen und</a:t>
-            </a:r>
-          </a:p>
-          <a:p>
-            <a:r>
-              <a:rPr i="0"/>
-              <a:t>keine Einschätzung verlangen.</a:t>
-            </a:r>
-          </a:p>
-          <a:p/>
-          <a:p>
-            <a:r>
-              <a:rPr i="0"/>
               <a:t>### Technische Voraussetzungen</a:t>
             </a:r>
           </a:p>
-          <a:p/>
-          <a:p>
-            <a:r>
-              <a:rPr i="0"/>
-              <a:t>Technisch braucht es den KI-Zugang, den der Volkshochschul-Verband ohnehin</a:t>
-            </a:r>
-          </a:p>
-          <a:p>
-            <a:r>
-              <a:rPr i="0"/>
-              <a:t>bereitstellt, einen dort angelegten Assistenten und die Wortliste als Datei.</a:t>
-            </a:r>
-          </a:p>
-          <a:p>
-            <a:r>
-              <a:rPr i="0"/>
-              <a:t>Kein neuer Vertrag, kein Eingriff ins Kursverwaltungssystem.</a:t>
+          <a:p>
+            <a:r>
+              <a:rPr i="0"/>
+              <a:t>- Der KI-Zugang, den der Volkshochschul-Verband ohnehin bereitstellt, ein dort angelegter Assistent, die Wortliste als Datei.</a:t>
+            </a:r>
+          </a:p>
+          <a:p>
+            <a:r>
+              <a:rPr i="0"/>
+              <a:t>- Kein neuer Vertrag, kein Eingriff ins Kursverwaltungssystem.</a:t>
             </a:r>
           </a:p>
         </p:txBody>
@@ -3064,142 +2889,136 @@
               <a:t>### Rolle, Aufgabe, Format</a:t>
             </a:r>
           </a:p>
+          <a:p>
+            <a:r>
+              <a:rPr i="0"/>
+              <a:t>- </a:t>
+            </a:r>
+            <a:r>
+              <a:rPr b="1" i="0"/>
+              <a:t>ROLLE</a:t>
+            </a:r>
+            <a:r>
+              <a:rPr i="0"/>
+              <a:t>: Redaktionsassistenz, nicht Autorin.</a:t>
+            </a:r>
+          </a:p>
+          <a:p>
+            <a:r>
+              <a:rPr i="0"/>
+              <a:t>- </a:t>
+            </a:r>
+            <a:r>
+              <a:rPr b="1" i="0"/>
+              <a:t>AUFGABE</a:t>
+            </a:r>
+            <a:r>
+              <a:rPr i="0"/>
+              <a:t>: erst die Zielgruppe bestimmen, dann prüfen. Die Reihenfolge steht fest.</a:t>
+            </a:r>
+          </a:p>
+          <a:p>
+            <a:r>
+              <a:rPr i="0"/>
+              <a:t>- </a:t>
+            </a:r>
+            <a:r>
+              <a:rPr b="1" i="0"/>
+              <a:t>FORMAT</a:t>
+            </a:r>
+            <a:r>
+              <a:rPr i="0"/>
+              <a:t>: zu jedem Befund ein wörtliches Zitat, eine Begründung, ein konkreter Vorschlag. </a:t>
+            </a:r>
+            <a:r>
+              <a:rPr b="1" i="0">
+                <a:solidFill>
+                  <a:srgbClr val="A4162B"/>
+                </a:solidFill>
+              </a:rPr>
+              <a:t>Ohne Vorschlag kein Befund.</a:t>
+            </a:r>
+          </a:p>
           <a:p/>
           <a:p>
             <a:r>
               <a:rPr i="0"/>
-              <a:t>Die ROLLE macht ihn zur Redaktionsassistenz, nicht zur Autorin. Die AUFGABE</a:t>
-            </a:r>
-          </a:p>
-          <a:p>
-            <a:r>
-              <a:rPr i="0"/>
-              <a:t>schreibt die Reihenfolge vor: erst die Zielgruppe bestimmen, dann prüfen. Das</a:t>
-            </a:r>
-          </a:p>
-          <a:p>
-            <a:r>
-              <a:rPr i="0"/>
-              <a:t>FORMAT erzwingt zu jedem Befund ein wörtliches Zitat, eine Begründung und</a:t>
-            </a:r>
-          </a:p>
-          <a:p>
-            <a:r>
-              <a:rPr i="0"/>
-              <a:t>einen konkreten Vorschlag. Ohne Vorschlag kein Befund.</a:t>
+              <a:t>### Kontext: die Wortliste</a:t>
+            </a:r>
+          </a:p>
+          <a:p>
+            <a:r>
+              <a:rPr i="0"/>
+              <a:t>- Der KONTEXT enthält das Hauswissen: acht Programmbereiche, interne Abkürzungen, sechs Prüfregeln.</a:t>
+            </a:r>
+          </a:p>
+          <a:p>
+            <a:r>
+              <a:rPr i="0"/>
+              <a:t>- Der wichtigste Teil: 820 Wörter des Prüfungswortschatzes für das </a:t>
+            </a:r>
+            <a:r>
+              <a:rPr b="1" i="0"/>
+              <a:t>Goethe-Zertifikat A1</a:t>
+            </a:r>
+            <a:r>
+              <a:rPr i="0"/>
+              <a:t>. Vollständig im Prompt, nicht als Verweis.</a:t>
+            </a:r>
+          </a:p>
+          <a:p>
+            <a:r>
+              <a:rPr i="0"/>
+              <a:t>- </a:t>
+            </a:r>
+            <a:r>
+              <a:rPr b="1" i="0">
+                <a:solidFill>
+                  <a:srgbClr val="A4162B"/>
+                </a:solidFill>
+              </a:rPr>
+              <a:t>Er schätzt das Sprachniveau also nicht, er begründet es.</a:t>
+            </a:r>
+          </a:p>
+          <a:p>
+            <a:r>
+              <a:rPr i="0"/>
+              <a:t>- Das ist das Ergebnis der ersten Überarbeitung: Vorher behauptete der Prompt, gegen Wortlisten zu prüfen, hatte sie aber gar nicht. Er schätzte frei und klang nach Beleg — derselbe Fehler, den ich anderen Werkzeugen vorwerfe.</a:t>
+            </a:r>
+          </a:p>
+          <a:p>
+            <a:r>
+              <a:rPr i="0"/>
+              <a:t>- </a:t>
+            </a:r>
+            <a:r>
+              <a:rPr i="1"/>
+              <a:t>Der Grundstock dieser Listen stammt laut Goethe-Institut aus einer Veröffentlichung der Prüfungszentrale des Deutschen Volkshochschul-Verbands in Frankfurt.</a:t>
             </a:r>
           </a:p>
           <a:p/>
           <a:p>
             <a:r>
               <a:rPr i="0"/>
-              <a:t>### Kontext: die Wortliste</a:t>
-            </a:r>
-          </a:p>
-          <a:p/>
-          <a:p>
-            <a:r>
-              <a:rPr i="0"/>
-              <a:t>Der KONTEXT enthält das Hauswissen: die acht Programmbereiche, die internen</a:t>
-            </a:r>
-          </a:p>
-          <a:p>
-            <a:r>
-              <a:rPr i="0"/>
-              <a:t>Abkürzungen, sechs Prüfregeln und — der wichtigste Teil — achthundertzwanzig</a:t>
-            </a:r>
-          </a:p>
-          <a:p>
-            <a:r>
-              <a:rPr i="0"/>
-              <a:t>Wörter des Prüfungswortschatzes für das Goethe-Zertifikat A1. Diese Liste</a:t>
-            </a:r>
-          </a:p>
-          <a:p>
-            <a:r>
-              <a:rPr i="0"/>
-              <a:t>steht vollständig im Prompt, nicht als Verweis. Er schätzt das Sprachniveau</a:t>
-            </a:r>
-          </a:p>
-          <a:p>
-            <a:r>
-              <a:rPr i="0"/>
-              <a:t>also nicht, sondern begründet es.</a:t>
-            </a:r>
-          </a:p>
-          <a:p/>
-          <a:p>
-            <a:r>
-              <a:rPr i="0"/>
-              <a:t>Das ist das Ergebnis der ersten Überarbeitung. In meiner ersten Fassung</a:t>
-            </a:r>
-          </a:p>
-          <a:p>
-            <a:r>
-              <a:rPr i="0"/>
-              <a:t>behauptete der Prompt, gegen die Wortlisten zu prüfen, hatte sie aber gar</a:t>
-            </a:r>
-          </a:p>
-          <a:p>
-            <a:r>
-              <a:rPr i="0"/>
-              <a:t>nicht. Er schätzte weiter frei und klang dabei nach Beleg — derselbe Fehler,</a:t>
-            </a:r>
-          </a:p>
-          <a:p>
-            <a:r>
-              <a:rPr i="0"/>
-              <a:t>den ich anderen Werkzeugen vorwerfe. Der Grundstock dieser Listen stammt</a:t>
-            </a:r>
-          </a:p>
-          <a:p>
-            <a:r>
-              <a:rPr i="0"/>
-              <a:t>übrigens laut Goethe-Institut aus einer Veröffentlichung der Prüfungszentrale</a:t>
-            </a:r>
-          </a:p>
-          <a:p>
-            <a:r>
-              <a:rPr i="0"/>
-              <a:t>des Deutschen Volkshochschulverbands in Frankfurt.</a:t>
-            </a:r>
-          </a:p>
-          <a:p/>
-          <a:p>
-            <a:r>
-              <a:rPr i="0"/>
-              <a:t>### Der Kasten unten: die Zeile Grenzen</a:t>
-            </a:r>
-          </a:p>
-          <a:p/>
-          <a:p>
-            <a:r>
-              <a:rPr i="0"/>
-              <a:t>In der Zeile GRENZEN steht: bewertet Texte, niemals Personen. Dieser eine Satz</a:t>
-            </a:r>
-          </a:p>
-          <a:p>
-            <a:r>
-              <a:rPr i="0"/>
-              <a:t>leistet zweierlei. Er hält das Projekt aus dem Hochrisikobereich der KI-</a:t>
-            </a:r>
-          </a:p>
-          <a:p>
-            <a:r>
-              <a:rPr i="0"/>
-              <a:t>Verordnung heraus, denn hoch eingestuft wird dort nur, was Menschen bewertet —</a:t>
-            </a:r>
-          </a:p>
-          <a:p>
-            <a:r>
-              <a:rPr i="0"/>
-              <a:t>dieses System bewertet Texte. Und er ist die Antwort auf die Frage des</a:t>
-            </a:r>
-          </a:p>
-          <a:p>
-            <a:r>
-              <a:rPr i="0"/>
-              <a:t>Personalrats, ob hier Leistung kontrolliert wird.</a:t>
+              <a:t>### Der Kasten unten: die Zeile GRENZEN</a:t>
+            </a:r>
+          </a:p>
+          <a:p>
+            <a:r>
+              <a:rPr i="0"/>
+              <a:t>- „Bewertet Texte, niemals Personen.“ Dieser eine Satz leistet zweierlei.</a:t>
+            </a:r>
+          </a:p>
+          <a:p>
+            <a:r>
+              <a:rPr i="0"/>
+              <a:t>- Er hält das Projekt aus dem Hochrisikobereich der KI-Verordnung: Hoch eingestuft wird dort nur, was Menschen bewertet — dieses System bewertet Texte.</a:t>
+            </a:r>
+          </a:p>
+          <a:p>
+            <a:r>
+              <a:rPr i="0"/>
+              <a:t>- Und er ist die Antwort auf die Frage des Personalrats, ob hier Leistung kontrolliert wird.</a:t>
             </a:r>
           </a:p>
         </p:txBody>
@@ -3270,13 +3089,13 @@
           <a:p>
             <a:r>
               <a:rPr i="0"/>
-              <a:t>Bleibt die Frage, wie das in den Alltag kommt. Dafür gibt es zwei Wege, und</a:t>
-            </a:r>
-          </a:p>
-          <a:p>
-            <a:r>
-              <a:rPr i="0"/>
-              <a:t>beide stehen vom ersten Tag an offen.</a:t>
+              <a:t>Bleibt die Frage, wie das in den Alltag kommt. Zwei Wege, beide vom ersten Tag</a:t>
+            </a:r>
+          </a:p>
+          <a:p>
+            <a:r>
+              <a:rPr i="0"/>
+              <a:t>an offen.</a:t>
             </a:r>
           </a:p>
           <a:p/>
@@ -3286,238 +3105,183 @@
               <a:t>### Weg 1: Als KI-Assistent bei fobizz</a:t>
             </a:r>
           </a:p>
+          <a:p>
+            <a:r>
+              <a:rPr i="0"/>
+              <a:t>- Braucht keine eigene Technik.</a:t>
+            </a:r>
+          </a:p>
+          <a:p>
+            <a:r>
+              <a:rPr i="0"/>
+              <a:t>- Der Deutsche Volkshochschul-Verband hat im Mai 2025 eine Rahmenvereinbarung mit </a:t>
+            </a:r>
+            <a:r>
+              <a:rPr b="1" i="0"/>
+              <a:t>fobizz</a:t>
+            </a:r>
+            <a:r>
+              <a:rPr i="0"/>
+              <a:t> geschlossen: datenschutzkonformer KI-Zugang für alle Volkshochschulen, mit eigenen Assistenten und eigenen Anweisungen.</a:t>
+            </a:r>
+          </a:p>
+          <a:p>
+            <a:r>
+              <a:rPr i="0"/>
+              <a:t>- Genau das ist mein Prompt. Zustimmung außerhalb des Pilotbereichs braucht es nicht, weil der Rahmenvertrag schon da ist.</a:t>
+            </a:r>
+          </a:p>
+          <a:p>
+            <a:r>
+              <a:rPr i="0"/>
+              <a:t>- </a:t>
+            </a:r>
+            <a:r>
+              <a:rPr i="1"/>
+              <a:t>Zu klären bleibt, ob die vhs Frankfurt die Lizenz auch gebucht hat. Der Rahmenvertrag schafft die Möglichkeit, er ist nicht die Buchung.</a:t>
+            </a:r>
+          </a:p>
           <a:p/>
           <a:p>
             <a:r>
               <a:rPr i="0"/>
-              <a:t>Der erste braucht keine eigene Technik. Der Deutsche Volkshochschul-Verband</a:t>
-            </a:r>
-          </a:p>
-          <a:p>
-            <a:r>
-              <a:rPr i="0"/>
-              <a:t>hat im Mai zweitausendfünfundzwanzig eine Rahmenvereinbarung mit einem</a:t>
-            </a:r>
-          </a:p>
-          <a:p>
-            <a:r>
-              <a:rPr i="0"/>
-              <a:t>Anbieter namens fobizz geschlossen. Mitarbeitende aller Volkshochschulen in</a:t>
-            </a:r>
-          </a:p>
-          <a:p>
-            <a:r>
-              <a:rPr i="0"/>
-              <a:t>Deutschland haben darüber datenschutzkonformen Zugang zu KI-Anwendungen, und</a:t>
-            </a:r>
-          </a:p>
-          <a:p>
-            <a:r>
-              <a:rPr i="0"/>
-              <a:t>man kann dort eigene Assistenten mit eigenen Anweisungen anlegen. Genau das</a:t>
-            </a:r>
-          </a:p>
-          <a:p>
-            <a:r>
-              <a:rPr i="0"/>
-              <a:t>ist mein Prompt. Zustimmung außerhalb des Pilotbereichs braucht es dafür</a:t>
-            </a:r>
-          </a:p>
-          <a:p>
-            <a:r>
-              <a:rPr i="0"/>
-              <a:t>nicht, weil der Rahmenvertrag schon da ist. Zu klären ist allerdings, ob die</a:t>
-            </a:r>
-          </a:p>
-          <a:p>
-            <a:r>
-              <a:rPr i="0"/>
-              <a:t>vhs Frankfurt die Lizenz auch tatsächlich gebucht hat — der Rahmenvertrag</a:t>
-            </a:r>
-          </a:p>
-          <a:p>
-            <a:r>
-              <a:rPr i="0"/>
-              <a:t>schafft die Möglichkeit, er ist nicht die Buchung.</a:t>
+              <a:t>### Die Einschränkung dazu</a:t>
+            </a:r>
+          </a:p>
+          <a:p>
+            <a:r>
+              <a:rPr i="0"/>
+              <a:t>- Diesen Weg habe ich nicht ausprobiert.</a:t>
+            </a:r>
+          </a:p>
+          <a:p>
+            <a:r>
+              <a:rPr i="0"/>
+              <a:t>- Mein Prüfwerkzeug bearbeitet jede Antwort nach: Es rechnet die Einstufung anhand einer Tabelle nach und entfernt Personennamen. Beides stand ursprünglich im Prompt, beides hielt das Modell nicht zuverlässig ein.</a:t>
+            </a:r>
+          </a:p>
+          <a:p>
+            <a:r>
+              <a:rPr i="0"/>
+              <a:t>- </a:t>
+            </a:r>
+            <a:r>
+              <a:rPr b="1" i="0">
+                <a:solidFill>
+                  <a:srgbClr val="A4162B"/>
+                </a:solidFill>
+              </a:rPr>
+              <a:t>In einem fremden Assistenten gibt es diesen Code nicht.</a:t>
+            </a:r>
+            <a:r>
+              <a:rPr i="0"/>
+              <a:t> Was das praktisch bedeutet, muss der Pilot zeigen.</a:t>
             </a:r>
           </a:p>
           <a:p/>
           <a:p>
             <a:r>
               <a:rPr i="0"/>
-              <a:t>### Die Einschränkung zu Weg 1</a:t>
+              <a:t>### Weg 2: Als eigenes Prüfwerkzeug</a:t>
+            </a:r>
+          </a:p>
+          <a:p>
+            <a:r>
+              <a:rPr i="0"/>
+              <a:t>- Das Werkzeug, das ich gebaut habe. Entwurf einfügen — oder bei einem vorhandenen Kurs nur die Nummer, dann holt es den Text selbst.</a:t>
+            </a:r>
+          </a:p>
+          <a:p>
+            <a:r>
+              <a:rPr i="0"/>
+              <a:t>- Die Schnittstelle des Kursportals ist öffentlich. Es braucht nur einen eigenen Server.</a:t>
             </a:r>
           </a:p>
           <a:p/>
           <a:p>
             <a:r>
               <a:rPr i="0"/>
-              <a:t>Eine Einschränkung gehört dazu, denn diesen Weg habe ich nicht ausprobiert:</a:t>
-            </a:r>
-          </a:p>
-          <a:p>
-            <a:r>
-              <a:rPr i="0"/>
-              <a:t>Mein Prüfwerkzeug bearbeitet jede Antwort nach. Es rechnet die Einstufung</a:t>
-            </a:r>
-          </a:p>
-          <a:p>
-            <a:r>
-              <a:rPr i="0"/>
-              <a:t>anhand einer Tabelle nach und entfernt Personennamen. Beides stand</a:t>
-            </a:r>
-          </a:p>
-          <a:p>
-            <a:r>
-              <a:rPr i="0"/>
-              <a:t>ursprünglich im Prompt, und beides hielt das Modell nicht zuverlässig ein —</a:t>
-            </a:r>
-          </a:p>
-          <a:p>
-            <a:r>
-              <a:rPr i="0"/>
-              <a:t>deshalb steht es heute im Programmcode. In einem fremden Assistenten gibt es</a:t>
-            </a:r>
-          </a:p>
-          <a:p>
-            <a:r>
-              <a:rPr i="0"/>
-              <a:t>diesen Code nicht. Was das praktisch bedeutet, muss der Pilot zeigen.</a:t>
+              <a:t>### Rechts im Bild: ein Befund</a:t>
+            </a:r>
+          </a:p>
+          <a:p>
+            <a:r>
+              <a:rPr i="0"/>
+              <a:t>- Ein Befund aus einem echten Durchlauf, dem Deutschkurs auf A2.</a:t>
+            </a:r>
+          </a:p>
+          <a:p>
+            <a:r>
+              <a:rPr i="0"/>
+              <a:t>- Jeder Befund hat dieselben vier Teile: Einstufung, Regel, wörtliche Stelle, Vorschlag.</a:t>
+            </a:r>
+          </a:p>
+          <a:p>
+            <a:r>
+              <a:rPr i="0"/>
+              <a:t>- Dieser hier ist Pflicht: Der Link heißt schlicht „hier“. Wer sich die Seite vorlesen lässt und von Link zu Link springt, hört nur „hier“.</a:t>
+            </a:r>
+          </a:p>
+          <a:p>
+            <a:r>
+              <a:rPr i="0"/>
+              <a:t>- Der Vorschlag daneben ist kein Kommentar, sondern fertiger Text zum Übernehmen.</a:t>
             </a:r>
           </a:p>
           <a:p/>
           <a:p>
             <a:r>
               <a:rPr i="0"/>
-              <a:t>### Weg 2: Als eigenes Prüfwerkzeug</a:t>
+              <a:t>### Hier die Vorführung</a:t>
+            </a:r>
+          </a:p>
+          <a:p>
+            <a:r>
+              <a:rPr i="0"/>
+              <a:t>- Ich zeige euch das kurz live, an genau diesem Kurs.</a:t>
+            </a:r>
+          </a:p>
+          <a:p>
+            <a:r>
+              <a:rPr i="0"/>
+              <a:t>- </a:t>
+            </a:r>
+            <a:r>
+              <a:rPr i="1"/>
+              <a:t>Ein Prototyp für diese Arbeit. Er belegt, dass der Weg funktioniert — eine fertige Anwendung ist er nicht.</a:t>
             </a:r>
           </a:p>
           <a:p/>
           <a:p>
             <a:r>
               <a:rPr i="0"/>
-              <a:t>Der zweite Weg ist das Prüfwerkzeug, das ich gebaut habe. Dort fügt man den</a:t>
-            </a:r>
-          </a:p>
-          <a:p>
-            <a:r>
-              <a:rPr i="0"/>
-              <a:t>Entwurf ein — oder gibt bei einem vorhandenen Kurs nur die Nummer ein, dann</a:t>
-            </a:r>
-          </a:p>
-          <a:p>
-            <a:r>
-              <a:rPr i="0"/>
-              <a:t>holt es den Text selbst. Die Schnittstelle des Kursportals ist öffentlich, das</a:t>
-            </a:r>
-          </a:p>
-          <a:p>
-            <a:r>
-              <a:rPr i="0"/>
-              <a:t>kostet keinen Zugang; es braucht nur einen eigenen Server.</a:t>
-            </a:r>
-          </a:p>
-          <a:p/>
-          <a:p>
-            <a:r>
-              <a:rPr i="0"/>
-              <a:t>### Rechts im Bild: ein Befund</a:t>
-            </a:r>
-          </a:p>
-          <a:p/>
-          <a:p>
-            <a:r>
-              <a:rPr i="0"/>
-              <a:t>Rechts steht, was dabei herauskommt: ein Befund aus einem echten Durchlauf,</a:t>
-            </a:r>
-          </a:p>
-          <a:p>
-            <a:r>
-              <a:rPr i="0"/>
-              <a:t>dem Deutschkurs auf A2. Jeder Befund hat dieselben vier Teile: die Einstufung,</a:t>
-            </a:r>
-          </a:p>
-          <a:p>
-            <a:r>
-              <a:rPr i="0"/>
-              <a:t>die Regel, die wörtliche Stelle aus dem Text und einen konkreten Vorschlag.</a:t>
-            </a:r>
-          </a:p>
-          <a:p>
-            <a:r>
-              <a:rPr i="0"/>
-              <a:t>Dieser hier ist Pflicht, der Link heißt schlicht „hier“. Wer sich die Seite</a:t>
-            </a:r>
-          </a:p>
-          <a:p>
-            <a:r>
-              <a:rPr i="0"/>
-              <a:t>vorlesen lässt und von Link zu Link springt, hört nur „hier“. Der Vorschlag</a:t>
-            </a:r>
-          </a:p>
-          <a:p>
-            <a:r>
-              <a:rPr i="0"/>
-              <a:t>daneben ist kein Kommentar, sondern fertiger Text zum Übernehmen.</a:t>
-            </a:r>
-          </a:p>
-          <a:p/>
-          <a:p>
-            <a:r>
-              <a:rPr i="0"/>
-              <a:t>### Hier die Vorführung</a:t>
-            </a:r>
-          </a:p>
-          <a:p/>
-          <a:p>
-            <a:r>
-              <a:rPr i="0"/>
-              <a:t>Ich zeige euch das kurz live, an genau diesem Kurs.</a:t>
-            </a:r>
-          </a:p>
-          <a:p/>
-          <a:p>
-            <a:r>
-              <a:rPr i="0"/>
-              <a:t>Das ist ein Prototyp, den ich für diese Arbeit gebaut habe. Er belegt, dass</a:t>
-            </a:r>
-          </a:p>
-          <a:p>
-            <a:r>
-              <a:rPr i="0"/>
-              <a:t>der Weg funktioniert, er ist keine fertige Anwendung.</a:t>
-            </a:r>
-          </a:p>
-          <a:p/>
-          <a:p>
-            <a:r>
-              <a:rPr i="0"/>
               <a:t>### Der Kasten unten</a:t>
             </a:r>
           </a:p>
-          <a:p/>
-          <a:p>
-            <a:r>
-              <a:rPr i="0"/>
-              <a:t>Die Nachbemerkung unten ist kein Teil des Pilotprojekts. Man könnte die</a:t>
-            </a:r>
-          </a:p>
-          <a:p>
-            <a:r>
-              <a:rPr i="0"/>
-              <a:t>Prüfung ins Redaktionssystem selbst einbauen, dort, wo der Text entsteht. Nur</a:t>
-            </a:r>
-          </a:p>
-          <a:p>
-            <a:r>
-              <a:rPr i="0"/>
-              <a:t>wird das Portal von einem externen Dienstleister betreut, also hieße das:</a:t>
-            </a:r>
-          </a:p>
-          <a:p>
-            <a:r>
-              <a:rPr i="0"/>
-              <a:t>Auftrag, Budget, Vorlauf. Man kauft nichts, bevor man weiß, ob es wirkt.</a:t>
+          <a:p>
+            <a:r>
+              <a:rPr i="0"/>
+              <a:t>- Kein Teil des Pilotprojekts: Man könnte die Prüfung ins Redaktionssystem einbauen, dort, wo der Text entsteht.</a:t>
+            </a:r>
+          </a:p>
+          <a:p>
+            <a:r>
+              <a:rPr i="0"/>
+              <a:t>- Nur wird das Portal von einem externen Dienstleister betreut. Also Auftrag, Budget, Vorlauf.</a:t>
+            </a:r>
+          </a:p>
+          <a:p>
+            <a:r>
+              <a:rPr i="0"/>
+              <a:t>- </a:t>
+            </a:r>
+            <a:r>
+              <a:rPr b="1" i="0">
+                <a:solidFill>
+                  <a:srgbClr val="A4162B"/>
+                </a:solidFill>
+              </a:rPr>
+              <a:t>Man kauft nichts, bevor man weiß, ob es wirkt.</a:t>
             </a:r>
           </a:p>
         </p:txBody>

--- a/ausgabe/Praesentation-KLARTEXT.pptx
+++ b/ausgabe/Praesentation-KLARTEXT.pptx
@@ -2695,13 +2695,13 @@
           <a:p>
             <a:r>
               <a:rPr i="0"/>
-              <a:t>### Das Seitengerüst</a:t>
-            </a:r>
-          </a:p>
-          <a:p>
-            <a:r>
-              <a:rPr i="0"/>
-              <a:t>- Links steht, was am Gerüst der Seite hängt: Kontraste, Tastaturbedienung, Seitentitel, Navigation.</a:t>
+              <a:t>### Die Website</a:t>
+            </a:r>
+          </a:p>
+          <a:p>
+            <a:r>
+              <a:rPr i="0"/>
+              <a:t>- Links steht, was an der Website als Ganzem hängt: Kontraste, Tastaturbedienung, Seitentitel, Navigation.</a:t>
             </a:r>
           </a:p>
           <a:p>

--- a/ausgabe/Praesentation-KLARTEXT.pptx
+++ b/ausgabe/Praesentation-KLARTEXT.pptx
@@ -2682,20 +2682,24 @@
           <a:p>
             <a:r>
               <a:rPr i="0"/>
-              <a:t>Zur Lösung. Sie beginnt mit einer Abgrenzung, und die halte ich für den</a:t>
-            </a:r>
-          </a:p>
-          <a:p>
-            <a:r>
-              <a:rPr i="0"/>
-              <a:t>wichtigsten Teil meines Konzepts.</a:t>
+              <a:t>- Zunächst nochmal eine Abgrenzung</a:t>
+            </a:r>
+          </a:p>
+          <a:p>
+            <a:r>
+              <a:rPr i="0"/>
+              <a:t>- Was die Technik prüft, und wo KLARTEXT ansetzt.</a:t>
             </a:r>
           </a:p>
           <a:p/>
           <a:p>
             <a:r>
               <a:rPr i="0"/>
-              <a:t>### Die Website</a:t>
+              <a:t>### </a:t>
+            </a:r>
+            <a:r>
+              <a:rPr i="1"/>
+              <a:t>Die Website</a:t>
             </a:r>
           </a:p>
           <a:p>
@@ -2755,25 +2759,13 @@
           <a:p>
             <a:r>
               <a:rPr i="0"/>
-              <a:t>### Der Kasten unten</a:t>
-            </a:r>
-          </a:p>
-          <a:p>
-            <a:r>
-              <a:rPr i="0"/>
-              <a:t>- Die Trennlinie verläuft also nicht zwischen Sprache und Technik. Zwei meiner sechs Regeln sind selbst Pflichtkriterien.</a:t>
-            </a:r>
-          </a:p>
-          <a:p>
-            <a:r>
-              <a:rPr i="0"/>
-              <a:t>- Beispiel: eine hervorgehobene Zeile, die als Überschrift gemeint ist, im Quelltext aber keine. Das Prüfprogramm sieht dort nur Fließtext und meldet nichts.</a:t>
-            </a:r>
-          </a:p>
-          <a:p>
-            <a:r>
-              <a:rPr i="0"/>
-              <a:t>- Ob sie eine Überschrift sein sollte, kann man dem Text nicht ansehen, sondern nur verstehen. Deshalb liegt dieses Pflichtkriterium rechts.</a:t>
+              <a:t>### Callout</a:t>
+            </a:r>
+          </a:p>
+          <a:p>
+            <a:r>
+              <a:rPr i="0"/>
+              <a:t>- Die Trennlinie verläuft also nicht zwischen Technik und Sprache, sondern zwischen der Seite und dem einzelnen Text.</a:t>
             </a:r>
           </a:p>
           <a:p>
@@ -2782,27 +2774,22 @@
               <a:t>- </a:t>
             </a:r>
             <a:r>
+              <a:rPr b="1" i="0">
+                <a:solidFill>
+                  <a:srgbClr val="A4162B"/>
+                </a:solidFill>
+              </a:rPr>
+              <a:t>Neu ist allein der Schritt, für den man wissen muss, wer liest.</a:t>
+            </a:r>
+          </a:p>
+          <a:p>
+            <a:r>
+              <a:rPr i="0"/>
+              <a:t>- </a:t>
+            </a:r>
+            <a:r>
               <a:rPr i="1"/>
-              <a:t>Beim Bauen hat sich das dreimal bestätigt: Drei Zusagen, die zuerst im Prompt standen, hielt das Modell nicht zuverlässig ein. Alle drei stehen heute im Programmcode.</a:t>
-            </a:r>
-          </a:p>
-          <a:p/>
-          <a:p>
-            <a:r>
-              <a:rPr i="0"/>
-              <a:t>### Technische Voraussetzungen</a:t>
-            </a:r>
-          </a:p>
-          <a:p>
-            <a:r>
-              <a:rPr i="0"/>
-              <a:t>- Der KI-Zugang, den der Volkshochschul-Verband ohnehin bereitstellt, ein dort angelegter Assistent, die Wortliste als Datei.</a:t>
-            </a:r>
-          </a:p>
-          <a:p>
-            <a:r>
-              <a:rPr i="0"/>
-              <a:t>- Kein neuer Vertrag, kein Eingriff ins Kursverwaltungssystem.</a:t>
+              <a:t>Und genau dafür setzen wir ein KI-Sprachmodell ein.</a:t>
             </a:r>
           </a:p>
         </p:txBody>

--- a/ausgabe/Praesentation-KLARTEXT.pptx
+++ b/ausgabe/Praesentation-KLARTEXT.pptx
@@ -2682,7 +2682,7 @@
           <a:p>
             <a:r>
               <a:rPr i="0"/>
-              <a:t>- Zunächst nochmal eine Abgrenzung</a:t>
+              <a:t>- Nochmal zur Abgrenzung</a:t>
             </a:r>
           </a:p>
           <a:p>
@@ -2705,19 +2705,25 @@
           <a:p>
             <a:r>
               <a:rPr i="0"/>
-              <a:t>- Links steht, was an der Website als Ganzem hängt: Kontraste, Tastaturbedienung, Seitentitel, Navigation.</a:t>
-            </a:r>
-          </a:p>
-          <a:p>
-            <a:r>
-              <a:rPr i="0"/>
-              <a:t>- Prüfbar, ohne einen einzigen Kurs zu kennen. Gilt für alle 5800 Texte gleich.</a:t>
-            </a:r>
-          </a:p>
-          <a:p>
-            <a:r>
-              <a:rPr i="0"/>
-              <a:t>- Dafür gibt es etablierte Programme wie </a:t>
+              <a:t>- Was nicht zum Projekt gehört ist die technische Prüfung der Website als ganzes.</a:t>
+            </a:r>
+          </a:p>
+          <a:p>
+            <a:r>
+              <a:rPr i="0"/>
+              <a:t>- Also z.B. Kontraste, Tastaturbedienung, Seitentitel, Navigation.</a:t>
+            </a:r>
+          </a:p>
+          <a:p>
+            <a:r>
+              <a:rPr i="0"/>
+              <a:t>- Das ist prüfbar, ohne einen einzigen Kurs zu kennen.</a:t>
+            </a:r>
+          </a:p>
+          <a:p>
+            <a:r>
+              <a:rPr i="0"/>
+              <a:t>- Dafür gibt es etablierte Tools wie </a:t>
             </a:r>
             <a:r>
               <a:rPr b="1" i="0"/>
@@ -2725,7 +2731,7 @@
             </a:r>
             <a:r>
               <a:rPr i="0"/>
-              <a:t>. Zuständig ist die städtische IT.</a:t>
+              <a:t>. Zuständig ist hier die städtische IT.</a:t>
             </a:r>
           </a:p>
           <a:p/>
@@ -2738,21 +2744,19 @@
           <a:p>
             <a:r>
               <a:rPr i="0"/>
-              <a:t>- Rechts steht, was am einzelnen Text hängt: </a:t>
-            </a:r>
-            <a:r>
-              <a:rPr b="1" i="0">
-                <a:solidFill>
-                  <a:srgbClr val="A4162B"/>
-                </a:solidFill>
-              </a:rPr>
-              <a:t>Versteht die Zielgruppe genau dieses Kurses ihn?</a:t>
-            </a:r>
-          </a:p>
-          <a:p>
-            <a:r>
-              <a:rPr i="0"/>
-              <a:t>- Das lässt sich nicht beantworten, ohne zu wissen, wer liest. Zuständig sind die Programmbereiche.</a:t>
+              <a:t>- Das Projekt prüft den einzelnen Text:</a:t>
+            </a:r>
+          </a:p>
+          <a:p>
+            <a:r>
+              <a:rPr i="0"/>
+              <a:t>- Versteht die Zielgruppe genau dieses Kurses ihn?</a:t>
+            </a:r>
+          </a:p>
+          <a:p>
+            <a:r>
+              <a:rPr i="0"/>
+              <a:t>- Die KI kann hier nur Vorschläge machen, die Entscheidung liegt beim Fachbereich.</a:t>
             </a:r>
           </a:p>
           <a:p/>
@@ -2785,11 +2789,7 @@
           <a:p>
             <a:r>
               <a:rPr i="0"/>
-              <a:t>- </a:t>
-            </a:r>
-            <a:r>
-              <a:rPr i="1"/>
-              <a:t>Und genau dafür setzen wir ein KI-Sprachmodell ein.</a:t>
+              <a:t>- Und genau dafür setzen wir ein KI-Sprachmodell ein.</a:t>
             </a:r>
           </a:p>
         </p:txBody>
@@ -2860,13 +2860,13 @@
           <a:p>
             <a:r>
               <a:rPr i="0"/>
-              <a:t>Zum Kern der Aufgabe, dem System-Prompt. Er folgt der Sechs-Komponenten-</a:t>
-            </a:r>
-          </a:p>
-          <a:p>
-            <a:r>
-              <a:rPr i="0"/>
-              <a:t>Struktur aus dem Aufgabenblatt.</a:t>
+              <a:t>- Und damit kommen wir zum Kern der Aufgabe, unserem System-Prompt.</a:t>
+            </a:r>
+          </a:p>
+          <a:p>
+            <a:r>
+              <a:rPr i="0"/>
+              <a:t>- Er folgt der gängigen Sechs-Komponenten- Struktur</a:t>
             </a:r>
           </a:p>
           <a:p/>

--- a/ausgabe/Praesentation-KLARTEXT.pptx
+++ b/ausgabe/Praesentation-KLARTEXT.pptx
@@ -2873,57 +2873,13 @@
           <a:p>
             <a:r>
               <a:rPr i="0"/>
-              <a:t>### Rolle, Aufgabe, Format</a:t>
-            </a:r>
-          </a:p>
-          <a:p>
-            <a:r>
-              <a:rPr i="0"/>
-              <a:t>- </a:t>
-            </a:r>
-            <a:r>
-              <a:rPr b="1" i="0"/>
-              <a:t>ROLLE</a:t>
-            </a:r>
-            <a:r>
-              <a:rPr i="0"/>
-              <a:t>: Redaktionsassistenz, nicht Autorin.</a:t>
-            </a:r>
-          </a:p>
-          <a:p>
-            <a:r>
-              <a:rPr i="0"/>
-              <a:t>- </a:t>
-            </a:r>
-            <a:r>
-              <a:rPr b="1" i="0"/>
-              <a:t>AUFGABE</a:t>
-            </a:r>
-            <a:r>
-              <a:rPr i="0"/>
-              <a:t>: erst die Zielgruppe bestimmen, dann prüfen. Die Reihenfolge steht fest.</a:t>
-            </a:r>
-          </a:p>
-          <a:p>
-            <a:r>
-              <a:rPr i="0"/>
-              <a:t>- </a:t>
-            </a:r>
-            <a:r>
-              <a:rPr b="1" i="0"/>
-              <a:t>FORMAT</a:t>
-            </a:r>
-            <a:r>
-              <a:rPr i="0"/>
-              <a:t>: zu jedem Befund ein wörtliches Zitat, eine Begründung, ein konkreter Vorschlag. </a:t>
-            </a:r>
-            <a:r>
-              <a:rPr b="1" i="0">
-                <a:solidFill>
-                  <a:srgbClr val="A4162B"/>
-                </a:solidFill>
-              </a:rPr>
-              <a:t>Ohne Vorschlag kein Befund.</a:t>
+              <a:t>### Rolle, Aufgabe, Format, Grenzen</a:t>
+            </a:r>
+          </a:p>
+          <a:p>
+            <a:r>
+              <a:rPr i="0"/>
+              <a:t>*(Vorlesen)*</a:t>
             </a:r>
           </a:p>
           <a:p/>
@@ -2936,7 +2892,7 @@
           <a:p>
             <a:r>
               <a:rPr i="0"/>
-              <a:t>- Der KONTEXT enthält das Hauswissen: acht Programmbereiche, interne Abkürzungen, sechs Prüfregeln.</a:t>
+              <a:t>- Der KONTEXT enthält das Hauswissen: acht Programmbereiche, interne Abkürzungen und auch die sechs Prüfregeln sind hier drin.</a:t>
             </a:r>
           </a:p>
           <a:p>
@@ -2950,27 +2906,13 @@
             </a:r>
             <a:r>
               <a:rPr i="0"/>
-              <a:t>. Vollständig im Prompt, nicht als Verweis.</a:t>
-            </a:r>
-          </a:p>
-          <a:p>
-            <a:r>
-              <a:rPr i="0"/>
-              <a:t>- </a:t>
-            </a:r>
-            <a:r>
-              <a:rPr b="1" i="0">
-                <a:solidFill>
-                  <a:srgbClr val="A4162B"/>
-                </a:solidFill>
-              </a:rPr>
-              <a:t>Er schätzt das Sprachniveau also nicht, er begründet es.</a:t>
-            </a:r>
-          </a:p>
-          <a:p>
-            <a:r>
-              <a:rPr i="0"/>
-              <a:t>- Das ist das Ergebnis der ersten Überarbeitung: Vorher behauptete der Prompt, gegen Wortlisten zu prüfen, hatte sie aber gar nicht. Er schätzte frei und klang nach Beleg — derselbe Fehler, den ich anderen Werkzeugen vorwerfe.</a:t>
+              <a:t>. Die werden vollständig mit dem Prompt übergeben.</a:t>
+            </a:r>
+          </a:p>
+          <a:p>
+            <a:r>
+              <a:rPr i="0"/>
+              <a:t>- Das ist das Ergebnis der ersten Überarbeitung: Vorher hat die KI behauptet gegen die Wortlisten zu prüfen, was jedoch nicht erfolgt ist.</a:t>
             </a:r>
           </a:p>
           <a:p>

--- a/ausgabe/Praesentation-KLARTEXT.pptx
+++ b/ausgabe/Praesentation-KLARTEXT.pptx
@@ -2935,19 +2935,41 @@
           <a:p>
             <a:r>
               <a:rPr i="0"/>
-              <a:t>- „Bewertet Texte, niemals Personen.“ Dieser eine Satz leistet zweierlei.</a:t>
-            </a:r>
-          </a:p>
-          <a:p>
-            <a:r>
-              <a:rPr i="0"/>
-              <a:t>- Er hält das Projekt aus dem Hochrisikobereich der KI-Verordnung: Hoch eingestuft wird dort nur, was Menschen bewertet — dieses System bewertet Texte.</a:t>
-            </a:r>
-          </a:p>
-          <a:p>
-            <a:r>
-              <a:rPr i="0"/>
-              <a:t>- Und er ist die Antwort auf die Frage des Personalrats, ob hier Leistung kontrolliert wird.</a:t>
+              <a:t>- „Bewertet Texte, niemals Personen.“ Das Werkzeug liefert Befunde zu Texten, die jemand geschrieben hat.</a:t>
+            </a:r>
+          </a:p>
+          <a:p>
+            <a:r>
+              <a:rPr i="0"/>
+              <a:t>- </a:t>
+            </a:r>
+            <a:r>
+              <a:rPr b="1" i="0">
+                <a:solidFill>
+                  <a:srgbClr val="A4162B"/>
+                </a:solidFill>
+              </a:rPr>
+              <a:t>Wer die auswertet, bewertet Menschen.</a:t>
+            </a:r>
+            <a:r>
+              <a:rPr i="0"/>
+              <a:t> Genau das verbietet der Prompt: keine Statistik, kein Vergleich zwischen Verfasserinnen.</a:t>
+            </a:r>
+          </a:p>
+          <a:p>
+            <a:r>
+              <a:rPr i="0"/>
+              <a:t>- Das ist die Antwort auf die Frage des Personalrats, ob hier Leistung kontrolliert wird.</a:t>
+            </a:r>
+          </a:p>
+          <a:p>
+            <a:r>
+              <a:rPr i="0"/>
+              <a:t>- </a:t>
+            </a:r>
+            <a:r>
+              <a:rPr i="1"/>
+              <a:t>Und es ist die Grenze zur KI-Verordnung: Systeme, die die Leistung Beschäftigter bewerten, stuft sie als hochriskant ein.</a:t>
             </a:r>
           </a:p>
         </p:txBody>

--- a/ausgabe/Praesentation-KLARTEXT.pptx
+++ b/ausgabe/Praesentation-KLARTEXT.pptx
@@ -2921,8 +2921,20 @@
               <a:t>- </a:t>
             </a:r>
             <a:r>
+              <a:rPr b="1" i="0">
+                <a:solidFill>
+                  <a:srgbClr val="A4162B"/>
+                </a:solidFill>
+              </a:rPr>
+              <a:t>Und der Maßstab kommt nicht von mir:</a:t>
+            </a:r>
+            <a:r>
+              <a:rPr i="0"/>
+              <a:t> Die Liste geht laut Goethe-Institut auf eine Veröffentlichung der Prüfungszentrale des Deutschen Volkshochschul-Verbands zurück. </a:t>
+            </a:r>
+            <a:r>
               <a:rPr i="1"/>
-              <a:t>Der Grundstock dieser Listen stammt laut Goethe-Institut aus einer Veröffentlichung der Prüfungszentrale des Deutschen Volkshochschul-Verbands in Frankfurt.</a:t>
+              <a:t>Die sitzt in Frankfurt — Zufall, aber ein hübscher.</a:t>
             </a:r>
           </a:p>
           <a:p/>

--- a/ausgabe/Praesentation-KLARTEXT.pptx
+++ b/ausgabe/Praesentation-KLARTEXT.pptx
@@ -2941,13 +2941,7 @@
           <a:p>
             <a:r>
               <a:rPr i="0"/>
-              <a:t>### Der Kasten unten: die Zeile GRENZEN</a:t>
-            </a:r>
-          </a:p>
-          <a:p>
-            <a:r>
-              <a:rPr i="0"/>
-              <a:t>- „Bewertet Texte, niemals Personen.“ Das Werkzeug liefert Befunde zu Texten, die jemand geschrieben hat.</a:t>
+              <a:t>### Zeile GRENZEN</a:t>
             </a:r>
           </a:p>
           <a:p>
@@ -2961,27 +2955,11 @@
                   <a:srgbClr val="A4162B"/>
                 </a:solidFill>
               </a:rPr>
-              <a:t>Wer die auswertet, bewertet Menschen.</a:t>
-            </a:r>
-            <a:r>
-              <a:rPr i="0"/>
-              <a:t> Genau das verbietet der Prompt: keine Statistik, kein Vergleich zwischen Verfasserinnen.</a:t>
-            </a:r>
-          </a:p>
-          <a:p>
-            <a:r>
-              <a:rPr i="0"/>
-              <a:t>- Das ist die Antwort auf die Frage des Personalrats, ob hier Leistung kontrolliert wird.</a:t>
-            </a:r>
-          </a:p>
-          <a:p>
-            <a:r>
-              <a:rPr i="0"/>
-              <a:t>- </a:t>
-            </a:r>
-            <a:r>
-              <a:rPr i="1"/>
-              <a:t>Und es ist die Grenze zur KI-Verordnung: Systeme, die die Leistung Beschäftigter bewerten, stuft sie als hochriskant ein.</a:t>
+              <a:t>Bewertet Texte, niemals Personen.</a:t>
+            </a:r>
+            <a:r>
+              <a:rPr i="0"/>
+              <a:t> Das ist der Satz, mit dem ich beim Personalrat antrete.</a:t>
             </a:r>
           </a:p>
         </p:txBody>

--- a/ausgabe/Praesentation-KLARTEXT.pptx
+++ b/ausgabe/Praesentation-KLARTEXT.pptx
@@ -646,7 +646,20 @@
           <a:p>
             <a:r>
               <a:rPr i="0"/>
-              <a:t>Damit zum Change-Teil, und der beginnt mit den </a:t>
+              <a:t>- Damit zum Change-Teil</a:t>
+            </a:r>
+          </a:p>
+          <a:p>
+            <a:r>
+              <a:rPr i="0"/>
+              <a:t>- Der Pilot beschränkt sich auf einen der vier Fachbereiche. Nur so ist der Kreis klein genug, dass man ihn wirklich einbinden kann.</a:t>
+            </a:r>
+          </a:p>
+          <a:p/>
+          <a:p>
+            <a:r>
+              <a:rPr i="0"/>
+              <a:t>und der beginnt mit den </a:t>
             </a:r>
             <a:r>
               <a:rPr b="1" i="0"/>
@@ -683,7 +696,7 @@
           <a:p>
             <a:r>
               <a:rPr i="0"/>
-              <a:t>- Wer entscheidet oder zustimmen muss.</a:t>
+              <a:t>- Ich fange an mit den Stakeholdern, die wir eng einbinden müssen.</a:t>
             </a:r>
           </a:p>
           <a:p>
@@ -707,7 +720,7 @@
             </a:r>
             <a:r>
               <a:rPr b="1" i="0"/>
-              <a:t>Der Fachbereich des Pilotbereichs</a:t>
+              <a:t>Der Pilot-Fachbereich</a:t>
             </a:r>
             <a:r>
               <a:rPr i="0"/>
@@ -1409,7 +1422,7 @@
             </a:r>
             <a:r>
               <a:rPr b="1" i="0"/>
-              <a:t>Programmbereich</a:t>
+              <a:t>Fachbereich</a:t>
             </a:r>
             <a:r>
               <a:rPr i="0"/>
@@ -2926,40 +2939,11 @@
                   <a:srgbClr val="A4162B"/>
                 </a:solidFill>
               </a:rPr>
-              <a:t>Und der Maßstab kommt nicht von mir:</a:t>
-            </a:r>
-            <a:r>
-              <a:rPr i="0"/>
-              <a:t> Die Liste geht laut Goethe-Institut auf eine Veröffentlichung der Prüfungszentrale des Deutschen Volkshochschul-Verbands zurück. </a:t>
-            </a:r>
-            <a:r>
-              <a:rPr i="1"/>
-              <a:t>Die sitzt in Frankfurt — Zufall, aber ein hübscher.</a:t>
-            </a:r>
-          </a:p>
-          <a:p/>
-          <a:p>
-            <a:r>
-              <a:rPr i="0"/>
-              <a:t>### Zeile GRENZEN</a:t>
-            </a:r>
-          </a:p>
-          <a:p>
-            <a:r>
-              <a:rPr i="0"/>
-              <a:t>- </a:t>
-            </a:r>
-            <a:r>
-              <a:rPr b="1" i="0">
-                <a:solidFill>
-                  <a:srgbClr val="A4162B"/>
-                </a:solidFill>
-              </a:rPr>
-              <a:t>Bewertet Texte, niemals Personen.</a:t>
-            </a:r>
-            <a:r>
-              <a:rPr i="0"/>
-              <a:t> Das ist der Satz, mit dem ich beim Personalrat antrete.</a:t>
+              <a:t>Funfact:</a:t>
+            </a:r>
+            <a:r>
+              <a:rPr i="0"/>
+              <a:t> Die Liste geht laut Goethe-Institut auf eine Veröffentlichung der Prüfungszentrale des Deutschen Volkshochschul-Verbands zurück.</a:t>
             </a:r>
           </a:p>
         </p:txBody>
@@ -3030,13 +3014,13 @@
           <a:p>
             <a:r>
               <a:rPr i="0"/>
-              <a:t>Bleibt die Frage, wie das in den Alltag kommt. Zwei Wege, beide vom ersten Tag</a:t>
-            </a:r>
-          </a:p>
-          <a:p>
-            <a:r>
-              <a:rPr i="0"/>
-              <a:t>an offen.</a:t>
+              <a:t>- Zur technischen Implementierung</a:t>
+            </a:r>
+          </a:p>
+          <a:p>
+            <a:r>
+              <a:rPr i="0"/>
+              <a:t>- Zwei Wege sind zu Beginn des Pilotprojekts verfügbar.</a:t>
             </a:r>
           </a:p>
           <a:p/>
@@ -3055,7 +3039,7 @@
           <a:p>
             <a:r>
               <a:rPr i="0"/>
-              <a:t>- Der Deutsche Volkshochschul-Verband hat im Mai 2025 eine Rahmenvereinbarung mit </a:t>
+              <a:t>- Der Deutsche Volkshochschul-Verband hat im Mai 2025 eine Rahmenvereinbarung mit dem Anbieter </a:t>
             </a:r>
             <a:r>
               <a:rPr b="1" i="0"/>
@@ -3069,160 +3053,51 @@
           <a:p>
             <a:r>
               <a:rPr i="0"/>
-              <a:t>- Genau das ist mein Prompt. Zustimmung außerhalb des Pilotbereichs braucht es nicht, weil der Rahmenvertrag schon da ist.</a:t>
-            </a:r>
-          </a:p>
-          <a:p>
-            <a:r>
-              <a:rPr i="0"/>
-              <a:t>- </a:t>
-            </a:r>
-            <a:r>
-              <a:rPr i="1"/>
-              <a:t>Zu klären bleibt, ob die vhs Frankfurt die Lizenz auch gebucht hat. Der Rahmenvertrag schafft die Möglichkeit, er ist nicht die Buchung.</a:t>
+              <a:t>- Zustimmung außerhalb des Pilotbereichs braucht es nicht, weil bereits ein Rahmenvertrag besteht.</a:t>
             </a:r>
           </a:p>
           <a:p/>
           <a:p>
             <a:r>
               <a:rPr i="0"/>
-              <a:t>### Die Einschränkung dazu</a:t>
-            </a:r>
-          </a:p>
-          <a:p>
-            <a:r>
-              <a:rPr i="0"/>
-              <a:t>- Diesen Weg habe ich nicht ausprobiert.</a:t>
-            </a:r>
-          </a:p>
-          <a:p>
-            <a:r>
-              <a:rPr i="0"/>
-              <a:t>- Mein Prüfwerkzeug bearbeitet jede Antwort nach: Es rechnet die Einstufung anhand einer Tabelle nach und entfernt Personennamen. Beides stand ursprünglich im Prompt, beides hielt das Modell nicht zuverlässig ein.</a:t>
-            </a:r>
-          </a:p>
-          <a:p>
-            <a:r>
-              <a:rPr i="0"/>
-              <a:t>- </a:t>
-            </a:r>
-            <a:r>
-              <a:rPr b="1" i="0">
-                <a:solidFill>
-                  <a:srgbClr val="A4162B"/>
-                </a:solidFill>
-              </a:rPr>
-              <a:t>In einem fremden Assistenten gibt es diesen Code nicht.</a:t>
-            </a:r>
-            <a:r>
-              <a:rPr i="0"/>
-              <a:t> Was das praktisch bedeutet, muss der Pilot zeigen.</a:t>
+              <a:t>### Weg 2: Als eigenes Prüfwerkzeug</a:t>
+            </a:r>
+          </a:p>
+          <a:p>
+            <a:r>
+              <a:rPr i="0"/>
+              <a:t>- Einen Entwurf einfügen — oder einen vorhandenen Kurs auswählen</a:t>
+            </a:r>
+          </a:p>
+          <a:p>
+            <a:r>
+              <a:rPr i="0"/>
+              <a:t>- Die Schnittstelle des Kursportals ist öffentlich. Es braucht nur einen eigenen Server.</a:t>
+            </a:r>
+          </a:p>
+          <a:p>
+            <a:r>
+              <a:rPr i="0"/>
+              <a:t>- Auch um den Prompt zu testen, habe ich hier einen Prototyp gebaut.</a:t>
             </a:r>
           </a:p>
           <a:p/>
           <a:p>
             <a:r>
               <a:rPr i="0"/>
-              <a:t>### Weg 2: Als eigenes Prüfwerkzeug</a:t>
-            </a:r>
-          </a:p>
-          <a:p>
-            <a:r>
-              <a:rPr i="0"/>
-              <a:t>- Das Werkzeug, das ich gebaut habe. Entwurf einfügen — oder bei einem vorhandenen Kurs nur die Nummer, dann holt es den Text selbst.</a:t>
-            </a:r>
-          </a:p>
-          <a:p>
-            <a:r>
-              <a:rPr i="0"/>
-              <a:t>- Die Schnittstelle des Kursportals ist öffentlich. Es braucht nur einen eigenen Server.</a:t>
-            </a:r>
-          </a:p>
-          <a:p/>
-          <a:p>
-            <a:r>
-              <a:rPr i="0"/>
-              <a:t>### Rechts im Bild: ein Befund</a:t>
-            </a:r>
-          </a:p>
-          <a:p>
-            <a:r>
-              <a:rPr i="0"/>
-              <a:t>- Ein Befund aus einem echten Durchlauf, dem Deutschkurs auf A2.</a:t>
-            </a:r>
-          </a:p>
-          <a:p>
-            <a:r>
-              <a:rPr i="0"/>
-              <a:t>- Jeder Befund hat dieselben vier Teile: Einstufung, Regel, wörtliche Stelle, Vorschlag.</a:t>
-            </a:r>
-          </a:p>
-          <a:p>
-            <a:r>
-              <a:rPr i="0"/>
-              <a:t>- Dieser hier ist Pflicht: Der Link heißt schlicht „hier“. Wer sich die Seite vorlesen lässt und von Link zu Link springt, hört nur „hier“.</a:t>
-            </a:r>
-          </a:p>
-          <a:p>
-            <a:r>
-              <a:rPr i="0"/>
-              <a:t>- Der Vorschlag daneben ist kein Kommentar, sondern fertiger Text zum Übernehmen.</a:t>
-            </a:r>
-          </a:p>
-          <a:p/>
-          <a:p>
-            <a:r>
-              <a:rPr i="0"/>
-              <a:t>### Hier die Vorführung</a:t>
-            </a:r>
-          </a:p>
-          <a:p>
-            <a:r>
-              <a:rPr i="0"/>
-              <a:t>- Ich zeige euch das kurz live, an genau diesem Kurs.</a:t>
-            </a:r>
-          </a:p>
-          <a:p>
-            <a:r>
-              <a:rPr i="0"/>
-              <a:t>- </a:t>
-            </a:r>
-            <a:r>
-              <a:rPr i="1"/>
-              <a:t>Ein Prototyp für diese Arbeit. Er belegt, dass der Weg funktioniert — eine fertige Anwendung ist er nicht.</a:t>
-            </a:r>
-          </a:p>
-          <a:p/>
-          <a:p>
-            <a:r>
-              <a:rPr i="0"/>
-              <a:t>### Der Kasten unten</a:t>
-            </a:r>
-          </a:p>
-          <a:p>
-            <a:r>
-              <a:rPr i="0"/>
-              <a:t>- Kein Teil des Pilotprojekts: Man könnte die Prüfung ins Redaktionssystem einbauen, dort, wo der Text entsteht.</a:t>
-            </a:r>
-          </a:p>
-          <a:p>
-            <a:r>
-              <a:rPr i="0"/>
-              <a:t>- Nur wird das Portal von einem externen Dienstleister betreut. Also Auftrag, Budget, Vorlauf.</a:t>
-            </a:r>
-          </a:p>
-          <a:p>
-            <a:r>
-              <a:rPr i="0"/>
-              <a:t>- </a:t>
-            </a:r>
-            <a:r>
-              <a:rPr b="1" i="0">
-                <a:solidFill>
-                  <a:srgbClr val="A4162B"/>
-                </a:solidFill>
-              </a:rPr>
-              <a:t>Man kauft nichts, bevor man weiß, ob es wirkt.</a:t>
+              <a:t>### Unten:</a:t>
+            </a:r>
+          </a:p>
+          <a:p>
+            <a:r>
+              <a:rPr i="0"/>
+              <a:t>- Perspektivisch möglich, aber kein Teil des Pilotprojekts: Man könnte die Prüfung direkt ins Redaktionssystem einbauen, also dort, wo der Text entsteht.</a:t>
+            </a:r>
+          </a:p>
+          <a:p>
+            <a:r>
+              <a:rPr i="0"/>
+              <a:t>- Allerdings wird das Portal von einem externen Dienstleister betreut.</a:t>
             </a:r>
           </a:p>
         </p:txBody>

--- a/ausgabe/Praesentation-KLARTEXT.pptx
+++ b/ausgabe/Praesentation-KLARTEXT.pptx
@@ -646,44 +646,28 @@
           <a:p>
             <a:r>
               <a:rPr i="0"/>
-              <a:t>- Damit zum Change-Teil</a:t>
-            </a:r>
-          </a:p>
-          <a:p>
-            <a:r>
-              <a:rPr i="0"/>
-              <a:t>- Der Pilot beschränkt sich auf einen der vier Fachbereiche. Nur so ist der Kreis klein genug, dass man ihn wirklich einbinden kann.</a:t>
+              <a:t>- Damit zum Change-Teil: Wen sollten wir im Projekt auf welche Weise berücksichtigen?</a:t>
+            </a:r>
+          </a:p>
+          <a:p>
+            <a:r>
+              <a:rPr i="0"/>
+              <a:t>- Wichtig: Der Pilot beschränkt sich auf einen der vier Fachbereiche.</a:t>
             </a:r>
           </a:p>
           <a:p/>
           <a:p>
             <a:r>
               <a:rPr i="0"/>
-              <a:t>und der beginnt mit den </a:t>
-            </a:r>
-            <a:r>
-              <a:rPr b="1" i="0"/>
-              <a:t>Stakeholdern</a:t>
-            </a:r>
-            <a:r>
-              <a:rPr i="0"/>
-              <a:t>. Die</a:t>
-            </a:r>
-          </a:p>
-          <a:p>
+              <a:t>- Die </a:t>
+            </a:r>
             <a:r>
               <a:rPr b="1" i="0"/>
               <a:t>Einfluss-Betroffenheits-Matrix</a:t>
             </a:r>
             <a:r>
               <a:rPr i="0"/>
-              <a:t> sortiert sie nach zwei Fragen: Wer ist</a:t>
-            </a:r>
-          </a:p>
-          <a:p>
-            <a:r>
-              <a:rPr i="0"/>
-              <a:t>betroffen, und wer hat Einfluss.</a:t>
+              <a:t> sortiert die Stakeholder nach zwei Fragen: Wer ist betroffen, und wer hat Einfluss.</a:t>
             </a:r>
           </a:p>
           <a:p/>
@@ -710,7 +694,7 @@
             </a:r>
             <a:r>
               <a:rPr i="0"/>
-              <a:t> — laut Impressum persönlich für die redaktionellen Inhalte verantwortlich.</a:t>
+              <a:t> — da er laut Impressum persönlich für die redaktionellen Inhalte verantwortlich ist.</a:t>
             </a:r>
           </a:p>
           <a:p>
@@ -724,21 +708,7 @@
             </a:r>
             <a:r>
               <a:rPr i="0"/>
-              <a:t> — entscheidet über den Text. Und zwar nur dieser eine: Vier gleichzeitig wären kein Pilot mehr.</a:t>
-            </a:r>
-          </a:p>
-          <a:p>
-            <a:r>
-              <a:rPr i="0"/>
-              <a:t>- </a:t>
-            </a:r>
-            <a:r>
-              <a:rPr b="1" i="0"/>
-              <a:t>Die Redaktion des Programmhefts</a:t>
-            </a:r>
-            <a:r>
-              <a:rPr i="0"/>
-              <a:t> — prüft Texte für den Druck schon heute, weiß also, wie Textprüfung geht.</a:t>
+              <a:t> — natürlich, er entscheidet über den Text.</a:t>
             </a:r>
           </a:p>
           <a:p>
@@ -892,6 +862,24 @@
             <a:r>
               <a:rPr i="0"/>
               <a:t>- Einen Kanal haben sie doch: Arbeitnehmerähnliche Personen gelten nach dem Personalvertretungsgesetz als Beschäftigte, der Personalrat vertritt sie mit.</a:t>
+            </a:r>
+          </a:p>
+          <a:p>
+            <a:r>
+              <a:rPr i="0"/>
+              <a:t>- </a:t>
+            </a:r>
+            <a:r>
+              <a:rPr b="1" i="0"/>
+              <a:t>Die Redaktion des Programmhefts</a:t>
+            </a:r>
+            <a:r>
+              <a:rPr i="0"/>
+              <a:t> — prüft Texte für den Druck schon heute, weiß also, wie Textprüfung geht. </a:t>
+            </a:r>
+            <a:r>
+              <a:rPr i="1"/>
+              <a:t>Im Pilot ist sie nicht: Der prüft nur neue Portaltexte.</a:t>
             </a:r>
           </a:p>
           <a:p>
@@ -2071,7 +2059,7 @@
           <a:p>
             <a:r>
               <a:rPr i="0"/>
-              <a:t>### Der Kasten unten</a:t>
+              <a:t>### Callout</a:t>
             </a:r>
           </a:p>
           <a:p>

--- a/ausgabe/Praesentation-KLARTEXT.pptx
+++ b/ausgabe/Praesentation-KLARTEXT.pptx
@@ -722,7 +722,7 @@
             </a:r>
             <a:r>
               <a:rPr i="0"/>
-              <a:t> — hier ist die Einordnung zu schwach. Sein Einfluss ist kein hoher, sondern ein </a:t>
+              <a:t> — der Einzige, der das Projekt anhalten kann: Die Einführung ist mitbestimmungspflichtig. </a:t>
             </a:r>
             <a:r>
               <a:rPr b="1" i="0">
@@ -730,11 +730,11 @@
                   <a:srgbClr val="A4162B"/>
                 </a:solidFill>
               </a:rPr>
-              <a:t>sperrender</a:t>
-            </a:r>
-            <a:r>
-              <a:rPr i="0"/>
-              <a:t>: Die Einführung ist mitbestimmungspflichtig. </a:t>
+              <a:t>Ohne seine Zustimmung passiert nichts.</a:t>
+            </a:r>
+            <a:r>
+              <a:rPr i="0"/>
+              <a:t> </a:t>
             </a:r>
             <a:r>
               <a:rPr i="1"/>
@@ -787,20 +787,6 @@
             <a:r>
               <a:rPr i="0"/>
               <a:t> — bleibt für die technische Seite zuständig.</a:t>
-            </a:r>
-          </a:p>
-          <a:p>
-            <a:r>
-              <a:rPr i="0"/>
-              <a:t>- </a:t>
-            </a:r>
-            <a:r>
-              <a:rPr b="1" i="0"/>
-              <a:t>Advellence</a:t>
-            </a:r>
-            <a:r>
-              <a:rPr i="0"/>
-              <a:t> — programmiert laut Impressum das Portal.</a:t>
             </a:r>
           </a:p>
           <a:p>

--- a/ausgabe/Praesentation-KLARTEXT.pptx
+++ b/ausgabe/Praesentation-KLARTEXT.pptx
@@ -732,14 +732,6 @@
               </a:rPr>
               <a:t>Ohne seine Zustimmung passiert nichts.</a:t>
             </a:r>
-            <a:r>
-              <a:rPr i="0"/>
-              <a:t> </a:t>
-            </a:r>
-            <a:r>
-              <a:rPr i="1"/>
-              <a:t>Seine zwei von sechzehn Sitzen in der Betriebskommission sind daneben bedeutungslos.</a:t>
-            </a:r>
           </a:p>
           <a:p/>
           <a:p>
@@ -800,7 +792,7 @@
             </a:r>
             <a:r>
               <a:rPr i="0"/>
-              <a:t> — Aufsichtsgremium.</a:t>
+              <a:t> — als Aufsichtsgremium.</a:t>
             </a:r>
           </a:p>
           <a:p>
@@ -827,12 +819,6 @@
           <a:p>
             <a:r>
               <a:rPr i="0"/>
-              <a:t>- Der Quadrant, der mich am meisten beschäftigt hat.</a:t>
-            </a:r>
-          </a:p>
-          <a:p>
-            <a:r>
-              <a:rPr i="0"/>
               <a:t>- </a:t>
             </a:r>
             <a:r>
@@ -841,13 +827,7 @@
             </a:r>
             <a:r>
               <a:rPr i="0"/>
-              <a:t> — maximal betroffen, denn in der Branche schreiben sie viele dieser Texte. In keinem Gremium sitzen sie, und vorschreiben kann man ihnen nichts.</a:t>
-            </a:r>
-          </a:p>
-          <a:p>
-            <a:r>
-              <a:rPr i="0"/>
-              <a:t>- Einen Kanal haben sie doch: Arbeitnehmerähnliche Personen gelten nach dem Personalvertretungsgesetz als Beschäftigte, der Personalrat vertritt sie mit.</a:t>
+              <a:t> — oft kommt der Text von ihnen. Trotzdem sitzen sie in keinem Gremium, und vorschreiben kann man ihnen nichts.</a:t>
             </a:r>
           </a:p>
           <a:p>
@@ -876,24 +856,6 @@
             <a:r>
               <a:rPr b="1" i="0"/>
               <a:t>Die Teilnehmenden</a:t>
-            </a:r>
-            <a:r>
-              <a:rPr i="0"/>
-              <a:t> — besonders in Deutschkursen und Grundbildung. </a:t>
-            </a:r>
-            <a:r>
-              <a:rPr b="1" i="0">
-                <a:solidFill>
-                  <a:srgbClr val="A4162B"/>
-                </a:solidFill>
-              </a:rPr>
-              <a:t>Für sie ist das Projekt gemacht, und sie haben keine Stimme — in keinem Gremium und in keinem Gesetz.</a:t>
-            </a:r>
-          </a:p>
-          <a:p>
-            <a:r>
-              <a:rPr i="0"/>
-              <a:t>- Bei ihnen ist Beteiligung kein guter Stil, sondern das einzige Instrument, das es überhaupt gibt.</a:t>
             </a:r>
           </a:p>
         </p:txBody>
@@ -964,19 +926,7 @@
           <a:p>
             <a:r>
               <a:rPr i="0"/>
-              <a:t>Jetzt zum Widerstand. Der Unterricht nennt vier Ursachen: Unsicherheit,</a:t>
-            </a:r>
-          </a:p>
-          <a:p>
-            <a:r>
-              <a:rPr i="0"/>
-              <a:t>Verlustangst, fehlende Perspektive und Gewohnheit. Für jede gibt es hier einen</a:t>
-            </a:r>
-          </a:p>
-          <a:p>
-            <a:r>
-              <a:rPr i="0"/>
-              <a:t>Fall, den es wirklich gibt.</a:t>
+              <a:t>Jetzt zu den Widerständen.</a:t>
             </a:r>
           </a:p>
           <a:p/>
@@ -989,7 +939,7 @@
           <a:p>
             <a:r>
               <a:rPr i="0"/>
-              <a:t>- Die Frage, die als Erstes kommt: Schreibt die KI jetzt unsere Texte?</a:t>
+              <a:t>- Die Frage, die als Erstes kommen könnte: Schreibt die KI jetzt unsere Texte?</a:t>
             </a:r>
           </a:p>
           <a:p>

--- a/ausgabe/Praesentation-KLARTEXT.pptx
+++ b/ausgabe/Praesentation-KLARTEXT.pptx
@@ -1170,57 +1170,20 @@
           <a:p>
             <a:r>
               <a:rPr i="0"/>
-              <a:t>ich hebe zwei Dinge heraus.</a:t>
+              <a:t>ich erkläre die Logik dahinter.</a:t>
             </a:r>
           </a:p>
           <a:p/>
           <a:p>
             <a:r>
               <a:rPr i="0"/>
-              <a:t>### Monat 2, Kommunikation: Training</a:t>
-            </a:r>
-          </a:p>
-          <a:p>
-            <a:r>
-              <a:rPr i="0"/>
-              <a:t>- Keine Kür, sondern Pflicht: </a:t>
-            </a:r>
-            <a:r>
-              <a:rPr b="1" i="0"/>
-              <a:t>Artikel 4 der KI-Verordnung</a:t>
-            </a:r>
-            <a:r>
-              <a:rPr i="0"/>
-              <a:t> verlangt seit Februar 2025 ausreichende KI-Kompetenz.</a:t>
-            </a:r>
-          </a:p>
-          <a:p>
-            <a:r>
-              <a:rPr i="0"/>
-              <a:t>- Und zwar für das Personal und für alle, die im Auftrag mit Betrieb und Nutzung befasst sind.</a:t>
-            </a:r>
-          </a:p>
-          <a:p>
-            <a:r>
-              <a:rPr i="0"/>
-              <a:t>- Deshalb steht in der Zelle nicht „Personal“, sondern „alle, die bedienen“. </a:t>
-            </a:r>
-            <a:r>
-              <a:rPr i="1"/>
-              <a:t>Wer nicht bedient, braucht die Schulung nicht — deshalb bleiben die Kursleitungen aus dieser Kette.</a:t>
-            </a:r>
-          </a:p>
-          <a:p/>
-          <a:p>
-            <a:r>
-              <a:rPr i="0"/>
-              <a:t>### Strang Change: erst fragen, dann handeln</a:t>
-            </a:r>
-          </a:p>
-          <a:p>
-            <a:r>
-              <a:rPr i="0"/>
-              <a:t>- Die Freigabe der Textbausteine steht im ersten Monat, nicht im zweiten.</a:t>
+              <a:t>### Die Logik: eine Kette von Freigaben</a:t>
+            </a:r>
+          </a:p>
+          <a:p>
+            <a:r>
+              <a:rPr i="0"/>
+              <a:t>- Jeder Monat gibt den nächsten erst frei.</a:t>
             </a:r>
           </a:p>
           <a:p>
@@ -1234,7 +1197,83 @@
                   <a:srgbClr val="A4162B"/>
                 </a:solidFill>
               </a:rPr>
-              <a:t>Sonst läuft der Quick Win auf eine Zuständigkeit, die niemand hat.</a:t>
+              <a:t>Ohne Dienstvereinbarung kein Setup, ohne Training kein Pilot, ohne Nachmessung kein Rollout.</a:t>
+            </a:r>
+          </a:p>
+          <a:p>
+            <a:r>
+              <a:rPr i="0"/>
+              <a:t>- Der Rollout im dritten Monat wird deshalb nur vorbereitet. Ob er kommt, entscheidet die Nachmessung — nicht der Kalender.</a:t>
+            </a:r>
+          </a:p>
+          <a:p/>
+          <a:p>
+            <a:r>
+              <a:rPr i="0"/>
+              <a:t>### Monat 2, Kommunikation: Training</a:t>
+            </a:r>
+          </a:p>
+          <a:p>
+            <a:r>
+              <a:rPr i="0"/>
+              <a:t>- Keine Kür, sondern Pflicht: </a:t>
+            </a:r>
+            <a:r>
+              <a:rPr b="1" i="0"/>
+              <a:t>Artikel 4 der KI-Verordnung</a:t>
+            </a:r>
+            <a:r>
+              <a:rPr i="0"/>
+              <a:t> verlangt seit Februar 2025 ausreichende KI-Kompetenz.</a:t>
+            </a:r>
+          </a:p>
+          <a:p>
+            <a:r>
+              <a:rPr i="0"/>
+              <a:t>- Und zwar für das Personal und für alle, die im Auftrag mit Betrieb und Nutzung befasst sind.</a:t>
+            </a:r>
+          </a:p>
+          <a:p>
+            <a:r>
+              <a:rPr i="0"/>
+              <a:t>- Deshalb steht in der Zelle nicht „Personal“, sondern „alle, die bedienen“. </a:t>
+            </a:r>
+            <a:r>
+              <a:rPr i="1"/>
+              <a:t>Wer nicht bedient, braucht die Schulung nicht — deshalb bleiben die Kursleitungen aus dieser Kette.</a:t>
+            </a:r>
+          </a:p>
+          <a:p/>
+          <a:p>
+            <a:r>
+              <a:rPr i="0"/>
+              <a:t>### Der Kasten unten: die Bausteinfreigabe</a:t>
+            </a:r>
+          </a:p>
+          <a:p>
+            <a:r>
+              <a:rPr i="0"/>
+              <a:t>- Im Change-Strang steht das Fragen vor dem Handeln: Die Freigabe der Textbausteine wird im ersten Monat geklärt, korrigiert wird im zweiten.</a:t>
+            </a:r>
+          </a:p>
+          <a:p>
+            <a:r>
+              <a:rPr i="0"/>
+              <a:t>- Warum die Bausteine zuerst? Ein korrigierter Baustein wirkt sofort in vielen Kursen gleichzeitig — der früheste sichtbare Erfolg, den dieses Projekt haben kann.</a:t>
+            </a:r>
+          </a:p>
+          <a:p>
+            <a:r>
+              <a:rPr i="0"/>
+              <a:t>- </a:t>
+            </a:r>
+            <a:r>
+              <a:rPr b="1" i="0">
+                <a:solidFill>
+                  <a:srgbClr val="A4162B"/>
+                </a:solidFill>
+              </a:rPr>
+              <a:t>Ohne die Zuständigkeit aus dem ersten Monat dürfte ihn im zweiten niemand anfassen.</a:t>
             </a:r>
           </a:p>
         </p:txBody>

--- a/ausgabe/Praesentation-KLARTEXT.pptx
+++ b/ausgabe/Praesentation-KLARTEXT.pptx
@@ -978,7 +978,7 @@
           <a:p>
             <a:r>
               <a:rPr i="0"/>
-              <a:t>- Eine Kursbeschreibung ist selten von einer Hand: Anmeldehinweis, Beschreibung der Niveaustufe — solche Bausteine stehen wortgleich in vielen Kursen und werden nicht dort gepflegt, wo der Kurs angeboten wird.</a:t>
+              <a:t>- Eine Kursbeschreibung ist selten von einer Hand: Anmeldehinweis, Beschreibung der Niveaustufe — solche Textbausteine stehen wortgleich in vielen Kursen und werden nicht dort gepflegt, wo der Kurs angeboten wird.</a:t>
             </a:r>
           </a:p>
           <a:p>
@@ -1216,7 +1216,13 @@
           <a:p>
             <a:r>
               <a:rPr i="0"/>
-              <a:t>- Keine Kür, sondern Pflicht: </a:t>
+              <a:t>- Kein KI-Grundlagenkurs, sondern eine Schulung am konkreten System: einen Kurstext prüfen lassen, die Befunde lesen, annehmen oder verwerfen — und die Grenze kennen: Die KI schlägt vor, entschieden wird im Fachbereich.</a:t>
+            </a:r>
+          </a:p>
+          <a:p>
+            <a:r>
+              <a:rPr i="0"/>
+              <a:t>- Verpflichtend ist das ohnehin: </a:t>
             </a:r>
             <a:r>
               <a:rPr b="1" i="0"/>
@@ -1224,19 +1230,13 @@
             </a:r>
             <a:r>
               <a:rPr i="0"/>
-              <a:t> verlangt seit Februar 2025 ausreichende KI-Kompetenz.</a:t>
-            </a:r>
-          </a:p>
-          <a:p>
-            <a:r>
-              <a:rPr i="0"/>
-              <a:t>- Und zwar für das Personal und für alle, die im Auftrag mit Betrieb und Nutzung befasst sind.</a:t>
-            </a:r>
-          </a:p>
-          <a:p>
-            <a:r>
-              <a:rPr i="0"/>
-              <a:t>- Deshalb steht in der Zelle nicht „Personal“, sondern „alle, die bedienen“. </a:t>
+              <a:t> verlangt seit Februar 2025 ausreichende KI-Kompetenz — und zwar ausdrücklich bezogen auf den Einsatzkontext. Genau das leistet eine Schulung am Werkzeug selbst.</a:t>
+            </a:r>
+          </a:p>
+          <a:p>
+            <a:r>
+              <a:rPr i="0"/>
+              <a:t>- Die Pflicht gilt für das Personal und für alle, die im Auftrag mit Betrieb und Nutzung befasst sind. Deshalb steht in der Zelle nicht „Personal“, sondern „alle, die bedienen“. </a:t>
             </a:r>
             <a:r>
               <a:rPr i="1"/>
@@ -1247,25 +1247,25 @@
           <a:p>
             <a:r>
               <a:rPr i="0"/>
-              <a:t>### Der Kasten unten: die Bausteinfreigabe</a:t>
-            </a:r>
-          </a:p>
-          <a:p>
-            <a:r>
-              <a:rPr i="0"/>
-              <a:t>- Im Change-Strang steht das Fragen vor dem Handeln: Die Freigabe der Textbausteine wird im ersten Monat geklärt, korrigiert wird im zweiten.</a:t>
-            </a:r>
-          </a:p>
-          <a:p>
-            <a:r>
-              <a:rPr i="0"/>
-              <a:t>- Warum die Bausteine zuerst? Ein korrigierter Baustein wirkt sofort in vielen Kursen gleichzeitig — der früheste sichtbare Erfolg, den dieses Projekt haben kann.</a:t>
-            </a:r>
-          </a:p>
-          <a:p>
-            <a:r>
-              <a:rPr i="0"/>
-              <a:t>- </a:t>
+              <a:t>### Der Kasten unten: die Textbausteine</a:t>
+            </a:r>
+          </a:p>
+          <a:p>
+            <a:r>
+              <a:rPr i="0"/>
+              <a:t>- Was mit Textbausteinen gemeint ist: Textteile, die zentral gepflegt werden und wortgleich in vielen Kursbeschreibungen stehen — der Anmeldehinweis etwa, oder die Beschreibung der Niveaustufe.</a:t>
+            </a:r>
+          </a:p>
+          <a:p>
+            <a:r>
+              <a:rPr i="0"/>
+              <a:t>- Der Fachbereich, der die Befunde bekommt, darf genau diese Teile nicht ändern — das war die Verlustangst von der Widerstandsfolie. Beim Kernfall, dem Deutschkurs auf A2, ist das mehr als die halbe Beschreibung.</a:t>
+            </a:r>
+          </a:p>
+          <a:p>
+            <a:r>
+              <a:rPr i="0"/>
+              <a:t>- Warum zuerst? </a:t>
             </a:r>
             <a:r>
               <a:rPr b="1" i="0">
@@ -1273,7 +1273,21 @@
                   <a:srgbClr val="A4162B"/>
                 </a:solidFill>
               </a:rPr>
-              <a:t>Ohne die Zuständigkeit aus dem ersten Monat dürfte ihn im zweiten niemand anfassen.</a:t>
+              <a:t>Ein korrigierter Textbaustein wirkt sofort in allen Kursen, die ihn verwenden</a:t>
+            </a:r>
+            <a:r>
+              <a:rPr i="0"/>
+              <a:t> — der früheste sichtbare Erfolg, den dieses Projekt haben kann.</a:t>
+            </a:r>
+          </a:p>
+          <a:p>
+            <a:r>
+              <a:rPr i="0"/>
+              <a:t>- Deshalb das Fragen vor dem Handeln: Die Zuständigkeit wird im ersten Monat geklärt, korrigiert wird im zweiten. </a:t>
+            </a:r>
+            <a:r>
+              <a:rPr i="1"/>
+              <a:t>Ohne sie dürfte im zweiten Monat niemand einen Textbaustein anfassen.</a:t>
             </a:r>
           </a:p>
         </p:txBody>
@@ -1399,7 +1413,7 @@
             </a:r>
             <a:r>
               <a:rPr b="1" i="0"/>
-              <a:t>Freigabe der Bausteine</a:t>
+              <a:t>Freigabe der Textbausteine</a:t>
             </a:r>
             <a:r>
               <a:rPr i="0"/>

--- a/ausgabe/Praesentation-KLARTEXT.pptx
+++ b/ausgabe/Praesentation-KLARTEXT.pptx
@@ -1158,19 +1158,19 @@
           <a:p>
             <a:r>
               <a:rPr i="0"/>
-              <a:t>Der Zeitplan: drei Monate, drei Stränge, die neun Phasen aus der</a:t>
-            </a:r>
-          </a:p>
-          <a:p>
-            <a:r>
-              <a:rPr i="0"/>
-              <a:t>Aufgabenstellung als Überschrift jeder Zelle. Die Zellen könnt ihr mitlesen,</a:t>
-            </a:r>
-          </a:p>
-          <a:p>
-            <a:r>
-              <a:rPr i="0"/>
-              <a:t>ich erkläre die Logik dahinter.</a:t>
+              <a:t>Der Zeitplan: drei Monate, drei Stränge — Technik, Kommunikation, Change —,</a:t>
+            </a:r>
+          </a:p>
+          <a:p>
+            <a:r>
+              <a:rPr i="0"/>
+              <a:t>die neun Phasen aus der Aufgabenstellung als Überschrift jeder Zelle. Die</a:t>
+            </a:r>
+          </a:p>
+          <a:p>
+            <a:r>
+              <a:rPr i="0"/>
+              <a:t>Zellen könnt ihr mitlesen, ich erkläre die Logik dahinter.</a:t>
             </a:r>
           </a:p>
           <a:p/>
@@ -1183,7 +1183,7 @@
           <a:p>
             <a:r>
               <a:rPr i="0"/>
-              <a:t>- Jeder Monat gibt den nächsten erst frei.</a:t>
+              <a:t>- Dieser Plan ist keine Abfolge von Terminen, sondern eine Kette von Freigaben. Jeder Monat gibt den nächsten erst frei.</a:t>
             </a:r>
           </a:p>
           <a:p>
@@ -1203,20 +1203,61 @@
           <a:p>
             <a:r>
               <a:rPr i="0"/>
-              <a:t>- Der Rollout im dritten Monat wird deshalb nur vorbereitet. Ob er kommt, entscheidet die Nachmessung — nicht der Kalender.</a:t>
+              <a:t>- Deshalb wird der Rollout im dritten Monat nur vorbereitet. Ob er kommt, entscheidet die Nachmessung — nicht der Kalender. </a:t>
+            </a:r>
+            <a:r>
+              <a:rPr i="1"/>
+              <a:t>Ein Plan, der das Nein am Ende nicht vorsieht, wäre keiner.</a:t>
             </a:r>
           </a:p>
           <a:p/>
           <a:p>
             <a:r>
               <a:rPr i="0"/>
+              <a:t>### Technik-Strang: die Rolle des Prüfwerkzeugs</a:t>
+            </a:r>
+          </a:p>
+          <a:p>
+            <a:r>
+              <a:rPr i="0"/>
+              <a:t>- Das Setup im ersten Monat ist bewusst klein: Der Assistent wird im bestehenden KI-Zugang des Verbands angelegt — kein Einkauf, keine neue Stelle.</a:t>
+            </a:r>
+          </a:p>
+          <a:p>
+            <a:r>
+              <a:rPr i="0"/>
+              <a:t>- Geschärft wird der Prompt im eigenen Prüfwerkzeug, dem von eben: Es holt echte Kurstexte selbst und protokolliert jeden Lauf.</a:t>
+            </a:r>
+          </a:p>
+          <a:p>
+            <a:r>
+              <a:rPr i="0"/>
+              <a:t>- Im Pilot stehen dann beide Wege offen: der Assistent für den Fachbereich, daneben das Prüfwerkzeug. </a:t>
+            </a:r>
+            <a:r>
+              <a:rPr i="1"/>
+              <a:t>Dort laufen Namensschutz und die Korrektur der Einstufung im Code mit.</a:t>
+            </a:r>
+          </a:p>
+          <a:p/>
+          <a:p>
+            <a:r>
+              <a:rPr i="0"/>
               <a:t>### Monat 2, Kommunikation: Training</a:t>
             </a:r>
           </a:p>
           <a:p>
             <a:r>
               <a:rPr i="0"/>
-              <a:t>- Kein KI-Grundlagenkurs, sondern eine Schulung am konkreten System: einen Kurstext prüfen lassen, die Befunde lesen, annehmen oder verwerfen — und die Grenze kennen: Die KI schlägt vor, entschieden wird im Fachbereich.</a:t>
+              <a:t>- Kein KI-Grundlagenkurs, sondern eine Schulung am konkreten System: einen Kurstext prüfen lassen, die Befunde lesen, annehmen oder verwerfen — und die Grenze kennen: </a:t>
+            </a:r>
+            <a:r>
+              <a:rPr b="1" i="0">
+                <a:solidFill>
+                  <a:srgbClr val="A4162B"/>
+                </a:solidFill>
+              </a:rPr>
+              <a:t>Die KI schlägt vor, entschieden wird im Fachbereich.</a:t>
             </a:r>
           </a:p>
           <a:p>
@@ -1230,7 +1271,7 @@
             </a:r>
             <a:r>
               <a:rPr i="0"/>
-              <a:t> verlangt seit Februar 2025 ausreichende KI-Kompetenz — und zwar ausdrücklich bezogen auf den Einsatzkontext. Genau das leistet eine Schulung am Werkzeug selbst.</a:t>
+              <a:t> verlangt seit Februar 2025 ausreichende KI-Kompetenz — ausdrücklich bezogen auf den Einsatzkontext. Genau das leistet eine Schulung am Werkzeug selbst, kein Foliensatz über KI im Allgemeinen.</a:t>
             </a:r>
           </a:p>
           <a:p>
@@ -1241,6 +1282,31 @@
             <a:r>
               <a:rPr i="1"/>
               <a:t>Wer nicht bedient, braucht die Schulung nicht — deshalb bleiben die Kursleitungen aus dieser Kette.</a:t>
+            </a:r>
+          </a:p>
+          <a:p/>
+          <a:p>
+            <a:r>
+              <a:rPr i="0"/>
+              <a:t>### Monat 3, Kommunikation: warum eine feste Sprechstunde</a:t>
+            </a:r>
+          </a:p>
+          <a:p>
+            <a:r>
+              <a:rPr i="0"/>
+              <a:t>- Support auf Zuruf klingt großzügig und ist das Gegenteil: Wer fragen will, muss erst entscheiden, ob seine Frage eine Störung wert ist. Viele fragen dann gar nicht — und legen das Werkzeug leise weg.</a:t>
+            </a:r>
+          </a:p>
+          <a:p>
+            <a:r>
+              <a:rPr i="0"/>
+              <a:t>- Ein festes Fenster senkt diese Schwelle, und es macht den Aufwand planbar — ein Projektteam, das nebenbei erreichbar wäre, gibt es hier nicht.</a:t>
+            </a:r>
+          </a:p>
+          <a:p>
+            <a:r>
+              <a:rPr i="0"/>
+              <a:t>- Und: Dieselbe Frage dreimal in einer Sprechstunde ist ein Befund — am Prompt oder an der Schulung. Dreimal auf Zuruf verteilt, merkt das niemand.</a:t>
             </a:r>
           </a:p>
           <a:p/>
@@ -1358,10 +1424,14 @@
           <a:p>
             <a:r>
               <a:rPr i="0"/>
-              <a:t>Die ersten dreißig Tage. Keine Aufzählung, sondern eine Reihenfolge:</a:t>
-            </a:r>
-          </a:p>
-          <a:p>
+              <a:t>Das war der Plan für drei Monate — das hier ist sein erster Monat im Detail.</a:t>
+            </a:r>
+          </a:p>
+          <a:p>
+            <a:r>
+              <a:rPr i="0"/>
+              <a:t>Keine Aufzählung, sondern eine Reihenfolge: </a:t>
+            </a:r>
             <a:r>
               <a:rPr b="1" i="0">
                 <a:solidFill>
@@ -1375,13 +1445,13 @@
           <a:p>
             <a:r>
               <a:rPr i="0"/>
-              <a:t>### Die vier Schritte</a:t>
-            </a:r>
-          </a:p>
-          <a:p>
-            <a:r>
-              <a:rPr i="0"/>
-              <a:t>- Die </a:t>
+              <a:t>### Schritt eins: die Dienstvereinbarung</a:t>
+            </a:r>
+          </a:p>
+          <a:p>
+            <a:r>
+              <a:rPr i="0"/>
+              <a:t>- Zuerst die </a:t>
             </a:r>
             <a:r>
               <a:rPr b="1" i="0"/>
@@ -1389,13 +1459,30 @@
             </a:r>
             <a:r>
               <a:rPr i="0"/>
-              <a:t> zuerst, aus dem Grund von eben.</a:t>
-            </a:r>
-          </a:p>
-          <a:p>
-            <a:r>
-              <a:rPr i="0"/>
-              <a:t>- Dann einen </a:t>
+              <a:t> mit dem Personalrat — er ist der Einzige, der das Projekt anhalten kann, die Einführung ist mitbestimmungspflichtig.</a:t>
+            </a:r>
+          </a:p>
+          <a:p>
+            <a:r>
+              <a:rPr i="0"/>
+              <a:t>- Vorher wird nichts angelegt, auch nicht „nur zum Ausprobieren“. </a:t>
+            </a:r>
+            <a:r>
+              <a:rPr i="1"/>
+              <a:t>Ein Assistent, der schon läuft, während noch verhandelt wird, kostet genau das Vertrauen, von dem der Pilot lebt.</a:t>
+            </a:r>
+          </a:p>
+          <a:p/>
+          <a:p>
+            <a:r>
+              <a:rPr i="0"/>
+              <a:t>### Schritt zwei: den Pilotbereich gewinnen</a:t>
+            </a:r>
+          </a:p>
+          <a:p>
+            <a:r>
+              <a:rPr i="0"/>
+              <a:t>- Einen </a:t>
             </a:r>
             <a:r>
               <a:rPr b="1" i="0"/>
@@ -1403,27 +1490,71 @@
             </a:r>
             <a:r>
               <a:rPr i="0"/>
-              <a:t> gewinnen, und zwar freiwillig — ein zugewiesener liefert kein belastbares Ergebnis, sondern nur Erfüllung.</a:t>
-            </a:r>
-          </a:p>
-          <a:p>
-            <a:r>
-              <a:rPr i="0"/>
-              <a:t>- Dann die </a:t>
+              <a:t> gewinnen, nicht zuweisen. Freiwillig deshalb, weil ein zugewiesener Pilot Erfüllung liefert, kein Ergebnis.</a:t>
+            </a:r>
+          </a:p>
+          <a:p>
+            <a:r>
+              <a:rPr i="0"/>
+              <a:t>- Der Bereich, der sich meldet, bekommt dafür etwas: Er wählt im zweiten Monat selbst, welche Regeln verbindlich gelten.</a:t>
+            </a:r>
+          </a:p>
+          <a:p/>
+          <a:p>
+            <a:r>
+              <a:rPr i="0"/>
+              <a:t>### Schritt drei: die Freigabe der Textbausteine</a:t>
+            </a:r>
+          </a:p>
+          <a:p>
+            <a:r>
+              <a:rPr i="0"/>
+              <a:t>- Klären, wer die zentral gepflegten </a:t>
             </a:r>
             <a:r>
               <a:rPr b="1" i="0"/>
-              <a:t>Freigabe der Textbausteine</a:t>
-            </a:r>
-            <a:r>
-              <a:rPr i="0"/>
-              <a:t>.</a:t>
-            </a:r>
-          </a:p>
-          <a:p>
-            <a:r>
-              <a:rPr i="0"/>
-              <a:t>- Und erst als viertes das Technische, den </a:t>
+              <a:t>Textbausteine</a:t>
+            </a:r>
+            <a:r>
+              <a:rPr i="0"/>
+              <a:t> ändern darf — die Teile, die wortgleich in vielen Kursen stehen.</a:t>
+            </a:r>
+          </a:p>
+          <a:p>
+            <a:r>
+              <a:rPr i="0"/>
+              <a:t>- Das ist der Schritt, den man am ehesten überspringt, und der teuerste: Lässt man ihn aus, liefert der Pilot eine Liste von Befunden, die im Pilotbereich niemand ändern darf.</a:t>
+            </a:r>
+          </a:p>
+          <a:p>
+            <a:r>
+              <a:rPr i="0"/>
+              <a:t>- </a:t>
+            </a:r>
+            <a:r>
+              <a:rPr b="1" i="0">
+                <a:solidFill>
+                  <a:srgbClr val="A4162B"/>
+                </a:solidFill>
+              </a:rPr>
+              <a:t>Das Werkzeug hätte sich dann beim ersten Durchlauf selbst erledigt.</a:t>
+            </a:r>
+            <a:r>
+              <a:rPr i="0"/>
+              <a:t> Das sagt auch der Kasten unten.</a:t>
+            </a:r>
+          </a:p>
+          <a:p/>
+          <a:p>
+            <a:r>
+              <a:rPr i="0"/>
+              <a:t>### Schritt vier: der Assistent</a:t>
+            </a:r>
+          </a:p>
+          <a:p>
+            <a:r>
+              <a:rPr i="0"/>
+              <a:t>- Erst als Letztes das Technische: den </a:t>
             </a:r>
             <a:r>
               <a:rPr b="1" i="0"/>
@@ -1431,32 +1562,21 @@
             </a:r>
             <a:r>
               <a:rPr i="0"/>
-              <a:t>. Das kostet nichts: kein Einkauf, keine neue Stelle, der KI-Zugang ist da.</a:t>
-            </a:r>
-          </a:p>
-          <a:p/>
-          <a:p>
-            <a:r>
-              <a:rPr i="0"/>
-              <a:t>### Der Kasten unten: der dritte Schritt</a:t>
-            </a:r>
-          </a:p>
-          <a:p>
-            <a:r>
-              <a:rPr i="0"/>
-              <a:t>- Der, den man am ehesten überspringt, und der teuerste.</a:t>
-            </a:r>
-          </a:p>
-          <a:p>
-            <a:r>
-              <a:rPr i="0"/>
-              <a:t>- Lässt man ihn aus, liefert der Pilot eine Liste von Befunden, die im Pilotbereich niemand ändern darf.</a:t>
-            </a:r>
-          </a:p>
-          <a:p>
-            <a:r>
-              <a:rPr i="0"/>
-              <a:t>- Das Werkzeug hat sich dann beim ersten Durchlauf selbst erledigt.</a:t>
+              <a:t>. Das kostet nichts — kein Einkauf, keine neue Stelle, der KI-Zugang des Verbands ist da.</a:t>
+            </a:r>
+          </a:p>
+          <a:p>
+            <a:r>
+              <a:rPr i="0"/>
+              <a:t>- Dass der technische Schritt der letzte und der billigste ist, ist die Pointe dieser Folie: </a:t>
+            </a:r>
+            <a:r>
+              <a:rPr b="1" i="0">
+                <a:solidFill>
+                  <a:srgbClr val="A4162B"/>
+                </a:solidFill>
+              </a:rPr>
+              <a:t>Die Arbeit liegt nicht in der Technik, sondern in den Zuständigkeiten davor.</a:t>
             </a:r>
           </a:p>
         </p:txBody>

--- a/ausgabe/Praesentation-KLARTEXT.pptx
+++ b/ausgabe/Praesentation-KLARTEXT.pptx
@@ -1158,39 +1158,16 @@
           <a:p>
             <a:r>
               <a:rPr i="0"/>
-              <a:t>Der Zeitplan: drei Monate, drei Stränge — Technik, Kommunikation, Change —,</a:t>
-            </a:r>
-          </a:p>
-          <a:p>
-            <a:r>
-              <a:rPr i="0"/>
-              <a:t>die neun Phasen aus der Aufgabenstellung als Überschrift jeder Zelle. Die</a:t>
-            </a:r>
-          </a:p>
-          <a:p>
-            <a:r>
-              <a:rPr i="0"/>
-              <a:t>Zellen könnt ihr mitlesen, ich erkläre die Logik dahinter.</a:t>
-            </a:r>
-          </a:p>
-          <a:p/>
-          <a:p>
-            <a:r>
-              <a:rPr i="0"/>
-              <a:t>### Die Logik: eine Kette von Freigaben</a:t>
-            </a:r>
-          </a:p>
-          <a:p>
-            <a:r>
-              <a:rPr i="0"/>
-              <a:t>- Dieser Plan ist keine Abfolge von Terminen, sondern eine Kette von Freigaben. Jeder Monat gibt den nächsten erst frei.</a:t>
-            </a:r>
-          </a:p>
-          <a:p>
-            <a:r>
-              <a:rPr i="0"/>
-              <a:t>- </a:t>
-            </a:r>
+              <a:t>Der Zeitplan: drei Monate, drei Stränge, die neun Phasen aus der</a:t>
+            </a:r>
+          </a:p>
+          <a:p>
+            <a:r>
+              <a:rPr i="0"/>
+              <a:t>Aufgabenstellung. Und eine Logik dahinter, eine Kette von Freigaben:</a:t>
+            </a:r>
+          </a:p>
+          <a:p>
             <a:r>
               <a:rPr b="1" i="0">
                 <a:solidFill>
@@ -1203,53 +1180,56 @@
           <a:p>
             <a:r>
               <a:rPr i="0"/>
-              <a:t>- Deshalb wird der Rollout im dritten Monat nur vorbereitet. Ob er kommt, entscheidet die Nachmessung — nicht der Kalender. </a:t>
-            </a:r>
-            <a:r>
-              <a:rPr i="1"/>
-              <a:t>Ein Plan, der das Nein am Ende nicht vorsieht, wäre keiner.</a:t>
+              <a:t>Ich gehe die Stränge einmal durch.</a:t>
             </a:r>
           </a:p>
           <a:p/>
           <a:p>
             <a:r>
               <a:rPr i="0"/>
-              <a:t>### Technik-Strang: die Rolle des Prüfwerkzeugs</a:t>
-            </a:r>
-          </a:p>
-          <a:p>
-            <a:r>
-              <a:rPr i="0"/>
-              <a:t>- Das Setup im ersten Monat ist bewusst klein: Der Assistent wird im bestehenden KI-Zugang des Verbands angelegt — kein Einkauf, keine neue Stelle.</a:t>
-            </a:r>
-          </a:p>
-          <a:p>
-            <a:r>
-              <a:rPr i="0"/>
-              <a:t>- Geschärft wird der Prompt im eigenen Prüfwerkzeug, dem von eben: Es holt echte Kurstexte selbst und protokolliert jeden Lauf.</a:t>
-            </a:r>
-          </a:p>
-          <a:p>
-            <a:r>
-              <a:rPr i="0"/>
-              <a:t>- Im Pilot stehen dann beide Wege offen: der Assistent für den Fachbereich, daneben das Prüfwerkzeug. </a:t>
-            </a:r>
-            <a:r>
-              <a:rPr i="1"/>
-              <a:t>Dort laufen Namensschutz und die Korrektur der Einstufung im Code mit.</a:t>
-            </a:r>
-          </a:p>
-          <a:p/>
-          <a:p>
-            <a:r>
-              <a:rPr i="0"/>
-              <a:t>### Monat 2, Kommunikation: Training</a:t>
-            </a:r>
-          </a:p>
-          <a:p>
-            <a:r>
-              <a:rPr i="0"/>
-              <a:t>- Kein KI-Grundlagenkurs, sondern eine Schulung am konkreten System: einen Kurstext prüfen lassen, die Befunde lesen, annehmen oder verwerfen — und die Grenze kennen: </a:t>
+              <a:t>### Technische Implementation</a:t>
+            </a:r>
+          </a:p>
+          <a:p>
+            <a:r>
+              <a:rPr i="0"/>
+              <a:t>- </a:t>
+            </a:r>
+            <a:r>
+              <a:rPr b="1" i="0"/>
+              <a:t>Setup:</a:t>
+            </a:r>
+            <a:r>
+              <a:rPr i="0"/>
+              <a:t> Der Assistent wird im bestehenden KI-Zugang des Verbands angelegt. Den Prompt schärfe ich im Prüfwerkzeug an echten Kurstexten — jeder Lauf wird protokolliert.</a:t>
+            </a:r>
+          </a:p>
+          <a:p>
+            <a:r>
+              <a:rPr i="0"/>
+              <a:t>- </a:t>
+            </a:r>
+            <a:r>
+              <a:rPr b="1" i="0"/>
+              <a:t>Pilot:</a:t>
+            </a:r>
+            <a:r>
+              <a:rPr i="0"/>
+              <a:t> Ein Fachbereich, nur neu entstehende Texte. Klein genug, um alle Beteiligten wirklich einzubinden.</a:t>
+            </a:r>
+          </a:p>
+          <a:p>
+            <a:r>
+              <a:rPr i="0"/>
+              <a:t>- </a:t>
+            </a:r>
+            <a:r>
+              <a:rPr b="1" i="0"/>
+              <a:t>Rollout:</a:t>
+            </a:r>
+            <a:r>
+              <a:rPr i="0"/>
+              <a:t> Wird nur vorbereitet. </a:t>
             </a:r>
             <a:r>
               <a:rPr b="1" i="0">
@@ -1257,13 +1237,42 @@
                   <a:srgbClr val="A4162B"/>
                 </a:solidFill>
               </a:rPr>
-              <a:t>Die KI schlägt vor, entschieden wird im Fachbereich.</a:t>
-            </a:r>
-          </a:p>
-          <a:p>
-            <a:r>
-              <a:rPr i="0"/>
-              <a:t>- Verpflichtend ist das ohnehin: </a:t>
+              <a:t>Ob er kommt, entscheidet die Nachmessung — nicht der Kalender.</a:t>
+            </a:r>
+          </a:p>
+          <a:p/>
+          <a:p>
+            <a:r>
+              <a:rPr i="0"/>
+              <a:t>### Kommunikation</a:t>
+            </a:r>
+          </a:p>
+          <a:p>
+            <a:r>
+              <a:rPr i="0"/>
+              <a:t>- </a:t>
+            </a:r>
+            <a:r>
+              <a:rPr b="1" i="0"/>
+              <a:t>Ankündigung:</a:t>
+            </a:r>
+            <a:r>
+              <a:rPr i="0"/>
+              <a:t> Erst die Dienstvereinbarung mit dem Personalrat, dann die Bekanntgabe im Haus — in dieser Reihenfolge, sonst verhandelt man öffentlich.</a:t>
+            </a:r>
+          </a:p>
+          <a:p>
+            <a:r>
+              <a:rPr i="0"/>
+              <a:t>- </a:t>
+            </a:r>
+            <a:r>
+              <a:rPr b="1" i="0"/>
+              <a:t>Training:</a:t>
+            </a:r>
+            <a:r>
+              <a:rPr i="0"/>
+              <a:t> Kein KI-Grundlagenkurs, sondern eine Schulung am konkreten System, bevor der erste Text geprüft wird. Pflicht ist sie ohnehin: </a:t>
             </a:r>
             <a:r>
               <a:rPr b="1" i="0"/>
@@ -1271,67 +1280,64 @@
             </a:r>
             <a:r>
               <a:rPr i="0"/>
-              <a:t> verlangt seit Februar 2025 ausreichende KI-Kompetenz — ausdrücklich bezogen auf den Einsatzkontext. Genau das leistet eine Schulung am Werkzeug selbst, kein Foliensatz über KI im Allgemeinen.</a:t>
-            </a:r>
-          </a:p>
-          <a:p>
-            <a:r>
-              <a:rPr i="0"/>
-              <a:t>- Die Pflicht gilt für das Personal und für alle, die im Auftrag mit Betrieb und Nutzung befasst sind. Deshalb steht in der Zelle nicht „Personal“, sondern „alle, die bedienen“. </a:t>
+              <a:t>, für alle, die bedienen. </a:t>
             </a:r>
             <a:r>
               <a:rPr i="1"/>
-              <a:t>Wer nicht bedient, braucht die Schulung nicht — deshalb bleiben die Kursleitungen aus dieser Kette.</a:t>
+              <a:t>Wer nicht bedient, braucht keine Schulung — deshalb bleiben die Kursleitungen draußen.</a:t>
+            </a:r>
+          </a:p>
+          <a:p>
+            <a:r>
+              <a:rPr i="0"/>
+              <a:t>- </a:t>
+            </a:r>
+            <a:r>
+              <a:rPr b="1" i="0"/>
+              <a:t>Support:</a:t>
+            </a:r>
+            <a:r>
+              <a:rPr i="0"/>
+              <a:t> Eine feste Sprechstunde statt Zuruf. Sie senkt die Schwelle zu fragen, hält den Aufwand planbar — und dieselbe Frage dreimal in einer Stunde ist ein Befund am Prompt oder an der Schulung.</a:t>
             </a:r>
           </a:p>
           <a:p/>
           <a:p>
             <a:r>
               <a:rPr i="0"/>
-              <a:t>### Monat 3, Kommunikation: warum eine feste Sprechstunde</a:t>
-            </a:r>
-          </a:p>
-          <a:p>
-            <a:r>
-              <a:rPr i="0"/>
-              <a:t>- Support auf Zuruf klingt großzügig und ist das Gegenteil: Wer fragen will, muss erst entscheiden, ob seine Frage eine Störung wert ist. Viele fragen dann gar nicht — und legen das Werkzeug leise weg.</a:t>
-            </a:r>
-          </a:p>
-          <a:p>
-            <a:r>
-              <a:rPr i="0"/>
-              <a:t>- Ein festes Fenster senkt diese Schwelle, und es macht den Aufwand planbar — ein Projektteam, das nebenbei erreichbar wäre, gibt es hier nicht.</a:t>
-            </a:r>
-          </a:p>
-          <a:p>
-            <a:r>
-              <a:rPr i="0"/>
-              <a:t>- Und: Dieselbe Frage dreimal in einer Sprechstunde ist ein Befund — am Prompt oder an der Schulung. Dreimal auf Zuruf verteilt, merkt das niemand.</a:t>
-            </a:r>
-          </a:p>
-          <a:p/>
-          <a:p>
-            <a:r>
-              <a:rPr i="0"/>
-              <a:t>### Der Kasten unten: die Textbausteine</a:t>
-            </a:r>
-          </a:p>
-          <a:p>
-            <a:r>
-              <a:rPr i="0"/>
-              <a:t>- Was mit Textbausteinen gemeint ist: Textteile, die zentral gepflegt werden und wortgleich in vielen Kursbeschreibungen stehen — der Anmeldehinweis etwa, oder die Beschreibung der Niveaustufe.</a:t>
-            </a:r>
-          </a:p>
-          <a:p>
-            <a:r>
-              <a:rPr i="0"/>
-              <a:t>- Der Fachbereich, der die Befunde bekommt, darf genau diese Teile nicht ändern — das war die Verlustangst von der Widerstandsfolie. Beim Kernfall, dem Deutschkurs auf A2, ist das mehr als die halbe Beschreibung.</a:t>
-            </a:r>
-          </a:p>
-          <a:p>
-            <a:r>
-              <a:rPr i="0"/>
-              <a:t>- Warum zuerst? </a:t>
+              <a:t>### Change</a:t>
+            </a:r>
+          </a:p>
+          <a:p>
+            <a:r>
+              <a:rPr i="0"/>
+              <a:t>- </a:t>
+            </a:r>
+            <a:r>
+              <a:rPr b="1" i="0"/>
+              <a:t>Vorbereitung:</a:t>
+            </a:r>
+            <a:r>
+              <a:rPr i="0"/>
+              <a:t> Den Pilotbereich gewinnen, nicht zuweisen. Die Betroffenen befragen, bevor etwas läuft. Und klären, wer die Textbausteine ändern darf — die zentral gepflegten Teile, die wortgleich in vielen Kursen stehen. </a:t>
+            </a:r>
+            <a:r>
+              <a:rPr i="1"/>
+              <a:t>Das war die Verlustangst von der Widerstandsfolie.</a:t>
+            </a:r>
+          </a:p>
+          <a:p>
+            <a:r>
+              <a:rPr i="0"/>
+              <a:t>- </a:t>
+            </a:r>
+            <a:r>
+              <a:rPr b="1" i="0"/>
+              <a:t>Einbindung:</a:t>
+            </a:r>
+            <a:r>
+              <a:rPr i="0"/>
+              <a:t> Der Bereich wählt selbst, welche Regeln verbindlich gelten. Und er korrigiert die Textbausteine zuerst: </a:t>
             </a:r>
             <a:r>
               <a:rPr b="1" i="0">
@@ -1339,21 +1345,21 @@
                   <a:srgbClr val="A4162B"/>
                 </a:solidFill>
               </a:rPr>
-              <a:t>Ein korrigierter Textbaustein wirkt sofort in allen Kursen, die ihn verwenden</a:t>
-            </a:r>
-            <a:r>
-              <a:rPr i="0"/>
-              <a:t> — der früheste sichtbare Erfolg, den dieses Projekt haben kann.</a:t>
-            </a:r>
-          </a:p>
-          <a:p>
-            <a:r>
-              <a:rPr i="0"/>
-              <a:t>- Deshalb das Fragen vor dem Handeln: Die Zuständigkeit wird im ersten Monat geklärt, korrigiert wird im zweiten. </a:t>
-            </a:r>
-            <a:r>
-              <a:rPr i="1"/>
-              <a:t>Ohne sie dürfte im zweiten Monat niemand einen Textbaustein anfassen.</a:t>
+              <a:t>Ein korrigierter Textbaustein wirkt sofort in allen Kursen, die ihn verwenden.</a:t>
+            </a:r>
+          </a:p>
+          <a:p>
+            <a:r>
+              <a:rPr i="0"/>
+              <a:t>- </a:t>
+            </a:r>
+            <a:r>
+              <a:rPr b="1" i="0"/>
+              <a:t>Begleitung:</a:t>
+            </a:r>
+            <a:r>
+              <a:rPr i="0"/>
+              <a:t> Die Nachmessung, mit demselben Skript wie die Ausgangsmessung — sonst weiß man nicht, ob die Texte besser wurden oder nur die Messung anders. Danach fällt die Rollout-Entscheidung.</a:t>
             </a:r>
           </a:p>
         </p:txBody>

--- a/ausgabe/Praesentation-KLARTEXT.pptx
+++ b/ausgabe/Praesentation-KLARTEXT.pptx
@@ -575,7 +575,7 @@
           <a:p>
             <a:r>
               <a:rPr i="0"/>
-              <a:t>- Die Beschreibungen dieser Kurse sind oft in einem Deutsch geschrieben, das man erst nach dem Kurs versteht.</a:t>
+              <a:t>- Die Beschreibungen dieser Kurse sind aber oft in einem Deutsch geschrieben, das man erst nach dem Kurs versteht.</a:t>
             </a:r>
           </a:p>
         </p:txBody>
@@ -926,7 +926,13 @@
           <a:p>
             <a:r>
               <a:rPr i="0"/>
-              <a:t>Jetzt zu den Widerständen.</a:t>
+              <a:t>Jetzt zu den Widerständen. Ich erwarte hier vier — ob es dabei bleibt, zeigt</a:t>
+            </a:r>
+          </a:p>
+          <a:p>
+            <a:r>
+              <a:rPr i="0"/>
+              <a:t>die Befragung der Betroffenen im ersten Monat.</a:t>
             </a:r>
           </a:p>
           <a:p/>
@@ -948,10 +954,96 @@
               <a:t>- Nein. Sie schlägt vor, mehr nicht. Entschieden und veröffentlicht wird von Menschen.</a:t>
             </a:r>
           </a:p>
-          <a:p>
-            <a:r>
-              <a:rPr i="0"/>
-              <a:t>- </a:t>
+          <a:p/>
+          <a:p>
+            <a:r>
+              <a:rPr i="0"/>
+              <a:t>### Verlustangst in den Fachbereichen</a:t>
+            </a:r>
+          </a:p>
+          <a:p>
+            <a:r>
+              <a:rPr i="0"/>
+              <a:t>- "Ich werde an Texten gemessen, die ich gar nicht ändern darf."</a:t>
+            </a:r>
+          </a:p>
+          <a:p>
+            <a:r>
+              <a:rPr i="0"/>
+              <a:t>- Der einzige Einwand, der noch offen ist.</a:t>
+            </a:r>
+          </a:p>
+          <a:p>
+            <a:r>
+              <a:rPr i="0"/>
+              <a:t>- Eine Kursbeschreibung ist oft nicht aus einer Hand: z.B. der Anmeldehinweis oder die Beschreibung der Niveaustufe — solche Textbausteine stehen wortgleich in vielen Kursen und werden nicht dort gepflegt, wo der Kurs angeboten wird.</a:t>
+            </a:r>
+          </a:p>
+          <a:p>
+            <a:r>
+              <a:rPr i="0"/>
+              <a:t>- Wer die Befunde bekommt, darf den Text also oft gar nicht ändern.</a:t>
+            </a:r>
+          </a:p>
+          <a:p>
+            <a:r>
+              <a:rPr i="0"/>
+              <a:t>- Die Antwort ist deshalb hier keine Schulung, sondern eine Zuständigkeitsfrage — und die gehört vor den Pilot.</a:t>
+            </a:r>
+          </a:p>
+          <a:p/>
+          <a:p>
+            <a:r>
+              <a:rPr i="0"/>
+              <a:t>### Fehlende Perspektive bei der Kursleitung</a:t>
+            </a:r>
+          </a:p>
+          <a:p>
+            <a:r>
+              <a:rPr i="0"/>
+              <a:t>- "Noch eine Aufgabe - bezahlt werde ich nach Unterrichtsstunden."</a:t>
+            </a:r>
+          </a:p>
+          <a:p>
+            <a:r>
+              <a:rPr i="0"/>
+              <a:t>- Bei den Honorarkräften wiegt der Einwand am schwersten: Bezahlt wird die Unterrichtsstunde. Arbeit am Text kommt in der Abrechnung nicht vor.</a:t>
+            </a:r>
+          </a:p>
+          <a:p>
+            <a:r>
+              <a:rPr i="0"/>
+              <a:t>- Der Einwand ist berechtigt und gehört auch so beantwortet.</a:t>
+            </a:r>
+          </a:p>
+          <a:p>
+            <a:r>
+              <a:rPr i="0"/>
+              <a:t>- Die Antwort:</a:t>
+            </a:r>
+          </a:p>
+          <a:p>
+            <a:r>
+              <a:rPr i="0"/>
+              <a:t>- Es kommt keine neue Aufgabe dazu.</a:t>
+            </a:r>
+          </a:p>
+          <a:p>
+            <a:r>
+              <a:rPr i="0"/>
+              <a:t>- Geprüft wird im Fachbereich, an dem Text, der dort eingeht.</a:t>
+            </a:r>
+          </a:p>
+          <a:p>
+            <a:r>
+              <a:rPr i="0"/>
+              <a:t>- Wer eine Rückmeldung möchte, bekommt sie, aber eine Pflicht wird daraus nicht.</a:t>
+            </a:r>
+          </a:p>
+          <a:p>
+            <a:r>
+              <a:rPr i="0"/>
+              <a:t>- Kontrolle ist das nicht: </a:t>
             </a:r>
             <a:r>
               <a:rPr b="1" i="0">
@@ -959,92 +1051,24 @@
                   <a:srgbClr val="A4162B"/>
                 </a:solidFill>
               </a:rPr>
-              <a:t>Das ist keine Beruhigung, sondern der Zuschnitt des Werkzeugs.</a:t>
+              <a:t>Geprüft wird der Text, nicht die Person, die ihn geschrieben hat.</a:t>
+            </a:r>
+            <a:r>
+              <a:rPr i="0"/>
+              <a:t> Es wird kein Befund einer Kursleitung zugeordnet.</a:t>
             </a:r>
           </a:p>
           <a:p/>
           <a:p>
             <a:r>
               <a:rPr i="0"/>
-              <a:t>### Verlustangst · Fachbereich</a:t>
-            </a:r>
-          </a:p>
-          <a:p>
-            <a:r>
-              <a:rPr i="0"/>
-              <a:t>- Der einzige Einwand, der noch offen ist.</a:t>
-            </a:r>
-          </a:p>
-          <a:p>
-            <a:r>
-              <a:rPr i="0"/>
-              <a:t>- Eine Kursbeschreibung ist selten von einer Hand: Anmeldehinweis, Beschreibung der Niveaustufe — solche Textbausteine stehen wortgleich in vielen Kursen und werden nicht dort gepflegt, wo der Kurs angeboten wird.</a:t>
-            </a:r>
-          </a:p>
-          <a:p>
-            <a:r>
-              <a:rPr i="0"/>
-              <a:t>- Wer die Befunde bekommt, darf den Text also oft gar nicht ändern.</a:t>
-            </a:r>
-          </a:p>
-          <a:p>
-            <a:r>
-              <a:rPr i="0"/>
-              <a:t>- Keine Angst vor der Maschine, sondern die Aussicht, für etwas geradezustehen, das einem nicht gehört.</a:t>
-            </a:r>
-          </a:p>
-          <a:p>
-            <a:r>
-              <a:rPr i="0"/>
-              <a:t>- Die Antwort ist deshalb keine Schulung, sondern eine Zuständigkeitsfrage — und die gehört vor den Pilot.</a:t>
-            </a:r>
-          </a:p>
-          <a:p/>
-          <a:p>
-            <a:r>
-              <a:rPr i="0"/>
-              <a:t>### Fehlende Perspektive · Kursleitung</a:t>
-            </a:r>
-          </a:p>
-          <a:p>
-            <a:r>
-              <a:rPr i="0"/>
-              <a:t>- Bei den Honorarkräften schärfer als bei allen anderen: Ihre Abrechnungseinheit ist die Unterrichtsstunde, Textarbeit kommt darin nicht vor.</a:t>
-            </a:r>
-          </a:p>
-          <a:p>
-            <a:r>
-              <a:rPr i="0"/>
-              <a:t>- Der Einwand ist berechtigt und gehört auch so beantwortet.</a:t>
-            </a:r>
-          </a:p>
-          <a:p>
-            <a:r>
-              <a:rPr i="0"/>
-              <a:t>- Die Antwort ist der Zuschnitt: Geprüft wird im Fachbereich, an dem Text, der dort eingeht.</a:t>
-            </a:r>
-          </a:p>
-          <a:p>
-            <a:r>
-              <a:rPr i="0"/>
-              <a:t>- </a:t>
-            </a:r>
-            <a:r>
-              <a:rPr i="1"/>
-              <a:t>Das schützt auch ihren Status: Verbindliche Regeln und ein Protokoll je Text wären genau die Merkmale, an denen sich eine Scheinselbständigkeit festmachen lässt.</a:t>
-            </a:r>
-          </a:p>
-          <a:p/>
-          <a:p>
-            <a:r>
-              <a:rPr i="0"/>
               <a:t>### Gewohnheit · Redaktion des Programmhefts</a:t>
             </a:r>
           </a:p>
           <a:p>
             <a:r>
               <a:rPr i="0"/>
-              <a:t>- Der Satz, der jedes Qualitätsprojekt begleitet: Es hat sich doch nie jemand beschwert. Und er stimmt vermutlich.</a:t>
+              <a:t>- Der Satz: Es hat sich doch nie jemand beschwert. Und das stimmt vermutlich sogar.</a:t>
             </a:r>
           </a:p>
           <a:p>
@@ -1056,7 +1080,7 @@
           <a:p>
             <a:r>
               <a:rPr i="0"/>
-              <a:t>- Der Punkt ist nur: </a:t>
+              <a:t>- Das Problem ist: </a:t>
             </a:r>
             <a:r>
               <a:rPr b="1" i="0">
@@ -1074,7 +1098,7 @@
             </a:r>
             <a:r>
               <a:rPr i="1"/>
-              <a:t>Dass es bisher niemand gesehen hat, ist deshalb kein Versäumnis, sondern liegt in der Sache.</a:t>
+              <a:t>Dass es bisher niemand gesehen hat, ist deshalb kein Versäumnis, sondern liegt in der Sache an sich.</a:t>
             </a:r>
           </a:p>
           <a:p/>
@@ -1164,10 +1188,14 @@
           <a:p>
             <a:r>
               <a:rPr i="0"/>
-              <a:t>Aufgabenstellung. Und eine Logik dahinter, eine Kette von Freigaben:</a:t>
-            </a:r>
-          </a:p>
-          <a:p>
+              <a:t>Aufgabenstellung.</a:t>
+            </a:r>
+          </a:p>
+          <a:p>
+            <a:r>
+              <a:rPr i="0"/>
+              <a:t>- Der Plan ist eine Kette von Freigaben: </a:t>
+            </a:r>
             <a:r>
               <a:rPr b="1" i="0">
                 <a:solidFill>
@@ -1177,10 +1205,11 @@
               <a:t>Ohne Dienstvereinbarung kein Setup, ohne Training kein Pilot, ohne Nachmessung kein Rollout.</a:t>
             </a:r>
           </a:p>
-          <a:p>
-            <a:r>
-              <a:rPr i="0"/>
-              <a:t>Ich gehe die Stränge einmal durch.</a:t>
+          <a:p/>
+          <a:p>
+            <a:r>
+              <a:rPr i="0"/>
+              <a:t>Gehen wir die Stränge einmal durch.</a:t>
             </a:r>
           </a:p>
           <a:p/>
@@ -1201,7 +1230,7 @@
             </a:r>
             <a:r>
               <a:rPr i="0"/>
-              <a:t> Der Assistent wird im bestehenden KI-Zugang des Verbands angelegt. Den Prompt schärfe ich im Prüfwerkzeug an echten Kurstexten — jeder Lauf wird protokolliert.</a:t>
+              <a:t> Der Assistent wird im bestehenden KI-Zugang des Verbands angelegt. Der Prompt wird im Prüfwerkzeug an echten Kurstexten nachgeschärft — jeder Lauf wird protokolliert.</a:t>
             </a:r>
           </a:p>
           <a:p>
@@ -1221,7 +1250,7 @@
           <a:p>
             <a:r>
               <a:rPr i="0"/>
-              <a:t>- </a:t>
+              <a:t>- Der </a:t>
             </a:r>
             <a:r>
               <a:rPr b="1" i="0"/>
@@ -1229,15 +1258,7 @@
             </a:r>
             <a:r>
               <a:rPr i="0"/>
-              <a:t> Wird nur vorbereitet. </a:t>
-            </a:r>
-            <a:r>
-              <a:rPr b="1" i="0">
-                <a:solidFill>
-                  <a:srgbClr val="A4162B"/>
-                </a:solidFill>
-              </a:rPr>
-              <a:t>Ob er kommt, entscheidet die Nachmessung — nicht der Kalender.</a:t>
+              <a:t> wird im dritten Monat nur vorbereitet. Ob er kommt, entscheidet die Nachmessung.</a:t>
             </a:r>
           </a:p>
           <a:p/>
@@ -1272,19 +1293,7 @@
             </a:r>
             <a:r>
               <a:rPr i="0"/>
-              <a:t> Kein KI-Grundlagenkurs, sondern eine Schulung am konkreten System, bevor der erste Text geprüft wird. Pflicht ist sie ohnehin: </a:t>
-            </a:r>
-            <a:r>
-              <a:rPr b="1" i="0"/>
-              <a:t>Artikel 4 der KI-Verordnung</a:t>
-            </a:r>
-            <a:r>
-              <a:rPr i="0"/>
-              <a:t>, für alle, die bedienen. </a:t>
-            </a:r>
-            <a:r>
-              <a:rPr i="1"/>
-              <a:t>Wer nicht bedient, braucht keine Schulung — deshalb bleiben die Kursleitungen draußen.</a:t>
+              <a:t> Kein KI-Grundlagenkurs, sondern eine Schulung am konkreten System, bevor der erste Text geprüft wird.</a:t>
             </a:r>
           </a:p>
           <a:p>
@@ -1298,7 +1307,7 @@
             </a:r>
             <a:r>
               <a:rPr i="0"/>
-              <a:t> Eine feste Sprechstunde statt Zuruf. Sie senkt die Schwelle zu fragen, hält den Aufwand planbar — und dieselbe Frage dreimal in einer Stunde ist ein Befund am Prompt oder an der Schulung.</a:t>
+              <a:t> Eine feste Sprechstunde statt Zuruf. Sie senkt die Schwelle zu fragen, hält den Aufwand planbar.</a:t>
             </a:r>
           </a:p>
           <a:p/>
@@ -1319,11 +1328,7 @@
             </a:r>
             <a:r>
               <a:rPr i="0"/>
-              <a:t> Den Pilotbereich gewinnen, nicht zuweisen. Die Betroffenen befragen, bevor etwas läuft. Und klären, wer die Textbausteine ändern darf — die zentral gepflegten Teile, die wortgleich in vielen Kursen stehen. </a:t>
-            </a:r>
-            <a:r>
-              <a:rPr i="1"/>
-              <a:t>Das war die Verlustangst von der Widerstandsfolie.</a:t>
+              <a:t> Den Pilotbereich gewinnen, nicht zuweisen. Die Betroffenen befragen, bevor etwas läuft. Und klären, wer die zentral gepflegten Textbausteine ändern darf.</a:t>
             </a:r>
           </a:p>
           <a:p>
@@ -1337,7 +1342,7 @@
             </a:r>
             <a:r>
               <a:rPr i="0"/>
-              <a:t> Der Bereich wählt selbst, welche Regeln verbindlich gelten. Und er korrigiert die Textbausteine zuerst: </a:t>
+              <a:t> Der Bereich wählt selbst, welche Regeln verbindlich gelten und vor der Veröffentlichung behoben sind. Und er korrigiert die Textbausteine zuerst: </a:t>
             </a:r>
             <a:r>
               <a:rPr b="1" i="0">
@@ -1451,7 +1456,7 @@
           <a:p>
             <a:r>
               <a:rPr i="0"/>
-              <a:t>### Schritt eins: die Dienstvereinbarung</a:t>
+              <a:t>### Schritt eins</a:t>
             </a:r>
           </a:p>
           <a:p>
@@ -1471,18 +1476,14 @@
           <a:p>
             <a:r>
               <a:rPr i="0"/>
-              <a:t>- Vorher wird nichts angelegt, auch nicht „nur zum Ausprobieren“. </a:t>
-            </a:r>
-            <a:r>
-              <a:rPr i="1"/>
-              <a:t>Ein Assistent, der schon läuft, während noch verhandelt wird, kostet genau das Vertrauen, von dem der Pilot lebt.</a:t>
+              <a:t>- Vorher wird nichts angelegt, auch nicht „nur zum Ausprobieren“.</a:t>
             </a:r>
           </a:p>
           <a:p/>
           <a:p>
             <a:r>
               <a:rPr i="0"/>
-              <a:t>### Schritt zwei: den Pilotbereich gewinnen</a:t>
+              <a:t>### Schritt zwei</a:t>
             </a:r>
           </a:p>
           <a:p>
@@ -1509,7 +1510,7 @@
           <a:p>
             <a:r>
               <a:rPr i="0"/>
-              <a:t>### Schritt drei: die Freigabe der Textbausteine</a:t>
+              <a:t>### Schritt drei</a:t>
             </a:r>
           </a:p>
           <a:p>
@@ -1532,29 +1533,11 @@
               <a:t>- Das ist der Schritt, den man am ehesten überspringt, und der teuerste: Lässt man ihn aus, liefert der Pilot eine Liste von Befunden, die im Pilotbereich niemand ändern darf.</a:t>
             </a:r>
           </a:p>
-          <a:p>
-            <a:r>
-              <a:rPr i="0"/>
-              <a:t>- </a:t>
-            </a:r>
-            <a:r>
-              <a:rPr b="1" i="0">
-                <a:solidFill>
-                  <a:srgbClr val="A4162B"/>
-                </a:solidFill>
-              </a:rPr>
-              <a:t>Das Werkzeug hätte sich dann beim ersten Durchlauf selbst erledigt.</a:t>
-            </a:r>
-            <a:r>
-              <a:rPr i="0"/>
-              <a:t> Das sagt auch der Kasten unten.</a:t>
-            </a:r>
-          </a:p>
           <a:p/>
           <a:p>
             <a:r>
               <a:rPr i="0"/>
-              <a:t>### Schritt vier: der Assistent</a:t>
+              <a:t>### Schritt vier</a:t>
             </a:r>
           </a:p>
           <a:p>
@@ -1569,20 +1552,6 @@
             <a:r>
               <a:rPr i="0"/>
               <a:t>. Das kostet nichts — kein Einkauf, keine neue Stelle, der KI-Zugang des Verbands ist da.</a:t>
-            </a:r>
-          </a:p>
-          <a:p>
-            <a:r>
-              <a:rPr i="0"/>
-              <a:t>- Dass der technische Schritt der letzte und der billigste ist, ist die Pointe dieser Folie: </a:t>
-            </a:r>
-            <a:r>
-              <a:rPr b="1" i="0">
-                <a:solidFill>
-                  <a:srgbClr val="A4162B"/>
-                </a:solidFill>
-              </a:rPr>
-              <a:t>Die Arbeit liegt nicht in der Technik, sondern in den Zuständigkeiten davor.</a:t>
             </a:r>
           </a:p>
         </p:txBody>
@@ -1653,20 +1622,14 @@
           <a:p>
             <a:r>
               <a:rPr i="0"/>
-              <a:t>Und woran würde man merken, ob es gewirkt hat?</a:t>
+              <a:t>Noch zur Erfolgsmessung, welche KPIs setzen wir an?</a:t>
             </a:r>
           </a:p>
           <a:p/>
           <a:p>
             <a:r>
               <a:rPr i="0"/>
-              <a:t>### Die ersten drei Kennzahlen</a:t>
-            </a:r>
-          </a:p>
-          <a:p>
-            <a:r>
-              <a:rPr i="0"/>
-              <a:t>- Vier Kennzahlen, jede mit Ausgangswert und Ziel.</a:t>
+              <a:t>### 1)</a:t>
             </a:r>
           </a:p>
           <a:p>
@@ -1675,12 +1638,26 @@
               <a:t>- Die Befundquote soll von 57 Prozent unter 25 fallen.</a:t>
             </a:r>
           </a:p>
+          <a:p/>
+          <a:p>
+            <a:r>
+              <a:rPr i="0"/>
+              <a:t>### 2)</a:t>
+            </a:r>
+          </a:p>
           <a:p>
             <a:r>
               <a:rPr i="0"/>
               <a:t>- Alle neuen Texte im Pilotbereich sollen geprüft sein.</a:t>
             </a:r>
           </a:p>
+          <a:p/>
+          <a:p>
+            <a:r>
+              <a:rPr i="0"/>
+              <a:t>### 3)</a:t>
+            </a:r>
+          </a:p>
           <a:p>
             <a:r>
               <a:rPr i="0"/>
@@ -1691,105 +1668,32 @@
           <a:p>
             <a:r>
               <a:rPr i="0"/>
-              <a:t>### Die vierte Kennzahl: die Befragung</a:t>
-            </a:r>
-          </a:p>
-          <a:p>
-            <a:r>
-              <a:rPr i="0"/>
-              <a:t>- Die ersten drei messen nur den Text, nicht die Wirkung. Deshalb frage ich die Teilnehmenden selbst.</a:t>
-            </a:r>
-          </a:p>
-          <a:p>
-            <a:r>
-              <a:rPr i="0"/>
-              <a:t>- Nicht über einen Fragebogen auf der Website — den füllt genau die Zielgruppe nicht aus, um die es geht.</a:t>
-            </a:r>
-          </a:p>
-          <a:p>
-            <a:r>
-              <a:rPr i="0"/>
-              <a:t>- Sondern im Kurs, am Ende einer Stunde, in einfacher Sprache.</a:t>
-            </a:r>
-          </a:p>
-          <a:p>
-            <a:r>
-              <a:rPr i="0"/>
-              <a:t>- </a:t>
-            </a:r>
-            <a:r>
-              <a:rPr b="1" i="0">
-                <a:solidFill>
-                  <a:srgbClr val="A4162B"/>
-                </a:solidFill>
-              </a:rPr>
-              <a:t>Freiwillig und vergütet.</a:t>
-            </a:r>
-            <a:r>
-              <a:rPr i="0"/>
-              <a:t> </a:t>
-            </a:r>
-            <a:r>
-              <a:rPr i="1"/>
-              <a:t>Sonst wäre sie eine neue Aufgabe ohne Bezahlung — bei Honorarkräften genau das Problem von der Widerstandsfolie.</a:t>
+              <a:t>### 4)</a:t>
+            </a:r>
+          </a:p>
+          <a:p>
+            <a:r>
+              <a:rPr i="0"/>
+              <a:t>- Die ersten drei messen nur den Text, nicht die Wirkung. Daher sollten wir auch die Teilnehmenden selbst befragen.</a:t>
+            </a:r>
+          </a:p>
+          <a:p>
+            <a:r>
+              <a:rPr i="0"/>
+              <a:t>- Nicht über einen Fragebogen auf der Website, sondern im Kurs, am Ende einer Stunde.</a:t>
             </a:r>
           </a:p>
           <a:p/>
           <a:p>
             <a:r>
               <a:rPr i="0"/>
-              <a:t>### Letzte Spalte: womit gemessen wird</a:t>
-            </a:r>
-          </a:p>
-          <a:p>
-            <a:r>
-              <a:rPr i="0"/>
-              <a:t>- Die Nachmessung läuft mit demselben Skript wie die Ausgangsmessung. Dafür bleibt es unverändert liegen.</a:t>
-            </a:r>
-          </a:p>
-          <a:p>
-            <a:r>
-              <a:rPr i="0"/>
-              <a:t>- Sonst wüsste man hinterher nicht, ob die Texte besser geworden sind oder nur die Messung anders.</a:t>
-            </a:r>
-          </a:p>
-          <a:p/>
-          <a:p>
-            <a:r>
-              <a:rPr i="0"/>
-              <a:t>### Das Risiko unten</a:t>
-            </a:r>
-          </a:p>
-          <a:p>
-            <a:r>
-              <a:rPr i="0"/>
-              <a:t>- Die ersten drei Kennzahlen lassen sich erfüllen, ohne dass ein einziger Text besser wird: Wer lange Sätze teilt und schwere Wörter austauscht, drückt die Quote.</a:t>
-            </a:r>
-          </a:p>
-          <a:p>
-            <a:r>
-              <a:rPr i="0"/>
-              <a:t>- </a:t>
-            </a:r>
-            <a:r>
-              <a:rPr b="1" i="0">
-                <a:solidFill>
-                  <a:srgbClr val="A4162B"/>
-                </a:solidFill>
-              </a:rPr>
-              <a:t>Ein kürzerer Satz ist nicht automatisch ein verständlicherer.</a:t>
-            </a:r>
-          </a:p>
-          <a:p>
-            <a:r>
-              <a:rPr i="0"/>
-              <a:t>- Genau dagegen steht die vierte. Sie fragt nicht den Text, sondern die Menschen, für die er geschrieben ist.</a:t>
-            </a:r>
-          </a:p>
-          <a:p>
-            <a:r>
-              <a:rPr i="0"/>
-              <a:t>- Ohne sie misst der Pilot am Ende nur seinen eigenen Maßstab.</a:t>
+              <a:t>### Das Risiko</a:t>
+            </a:r>
+          </a:p>
+          <a:p>
+            <a:r>
+              <a:rPr i="0"/>
+              <a:t>*(vorlesen)*</a:t>
             </a:r>
           </a:p>
         </p:txBody>
@@ -1952,7 +1856,11 @@
           <a:p>
             <a:r>
               <a:rPr i="0"/>
-              <a:t>### 5.800 Texte und 57 Prozent</a:t>
+              <a:t>### </a:t>
+            </a:r>
+            <a:r>
+              <a:rPr i="1"/>
+              <a:t>5.800 Texte und 57 Prozent</a:t>
             </a:r>
           </a:p>
           <a:p/>
@@ -1965,61 +1873,47 @@
           <a:p>
             <a:r>
               <a:rPr i="0"/>
-              <a:t>- Von allen Texten, die heute im Portal stehen, hat mehr als jeder zweite Text einen Befund. </a:t>
+              <a:t>- Von allen Texten, die heute im Portal stehen, hat mehr als jeder zweite Text einen Befund.</a:t>
+            </a:r>
+          </a:p>
+          <a:p/>
+          <a:p>
+            <a:r>
+              <a:rPr i="0"/>
+              <a:t>### </a:t>
             </a:r>
             <a:r>
               <a:rPr i="1"/>
-              <a:t>Die Zahl stammt von einem Skript, das ohne KI auskommt und deshalb eine der sechs Regeln nicht prüfen kann. Mit dem Prüfassistenten liegt der Wert höher.</a:t>
+              <a:t>Fünf Jahre ohne externe Prüfung</a:t>
+            </a:r>
+          </a:p>
+          <a:p>
+            <a:r>
+              <a:rPr i="0"/>
+              <a:t>- Die letzte externe Prüfung auf Barrierefreiheit der Website ist etwa 5 Jahre her. Die Zahl stammt aus der Erklärung zur Barrierefreiheit der Volkshochschule.</a:t>
             </a:r>
           </a:p>
           <a:p/>
           <a:p>
             <a:r>
               <a:rPr i="0"/>
-              <a:t>### Fünf Jahre ohne externe Prüfung</a:t>
-            </a:r>
-          </a:p>
-          <a:p>
-            <a:r>
-              <a:rPr i="0"/>
-              <a:t>Die letzte externe Prüfung auf Barrierefreiheit der Website ist etwa 5 Jahre</a:t>
-            </a:r>
-          </a:p>
-          <a:p>
-            <a:r>
-              <a:rPr i="0"/>
-              <a:t>her. Die Zahl stammt aus der Erklärung zur Barrierefreiheit der</a:t>
-            </a:r>
-          </a:p>
-          <a:p>
-            <a:r>
-              <a:rPr i="0"/>
-              <a:t>Volkshochschule.</a:t>
-            </a:r>
-          </a:p>
-          <a:p/>
-          <a:p>
-            <a:r>
-              <a:rPr i="0"/>
-              <a:t>### Einfache Sprache, der eigentliche Anlass</a:t>
-            </a:r>
-          </a:p>
-          <a:p>
-            <a:r>
-              <a:rPr i="0"/>
-              <a:t>Dort heißt es auch, dass Informationen zu Betrieb und Kursgeschäft in</a:t>
-            </a:r>
-          </a:p>
-          <a:p>
-            <a:r>
-              <a:rPr i="0"/>
-              <a:t>einfacher Sprache verfügbar sind. Das gilt jedoch nicht für die</a:t>
-            </a:r>
-          </a:p>
-          <a:p>
-            <a:r>
-              <a:rPr i="0"/>
-              <a:t>Kursbeschreibungen selbst, die immerhin den größten Textbestand darstellen.</a:t>
+              <a:t>### </a:t>
+            </a:r>
+            <a:r>
+              <a:rPr i="1"/>
+              <a:t>Einfache Sprache, der eigentliche Anlass</a:t>
+            </a:r>
+          </a:p>
+          <a:p>
+            <a:r>
+              <a:rPr i="0"/>
+              <a:t>- Dort heißt es auch, dass Informationen zu Betrieb und Kursgeschäft in einfacher Sprache verfügbar sind.</a:t>
+            </a:r>
+          </a:p>
+          <a:p>
+            <a:r>
+              <a:rPr i="0"/>
+              <a:t>- Das gilt aber nicht für die Kursbeschreibungen selbst, und die machen immerhin den größten Textbestand aus.</a:t>
             </a:r>
           </a:p>
           <a:p/>
@@ -2103,7 +1997,7 @@
           <a:p>
             <a:r>
               <a:rPr i="0"/>
-              <a:t>Daraus folgt mein Vorschlag.</a:t>
+              <a:t>Daraus folgt der Vorschlag.</a:t>
             </a:r>
           </a:p>
           <a:p/>
@@ -2154,7 +2048,7 @@
           <a:p>
             <a:r>
               <a:rPr i="0"/>
-              <a:t>- Für die technische Barrierefreiheit der Website bleiben normale Prüfwerkzeug zuständig, zusammen mit der städtischen IT. Die KI sieht nur den Kurstext.</a:t>
+              <a:t>- Für die technische Barrierefreiheit der Website bleiben normale Prüfwerkzeuge zuständig, zusammen mit der städtischen IT. Die KI sieht nur den Kurstext.</a:t>
             </a:r>
           </a:p>
           <a:p/>
@@ -2307,7 +2201,11 @@
           <a:p>
             <a:r>
               <a:rPr i="0"/>
-              <a:t>### Der Satz oben aus der Betriebssatzung</a:t>
+              <a:t>### </a:t>
+            </a:r>
+            <a:r>
+              <a:rPr i="1"/>
+              <a:t>Der Satz oben aus der Betriebssatzung</a:t>
             </a:r>
           </a:p>
           <a:p>
@@ -2854,7 +2752,11 @@
           <a:p>
             <a:r>
               <a:rPr i="0"/>
-              <a:t>### Der einzelne Text</a:t>
+              <a:t>### </a:t>
+            </a:r>
+            <a:r>
+              <a:rPr i="1"/>
+              <a:t>Der einzelne Text</a:t>
             </a:r>
           </a:p>
           <a:p>
@@ -2899,7 +2801,7 @@
                   <a:srgbClr val="A4162B"/>
                 </a:solidFill>
               </a:rPr>
-              <a:t>Neu ist allein der Schritt, für den man wissen muss, wer liest.</a:t>
+              <a:t>Neu ist allein der Schritt, der die Zielgruppe kennen muss.</a:t>
             </a:r>
           </a:p>
           <a:p>
